--- a/content/decks/media-studies/media-studies-s1-lesson-15-institutions-and-section-a-craft.pptx
+++ b/content/decks/media-studies/media-studies-s1-lesson-15-institutions-and-section-a-craft.pptx
@@ -17,9 +17,10 @@
     <p:sldId id="265" r:id="rId11"/>
     <p:sldId id="266" r:id="rId12"/>
     <p:sldId id="267" r:id="rId13"/>
+    <p:sldId id="268" r:id="rId14"/>
   </p:sldIdLst>
   <p:notesMasterIdLst>
-    <p:notesMasterId r:id="rId14"/>
+    <p:notesMasterId r:id="rId15"/>
   </p:notesMasterIdLst>
   <p:sldSz cx="12192000" cy="6858000"/>
   <p:notesSz cx="6858000" cy="12192000"/>
@@ -819,6 +820,94 @@
 </p:notes>
 </file>
 
+<file path=ppt/notesSlides/notesSlide13.xml><?xml version="1.0" encoding="utf-8"?>
+<p:notes xmlns:a="http://schemas.openxmlformats.org/drawingml/2006/main" xmlns:r="http://schemas.openxmlformats.org/officeDocument/2006/relationships" xmlns:p="http://schemas.openxmlformats.org/presentationml/2006/main">
+  <p:cSld>
+    <p:spTree>
+      <p:nvGrpSpPr>
+        <p:cNvPr id="1" name=""/>
+        <p:cNvGrpSpPr/>
+        <p:nvPr/>
+      </p:nvGrpSpPr>
+      <p:grpSpPr>
+        <a:xfrm>
+          <a:off x="0" y="0"/>
+          <a:ext cx="0" cy="0"/>
+          <a:chOff x="0" y="0"/>
+          <a:chExt cx="0" cy="0"/>
+        </a:xfrm>
+      </p:grpSpPr>
+      <p:sp>
+        <p:nvSpPr>
+          <p:cNvPr id="2" name="Slide Image Placeholder 1"/>
+          <p:cNvSpPr>
+            <a:spLocks noGrp="1" noRot="1" noChangeAspect="1"/>
+          </p:cNvSpPr>
+          <p:nvPr>
+            <p:ph type="sldImg"/>
+          </p:nvPr>
+        </p:nvSpPr>
+        <p:spPr/>
+      </p:sp>
+      <p:sp>
+        <p:nvSpPr>
+          <p:cNvPr id="3" name="Notes Placeholder 2"/>
+          <p:cNvSpPr>
+            <a:spLocks noGrp="1"/>
+          </p:cNvSpPr>
+          <p:nvPr>
+            <p:ph type="body" idx="1"/>
+          </p:nvPr>
+        </p:nvSpPr>
+        <p:spPr/>
+        <p:txBody>
+          <a:bodyPr/>
+          <a:lstStyle/>
+          <a:p>
+            <a:r>
+              <a:rPr lang="en-US" dirty="0"/>
+              <a:t/>
+            </a:r>
+            <a:endParaRPr lang="en-US" dirty="0"/>
+          </a:p>
+        </p:txBody>
+      </p:sp>
+      <p:sp>
+        <p:nvSpPr>
+          <p:cNvPr id="4" name="Slide Number Placeholder 3"/>
+          <p:cNvSpPr>
+            <a:spLocks noGrp="1"/>
+          </p:cNvSpPr>
+          <p:nvPr>
+            <p:ph type="sldNum" sz="quarter" idx="10"/>
+          </p:nvPr>
+        </p:nvSpPr>
+        <p:spPr/>
+        <p:txBody>
+          <a:bodyPr/>
+          <a:lstStyle/>
+          <a:p>
+            <a:fld id="{F7021451-1387-4CA6-816F-3879F97B5CBC}" type="slidenum">
+              <a:rPr lang="en-US"/>
+              <a:t>13</a:t>
+            </a:fld>
+            <a:endParaRPr lang="en-US"/>
+          </a:p>
+        </p:txBody>
+      </p:sp>
+    </p:spTree>
+    <p:extLst>
+      <p:ext uri="{BB962C8B-B14F-4D97-AF65-F5344CB8AC3E}">
+        <p14:creationId xmlns:p14="http://schemas.microsoft.com/office/powerpoint/2010/main" val="1024086991"/>
+      </p:ext>
+    </p:extLst>
+  </p:cSld>
+  <p:clrMapOvr>
+    <a:masterClrMapping/>
+  </p:clrMapOvr>
+</p:notes>
+</file>
+
 <file path=ppt/notesSlides/notesSlide2.xml><?xml version="1.0" encoding="utf-8"?>
 <p:notes xmlns:a="http://schemas.openxmlformats.org/drawingml/2006/main" xmlns:r="http://schemas.openxmlformats.org/officeDocument/2006/relationships" xmlns:p="http://schemas.openxmlformats.org/presentationml/2006/main">
   <p:cSld>
@@ -1041,7 +1130,7 @@
           <a:p>
             <a:r>
               <a:rPr lang="en-US" dirty="0"/>
-              <a:t>Le Gray's imperial commission: a photograph made to a paymaster's brief. Funding follows content, a century and a half before the streaming wars.</a:t>
+              <a:t>The title card is the study's own object. D1 replicates the method on a text the class knows instead: same protocol, groups compared, readings tracked to situation.</a:t>
             </a:r>
             <a:endParaRPr lang="en-US" dirty="0"/>
           </a:p>
@@ -1129,7 +1218,7 @@
           <a:p>
             <a:r>
               <a:rPr lang="en-US" dirty="0"/>
-              <a:t/>
+              <a:t>Le Gray's imperial commission: a photograph made to a paymaster's brief. Funding follows content, a century and a half before the streaming wars.</a:t>
             </a:r>
             <a:endParaRPr lang="en-US" dirty="0"/>
           </a:p>
@@ -1393,7 +1482,7 @@
           <a:p>
             <a:r>
               <a:rPr lang="en-US" dirty="0"/>
-              <a:t>Underwood's camera operator high above Fifth Avenue: the institution's chosen vantage point, from which the frame is set.</a:t>
+              <a:t/>
             </a:r>
             <a:endParaRPr lang="en-US" dirty="0"/>
           </a:p>
@@ -1481,7 +1570,7 @@
           <a:p>
             <a:r>
               <a:rPr lang="en-US" dirty="0"/>
-              <a:t/>
+              <a:t>Underwood's camera operator high above Fifth Avenue: the institution's chosen vantage point, from which the frame is set.</a:t>
             </a:r>
             <a:endParaRPr lang="en-US" dirty="0"/>
           </a:p>
@@ -2160,7 +2249,7 @@
                 <a:ea typeface="Arial" pitchFamily="34" charset="-122"/>
                 <a:cs typeface="Arial" pitchFamily="34" charset="-120"/>
               </a:rPr>
-              <a:t>THE CASE-STUDY DOCUMENT</a:t>
+              <a:t>CS12 · SECTION A, DEMYSTIFIED</a:t>
             </a:r>
             <a:endParaRPr lang="en-US" sz="1100" dirty="0"/>
           </a:p>
@@ -2199,7 +2288,7 @@
                 <a:ea typeface="Arial" pitchFamily="34" charset="-122"/>
                 <a:cs typeface="Arial" pitchFamily="34" charset="-120"/>
               </a:rPr>
-              <a:t>STILL IN USE IN MAY</a:t>
+              <a:t>THE MARK SCHEME AS FURNITURE</a:t>
             </a:r>
             <a:endParaRPr lang="en-US" sz="1100" dirty="0"/>
           </a:p>
@@ -2236,8 +2325,8 @@
         </p:nvSpPr>
         <p:spPr>
           <a:xfrm>
-            <a:off x="822960" y="932688"/>
-            <a:ext cx="10543032" cy="640080"/>
+            <a:off x="822960" y="1280160"/>
+            <a:ext cx="10543032" cy="914400"/>
           </a:xfrm>
           <a:prstGeom prst="rect">
             <a:avLst/>
@@ -2253,7 +2342,7 @@
               <a:buNone/>
             </a:pPr>
             <a:r>
-              <a:rPr lang="en-US" sz="3000" dirty="0">
+              <a:rPr lang="en-US" sz="3600" dirty="0">
                 <a:solidFill>
                   <a:srgbClr val="24313F"/>
                 </a:solidFill>
@@ -2261,87 +2350,74 @@
                 <a:ea typeface="Georgia" pitchFamily="34" charset="-122"/>
                 <a:cs typeface="Georgia" pitchFamily="34" charset="-120"/>
               </a:rPr>
-              <a:t>One institution, tracked to Paper 2</a:t>
-            </a:r>
-            <a:endParaRPr lang="en-US" sz="3000" dirty="0"/>
-          </a:p>
-        </p:txBody>
-      </p:sp>
-      <p:sp>
-        <p:nvSpPr>
-          <p:cNvPr id="6" name="Text 4"/>
-          <p:cNvSpPr/>
-          <p:nvPr/>
-        </p:nvSpPr>
-        <p:spPr>
-          <a:xfrm>
-            <a:off x="822960" y="1783080"/>
-            <a:ext cx="640080" cy="457200"/>
-          </a:xfrm>
-          <a:prstGeom prst="rect">
-            <a:avLst/>
-          </a:prstGeom>
-          <a:noFill/>
-          <a:ln/>
-        </p:spPr>
-        <p:txBody>
-          <a:bodyPr wrap="square" lIns="0" tIns="0" rIns="0" bIns="0" rtlCol="0" anchor="ctr"/>
+              <a:t>Write it with the answers open</a:t>
+            </a:r>
+            <a:endParaRPr lang="en-US" sz="3600" dirty="0"/>
+          </a:p>
+        </p:txBody>
+      </p:sp>
+      <p:sp>
+        <p:nvSpPr>
+          <p:cNvPr id="6" name="Shape 4"/>
+          <p:cNvSpPr/>
+          <p:nvPr/>
+        </p:nvSpPr>
+        <p:spPr>
+          <a:xfrm>
+            <a:off x="822960" y="2514600"/>
+            <a:ext cx="914400" cy="0"/>
+          </a:xfrm>
+          <a:prstGeom prst="line">
+            <a:avLst/>
+          </a:prstGeom>
+          <a:noFill/>
+          <a:ln w="31750">
+            <a:solidFill>
+              <a:srgbClr val="8C3A38"/>
+            </a:solidFill>
+            <a:prstDash val="solid"/>
+          </a:ln>
+        </p:spPr>
+      </p:sp>
+      <p:sp>
+        <p:nvSpPr>
+          <p:cNvPr id="7" name="Text 5"/>
+          <p:cNvSpPr/>
+          <p:nvPr/>
+        </p:nvSpPr>
+        <p:spPr>
+          <a:xfrm>
+            <a:off x="822960" y="2743200"/>
+            <a:ext cx="9875520" cy="2194560"/>
+          </a:xfrm>
+          <a:prstGeom prst="rect">
+            <a:avLst/>
+          </a:prstGeom>
+          <a:noFill/>
+          <a:ln/>
+        </p:spPr>
+        <p:txBody>
+          <a:bodyPr wrap="square" lIns="0" tIns="0" rIns="0" bIns="0" rtlCol="0" anchor="t"/>
           <a:lstStyle/>
           <a:p>
             <a:pPr indent="0" marL="0">
-              <a:buNone/>
-            </a:pPr>
-            <a:r>
-              <a:rPr lang="en-US" sz="1700" dirty="0">
-                <a:solidFill>
-                  <a:srgbClr val="A3C1AD"/>
+              <a:lnSpc>
+                <a:spcPts val="2700"/>
+              </a:lnSpc>
+              <a:buNone/>
+            </a:pPr>
+            <a:r>
+              <a:rPr lang="en-US" sz="1900" dirty="0">
+                <a:solidFill>
+                  <a:srgbClr val="24313F"/>
                 </a:solidFill>
                 <a:latin typeface="Georgia" pitchFamily="34" charset="0"/>
                 <a:ea typeface="Georgia" pitchFamily="34" charset="-122"/>
                 <a:cs typeface="Georgia" pitchFamily="34" charset="-120"/>
               </a:rPr>
-              <a:t>01</a:t>
-            </a:r>
-            <a:endParaRPr lang="en-US" sz="1700" dirty="0"/>
-          </a:p>
-        </p:txBody>
-      </p:sp>
-      <p:sp>
-        <p:nvSpPr>
-          <p:cNvPr id="7" name="Text 5"/>
-          <p:cNvSpPr/>
-          <p:nvPr/>
-        </p:nvSpPr>
-        <p:spPr>
-          <a:xfrm>
-            <a:off x="1463040" y="1783080"/>
-            <a:ext cx="4480560" cy="457200"/>
-          </a:xfrm>
-          <a:prstGeom prst="rect">
-            <a:avLst/>
-          </a:prstGeom>
-          <a:noFill/>
-          <a:ln/>
-        </p:spPr>
-        <p:txBody>
-          <a:bodyPr wrap="square" lIns="0" tIns="0" rIns="0" bIns="0" rtlCol="0" anchor="ctr"/>
-          <a:lstStyle/>
-          <a:p>
-            <a:pPr indent="0" marL="0">
-              <a:buNone/>
-            </a:pPr>
-            <a:r>
-              <a:rPr lang="en-US" sz="1650" dirty="0">
-                <a:solidFill>
-                  <a:srgbClr val="24313F"/>
-                </a:solidFill>
-                <a:latin typeface="Georgia" pitchFamily="34" charset="0"/>
-                <a:ea typeface="Georgia" pitchFamily="34" charset="-122"/>
-                <a:cs typeface="Georgia" pitchFamily="34" charset="-120"/>
-              </a:rPr>
-              <a:t>Identity and ownership</a:t>
-            </a:r>
-            <a:endParaRPr lang="en-US" sz="1650" dirty="0"/>
+              <a:t>The official five-criteria rubric sits on every desk, consultable. Paragraphs are drafted solo, but any student may stop, check the band language, and annotate their own margin: this sentence is my terminology evidence. The mark scheme stops being an enemy the moment it becomes furniture. In review, each student labels which criterion each paragraph earned, and finds the one they never fed.</a:t>
+            </a:r>
+            <a:endParaRPr lang="en-US" sz="1900" dirty="0"/>
           </a:p>
         </p:txBody>
       </p:sp>
@@ -2353,8 +2429,8 @@
         </p:nvSpPr>
         <p:spPr>
           <a:xfrm>
-            <a:off x="822960" y="2313432"/>
-            <a:ext cx="5029200" cy="0"/>
+            <a:off x="822960" y="6382512"/>
+            <a:ext cx="10543032" cy="0"/>
           </a:xfrm>
           <a:prstGeom prst="line">
             <a:avLst/>
@@ -2376,8 +2452,8 @@
         </p:nvSpPr>
         <p:spPr>
           <a:xfrm>
-            <a:off x="822960" y="2441448"/>
-            <a:ext cx="640080" cy="457200"/>
+            <a:off x="822960" y="6419088"/>
+            <a:ext cx="7315200" cy="274320"/>
           </a:xfrm>
           <a:prstGeom prst="rect">
             <a:avLst/>
@@ -2393,714 +2469,7 @@
               <a:buNone/>
             </a:pPr>
             <a:r>
-              <a:rPr lang="en-US" sz="1700" dirty="0">
-                <a:solidFill>
-                  <a:srgbClr val="A3C1AD"/>
-                </a:solidFill>
-                <a:latin typeface="Georgia" pitchFamily="34" charset="0"/>
-                <a:ea typeface="Georgia" pitchFamily="34" charset="-122"/>
-                <a:cs typeface="Georgia" pitchFamily="34" charset="-120"/>
-              </a:rPr>
-              <a:t>02</a:t>
-            </a:r>
-            <a:endParaRPr lang="en-US" sz="1700" dirty="0"/>
-          </a:p>
-        </p:txBody>
-      </p:sp>
-      <p:sp>
-        <p:nvSpPr>
-          <p:cNvPr id="10" name="Text 8"/>
-          <p:cNvSpPr/>
-          <p:nvPr/>
-        </p:nvSpPr>
-        <p:spPr>
-          <a:xfrm>
-            <a:off x="1463040" y="2441448"/>
-            <a:ext cx="4480560" cy="457200"/>
-          </a:xfrm>
-          <a:prstGeom prst="rect">
-            <a:avLst/>
-          </a:prstGeom>
-          <a:noFill/>
-          <a:ln/>
-        </p:spPr>
-        <p:txBody>
-          <a:bodyPr wrap="square" lIns="0" tIns="0" rIns="0" bIns="0" rtlCol="0" anchor="ctr"/>
-          <a:lstStyle/>
-          <a:p>
-            <a:pPr indent="0" marL="0">
-              <a:buNone/>
-            </a:pPr>
-            <a:r>
-              <a:rPr lang="en-US" sz="1650" dirty="0">
-                <a:solidFill>
-                  <a:srgbClr val="24313F"/>
-                </a:solidFill>
-                <a:latin typeface="Georgia" pitchFamily="34" charset="0"/>
-                <a:ea typeface="Georgia" pitchFamily="34" charset="-122"/>
-                <a:cs typeface="Georgia" pitchFamily="34" charset="-120"/>
-              </a:rPr>
-              <a:t>Production patterns</a:t>
-            </a:r>
-            <a:endParaRPr lang="en-US" sz="1650" dirty="0"/>
-          </a:p>
-        </p:txBody>
-      </p:sp>
-      <p:sp>
-        <p:nvSpPr>
-          <p:cNvPr id="11" name="Shape 9"/>
-          <p:cNvSpPr/>
-          <p:nvPr/>
-        </p:nvSpPr>
-        <p:spPr>
-          <a:xfrm>
-            <a:off x="822960" y="2971800"/>
-            <a:ext cx="5029200" cy="0"/>
-          </a:xfrm>
-          <a:prstGeom prst="line">
-            <a:avLst/>
-          </a:prstGeom>
-          <a:noFill/>
-          <a:ln w="9525">
-            <a:solidFill>
-              <a:srgbClr val="D9D4C4"/>
-            </a:solidFill>
-            <a:prstDash val="solid"/>
-          </a:ln>
-        </p:spPr>
-      </p:sp>
-      <p:sp>
-        <p:nvSpPr>
-          <p:cNvPr id="12" name="Text 10"/>
-          <p:cNvSpPr/>
-          <p:nvPr/>
-        </p:nvSpPr>
-        <p:spPr>
-          <a:xfrm>
-            <a:off x="822960" y="3099816"/>
-            <a:ext cx="640080" cy="457200"/>
-          </a:xfrm>
-          <a:prstGeom prst="rect">
-            <a:avLst/>
-          </a:prstGeom>
-          <a:noFill/>
-          <a:ln/>
-        </p:spPr>
-        <p:txBody>
-          <a:bodyPr wrap="square" lIns="0" tIns="0" rIns="0" bIns="0" rtlCol="0" anchor="ctr"/>
-          <a:lstStyle/>
-          <a:p>
-            <a:pPr indent="0" marL="0">
-              <a:buNone/>
-            </a:pPr>
-            <a:r>
-              <a:rPr lang="en-US" sz="1700" dirty="0">
-                <a:solidFill>
-                  <a:srgbClr val="A3C1AD"/>
-                </a:solidFill>
-                <a:latin typeface="Georgia" pitchFamily="34" charset="0"/>
-                <a:ea typeface="Georgia" pitchFamily="34" charset="-122"/>
-                <a:cs typeface="Georgia" pitchFamily="34" charset="-120"/>
-              </a:rPr>
-              <a:t>03</a:t>
-            </a:r>
-            <a:endParaRPr lang="en-US" sz="1700" dirty="0"/>
-          </a:p>
-        </p:txBody>
-      </p:sp>
-      <p:sp>
-        <p:nvSpPr>
-          <p:cNvPr id="13" name="Text 11"/>
-          <p:cNvSpPr/>
-          <p:nvPr/>
-        </p:nvSpPr>
-        <p:spPr>
-          <a:xfrm>
-            <a:off x="1463040" y="3099816"/>
-            <a:ext cx="4480560" cy="457200"/>
-          </a:xfrm>
-          <a:prstGeom prst="rect">
-            <a:avLst/>
-          </a:prstGeom>
-          <a:noFill/>
-          <a:ln/>
-        </p:spPr>
-        <p:txBody>
-          <a:bodyPr wrap="square" lIns="0" tIns="0" rIns="0" bIns="0" rtlCol="0" anchor="ctr"/>
-          <a:lstStyle/>
-          <a:p>
-            <a:pPr indent="0" marL="0">
-              <a:buNone/>
-            </a:pPr>
-            <a:r>
-              <a:rPr lang="en-US" sz="1650" dirty="0">
-                <a:solidFill>
-                  <a:srgbClr val="24313F"/>
-                </a:solidFill>
-                <a:latin typeface="Georgia" pitchFamily="34" charset="0"/>
-                <a:ea typeface="Georgia" pitchFamily="34" charset="-122"/>
-                <a:cs typeface="Georgia" pitchFamily="34" charset="-120"/>
-              </a:rPr>
-              <a:t>Distribution and marketing</a:t>
-            </a:r>
-            <a:endParaRPr lang="en-US" sz="1650" dirty="0"/>
-          </a:p>
-        </p:txBody>
-      </p:sp>
-      <p:sp>
-        <p:nvSpPr>
-          <p:cNvPr id="14" name="Shape 12"/>
-          <p:cNvSpPr/>
-          <p:nvPr/>
-        </p:nvSpPr>
-        <p:spPr>
-          <a:xfrm>
-            <a:off x="822960" y="3630168"/>
-            <a:ext cx="5029200" cy="0"/>
-          </a:xfrm>
-          <a:prstGeom prst="line">
-            <a:avLst/>
-          </a:prstGeom>
-          <a:noFill/>
-          <a:ln w="9525">
-            <a:solidFill>
-              <a:srgbClr val="D9D4C4"/>
-            </a:solidFill>
-            <a:prstDash val="solid"/>
-          </a:ln>
-        </p:spPr>
-      </p:sp>
-      <p:sp>
-        <p:nvSpPr>
-          <p:cNvPr id="15" name="Text 13"/>
-          <p:cNvSpPr/>
-          <p:nvPr/>
-        </p:nvSpPr>
-        <p:spPr>
-          <a:xfrm>
-            <a:off x="822960" y="3758184"/>
-            <a:ext cx="640080" cy="457200"/>
-          </a:xfrm>
-          <a:prstGeom prst="rect">
-            <a:avLst/>
-          </a:prstGeom>
-          <a:noFill/>
-          <a:ln/>
-        </p:spPr>
-        <p:txBody>
-          <a:bodyPr wrap="square" lIns="0" tIns="0" rIns="0" bIns="0" rtlCol="0" anchor="ctr"/>
-          <a:lstStyle/>
-          <a:p>
-            <a:pPr indent="0" marL="0">
-              <a:buNone/>
-            </a:pPr>
-            <a:r>
-              <a:rPr lang="en-US" sz="1700" dirty="0">
-                <a:solidFill>
-                  <a:srgbClr val="A3C1AD"/>
-                </a:solidFill>
-                <a:latin typeface="Georgia" pitchFamily="34" charset="0"/>
-                <a:ea typeface="Georgia" pitchFamily="34" charset="-122"/>
-                <a:cs typeface="Georgia" pitchFamily="34" charset="-120"/>
-              </a:rPr>
-              <a:t>04</a:t>
-            </a:r>
-            <a:endParaRPr lang="en-US" sz="1700" dirty="0"/>
-          </a:p>
-        </p:txBody>
-      </p:sp>
-      <p:sp>
-        <p:nvSpPr>
-          <p:cNvPr id="16" name="Text 14"/>
-          <p:cNvSpPr/>
-          <p:nvPr/>
-        </p:nvSpPr>
-        <p:spPr>
-          <a:xfrm>
-            <a:off x="1463040" y="3758184"/>
-            <a:ext cx="4480560" cy="457200"/>
-          </a:xfrm>
-          <a:prstGeom prst="rect">
-            <a:avLst/>
-          </a:prstGeom>
-          <a:noFill/>
-          <a:ln/>
-        </p:spPr>
-        <p:txBody>
-          <a:bodyPr wrap="square" lIns="0" tIns="0" rIns="0" bIns="0" rtlCol="0" anchor="ctr"/>
-          <a:lstStyle/>
-          <a:p>
-            <a:pPr indent="0" marL="0">
-              <a:buNone/>
-            </a:pPr>
-            <a:r>
-              <a:rPr lang="en-US" sz="1650" dirty="0">
-                <a:solidFill>
-                  <a:srgbClr val="24313F"/>
-                </a:solidFill>
-                <a:latin typeface="Georgia" pitchFamily="34" charset="0"/>
-                <a:ea typeface="Georgia" pitchFamily="34" charset="-122"/>
-                <a:cs typeface="Georgia" pitchFamily="34" charset="-120"/>
-              </a:rPr>
-              <a:t>Audience and consumption</a:t>
-            </a:r>
-            <a:endParaRPr lang="en-US" sz="1650" dirty="0"/>
-          </a:p>
-        </p:txBody>
-      </p:sp>
-      <p:sp>
-        <p:nvSpPr>
-          <p:cNvPr id="17" name="Shape 15"/>
-          <p:cNvSpPr/>
-          <p:nvPr/>
-        </p:nvSpPr>
-        <p:spPr>
-          <a:xfrm>
-            <a:off x="822960" y="4288536"/>
-            <a:ext cx="5029200" cy="0"/>
-          </a:xfrm>
-          <a:prstGeom prst="line">
-            <a:avLst/>
-          </a:prstGeom>
-          <a:noFill/>
-          <a:ln w="9525">
-            <a:solidFill>
-              <a:srgbClr val="D9D4C4"/>
-            </a:solidFill>
-            <a:prstDash val="solid"/>
-          </a:ln>
-        </p:spPr>
-      </p:sp>
-      <p:sp>
-        <p:nvSpPr>
-          <p:cNvPr id="18" name="Text 16"/>
-          <p:cNvSpPr/>
-          <p:nvPr/>
-        </p:nvSpPr>
-        <p:spPr>
-          <a:xfrm>
-            <a:off x="6217920" y="1783080"/>
-            <a:ext cx="640080" cy="457200"/>
-          </a:xfrm>
-          <a:prstGeom prst="rect">
-            <a:avLst/>
-          </a:prstGeom>
-          <a:noFill/>
-          <a:ln/>
-        </p:spPr>
-        <p:txBody>
-          <a:bodyPr wrap="square" lIns="0" tIns="0" rIns="0" bIns="0" rtlCol="0" anchor="ctr"/>
-          <a:lstStyle/>
-          <a:p>
-            <a:pPr indent="0" marL="0">
-              <a:buNone/>
-            </a:pPr>
-            <a:r>
-              <a:rPr lang="en-US" sz="1700" dirty="0">
-                <a:solidFill>
-                  <a:srgbClr val="A3C1AD"/>
-                </a:solidFill>
-                <a:latin typeface="Georgia" pitchFamily="34" charset="0"/>
-                <a:ea typeface="Georgia" pitchFamily="34" charset="-122"/>
-                <a:cs typeface="Georgia" pitchFamily="34" charset="-120"/>
-              </a:rPr>
-              <a:t>05</a:t>
-            </a:r>
-            <a:endParaRPr lang="en-US" sz="1700" dirty="0"/>
-          </a:p>
-        </p:txBody>
-      </p:sp>
-      <p:sp>
-        <p:nvSpPr>
-          <p:cNvPr id="19" name="Text 17"/>
-          <p:cNvSpPr/>
-          <p:nvPr/>
-        </p:nvSpPr>
-        <p:spPr>
-          <a:xfrm>
-            <a:off x="6858000" y="1783080"/>
-            <a:ext cx="4480560" cy="457200"/>
-          </a:xfrm>
-          <a:prstGeom prst="rect">
-            <a:avLst/>
-          </a:prstGeom>
-          <a:noFill/>
-          <a:ln/>
-        </p:spPr>
-        <p:txBody>
-          <a:bodyPr wrap="square" lIns="0" tIns="0" rIns="0" bIns="0" rtlCol="0" anchor="ctr"/>
-          <a:lstStyle/>
-          <a:p>
-            <a:pPr indent="0" marL="0">
-              <a:buNone/>
-            </a:pPr>
-            <a:r>
-              <a:rPr lang="en-US" sz="1650" dirty="0">
-                <a:solidFill>
-                  <a:srgbClr val="24313F"/>
-                </a:solidFill>
-                <a:latin typeface="Georgia" pitchFamily="34" charset="0"/>
-                <a:ea typeface="Georgia" pitchFamily="34" charset="-122"/>
-                <a:cs typeface="Georgia" pitchFamily="34" charset="-120"/>
-              </a:rPr>
-              <a:t>Regulation</a:t>
-            </a:r>
-            <a:endParaRPr lang="en-US" sz="1650" dirty="0"/>
-          </a:p>
-        </p:txBody>
-      </p:sp>
-      <p:sp>
-        <p:nvSpPr>
-          <p:cNvPr id="20" name="Shape 18"/>
-          <p:cNvSpPr/>
-          <p:nvPr/>
-        </p:nvSpPr>
-        <p:spPr>
-          <a:xfrm>
-            <a:off x="6217920" y="2313432"/>
-            <a:ext cx="5029200" cy="0"/>
-          </a:xfrm>
-          <a:prstGeom prst="line">
-            <a:avLst/>
-          </a:prstGeom>
-          <a:noFill/>
-          <a:ln w="9525">
-            <a:solidFill>
-              <a:srgbClr val="D9D4C4"/>
-            </a:solidFill>
-            <a:prstDash val="solid"/>
-          </a:ln>
-        </p:spPr>
-      </p:sp>
-      <p:sp>
-        <p:nvSpPr>
-          <p:cNvPr id="21" name="Text 19"/>
-          <p:cNvSpPr/>
-          <p:nvPr/>
-        </p:nvSpPr>
-        <p:spPr>
-          <a:xfrm>
-            <a:off x="6217920" y="2441448"/>
-            <a:ext cx="640080" cy="457200"/>
-          </a:xfrm>
-          <a:prstGeom prst="rect">
-            <a:avLst/>
-          </a:prstGeom>
-          <a:noFill/>
-          <a:ln/>
-        </p:spPr>
-        <p:txBody>
-          <a:bodyPr wrap="square" lIns="0" tIns="0" rIns="0" bIns="0" rtlCol="0" anchor="ctr"/>
-          <a:lstStyle/>
-          <a:p>
-            <a:pPr indent="0" marL="0">
-              <a:buNone/>
-            </a:pPr>
-            <a:r>
-              <a:rPr lang="en-US" sz="1700" dirty="0">
-                <a:solidFill>
-                  <a:srgbClr val="A3C1AD"/>
-                </a:solidFill>
-                <a:latin typeface="Georgia" pitchFamily="34" charset="0"/>
-                <a:ea typeface="Georgia" pitchFamily="34" charset="-122"/>
-                <a:cs typeface="Georgia" pitchFamily="34" charset="-120"/>
-              </a:rPr>
-              <a:t>06</a:t>
-            </a:r>
-            <a:endParaRPr lang="en-US" sz="1700" dirty="0"/>
-          </a:p>
-        </p:txBody>
-      </p:sp>
-      <p:sp>
-        <p:nvSpPr>
-          <p:cNvPr id="22" name="Text 20"/>
-          <p:cNvSpPr/>
-          <p:nvPr/>
-        </p:nvSpPr>
-        <p:spPr>
-          <a:xfrm>
-            <a:off x="6858000" y="2441448"/>
-            <a:ext cx="4480560" cy="457200"/>
-          </a:xfrm>
-          <a:prstGeom prst="rect">
-            <a:avLst/>
-          </a:prstGeom>
-          <a:noFill/>
-          <a:ln/>
-        </p:spPr>
-        <p:txBody>
-          <a:bodyPr wrap="square" lIns="0" tIns="0" rIns="0" bIns="0" rtlCol="0" anchor="ctr"/>
-          <a:lstStyle/>
-          <a:p>
-            <a:pPr indent="0" marL="0">
-              <a:buNone/>
-            </a:pPr>
-            <a:r>
-              <a:rPr lang="en-US" sz="1650" dirty="0">
-                <a:solidFill>
-                  <a:srgbClr val="24313F"/>
-                </a:solidFill>
-                <a:latin typeface="Georgia" pitchFamily="34" charset="0"/>
-                <a:ea typeface="Georgia" pitchFamily="34" charset="-122"/>
-                <a:cs typeface="Georgia" pitchFamily="34" charset="-120"/>
-              </a:rPr>
-              <a:t>Technology</a:t>
-            </a:r>
-            <a:endParaRPr lang="en-US" sz="1650" dirty="0"/>
-          </a:p>
-        </p:txBody>
-      </p:sp>
-      <p:sp>
-        <p:nvSpPr>
-          <p:cNvPr id="23" name="Shape 21"/>
-          <p:cNvSpPr/>
-          <p:nvPr/>
-        </p:nvSpPr>
-        <p:spPr>
-          <a:xfrm>
-            <a:off x="6217920" y="2971800"/>
-            <a:ext cx="5029200" cy="0"/>
-          </a:xfrm>
-          <a:prstGeom prst="line">
-            <a:avLst/>
-          </a:prstGeom>
-          <a:noFill/>
-          <a:ln w="9525">
-            <a:solidFill>
-              <a:srgbClr val="D9D4C4"/>
-            </a:solidFill>
-            <a:prstDash val="solid"/>
-          </a:ln>
-        </p:spPr>
-      </p:sp>
-      <p:sp>
-        <p:nvSpPr>
-          <p:cNvPr id="24" name="Text 22"/>
-          <p:cNvSpPr/>
-          <p:nvPr/>
-        </p:nvSpPr>
-        <p:spPr>
-          <a:xfrm>
-            <a:off x="6217920" y="3099816"/>
-            <a:ext cx="640080" cy="457200"/>
-          </a:xfrm>
-          <a:prstGeom prst="rect">
-            <a:avLst/>
-          </a:prstGeom>
-          <a:noFill/>
-          <a:ln/>
-        </p:spPr>
-        <p:txBody>
-          <a:bodyPr wrap="square" lIns="0" tIns="0" rIns="0" bIns="0" rtlCol="0" anchor="ctr"/>
-          <a:lstStyle/>
-          <a:p>
-            <a:pPr indent="0" marL="0">
-              <a:buNone/>
-            </a:pPr>
-            <a:r>
-              <a:rPr lang="en-US" sz="1700" dirty="0">
-                <a:solidFill>
-                  <a:srgbClr val="A3C1AD"/>
-                </a:solidFill>
-                <a:latin typeface="Georgia" pitchFamily="34" charset="0"/>
-                <a:ea typeface="Georgia" pitchFamily="34" charset="-122"/>
-                <a:cs typeface="Georgia" pitchFamily="34" charset="-120"/>
-              </a:rPr>
-              <a:t>07</a:t>
-            </a:r>
-            <a:endParaRPr lang="en-US" sz="1700" dirty="0"/>
-          </a:p>
-        </p:txBody>
-      </p:sp>
-      <p:sp>
-        <p:nvSpPr>
-          <p:cNvPr id="25" name="Text 23"/>
-          <p:cNvSpPr/>
-          <p:nvPr/>
-        </p:nvSpPr>
-        <p:spPr>
-          <a:xfrm>
-            <a:off x="6858000" y="3099816"/>
-            <a:ext cx="4480560" cy="457200"/>
-          </a:xfrm>
-          <a:prstGeom prst="rect">
-            <a:avLst/>
-          </a:prstGeom>
-          <a:noFill/>
-          <a:ln/>
-        </p:spPr>
-        <p:txBody>
-          <a:bodyPr wrap="square" lIns="0" tIns="0" rIns="0" bIns="0" rtlCol="0" anchor="ctr"/>
-          <a:lstStyle/>
-          <a:p>
-            <a:pPr indent="0" marL="0">
-              <a:buNone/>
-            </a:pPr>
-            <a:r>
-              <a:rPr lang="en-US" sz="1650" dirty="0">
-                <a:solidFill>
-                  <a:srgbClr val="24313F"/>
-                </a:solidFill>
-                <a:latin typeface="Georgia" pitchFamily="34" charset="0"/>
-                <a:ea typeface="Georgia" pitchFamily="34" charset="-122"/>
-                <a:cs typeface="Georgia" pitchFamily="34" charset="-120"/>
-              </a:rPr>
-              <a:t>Dated key facts</a:t>
-            </a:r>
-            <a:endParaRPr lang="en-US" sz="1650" dirty="0"/>
-          </a:p>
-        </p:txBody>
-      </p:sp>
-      <p:sp>
-        <p:nvSpPr>
-          <p:cNvPr id="26" name="Shape 24"/>
-          <p:cNvSpPr/>
-          <p:nvPr/>
-        </p:nvSpPr>
-        <p:spPr>
-          <a:xfrm>
-            <a:off x="6217920" y="3630168"/>
-            <a:ext cx="5029200" cy="0"/>
-          </a:xfrm>
-          <a:prstGeom prst="line">
-            <a:avLst/>
-          </a:prstGeom>
-          <a:noFill/>
-          <a:ln w="9525">
-            <a:solidFill>
-              <a:srgbClr val="D9D4C4"/>
-            </a:solidFill>
-            <a:prstDash val="solid"/>
-          </a:ln>
-        </p:spPr>
-      </p:sp>
-      <p:sp>
-        <p:nvSpPr>
-          <p:cNvPr id="27" name="Text 25"/>
-          <p:cNvSpPr/>
-          <p:nvPr/>
-        </p:nvSpPr>
-        <p:spPr>
-          <a:xfrm>
-            <a:off x="6217920" y="3758184"/>
-            <a:ext cx="640080" cy="457200"/>
-          </a:xfrm>
-          <a:prstGeom prst="rect">
-            <a:avLst/>
-          </a:prstGeom>
-          <a:noFill/>
-          <a:ln/>
-        </p:spPr>
-        <p:txBody>
-          <a:bodyPr wrap="square" lIns="0" tIns="0" rIns="0" bIns="0" rtlCol="0" anchor="ctr"/>
-          <a:lstStyle/>
-          <a:p>
-            <a:pPr indent="0" marL="0">
-              <a:buNone/>
-            </a:pPr>
-            <a:r>
-              <a:rPr lang="en-US" sz="1700" dirty="0">
-                <a:solidFill>
-                  <a:srgbClr val="A3C1AD"/>
-                </a:solidFill>
-                <a:latin typeface="Georgia" pitchFamily="34" charset="0"/>
-                <a:ea typeface="Georgia" pitchFamily="34" charset="-122"/>
-                <a:cs typeface="Georgia" pitchFamily="34" charset="-120"/>
-              </a:rPr>
-              <a:t>08</a:t>
-            </a:r>
-            <a:endParaRPr lang="en-US" sz="1700" dirty="0"/>
-          </a:p>
-        </p:txBody>
-      </p:sp>
-      <p:sp>
-        <p:nvSpPr>
-          <p:cNvPr id="28" name="Text 26"/>
-          <p:cNvSpPr/>
-          <p:nvPr/>
-        </p:nvSpPr>
-        <p:spPr>
-          <a:xfrm>
-            <a:off x="6858000" y="3758184"/>
-            <a:ext cx="4480560" cy="457200"/>
-          </a:xfrm>
-          <a:prstGeom prst="rect">
-            <a:avLst/>
-          </a:prstGeom>
-          <a:noFill/>
-          <a:ln/>
-        </p:spPr>
-        <p:txBody>
-          <a:bodyPr wrap="square" lIns="0" tIns="0" rIns="0" bIns="0" rtlCol="0" anchor="ctr"/>
-          <a:lstStyle/>
-          <a:p>
-            <a:pPr indent="0" marL="0">
-              <a:buNone/>
-            </a:pPr>
-            <a:r>
-              <a:rPr lang="en-US" sz="1650" dirty="0">
-                <a:solidFill>
-                  <a:srgbClr val="24313F"/>
-                </a:solidFill>
-                <a:latin typeface="Georgia" pitchFamily="34" charset="0"/>
-                <a:ea typeface="Georgia" pitchFamily="34" charset="-122"/>
-                <a:cs typeface="Georgia" pitchFamily="34" charset="-120"/>
-              </a:rPr>
-              <a:t>Coverage against the four Key Concepts</a:t>
-            </a:r>
-            <a:endParaRPr lang="en-US" sz="1650" dirty="0"/>
-          </a:p>
-        </p:txBody>
-      </p:sp>
-      <p:sp>
-        <p:nvSpPr>
-          <p:cNvPr id="29" name="Shape 27"/>
-          <p:cNvSpPr/>
-          <p:nvPr/>
-        </p:nvSpPr>
-        <p:spPr>
-          <a:xfrm>
-            <a:off x="6217920" y="4288536"/>
-            <a:ext cx="5029200" cy="0"/>
-          </a:xfrm>
-          <a:prstGeom prst="line">
-            <a:avLst/>
-          </a:prstGeom>
-          <a:noFill/>
-          <a:ln w="9525">
-            <a:solidFill>
-              <a:srgbClr val="D9D4C4"/>
-            </a:solidFill>
-            <a:prstDash val="solid"/>
-          </a:ln>
-        </p:spPr>
-      </p:sp>
-      <p:sp>
-        <p:nvSpPr>
-          <p:cNvPr id="30" name="Text 28"/>
-          <p:cNvSpPr/>
-          <p:nvPr/>
-        </p:nvSpPr>
-        <p:spPr>
-          <a:xfrm>
-            <a:off x="822960" y="4754880"/>
-            <a:ext cx="10543032" cy="457200"/>
-          </a:xfrm>
-          <a:prstGeom prst="rect">
-            <a:avLst/>
-          </a:prstGeom>
-          <a:noFill/>
-          <a:ln/>
-        </p:spPr>
-        <p:txBody>
-          <a:bodyPr wrap="square" lIns="0" tIns="0" rIns="0" bIns="0" rtlCol="0" anchor="ctr"/>
-          <a:lstStyle/>
-          <a:p>
-            <a:pPr indent="0" marL="0">
-              <a:buNone/>
-            </a:pPr>
-            <a:r>
-              <a:rPr lang="en-US" sz="1200" i="1" dirty="0">
+              <a:rPr lang="en-US" sz="900" spc="150" kern="0" dirty="0">
                 <a:solidFill>
                   <a:srgbClr val="7A7F72"/>
                 </a:solidFill>
@@ -3108,68 +2477,6 @@
                 <a:ea typeface="Arial" pitchFamily="34" charset="-122"/>
                 <a:cs typeface="Arial" pitchFamily="34" charset="-120"/>
               </a:rPr>
-              <a:t>Entries dated from today: the 5-year contemporaneity rule starts mattering now, and it is what makes the document Paper 2-legal in May.</a:t>
-            </a:r>
-            <a:endParaRPr lang="en-US" sz="1200" dirty="0"/>
-          </a:p>
-        </p:txBody>
-      </p:sp>
-      <p:sp>
-        <p:nvSpPr>
-          <p:cNvPr id="31" name="Shape 29"/>
-          <p:cNvSpPr/>
-          <p:nvPr/>
-        </p:nvSpPr>
-        <p:spPr>
-          <a:xfrm>
-            <a:off x="822960" y="6382512"/>
-            <a:ext cx="10543032" cy="0"/>
-          </a:xfrm>
-          <a:prstGeom prst="line">
-            <a:avLst/>
-          </a:prstGeom>
-          <a:noFill/>
-          <a:ln w="9525">
-            <a:solidFill>
-              <a:srgbClr val="D9D4C4"/>
-            </a:solidFill>
-            <a:prstDash val="solid"/>
-          </a:ln>
-        </p:spPr>
-      </p:sp>
-      <p:sp>
-        <p:nvSpPr>
-          <p:cNvPr id="32" name="Text 30"/>
-          <p:cNvSpPr/>
-          <p:nvPr/>
-        </p:nvSpPr>
-        <p:spPr>
-          <a:xfrm>
-            <a:off x="822960" y="6419088"/>
-            <a:ext cx="7315200" cy="274320"/>
-          </a:xfrm>
-          <a:prstGeom prst="rect">
-            <a:avLst/>
-          </a:prstGeom>
-          <a:noFill/>
-          <a:ln/>
-        </p:spPr>
-        <p:txBody>
-          <a:bodyPr wrap="square" lIns="0" tIns="0" rIns="0" bIns="0" rtlCol="0" anchor="ctr"/>
-          <a:lstStyle/>
-          <a:p>
-            <a:pPr indent="0" marL="0">
-              <a:buNone/>
-            </a:pPr>
-            <a:r>
-              <a:rPr lang="en-US" sz="900" spc="150" kern="0" dirty="0">
-                <a:solidFill>
-                  <a:srgbClr val="7A7F72"/>
-                </a:solidFill>
-                <a:latin typeface="Arial" pitchFamily="34" charset="0"/>
-                <a:ea typeface="Arial" pitchFamily="34" charset="-122"/>
-                <a:cs typeface="Arial" pitchFamily="34" charset="-120"/>
-              </a:rPr>
               <a:t>MEDIA STUDIES 9607 · SEMESTER I</a:t>
             </a:r>
             <a:endParaRPr lang="en-US" sz="900" dirty="0"/>
@@ -3178,7 +2485,7 @@
       </p:sp>
       <p:sp>
         <p:nvSpPr>
-          <p:cNvPr id="33" name="Text 31"/>
+          <p:cNvPr id="10" name="Text 8"/>
           <p:cNvSpPr/>
           <p:nvPr/>
         </p:nvSpPr>
@@ -3280,7 +2587,7 @@
                 <a:ea typeface="Arial" pitchFamily="34" charset="-122"/>
                 <a:cs typeface="Arial" pitchFamily="34" charset="-120"/>
               </a:rPr>
-              <a:t>DELIVERABLE · CS12</a:t>
+              <a:t>THE CASE-STUDY DOCUMENT</a:t>
             </a:r>
             <a:endParaRPr lang="en-US" sz="1100" dirty="0"/>
           </a:p>
@@ -3319,7 +2626,7 @@
                 <a:ea typeface="Arial" pitchFamily="34" charset="-122"/>
                 <a:cs typeface="Arial" pitchFamily="34" charset="-120"/>
               </a:rPr>
-              <a:t>SCAFFOLD REMOVED NEXT WEEK</a:t>
+              <a:t>STILL IN USE IN MAY</a:t>
             </a:r>
             <a:endParaRPr lang="en-US" sz="1100" dirty="0"/>
           </a:p>
@@ -3356,8 +2663,8 @@
         </p:nvSpPr>
         <p:spPr>
           <a:xfrm>
-            <a:off x="822960" y="1280160"/>
-            <a:ext cx="10543032" cy="914400"/>
+            <a:off x="822960" y="932688"/>
+            <a:ext cx="10543032" cy="640080"/>
           </a:xfrm>
           <a:prstGeom prst="rect">
             <a:avLst/>
@@ -3373,7 +2680,7 @@
               <a:buNone/>
             </a:pPr>
             <a:r>
-              <a:rPr lang="en-US" sz="3200" dirty="0">
+              <a:rPr lang="en-US" sz="3000" dirty="0">
                 <a:solidFill>
                   <a:srgbClr val="24313F"/>
                 </a:solidFill>
@@ -3381,87 +2688,61 @@
                 <a:ea typeface="Georgia" pitchFamily="34" charset="-122"/>
                 <a:cs typeface="Georgia" pitchFamily="34" charset="-120"/>
               </a:rPr>
-              <a:t>Guided Section A, mark scheme open</a:t>
-            </a:r>
-            <a:endParaRPr lang="en-US" sz="3200" dirty="0"/>
-          </a:p>
-        </p:txBody>
-      </p:sp>
-      <p:sp>
-        <p:nvSpPr>
-          <p:cNvPr id="6" name="Shape 4"/>
-          <p:cNvSpPr/>
-          <p:nvPr/>
-        </p:nvSpPr>
-        <p:spPr>
-          <a:xfrm>
-            <a:off x="822960" y="2468880"/>
-            <a:ext cx="914400" cy="0"/>
-          </a:xfrm>
-          <a:prstGeom prst="line">
-            <a:avLst/>
-          </a:prstGeom>
-          <a:noFill/>
-          <a:ln w="31750">
-            <a:solidFill>
-              <a:srgbClr val="8C3A38"/>
-            </a:solidFill>
-            <a:prstDash val="solid"/>
-          </a:ln>
-        </p:spPr>
-      </p:sp>
-      <p:sp>
-        <p:nvSpPr>
-          <p:cNvPr id="7" name="Text 5"/>
-          <p:cNvSpPr/>
-          <p:nvPr/>
-        </p:nvSpPr>
-        <p:spPr>
-          <a:xfrm>
-            <a:off x="822960" y="2697480"/>
-            <a:ext cx="9875520" cy="1828800"/>
-          </a:xfrm>
-          <a:prstGeom prst="rect">
-            <a:avLst/>
-          </a:prstGeom>
-          <a:noFill/>
-          <a:ln/>
-        </p:spPr>
-        <p:txBody>
-          <a:bodyPr wrap="square" lIns="0" tIns="0" rIns="0" bIns="0" rtlCol="0" anchor="t"/>
+              <a:t>One institution, tracked to Paper 2</a:t>
+            </a:r>
+            <a:endParaRPr lang="en-US" sz="3000" dirty="0"/>
+          </a:p>
+        </p:txBody>
+      </p:sp>
+      <p:sp>
+        <p:nvSpPr>
+          <p:cNvPr id="6" name="Text 4"/>
+          <p:cNvSpPr/>
+          <p:nvPr/>
+        </p:nvSpPr>
+        <p:spPr>
+          <a:xfrm>
+            <a:off x="822960" y="1783080"/>
+            <a:ext cx="640080" cy="457200"/>
+          </a:xfrm>
+          <a:prstGeom prst="rect">
+            <a:avLst/>
+          </a:prstGeom>
+          <a:noFill/>
+          <a:ln/>
+        </p:spPr>
+        <p:txBody>
+          <a:bodyPr wrap="square" lIns="0" tIns="0" rIns="0" bIns="0" rtlCol="0" anchor="ctr"/>
           <a:lstStyle/>
           <a:p>
             <a:pPr indent="0" marL="0">
-              <a:lnSpc>
-                <a:spcPts val="2800"/>
-              </a:lnSpc>
-              <a:buNone/>
-            </a:pPr>
-            <a:r>
-              <a:rPr lang="en-US" sz="2000" dirty="0">
-                <a:solidFill>
-                  <a:srgbClr val="24313F"/>
+              <a:buNone/>
+            </a:pPr>
+            <a:r>
+              <a:rPr lang="en-US" sz="1700" dirty="0">
+                <a:solidFill>
+                  <a:srgbClr val="A3C1AD"/>
                 </a:solidFill>
                 <a:latin typeface="Georgia" pitchFamily="34" charset="0"/>
                 <a:ea typeface="Georgia" pitchFamily="34" charset="-122"/>
                 <a:cs typeface="Georgia" pitchFamily="34" charset="-120"/>
               </a:rPr>
-              <a:t>A Section A response written with the mark scheme visible and consultable, part collaborative by design: the same format family as A4, with the scaffold removed next week. The find-your-unfed-criterion move sets each student's personal A4 target.</a:t>
-            </a:r>
-            <a:endParaRPr lang="en-US" sz="2000" dirty="0"/>
-          </a:p>
-        </p:txBody>
-      </p:sp>
-      <p:sp>
-        <p:nvSpPr>
-          <p:cNvPr id="8" name="Text 6"/>
-          <p:cNvSpPr/>
-          <p:nvPr/>
-        </p:nvSpPr>
-        <p:spPr>
-          <a:xfrm>
-            <a:off x="822960" y="4846320"/>
-            <a:ext cx="9875520" cy="457200"/>
+              <a:t>01</a:t>
+            </a:r>
+            <a:endParaRPr lang="en-US" sz="1700" dirty="0"/>
+          </a:p>
+        </p:txBody>
+      </p:sp>
+      <p:sp>
+        <p:nvSpPr>
+          <p:cNvPr id="7" name="Text 5"/>
+          <p:cNvSpPr/>
+          <p:nvPr/>
+        </p:nvSpPr>
+        <p:spPr>
+          <a:xfrm>
+            <a:off x="1463040" y="1783080"/>
+            <a:ext cx="4480560" cy="457200"/>
           </a:xfrm>
           <a:prstGeom prst="rect">
             <a:avLst/>
@@ -3477,30 +2758,30 @@
               <a:buNone/>
             </a:pPr>
             <a:r>
-              <a:rPr lang="en-US" sz="1300" i="1" dirty="0">
-                <a:solidFill>
-                  <a:srgbClr val="7A7F72"/>
-                </a:solidFill>
-                <a:latin typeface="Arial" pitchFamily="34" charset="0"/>
-                <a:ea typeface="Arial" pitchFamily="34" charset="-122"/>
-                <a:cs typeface="Arial" pitchFamily="34" charset="-120"/>
-              </a:rPr>
-              <a:t>The case-study document feeds A4, the End of Term Exam, and Paper 2: the highest-leverage artifact this side of the blog.</a:t>
-            </a:r>
-            <a:endParaRPr lang="en-US" sz="1300" dirty="0"/>
-          </a:p>
-        </p:txBody>
-      </p:sp>
-      <p:sp>
-        <p:nvSpPr>
-          <p:cNvPr id="9" name="Shape 7"/>
-          <p:cNvSpPr/>
-          <p:nvPr/>
-        </p:nvSpPr>
-        <p:spPr>
-          <a:xfrm>
-            <a:off x="822960" y="6382512"/>
-            <a:ext cx="10543032" cy="0"/>
+              <a:rPr lang="en-US" sz="1650" dirty="0">
+                <a:solidFill>
+                  <a:srgbClr val="24313F"/>
+                </a:solidFill>
+                <a:latin typeface="Georgia" pitchFamily="34" charset="0"/>
+                <a:ea typeface="Georgia" pitchFamily="34" charset="-122"/>
+                <a:cs typeface="Georgia" pitchFamily="34" charset="-120"/>
+              </a:rPr>
+              <a:t>Identity and ownership</a:t>
+            </a:r>
+            <a:endParaRPr lang="en-US" sz="1650" dirty="0"/>
+          </a:p>
+        </p:txBody>
+      </p:sp>
+      <p:sp>
+        <p:nvSpPr>
+          <p:cNvPr id="8" name="Shape 6"/>
+          <p:cNvSpPr/>
+          <p:nvPr/>
+        </p:nvSpPr>
+        <p:spPr>
+          <a:xfrm>
+            <a:off x="822960" y="2313432"/>
+            <a:ext cx="5029200" cy="0"/>
           </a:xfrm>
           <a:prstGeom prst="line">
             <a:avLst/>
@@ -3516,14 +2797,53 @@
       </p:sp>
       <p:sp>
         <p:nvSpPr>
+          <p:cNvPr id="9" name="Text 7"/>
+          <p:cNvSpPr/>
+          <p:nvPr/>
+        </p:nvSpPr>
+        <p:spPr>
+          <a:xfrm>
+            <a:off x="822960" y="2441448"/>
+            <a:ext cx="640080" cy="457200"/>
+          </a:xfrm>
+          <a:prstGeom prst="rect">
+            <a:avLst/>
+          </a:prstGeom>
+          <a:noFill/>
+          <a:ln/>
+        </p:spPr>
+        <p:txBody>
+          <a:bodyPr wrap="square" lIns="0" tIns="0" rIns="0" bIns="0" rtlCol="0" anchor="ctr"/>
+          <a:lstStyle/>
+          <a:p>
+            <a:pPr indent="0" marL="0">
+              <a:buNone/>
+            </a:pPr>
+            <a:r>
+              <a:rPr lang="en-US" sz="1700" dirty="0">
+                <a:solidFill>
+                  <a:srgbClr val="A3C1AD"/>
+                </a:solidFill>
+                <a:latin typeface="Georgia" pitchFamily="34" charset="0"/>
+                <a:ea typeface="Georgia" pitchFamily="34" charset="-122"/>
+                <a:cs typeface="Georgia" pitchFamily="34" charset="-120"/>
+              </a:rPr>
+              <a:t>02</a:t>
+            </a:r>
+            <a:endParaRPr lang="en-US" sz="1700" dirty="0"/>
+          </a:p>
+        </p:txBody>
+      </p:sp>
+      <p:sp>
+        <p:nvSpPr>
           <p:cNvPr id="10" name="Text 8"/>
           <p:cNvSpPr/>
           <p:nvPr/>
         </p:nvSpPr>
         <p:spPr>
           <a:xfrm>
-            <a:off x="822960" y="6419088"/>
-            <a:ext cx="7315200" cy="274320"/>
+            <a:off x="1463040" y="2441448"/>
+            <a:ext cx="4480560" cy="457200"/>
           </a:xfrm>
           <a:prstGeom prst="rect">
             <a:avLst/>
@@ -3539,7 +2859,675 @@
               <a:buNone/>
             </a:pPr>
             <a:r>
-              <a:rPr lang="en-US" sz="900" spc="150" kern="0" dirty="0">
+              <a:rPr lang="en-US" sz="1650" dirty="0">
+                <a:solidFill>
+                  <a:srgbClr val="24313F"/>
+                </a:solidFill>
+                <a:latin typeface="Georgia" pitchFamily="34" charset="0"/>
+                <a:ea typeface="Georgia" pitchFamily="34" charset="-122"/>
+                <a:cs typeface="Georgia" pitchFamily="34" charset="-120"/>
+              </a:rPr>
+              <a:t>Production patterns</a:t>
+            </a:r>
+            <a:endParaRPr lang="en-US" sz="1650" dirty="0"/>
+          </a:p>
+        </p:txBody>
+      </p:sp>
+      <p:sp>
+        <p:nvSpPr>
+          <p:cNvPr id="11" name="Shape 9"/>
+          <p:cNvSpPr/>
+          <p:nvPr/>
+        </p:nvSpPr>
+        <p:spPr>
+          <a:xfrm>
+            <a:off x="822960" y="2971800"/>
+            <a:ext cx="5029200" cy="0"/>
+          </a:xfrm>
+          <a:prstGeom prst="line">
+            <a:avLst/>
+          </a:prstGeom>
+          <a:noFill/>
+          <a:ln w="9525">
+            <a:solidFill>
+              <a:srgbClr val="D9D4C4"/>
+            </a:solidFill>
+            <a:prstDash val="solid"/>
+          </a:ln>
+        </p:spPr>
+      </p:sp>
+      <p:sp>
+        <p:nvSpPr>
+          <p:cNvPr id="12" name="Text 10"/>
+          <p:cNvSpPr/>
+          <p:nvPr/>
+        </p:nvSpPr>
+        <p:spPr>
+          <a:xfrm>
+            <a:off x="822960" y="3099816"/>
+            <a:ext cx="640080" cy="457200"/>
+          </a:xfrm>
+          <a:prstGeom prst="rect">
+            <a:avLst/>
+          </a:prstGeom>
+          <a:noFill/>
+          <a:ln/>
+        </p:spPr>
+        <p:txBody>
+          <a:bodyPr wrap="square" lIns="0" tIns="0" rIns="0" bIns="0" rtlCol="0" anchor="ctr"/>
+          <a:lstStyle/>
+          <a:p>
+            <a:pPr indent="0" marL="0">
+              <a:buNone/>
+            </a:pPr>
+            <a:r>
+              <a:rPr lang="en-US" sz="1700" dirty="0">
+                <a:solidFill>
+                  <a:srgbClr val="A3C1AD"/>
+                </a:solidFill>
+                <a:latin typeface="Georgia" pitchFamily="34" charset="0"/>
+                <a:ea typeface="Georgia" pitchFamily="34" charset="-122"/>
+                <a:cs typeface="Georgia" pitchFamily="34" charset="-120"/>
+              </a:rPr>
+              <a:t>03</a:t>
+            </a:r>
+            <a:endParaRPr lang="en-US" sz="1700" dirty="0"/>
+          </a:p>
+        </p:txBody>
+      </p:sp>
+      <p:sp>
+        <p:nvSpPr>
+          <p:cNvPr id="13" name="Text 11"/>
+          <p:cNvSpPr/>
+          <p:nvPr/>
+        </p:nvSpPr>
+        <p:spPr>
+          <a:xfrm>
+            <a:off x="1463040" y="3099816"/>
+            <a:ext cx="4480560" cy="457200"/>
+          </a:xfrm>
+          <a:prstGeom prst="rect">
+            <a:avLst/>
+          </a:prstGeom>
+          <a:noFill/>
+          <a:ln/>
+        </p:spPr>
+        <p:txBody>
+          <a:bodyPr wrap="square" lIns="0" tIns="0" rIns="0" bIns="0" rtlCol="0" anchor="ctr"/>
+          <a:lstStyle/>
+          <a:p>
+            <a:pPr indent="0" marL="0">
+              <a:buNone/>
+            </a:pPr>
+            <a:r>
+              <a:rPr lang="en-US" sz="1650" dirty="0">
+                <a:solidFill>
+                  <a:srgbClr val="24313F"/>
+                </a:solidFill>
+                <a:latin typeface="Georgia" pitchFamily="34" charset="0"/>
+                <a:ea typeface="Georgia" pitchFamily="34" charset="-122"/>
+                <a:cs typeface="Georgia" pitchFamily="34" charset="-120"/>
+              </a:rPr>
+              <a:t>Distribution and marketing</a:t>
+            </a:r>
+            <a:endParaRPr lang="en-US" sz="1650" dirty="0"/>
+          </a:p>
+        </p:txBody>
+      </p:sp>
+      <p:sp>
+        <p:nvSpPr>
+          <p:cNvPr id="14" name="Shape 12"/>
+          <p:cNvSpPr/>
+          <p:nvPr/>
+        </p:nvSpPr>
+        <p:spPr>
+          <a:xfrm>
+            <a:off x="822960" y="3630168"/>
+            <a:ext cx="5029200" cy="0"/>
+          </a:xfrm>
+          <a:prstGeom prst="line">
+            <a:avLst/>
+          </a:prstGeom>
+          <a:noFill/>
+          <a:ln w="9525">
+            <a:solidFill>
+              <a:srgbClr val="D9D4C4"/>
+            </a:solidFill>
+            <a:prstDash val="solid"/>
+          </a:ln>
+        </p:spPr>
+      </p:sp>
+      <p:sp>
+        <p:nvSpPr>
+          <p:cNvPr id="15" name="Text 13"/>
+          <p:cNvSpPr/>
+          <p:nvPr/>
+        </p:nvSpPr>
+        <p:spPr>
+          <a:xfrm>
+            <a:off x="822960" y="3758184"/>
+            <a:ext cx="640080" cy="457200"/>
+          </a:xfrm>
+          <a:prstGeom prst="rect">
+            <a:avLst/>
+          </a:prstGeom>
+          <a:noFill/>
+          <a:ln/>
+        </p:spPr>
+        <p:txBody>
+          <a:bodyPr wrap="square" lIns="0" tIns="0" rIns="0" bIns="0" rtlCol="0" anchor="ctr"/>
+          <a:lstStyle/>
+          <a:p>
+            <a:pPr indent="0" marL="0">
+              <a:buNone/>
+            </a:pPr>
+            <a:r>
+              <a:rPr lang="en-US" sz="1700" dirty="0">
+                <a:solidFill>
+                  <a:srgbClr val="A3C1AD"/>
+                </a:solidFill>
+                <a:latin typeface="Georgia" pitchFamily="34" charset="0"/>
+                <a:ea typeface="Georgia" pitchFamily="34" charset="-122"/>
+                <a:cs typeface="Georgia" pitchFamily="34" charset="-120"/>
+              </a:rPr>
+              <a:t>04</a:t>
+            </a:r>
+            <a:endParaRPr lang="en-US" sz="1700" dirty="0"/>
+          </a:p>
+        </p:txBody>
+      </p:sp>
+      <p:sp>
+        <p:nvSpPr>
+          <p:cNvPr id="16" name="Text 14"/>
+          <p:cNvSpPr/>
+          <p:nvPr/>
+        </p:nvSpPr>
+        <p:spPr>
+          <a:xfrm>
+            <a:off x="1463040" y="3758184"/>
+            <a:ext cx="4480560" cy="457200"/>
+          </a:xfrm>
+          <a:prstGeom prst="rect">
+            <a:avLst/>
+          </a:prstGeom>
+          <a:noFill/>
+          <a:ln/>
+        </p:spPr>
+        <p:txBody>
+          <a:bodyPr wrap="square" lIns="0" tIns="0" rIns="0" bIns="0" rtlCol="0" anchor="ctr"/>
+          <a:lstStyle/>
+          <a:p>
+            <a:pPr indent="0" marL="0">
+              <a:buNone/>
+            </a:pPr>
+            <a:r>
+              <a:rPr lang="en-US" sz="1650" dirty="0">
+                <a:solidFill>
+                  <a:srgbClr val="24313F"/>
+                </a:solidFill>
+                <a:latin typeface="Georgia" pitchFamily="34" charset="0"/>
+                <a:ea typeface="Georgia" pitchFamily="34" charset="-122"/>
+                <a:cs typeface="Georgia" pitchFamily="34" charset="-120"/>
+              </a:rPr>
+              <a:t>Audience and consumption</a:t>
+            </a:r>
+            <a:endParaRPr lang="en-US" sz="1650" dirty="0"/>
+          </a:p>
+        </p:txBody>
+      </p:sp>
+      <p:sp>
+        <p:nvSpPr>
+          <p:cNvPr id="17" name="Shape 15"/>
+          <p:cNvSpPr/>
+          <p:nvPr/>
+        </p:nvSpPr>
+        <p:spPr>
+          <a:xfrm>
+            <a:off x="822960" y="4288536"/>
+            <a:ext cx="5029200" cy="0"/>
+          </a:xfrm>
+          <a:prstGeom prst="line">
+            <a:avLst/>
+          </a:prstGeom>
+          <a:noFill/>
+          <a:ln w="9525">
+            <a:solidFill>
+              <a:srgbClr val="D9D4C4"/>
+            </a:solidFill>
+            <a:prstDash val="solid"/>
+          </a:ln>
+        </p:spPr>
+      </p:sp>
+      <p:sp>
+        <p:nvSpPr>
+          <p:cNvPr id="18" name="Text 16"/>
+          <p:cNvSpPr/>
+          <p:nvPr/>
+        </p:nvSpPr>
+        <p:spPr>
+          <a:xfrm>
+            <a:off x="6217920" y="1783080"/>
+            <a:ext cx="640080" cy="457200"/>
+          </a:xfrm>
+          <a:prstGeom prst="rect">
+            <a:avLst/>
+          </a:prstGeom>
+          <a:noFill/>
+          <a:ln/>
+        </p:spPr>
+        <p:txBody>
+          <a:bodyPr wrap="square" lIns="0" tIns="0" rIns="0" bIns="0" rtlCol="0" anchor="ctr"/>
+          <a:lstStyle/>
+          <a:p>
+            <a:pPr indent="0" marL="0">
+              <a:buNone/>
+            </a:pPr>
+            <a:r>
+              <a:rPr lang="en-US" sz="1700" dirty="0">
+                <a:solidFill>
+                  <a:srgbClr val="A3C1AD"/>
+                </a:solidFill>
+                <a:latin typeface="Georgia" pitchFamily="34" charset="0"/>
+                <a:ea typeface="Georgia" pitchFamily="34" charset="-122"/>
+                <a:cs typeface="Georgia" pitchFamily="34" charset="-120"/>
+              </a:rPr>
+              <a:t>05</a:t>
+            </a:r>
+            <a:endParaRPr lang="en-US" sz="1700" dirty="0"/>
+          </a:p>
+        </p:txBody>
+      </p:sp>
+      <p:sp>
+        <p:nvSpPr>
+          <p:cNvPr id="19" name="Text 17"/>
+          <p:cNvSpPr/>
+          <p:nvPr/>
+        </p:nvSpPr>
+        <p:spPr>
+          <a:xfrm>
+            <a:off x="6858000" y="1783080"/>
+            <a:ext cx="4480560" cy="457200"/>
+          </a:xfrm>
+          <a:prstGeom prst="rect">
+            <a:avLst/>
+          </a:prstGeom>
+          <a:noFill/>
+          <a:ln/>
+        </p:spPr>
+        <p:txBody>
+          <a:bodyPr wrap="square" lIns="0" tIns="0" rIns="0" bIns="0" rtlCol="0" anchor="ctr"/>
+          <a:lstStyle/>
+          <a:p>
+            <a:pPr indent="0" marL="0">
+              <a:buNone/>
+            </a:pPr>
+            <a:r>
+              <a:rPr lang="en-US" sz="1650" dirty="0">
+                <a:solidFill>
+                  <a:srgbClr val="24313F"/>
+                </a:solidFill>
+                <a:latin typeface="Georgia" pitchFamily="34" charset="0"/>
+                <a:ea typeface="Georgia" pitchFamily="34" charset="-122"/>
+                <a:cs typeface="Georgia" pitchFamily="34" charset="-120"/>
+              </a:rPr>
+              <a:t>Regulation</a:t>
+            </a:r>
+            <a:endParaRPr lang="en-US" sz="1650" dirty="0"/>
+          </a:p>
+        </p:txBody>
+      </p:sp>
+      <p:sp>
+        <p:nvSpPr>
+          <p:cNvPr id="20" name="Shape 18"/>
+          <p:cNvSpPr/>
+          <p:nvPr/>
+        </p:nvSpPr>
+        <p:spPr>
+          <a:xfrm>
+            <a:off x="6217920" y="2313432"/>
+            <a:ext cx="5029200" cy="0"/>
+          </a:xfrm>
+          <a:prstGeom prst="line">
+            <a:avLst/>
+          </a:prstGeom>
+          <a:noFill/>
+          <a:ln w="9525">
+            <a:solidFill>
+              <a:srgbClr val="D9D4C4"/>
+            </a:solidFill>
+            <a:prstDash val="solid"/>
+          </a:ln>
+        </p:spPr>
+      </p:sp>
+      <p:sp>
+        <p:nvSpPr>
+          <p:cNvPr id="21" name="Text 19"/>
+          <p:cNvSpPr/>
+          <p:nvPr/>
+        </p:nvSpPr>
+        <p:spPr>
+          <a:xfrm>
+            <a:off x="6217920" y="2441448"/>
+            <a:ext cx="640080" cy="457200"/>
+          </a:xfrm>
+          <a:prstGeom prst="rect">
+            <a:avLst/>
+          </a:prstGeom>
+          <a:noFill/>
+          <a:ln/>
+        </p:spPr>
+        <p:txBody>
+          <a:bodyPr wrap="square" lIns="0" tIns="0" rIns="0" bIns="0" rtlCol="0" anchor="ctr"/>
+          <a:lstStyle/>
+          <a:p>
+            <a:pPr indent="0" marL="0">
+              <a:buNone/>
+            </a:pPr>
+            <a:r>
+              <a:rPr lang="en-US" sz="1700" dirty="0">
+                <a:solidFill>
+                  <a:srgbClr val="A3C1AD"/>
+                </a:solidFill>
+                <a:latin typeface="Georgia" pitchFamily="34" charset="0"/>
+                <a:ea typeface="Georgia" pitchFamily="34" charset="-122"/>
+                <a:cs typeface="Georgia" pitchFamily="34" charset="-120"/>
+              </a:rPr>
+              <a:t>06</a:t>
+            </a:r>
+            <a:endParaRPr lang="en-US" sz="1700" dirty="0"/>
+          </a:p>
+        </p:txBody>
+      </p:sp>
+      <p:sp>
+        <p:nvSpPr>
+          <p:cNvPr id="22" name="Text 20"/>
+          <p:cNvSpPr/>
+          <p:nvPr/>
+        </p:nvSpPr>
+        <p:spPr>
+          <a:xfrm>
+            <a:off x="6858000" y="2441448"/>
+            <a:ext cx="4480560" cy="457200"/>
+          </a:xfrm>
+          <a:prstGeom prst="rect">
+            <a:avLst/>
+          </a:prstGeom>
+          <a:noFill/>
+          <a:ln/>
+        </p:spPr>
+        <p:txBody>
+          <a:bodyPr wrap="square" lIns="0" tIns="0" rIns="0" bIns="0" rtlCol="0" anchor="ctr"/>
+          <a:lstStyle/>
+          <a:p>
+            <a:pPr indent="0" marL="0">
+              <a:buNone/>
+            </a:pPr>
+            <a:r>
+              <a:rPr lang="en-US" sz="1650" dirty="0">
+                <a:solidFill>
+                  <a:srgbClr val="24313F"/>
+                </a:solidFill>
+                <a:latin typeface="Georgia" pitchFamily="34" charset="0"/>
+                <a:ea typeface="Georgia" pitchFamily="34" charset="-122"/>
+                <a:cs typeface="Georgia" pitchFamily="34" charset="-120"/>
+              </a:rPr>
+              <a:t>Technology</a:t>
+            </a:r>
+            <a:endParaRPr lang="en-US" sz="1650" dirty="0"/>
+          </a:p>
+        </p:txBody>
+      </p:sp>
+      <p:sp>
+        <p:nvSpPr>
+          <p:cNvPr id="23" name="Shape 21"/>
+          <p:cNvSpPr/>
+          <p:nvPr/>
+        </p:nvSpPr>
+        <p:spPr>
+          <a:xfrm>
+            <a:off x="6217920" y="2971800"/>
+            <a:ext cx="5029200" cy="0"/>
+          </a:xfrm>
+          <a:prstGeom prst="line">
+            <a:avLst/>
+          </a:prstGeom>
+          <a:noFill/>
+          <a:ln w="9525">
+            <a:solidFill>
+              <a:srgbClr val="D9D4C4"/>
+            </a:solidFill>
+            <a:prstDash val="solid"/>
+          </a:ln>
+        </p:spPr>
+      </p:sp>
+      <p:sp>
+        <p:nvSpPr>
+          <p:cNvPr id="24" name="Text 22"/>
+          <p:cNvSpPr/>
+          <p:nvPr/>
+        </p:nvSpPr>
+        <p:spPr>
+          <a:xfrm>
+            <a:off x="6217920" y="3099816"/>
+            <a:ext cx="640080" cy="457200"/>
+          </a:xfrm>
+          <a:prstGeom prst="rect">
+            <a:avLst/>
+          </a:prstGeom>
+          <a:noFill/>
+          <a:ln/>
+        </p:spPr>
+        <p:txBody>
+          <a:bodyPr wrap="square" lIns="0" tIns="0" rIns="0" bIns="0" rtlCol="0" anchor="ctr"/>
+          <a:lstStyle/>
+          <a:p>
+            <a:pPr indent="0" marL="0">
+              <a:buNone/>
+            </a:pPr>
+            <a:r>
+              <a:rPr lang="en-US" sz="1700" dirty="0">
+                <a:solidFill>
+                  <a:srgbClr val="A3C1AD"/>
+                </a:solidFill>
+                <a:latin typeface="Georgia" pitchFamily="34" charset="0"/>
+                <a:ea typeface="Georgia" pitchFamily="34" charset="-122"/>
+                <a:cs typeface="Georgia" pitchFamily="34" charset="-120"/>
+              </a:rPr>
+              <a:t>07</a:t>
+            </a:r>
+            <a:endParaRPr lang="en-US" sz="1700" dirty="0"/>
+          </a:p>
+        </p:txBody>
+      </p:sp>
+      <p:sp>
+        <p:nvSpPr>
+          <p:cNvPr id="25" name="Text 23"/>
+          <p:cNvSpPr/>
+          <p:nvPr/>
+        </p:nvSpPr>
+        <p:spPr>
+          <a:xfrm>
+            <a:off x="6858000" y="3099816"/>
+            <a:ext cx="4480560" cy="457200"/>
+          </a:xfrm>
+          <a:prstGeom prst="rect">
+            <a:avLst/>
+          </a:prstGeom>
+          <a:noFill/>
+          <a:ln/>
+        </p:spPr>
+        <p:txBody>
+          <a:bodyPr wrap="square" lIns="0" tIns="0" rIns="0" bIns="0" rtlCol="0" anchor="ctr"/>
+          <a:lstStyle/>
+          <a:p>
+            <a:pPr indent="0" marL="0">
+              <a:buNone/>
+            </a:pPr>
+            <a:r>
+              <a:rPr lang="en-US" sz="1650" dirty="0">
+                <a:solidFill>
+                  <a:srgbClr val="24313F"/>
+                </a:solidFill>
+                <a:latin typeface="Georgia" pitchFamily="34" charset="0"/>
+                <a:ea typeface="Georgia" pitchFamily="34" charset="-122"/>
+                <a:cs typeface="Georgia" pitchFamily="34" charset="-120"/>
+              </a:rPr>
+              <a:t>Dated key facts</a:t>
+            </a:r>
+            <a:endParaRPr lang="en-US" sz="1650" dirty="0"/>
+          </a:p>
+        </p:txBody>
+      </p:sp>
+      <p:sp>
+        <p:nvSpPr>
+          <p:cNvPr id="26" name="Shape 24"/>
+          <p:cNvSpPr/>
+          <p:nvPr/>
+        </p:nvSpPr>
+        <p:spPr>
+          <a:xfrm>
+            <a:off x="6217920" y="3630168"/>
+            <a:ext cx="5029200" cy="0"/>
+          </a:xfrm>
+          <a:prstGeom prst="line">
+            <a:avLst/>
+          </a:prstGeom>
+          <a:noFill/>
+          <a:ln w="9525">
+            <a:solidFill>
+              <a:srgbClr val="D9D4C4"/>
+            </a:solidFill>
+            <a:prstDash val="solid"/>
+          </a:ln>
+        </p:spPr>
+      </p:sp>
+      <p:sp>
+        <p:nvSpPr>
+          <p:cNvPr id="27" name="Text 25"/>
+          <p:cNvSpPr/>
+          <p:nvPr/>
+        </p:nvSpPr>
+        <p:spPr>
+          <a:xfrm>
+            <a:off x="6217920" y="3758184"/>
+            <a:ext cx="640080" cy="457200"/>
+          </a:xfrm>
+          <a:prstGeom prst="rect">
+            <a:avLst/>
+          </a:prstGeom>
+          <a:noFill/>
+          <a:ln/>
+        </p:spPr>
+        <p:txBody>
+          <a:bodyPr wrap="square" lIns="0" tIns="0" rIns="0" bIns="0" rtlCol="0" anchor="ctr"/>
+          <a:lstStyle/>
+          <a:p>
+            <a:pPr indent="0" marL="0">
+              <a:buNone/>
+            </a:pPr>
+            <a:r>
+              <a:rPr lang="en-US" sz="1700" dirty="0">
+                <a:solidFill>
+                  <a:srgbClr val="A3C1AD"/>
+                </a:solidFill>
+                <a:latin typeface="Georgia" pitchFamily="34" charset="0"/>
+                <a:ea typeface="Georgia" pitchFamily="34" charset="-122"/>
+                <a:cs typeface="Georgia" pitchFamily="34" charset="-120"/>
+              </a:rPr>
+              <a:t>08</a:t>
+            </a:r>
+            <a:endParaRPr lang="en-US" sz="1700" dirty="0"/>
+          </a:p>
+        </p:txBody>
+      </p:sp>
+      <p:sp>
+        <p:nvSpPr>
+          <p:cNvPr id="28" name="Text 26"/>
+          <p:cNvSpPr/>
+          <p:nvPr/>
+        </p:nvSpPr>
+        <p:spPr>
+          <a:xfrm>
+            <a:off x="6858000" y="3758184"/>
+            <a:ext cx="4480560" cy="457200"/>
+          </a:xfrm>
+          <a:prstGeom prst="rect">
+            <a:avLst/>
+          </a:prstGeom>
+          <a:noFill/>
+          <a:ln/>
+        </p:spPr>
+        <p:txBody>
+          <a:bodyPr wrap="square" lIns="0" tIns="0" rIns="0" bIns="0" rtlCol="0" anchor="ctr"/>
+          <a:lstStyle/>
+          <a:p>
+            <a:pPr indent="0" marL="0">
+              <a:buNone/>
+            </a:pPr>
+            <a:r>
+              <a:rPr lang="en-US" sz="1650" dirty="0">
+                <a:solidFill>
+                  <a:srgbClr val="24313F"/>
+                </a:solidFill>
+                <a:latin typeface="Georgia" pitchFamily="34" charset="0"/>
+                <a:ea typeface="Georgia" pitchFamily="34" charset="-122"/>
+                <a:cs typeface="Georgia" pitchFamily="34" charset="-120"/>
+              </a:rPr>
+              <a:t>Coverage against the four Key Concepts</a:t>
+            </a:r>
+            <a:endParaRPr lang="en-US" sz="1650" dirty="0"/>
+          </a:p>
+        </p:txBody>
+      </p:sp>
+      <p:sp>
+        <p:nvSpPr>
+          <p:cNvPr id="29" name="Shape 27"/>
+          <p:cNvSpPr/>
+          <p:nvPr/>
+        </p:nvSpPr>
+        <p:spPr>
+          <a:xfrm>
+            <a:off x="6217920" y="4288536"/>
+            <a:ext cx="5029200" cy="0"/>
+          </a:xfrm>
+          <a:prstGeom prst="line">
+            <a:avLst/>
+          </a:prstGeom>
+          <a:noFill/>
+          <a:ln w="9525">
+            <a:solidFill>
+              <a:srgbClr val="D9D4C4"/>
+            </a:solidFill>
+            <a:prstDash val="solid"/>
+          </a:ln>
+        </p:spPr>
+      </p:sp>
+      <p:sp>
+        <p:nvSpPr>
+          <p:cNvPr id="30" name="Text 28"/>
+          <p:cNvSpPr/>
+          <p:nvPr/>
+        </p:nvSpPr>
+        <p:spPr>
+          <a:xfrm>
+            <a:off x="822960" y="4754880"/>
+            <a:ext cx="10543032" cy="457200"/>
+          </a:xfrm>
+          <a:prstGeom prst="rect">
+            <a:avLst/>
+          </a:prstGeom>
+          <a:noFill/>
+          <a:ln/>
+        </p:spPr>
+        <p:txBody>
+          <a:bodyPr wrap="square" lIns="0" tIns="0" rIns="0" bIns="0" rtlCol="0" anchor="ctr"/>
+          <a:lstStyle/>
+          <a:p>
+            <a:pPr indent="0" marL="0">
+              <a:buNone/>
+            </a:pPr>
+            <a:r>
+              <a:rPr lang="en-US" sz="1200" i="1" dirty="0">
                 <a:solidFill>
                   <a:srgbClr val="7A7F72"/>
                 </a:solidFill>
@@ -3547,6 +3535,68 @@
                 <a:ea typeface="Arial" pitchFamily="34" charset="-122"/>
                 <a:cs typeface="Arial" pitchFamily="34" charset="-120"/>
               </a:rPr>
+              <a:t>Entries dated from today: the 5-year contemporaneity rule starts mattering now, and it is what makes the document Paper 2-legal in May.</a:t>
+            </a:r>
+            <a:endParaRPr lang="en-US" sz="1200" dirty="0"/>
+          </a:p>
+        </p:txBody>
+      </p:sp>
+      <p:sp>
+        <p:nvSpPr>
+          <p:cNvPr id="31" name="Shape 29"/>
+          <p:cNvSpPr/>
+          <p:nvPr/>
+        </p:nvSpPr>
+        <p:spPr>
+          <a:xfrm>
+            <a:off x="822960" y="6382512"/>
+            <a:ext cx="10543032" cy="0"/>
+          </a:xfrm>
+          <a:prstGeom prst="line">
+            <a:avLst/>
+          </a:prstGeom>
+          <a:noFill/>
+          <a:ln w="9525">
+            <a:solidFill>
+              <a:srgbClr val="D9D4C4"/>
+            </a:solidFill>
+            <a:prstDash val="solid"/>
+          </a:ln>
+        </p:spPr>
+      </p:sp>
+      <p:sp>
+        <p:nvSpPr>
+          <p:cNvPr id="32" name="Text 30"/>
+          <p:cNvSpPr/>
+          <p:nvPr/>
+        </p:nvSpPr>
+        <p:spPr>
+          <a:xfrm>
+            <a:off x="822960" y="6419088"/>
+            <a:ext cx="7315200" cy="274320"/>
+          </a:xfrm>
+          <a:prstGeom prst="rect">
+            <a:avLst/>
+          </a:prstGeom>
+          <a:noFill/>
+          <a:ln/>
+        </p:spPr>
+        <p:txBody>
+          <a:bodyPr wrap="square" lIns="0" tIns="0" rIns="0" bIns="0" rtlCol="0" anchor="ctr"/>
+          <a:lstStyle/>
+          <a:p>
+            <a:pPr indent="0" marL="0">
+              <a:buNone/>
+            </a:pPr>
+            <a:r>
+              <a:rPr lang="en-US" sz="900" spc="150" kern="0" dirty="0">
+                <a:solidFill>
+                  <a:srgbClr val="7A7F72"/>
+                </a:solidFill>
+                <a:latin typeface="Arial" pitchFamily="34" charset="0"/>
+                <a:ea typeface="Arial" pitchFamily="34" charset="-122"/>
+                <a:cs typeface="Arial" pitchFamily="34" charset="-120"/>
+              </a:rPr>
               <a:t>MEDIA STUDIES 9607 · SEMESTER I</a:t>
             </a:r>
             <a:endParaRPr lang="en-US" sz="900" dirty="0"/>
@@ -3555,7 +3605,7 @@
       </p:sp>
       <p:sp>
         <p:nvSpPr>
-          <p:cNvPr id="11" name="Text 9"/>
+          <p:cNvPr id="33" name="Text 31"/>
           <p:cNvSpPr/>
           <p:nvPr/>
         </p:nvSpPr>
@@ -3603,6 +3653,383 @@
 <file path=ppt/slides/slide12.xml><?xml version="1.0" encoding="utf-8"?>
 <p:sld xmlns:a="http://schemas.openxmlformats.org/drawingml/2006/main" xmlns:r="http://schemas.openxmlformats.org/officeDocument/2006/relationships" xmlns:p="http://schemas.openxmlformats.org/presentationml/2006/main">
   <p:cSld name="Slide 12">
+    <p:bg>
+      <p:bgPr>
+        <a:solidFill>
+          <a:srgbClr val="FAF8F1"/>
+        </a:solidFill>
+      </p:bgPr>
+    </p:bg>
+    <p:spTree>
+      <p:nvGrpSpPr>
+        <p:cNvPr id="1" name=""/>
+        <p:cNvGrpSpPr/>
+        <p:nvPr/>
+      </p:nvGrpSpPr>
+      <p:grpSpPr>
+        <a:xfrm>
+          <a:off x="0" y="0"/>
+          <a:ext cx="0" cy="0"/>
+          <a:chOff x="0" y="0"/>
+          <a:chExt cx="0" cy="0"/>
+        </a:xfrm>
+      </p:grpSpPr>
+      <p:sp>
+        <p:nvSpPr>
+          <p:cNvPr id="2" name="Text 0"/>
+          <p:cNvSpPr/>
+          <p:nvPr/>
+        </p:nvSpPr>
+        <p:spPr>
+          <a:xfrm>
+            <a:off x="822960" y="457200"/>
+            <a:ext cx="6400800" cy="274320"/>
+          </a:xfrm>
+          <a:prstGeom prst="rect">
+            <a:avLst/>
+          </a:prstGeom>
+          <a:noFill/>
+          <a:ln/>
+        </p:spPr>
+        <p:txBody>
+          <a:bodyPr wrap="square" lIns="0" tIns="0" rIns="0" bIns="0" rtlCol="0" anchor="ctr"/>
+          <a:lstStyle/>
+          <a:p>
+            <a:pPr algn="l" indent="0" marL="0">
+              <a:buNone/>
+            </a:pPr>
+            <a:r>
+              <a:rPr lang="en-US" sz="1100" b="1" spc="250" kern="0" dirty="0">
+                <a:solidFill>
+                  <a:srgbClr val="4A6B5D"/>
+                </a:solidFill>
+                <a:latin typeface="Arial" pitchFamily="34" charset="0"/>
+                <a:ea typeface="Arial" pitchFamily="34" charset="-122"/>
+                <a:cs typeface="Arial" pitchFamily="34" charset="-120"/>
+              </a:rPr>
+              <a:t>DELIVERABLE · CS12</a:t>
+            </a:r>
+            <a:endParaRPr lang="en-US" sz="1100" dirty="0"/>
+          </a:p>
+        </p:txBody>
+      </p:sp>
+      <p:sp>
+        <p:nvSpPr>
+          <p:cNvPr id="3" name="Text 1"/>
+          <p:cNvSpPr/>
+          <p:nvPr/>
+        </p:nvSpPr>
+        <p:spPr>
+          <a:xfrm>
+            <a:off x="6793992" y="457200"/>
+            <a:ext cx="4572000" cy="274320"/>
+          </a:xfrm>
+          <a:prstGeom prst="rect">
+            <a:avLst/>
+          </a:prstGeom>
+          <a:noFill/>
+          <a:ln/>
+        </p:spPr>
+        <p:txBody>
+          <a:bodyPr wrap="square" lIns="0" tIns="0" rIns="0" bIns="0" rtlCol="0" anchor="ctr"/>
+          <a:lstStyle/>
+          <a:p>
+            <a:pPr algn="r" indent="0" marL="0">
+              <a:buNone/>
+            </a:pPr>
+            <a:r>
+              <a:rPr lang="en-US" sz="1100" b="1" spc="250" kern="0" dirty="0">
+                <a:solidFill>
+                  <a:srgbClr val="7A7F72"/>
+                </a:solidFill>
+                <a:latin typeface="Arial" pitchFamily="34" charset="0"/>
+                <a:ea typeface="Arial" pitchFamily="34" charset="-122"/>
+                <a:cs typeface="Arial" pitchFamily="34" charset="-120"/>
+              </a:rPr>
+              <a:t>SCAFFOLD REMOVED NEXT WEEK</a:t>
+            </a:r>
+            <a:endParaRPr lang="en-US" sz="1100" dirty="0"/>
+          </a:p>
+        </p:txBody>
+      </p:sp>
+      <p:sp>
+        <p:nvSpPr>
+          <p:cNvPr id="4" name="Shape 2"/>
+          <p:cNvSpPr/>
+          <p:nvPr/>
+        </p:nvSpPr>
+        <p:spPr>
+          <a:xfrm>
+            <a:off x="822960" y="786384"/>
+            <a:ext cx="10543032" cy="0"/>
+          </a:xfrm>
+          <a:prstGeom prst="line">
+            <a:avLst/>
+          </a:prstGeom>
+          <a:noFill/>
+          <a:ln w="9525">
+            <a:solidFill>
+              <a:srgbClr val="D9D4C4"/>
+            </a:solidFill>
+            <a:prstDash val="solid"/>
+          </a:ln>
+        </p:spPr>
+      </p:sp>
+      <p:sp>
+        <p:nvSpPr>
+          <p:cNvPr id="5" name="Text 3"/>
+          <p:cNvSpPr/>
+          <p:nvPr/>
+        </p:nvSpPr>
+        <p:spPr>
+          <a:xfrm>
+            <a:off x="822960" y="1280160"/>
+            <a:ext cx="10543032" cy="914400"/>
+          </a:xfrm>
+          <a:prstGeom prst="rect">
+            <a:avLst/>
+          </a:prstGeom>
+          <a:noFill/>
+          <a:ln/>
+        </p:spPr>
+        <p:txBody>
+          <a:bodyPr wrap="square" lIns="0" tIns="0" rIns="0" bIns="0" rtlCol="0" anchor="ctr"/>
+          <a:lstStyle/>
+          <a:p>
+            <a:pPr indent="0" marL="0">
+              <a:buNone/>
+            </a:pPr>
+            <a:r>
+              <a:rPr lang="en-US" sz="3200" dirty="0">
+                <a:solidFill>
+                  <a:srgbClr val="24313F"/>
+                </a:solidFill>
+                <a:latin typeface="Georgia" pitchFamily="34" charset="0"/>
+                <a:ea typeface="Georgia" pitchFamily="34" charset="-122"/>
+                <a:cs typeface="Georgia" pitchFamily="34" charset="-120"/>
+              </a:rPr>
+              <a:t>Guided Section A, mark scheme open</a:t>
+            </a:r>
+            <a:endParaRPr lang="en-US" sz="3200" dirty="0"/>
+          </a:p>
+        </p:txBody>
+      </p:sp>
+      <p:sp>
+        <p:nvSpPr>
+          <p:cNvPr id="6" name="Shape 4"/>
+          <p:cNvSpPr/>
+          <p:nvPr/>
+        </p:nvSpPr>
+        <p:spPr>
+          <a:xfrm>
+            <a:off x="822960" y="2468880"/>
+            <a:ext cx="914400" cy="0"/>
+          </a:xfrm>
+          <a:prstGeom prst="line">
+            <a:avLst/>
+          </a:prstGeom>
+          <a:noFill/>
+          <a:ln w="31750">
+            <a:solidFill>
+              <a:srgbClr val="8C3A38"/>
+            </a:solidFill>
+            <a:prstDash val="solid"/>
+          </a:ln>
+        </p:spPr>
+      </p:sp>
+      <p:sp>
+        <p:nvSpPr>
+          <p:cNvPr id="7" name="Text 5"/>
+          <p:cNvSpPr/>
+          <p:nvPr/>
+        </p:nvSpPr>
+        <p:spPr>
+          <a:xfrm>
+            <a:off x="822960" y="2697480"/>
+            <a:ext cx="9875520" cy="1828800"/>
+          </a:xfrm>
+          <a:prstGeom prst="rect">
+            <a:avLst/>
+          </a:prstGeom>
+          <a:noFill/>
+          <a:ln/>
+        </p:spPr>
+        <p:txBody>
+          <a:bodyPr wrap="square" lIns="0" tIns="0" rIns="0" bIns="0" rtlCol="0" anchor="t"/>
+          <a:lstStyle/>
+          <a:p>
+            <a:pPr indent="0" marL="0">
+              <a:lnSpc>
+                <a:spcPts val="2800"/>
+              </a:lnSpc>
+              <a:buNone/>
+            </a:pPr>
+            <a:r>
+              <a:rPr lang="en-US" sz="2000" dirty="0">
+                <a:solidFill>
+                  <a:srgbClr val="24313F"/>
+                </a:solidFill>
+                <a:latin typeface="Georgia" pitchFamily="34" charset="0"/>
+                <a:ea typeface="Georgia" pitchFamily="34" charset="-122"/>
+                <a:cs typeface="Georgia" pitchFamily="34" charset="-120"/>
+              </a:rPr>
+              <a:t>A Section A response written with the mark scheme visible and consultable, part collaborative by design: the same format family as A4, with the scaffold removed next week. The find-your-unfed-criterion move sets each student's personal A4 target.</a:t>
+            </a:r>
+            <a:endParaRPr lang="en-US" sz="2000" dirty="0"/>
+          </a:p>
+        </p:txBody>
+      </p:sp>
+      <p:sp>
+        <p:nvSpPr>
+          <p:cNvPr id="8" name="Text 6"/>
+          <p:cNvSpPr/>
+          <p:nvPr/>
+        </p:nvSpPr>
+        <p:spPr>
+          <a:xfrm>
+            <a:off x="822960" y="4846320"/>
+            <a:ext cx="9875520" cy="457200"/>
+          </a:xfrm>
+          <a:prstGeom prst="rect">
+            <a:avLst/>
+          </a:prstGeom>
+          <a:noFill/>
+          <a:ln/>
+        </p:spPr>
+        <p:txBody>
+          <a:bodyPr wrap="square" lIns="0" tIns="0" rIns="0" bIns="0" rtlCol="0" anchor="ctr"/>
+          <a:lstStyle/>
+          <a:p>
+            <a:pPr indent="0" marL="0">
+              <a:buNone/>
+            </a:pPr>
+            <a:r>
+              <a:rPr lang="en-US" sz="1300" i="1" dirty="0">
+                <a:solidFill>
+                  <a:srgbClr val="7A7F72"/>
+                </a:solidFill>
+                <a:latin typeface="Arial" pitchFamily="34" charset="0"/>
+                <a:ea typeface="Arial" pitchFamily="34" charset="-122"/>
+                <a:cs typeface="Arial" pitchFamily="34" charset="-120"/>
+              </a:rPr>
+              <a:t>The case-study document feeds A4, the End of Term Exam, and Paper 2: the highest-leverage artifact this side of the blog.</a:t>
+            </a:r>
+            <a:endParaRPr lang="en-US" sz="1300" dirty="0"/>
+          </a:p>
+        </p:txBody>
+      </p:sp>
+      <p:sp>
+        <p:nvSpPr>
+          <p:cNvPr id="9" name="Shape 7"/>
+          <p:cNvSpPr/>
+          <p:nvPr/>
+        </p:nvSpPr>
+        <p:spPr>
+          <a:xfrm>
+            <a:off x="822960" y="6382512"/>
+            <a:ext cx="10543032" cy="0"/>
+          </a:xfrm>
+          <a:prstGeom prst="line">
+            <a:avLst/>
+          </a:prstGeom>
+          <a:noFill/>
+          <a:ln w="9525">
+            <a:solidFill>
+              <a:srgbClr val="D9D4C4"/>
+            </a:solidFill>
+            <a:prstDash val="solid"/>
+          </a:ln>
+        </p:spPr>
+      </p:sp>
+      <p:sp>
+        <p:nvSpPr>
+          <p:cNvPr id="10" name="Text 8"/>
+          <p:cNvSpPr/>
+          <p:nvPr/>
+        </p:nvSpPr>
+        <p:spPr>
+          <a:xfrm>
+            <a:off x="822960" y="6419088"/>
+            <a:ext cx="7315200" cy="274320"/>
+          </a:xfrm>
+          <a:prstGeom prst="rect">
+            <a:avLst/>
+          </a:prstGeom>
+          <a:noFill/>
+          <a:ln/>
+        </p:spPr>
+        <p:txBody>
+          <a:bodyPr wrap="square" lIns="0" tIns="0" rIns="0" bIns="0" rtlCol="0" anchor="ctr"/>
+          <a:lstStyle/>
+          <a:p>
+            <a:pPr indent="0" marL="0">
+              <a:buNone/>
+            </a:pPr>
+            <a:r>
+              <a:rPr lang="en-US" sz="900" spc="150" kern="0" dirty="0">
+                <a:solidFill>
+                  <a:srgbClr val="7A7F72"/>
+                </a:solidFill>
+                <a:latin typeface="Arial" pitchFamily="34" charset="0"/>
+                <a:ea typeface="Arial" pitchFamily="34" charset="-122"/>
+                <a:cs typeface="Arial" pitchFamily="34" charset="-120"/>
+              </a:rPr>
+              <a:t>MEDIA STUDIES 9607 · SEMESTER I</a:t>
+            </a:r>
+            <a:endParaRPr lang="en-US" sz="900" dirty="0"/>
+          </a:p>
+        </p:txBody>
+      </p:sp>
+      <p:sp>
+        <p:nvSpPr>
+          <p:cNvPr id="11" name="Text 9"/>
+          <p:cNvSpPr/>
+          <p:nvPr/>
+        </p:nvSpPr>
+        <p:spPr>
+          <a:xfrm>
+            <a:off x="10268712" y="6355080"/>
+            <a:ext cx="1097280" cy="365760"/>
+          </a:xfrm>
+          <a:prstGeom prst="rect">
+            <a:avLst/>
+          </a:prstGeom>
+          <a:noFill/>
+          <a:ln/>
+        </p:spPr>
+        <p:txBody>
+          <a:bodyPr wrap="square" lIns="0" tIns="0" rIns="0" bIns="0" rtlCol="0" anchor="ctr"/>
+          <a:lstStyle/>
+          <a:p>
+            <a:pPr algn="r" indent="0" marL="0">
+              <a:buNone/>
+            </a:pPr>
+            <a:r>
+              <a:rPr lang="en-US" sz="1600" dirty="0">
+                <a:solidFill>
+                  <a:srgbClr val="A3C1AD"/>
+                </a:solidFill>
+                <a:latin typeface="Georgia" pitchFamily="34" charset="0"/>
+                <a:ea typeface="Georgia" pitchFamily="34" charset="-122"/>
+                <a:cs typeface="Georgia" pitchFamily="34" charset="-120"/>
+              </a:rPr>
+              <a:t>07</a:t>
+            </a:r>
+            <a:endParaRPr lang="en-US" sz="1600" dirty="0"/>
+          </a:p>
+        </p:txBody>
+      </p:sp>
+    </p:spTree>
+  </p:cSld>
+  <p:clrMapOvr>
+    <a:masterClrMapping/>
+  </p:clrMapOvr>
+</p:sld>
+</file>
+
+<file path=ppt/slides/slide13.xml><?xml version="1.0" encoding="utf-8"?>
+<p:sld xmlns:a="http://schemas.openxmlformats.org/drawingml/2006/main" xmlns:r="http://schemas.openxmlformats.org/officeDocument/2006/relationships" xmlns:p="http://schemas.openxmlformats.org/presentationml/2006/main">
+  <p:cSld name="Slide 13">
     <p:bg>
       <p:bgPr>
         <a:solidFill>
@@ -3882,7 +4309,7 @@
                 <a:ea typeface="Georgia" pitchFamily="34" charset="-122"/>
                 <a:cs typeface="Georgia" pitchFamily="34" charset="-120"/>
               </a:rPr>
-              <a:t>07</a:t>
+              <a:t>08</a:t>
             </a:r>
             <a:endParaRPr lang="en-US" sz="1600" dirty="0"/>
           </a:p>
@@ -4637,238 +5064,6 @@
 <file path=ppt/slides/slide4.xml><?xml version="1.0" encoding="utf-8"?>
 <p:sld xmlns:a="http://schemas.openxmlformats.org/drawingml/2006/main" xmlns:r="http://schemas.openxmlformats.org/officeDocument/2006/relationships" xmlns:p="http://schemas.openxmlformats.org/presentationml/2006/main">
   <p:cSld name="Slide 4">
-    <p:spTree>
-      <p:nvGrpSpPr>
-        <p:cNvPr id="1" name=""/>
-        <p:cNvGrpSpPr/>
-        <p:nvPr/>
-      </p:nvGrpSpPr>
-      <p:grpSpPr>
-        <a:xfrm>
-          <a:off x="0" y="0"/>
-          <a:ext cx="0" cy="0"/>
-          <a:chOff x="0" y="0"/>
-          <a:chExt cx="0" cy="0"/>
-        </a:xfrm>
-      </p:grpSpPr>
-      <p:pic>
-        <p:nvPicPr>
-          <p:cNvPr id="2" name="Image 0" descr="/Users/dogan/Documents/Vaults/Courses/wiki/classes/media-studies/decks/_build/img/crops/legray-emperor-table_a1777.jpg">    </p:cNvPr>
-          <p:cNvPicPr>
-            <a:picLocks noChangeAspect="1"/>
-          </p:cNvPicPr>
-          <p:nvPr/>
-        </p:nvPicPr>
-        <p:blipFill>
-          <a:blip r:embed="rId1"/>
-          <a:stretch>
-            <a:fillRect/>
-          </a:stretch>
-        </p:blipFill>
-        <p:spPr>
-          <a:xfrm>
-            <a:off x="0" y="0"/>
-            <a:ext cx="12188952" cy="6858000"/>
-          </a:xfrm>
-          <a:prstGeom prst="rect">
-            <a:avLst/>
-          </a:prstGeom>
-        </p:spPr>
-      </p:pic>
-      <p:sp>
-        <p:nvSpPr>
-          <p:cNvPr id="3" name="Shape 0"/>
-          <p:cNvSpPr/>
-          <p:nvPr/>
-        </p:nvSpPr>
-        <p:spPr>
-          <a:xfrm>
-            <a:off x="502920" y="502920"/>
-            <a:ext cx="5120640" cy="502920"/>
-          </a:xfrm>
-          <a:prstGeom prst="rect">
-            <a:avLst/>
-          </a:prstGeom>
-          <a:solidFill>
-            <a:srgbClr val="FAF8F1"/>
-          </a:solidFill>
-          <a:ln/>
-        </p:spPr>
-      </p:sp>
-      <p:sp>
-        <p:nvSpPr>
-          <p:cNvPr id="4" name="Text 1"/>
-          <p:cNvSpPr/>
-          <p:nvPr/>
-        </p:nvSpPr>
-        <p:spPr>
-          <a:xfrm>
-            <a:off x="704088" y="521208"/>
-            <a:ext cx="4846320" cy="274320"/>
-          </a:xfrm>
-          <a:prstGeom prst="rect">
-            <a:avLst/>
-          </a:prstGeom>
-          <a:noFill/>
-          <a:ln/>
-        </p:spPr>
-        <p:txBody>
-          <a:bodyPr wrap="square" lIns="0" tIns="0" rIns="0" bIns="0" rtlCol="0" anchor="ctr"/>
-          <a:lstStyle/>
-          <a:p>
-            <a:pPr algn="l" indent="0" marL="0">
-              <a:buNone/>
-            </a:pPr>
-            <a:r>
-              <a:rPr lang="en-US" sz="1100" b="1" spc="250" kern="0" dirty="0">
-                <a:solidFill>
-                  <a:srgbClr val="4A6B5D"/>
-                </a:solidFill>
-                <a:latin typeface="Arial" pitchFamily="34" charset="0"/>
-                <a:ea typeface="Arial" pitchFamily="34" charset="-122"/>
-                <a:cs typeface="Arial" pitchFamily="34" charset="-120"/>
-              </a:rPr>
-              <a:t>THE FRAME BELONGED TO THE PAYER</a:t>
-            </a:r>
-            <a:endParaRPr lang="en-US" sz="1100" dirty="0"/>
-          </a:p>
-        </p:txBody>
-      </p:sp>
-      <p:sp>
-        <p:nvSpPr>
-          <p:cNvPr id="5" name="Shape 2"/>
-          <p:cNvSpPr/>
-          <p:nvPr/>
-        </p:nvSpPr>
-        <p:spPr>
-          <a:xfrm>
-            <a:off x="457200" y="5230368"/>
-            <a:ext cx="8778240" cy="1243584"/>
-          </a:xfrm>
-          <a:prstGeom prst="rect">
-            <a:avLst/>
-          </a:prstGeom>
-          <a:solidFill>
-            <a:srgbClr val="FAF8F1"/>
-          </a:solidFill>
-          <a:ln/>
-        </p:spPr>
-      </p:sp>
-      <p:sp>
-        <p:nvSpPr>
-          <p:cNvPr id="6" name="Shape 3"/>
-          <p:cNvSpPr/>
-          <p:nvPr/>
-        </p:nvSpPr>
-        <p:spPr>
-          <a:xfrm>
-            <a:off x="676656" y="5468112"/>
-            <a:ext cx="731520" cy="0"/>
-          </a:xfrm>
-          <a:prstGeom prst="line">
-            <a:avLst/>
-          </a:prstGeom>
-          <a:noFill/>
-          <a:ln w="28575">
-            <a:solidFill>
-              <a:srgbClr val="8C3A38"/>
-            </a:solidFill>
-            <a:prstDash val="solid"/>
-          </a:ln>
-        </p:spPr>
-      </p:sp>
-      <p:sp>
-        <p:nvSpPr>
-          <p:cNvPr id="7" name="Text 4"/>
-          <p:cNvSpPr/>
-          <p:nvPr/>
-        </p:nvSpPr>
-        <p:spPr>
-          <a:xfrm>
-            <a:off x="676656" y="5541264"/>
-            <a:ext cx="8339328" cy="585216"/>
-          </a:xfrm>
-          <a:prstGeom prst="rect">
-            <a:avLst/>
-          </a:prstGeom>
-          <a:noFill/>
-          <a:ln/>
-        </p:spPr>
-        <p:txBody>
-          <a:bodyPr wrap="square" lIns="0" tIns="0" rIns="0" bIns="0" rtlCol="0" anchor="t"/>
-          <a:lstStyle/>
-          <a:p>
-            <a:pPr indent="0" marL="0">
-              <a:lnSpc>
-                <a:spcPts val="2200"/>
-              </a:lnSpc>
-              <a:buNone/>
-            </a:pPr>
-            <a:r>
-              <a:rPr lang="en-US" sz="1800" dirty="0">
-                <a:solidFill>
-                  <a:srgbClr val="24313F"/>
-                </a:solidFill>
-                <a:latin typeface="Georgia" pitchFamily="34" charset="0"/>
-                <a:ea typeface="Georgia" pitchFamily="34" charset="-122"/>
-                <a:cs typeface="Georgia" pitchFamily="34" charset="-120"/>
-              </a:rPr>
-              <a:t>Le Gray photographed the Emperor's camp on commission: the frame belonged to who paid, in 1857 as now.</a:t>
-            </a:r>
-            <a:endParaRPr lang="en-US" sz="1800" dirty="0"/>
-          </a:p>
-        </p:txBody>
-      </p:sp>
-      <p:sp>
-        <p:nvSpPr>
-          <p:cNvPr id="8" name="Text 5"/>
-          <p:cNvSpPr/>
-          <p:nvPr/>
-        </p:nvSpPr>
-        <p:spPr>
-          <a:xfrm>
-            <a:off x="676656" y="6181344"/>
-            <a:ext cx="8339328" cy="256032"/>
-          </a:xfrm>
-          <a:prstGeom prst="rect">
-            <a:avLst/>
-          </a:prstGeom>
-          <a:noFill/>
-          <a:ln/>
-        </p:spPr>
-        <p:txBody>
-          <a:bodyPr wrap="square" lIns="0" tIns="0" rIns="0" bIns="0" rtlCol="0" anchor="ctr"/>
-          <a:lstStyle/>
-          <a:p>
-            <a:pPr indent="0" marL="0">
-              <a:buNone/>
-            </a:pPr>
-            <a:r>
-              <a:rPr lang="en-US" sz="950" spc="50" kern="0" dirty="0">
-                <a:solidFill>
-                  <a:srgbClr val="7A7F72"/>
-                </a:solidFill>
-                <a:latin typeface="Arial" pitchFamily="34" charset="0"/>
-                <a:ea typeface="Arial" pitchFamily="34" charset="-122"/>
-                <a:cs typeface="Arial" pitchFamily="34" charset="-120"/>
-              </a:rPr>
-              <a:t>Gustave Le Gray, Camp de Chalons, 1857</a:t>
-            </a:r>
-            <a:endParaRPr lang="en-US" sz="950" dirty="0"/>
-          </a:p>
-        </p:txBody>
-      </p:sp>
-    </p:spTree>
-  </p:cSld>
-  <p:clrMapOvr>
-    <a:masterClrMapping/>
-  </p:clrMapOvr>
-</p:sld>
-</file>
-
-<file path=ppt/slides/slide5.xml><?xml version="1.0" encoding="utf-8"?>
-<p:sld xmlns:a="http://schemas.openxmlformats.org/drawingml/2006/main" xmlns:r="http://schemas.openxmlformats.org/officeDocument/2006/relationships" xmlns:p="http://schemas.openxmlformats.org/presentationml/2006/main">
-  <p:cSld name="Slide 5">
     <p:bg>
       <p:bgPr>
         <a:solidFill>
@@ -4923,7 +5118,7 @@
                 <a:ea typeface="Arial" pitchFamily="34" charset="-122"/>
                 <a:cs typeface="Arial" pitchFamily="34" charset="-120"/>
               </a:rPr>
-              <a:t>WHO PAYS, AND WHAT THEY BUY</a:t>
+              <a:t>THE BROADCAST ITSELF</a:t>
             </a:r>
             <a:endParaRPr lang="en-US" sz="1100" dirty="0"/>
           </a:p>
@@ -4962,7 +5157,7 @@
                 <a:ea typeface="Arial" pitchFamily="34" charset="-122"/>
                 <a:cs typeface="Arial" pitchFamily="34" charset="-120"/>
               </a:rPr>
-              <a:t>PSB VERSUS COMMERCIAL</a:t>
+              <a:t>BBC ONE, EARLY EVENING, 1969 TO 1983</a:t>
             </a:r>
             <a:endParaRPr lang="en-US" sz="1100" dirty="0"/>
           </a:p>
@@ -4993,159 +5188,21 @@
       </p:sp>
       <p:sp>
         <p:nvSpPr>
-          <p:cNvPr id="5" name="Text 3"/>
-          <p:cNvSpPr/>
-          <p:nvPr/>
-        </p:nvSpPr>
-        <p:spPr>
-          <a:xfrm>
-            <a:off x="822960" y="932688"/>
-            <a:ext cx="10543032" cy="640080"/>
-          </a:xfrm>
-          <a:prstGeom prst="rect">
-            <a:avLst/>
-          </a:prstGeom>
-          <a:noFill/>
-          <a:ln/>
-        </p:spPr>
-        <p:txBody>
-          <a:bodyPr wrap="square" lIns="0" tIns="0" rIns="0" bIns="0" rtlCol="0" anchor="ctr"/>
-          <a:lstStyle/>
-          <a:p>
-            <a:pPr indent="0" marL="0">
-              <a:buNone/>
-            </a:pPr>
-            <a:r>
-              <a:rPr lang="en-US" sz="3200" dirty="0">
-                <a:solidFill>
-                  <a:srgbClr val="24313F"/>
-                </a:solidFill>
-                <a:latin typeface="Georgia" pitchFamily="34" charset="0"/>
-                <a:ea typeface="Georgia" pitchFamily="34" charset="-122"/>
-                <a:cs typeface="Georgia" pitchFamily="34" charset="-120"/>
-              </a:rPr>
-              <a:t>Follow the money</a:t>
-            </a:r>
-            <a:endParaRPr lang="en-US" sz="3200" dirty="0"/>
-          </a:p>
-        </p:txBody>
-      </p:sp>
-      <p:sp>
-        <p:nvSpPr>
-          <p:cNvPr id="6" name="Shape 4"/>
-          <p:cNvSpPr/>
-          <p:nvPr/>
-        </p:nvSpPr>
-        <p:spPr>
-          <a:xfrm>
-            <a:off x="822960" y="1737360"/>
-            <a:ext cx="10543032" cy="0"/>
-          </a:xfrm>
-          <a:prstGeom prst="line">
-            <a:avLst/>
-          </a:prstGeom>
-          <a:noFill/>
-          <a:ln w="12700">
-            <a:solidFill>
-              <a:srgbClr val="24313F"/>
-            </a:solidFill>
-            <a:prstDash val="solid"/>
-          </a:ln>
-        </p:spPr>
-      </p:sp>
-      <p:sp>
-        <p:nvSpPr>
-          <p:cNvPr id="7" name="Text 5"/>
-          <p:cNvSpPr/>
-          <p:nvPr/>
-        </p:nvSpPr>
-        <p:spPr>
-          <a:xfrm>
-            <a:off x="822960" y="1737360"/>
-            <a:ext cx="4023360" cy="640080"/>
-          </a:xfrm>
-          <a:prstGeom prst="rect">
-            <a:avLst/>
-          </a:prstGeom>
-          <a:noFill/>
-          <a:ln/>
-        </p:spPr>
-        <p:txBody>
-          <a:bodyPr wrap="square" lIns="0" tIns="0" rIns="0" bIns="0" rtlCol="0" anchor="ctr"/>
-          <a:lstStyle/>
-          <a:p>
-            <a:pPr indent="0" marL="0">
-              <a:buNone/>
-            </a:pPr>
-            <a:r>
-              <a:rPr lang="en-US" sz="1100" b="1" spc="150" kern="0" dirty="0">
-                <a:solidFill>
-                  <a:srgbClr val="7A7F72"/>
-                </a:solidFill>
-                <a:latin typeface="Arial" pitchFamily="34" charset="0"/>
-                <a:ea typeface="Arial" pitchFamily="34" charset="-122"/>
-                <a:cs typeface="Arial" pitchFamily="34" charset="-120"/>
-              </a:rPr>
-              <a:t>THE PAYER</a:t>
-            </a:r>
-            <a:endParaRPr lang="en-US" sz="1100" dirty="0"/>
-          </a:p>
-        </p:txBody>
-      </p:sp>
-      <p:sp>
-        <p:nvSpPr>
-          <p:cNvPr id="8" name="Text 6"/>
-          <p:cNvSpPr/>
-          <p:nvPr/>
-        </p:nvSpPr>
-        <p:spPr>
-          <a:xfrm>
-            <a:off x="5029200" y="1737360"/>
-            <a:ext cx="6309360" cy="640080"/>
-          </a:xfrm>
-          <a:prstGeom prst="rect">
-            <a:avLst/>
-          </a:prstGeom>
-          <a:noFill/>
-          <a:ln/>
-        </p:spPr>
-        <p:txBody>
-          <a:bodyPr wrap="square" lIns="0" tIns="0" rIns="0" bIns="0" rtlCol="0" anchor="ctr"/>
-          <a:lstStyle/>
-          <a:p>
-            <a:pPr indent="0" marL="0">
-              <a:buNone/>
-            </a:pPr>
-            <a:r>
-              <a:rPr lang="en-US" sz="1100" b="1" spc="150" kern="0" dirty="0">
-                <a:solidFill>
-                  <a:srgbClr val="7A7F72"/>
-                </a:solidFill>
-                <a:latin typeface="Arial" pitchFamily="34" charset="0"/>
-                <a:ea typeface="Arial" pitchFamily="34" charset="-122"/>
-                <a:cs typeface="Arial" pitchFamily="34" charset="-120"/>
-              </a:rPr>
-              <a:t>WHAT THE MONEY BUYS</a:t>
-            </a:r>
-            <a:endParaRPr lang="en-US" sz="1100" dirty="0"/>
-          </a:p>
-        </p:txBody>
-      </p:sp>
-      <p:sp>
-        <p:nvSpPr>
-          <p:cNvPr id="9" name="Shape 7"/>
-          <p:cNvSpPr/>
-          <p:nvPr/>
-        </p:nvSpPr>
-        <p:spPr>
-          <a:xfrm>
-            <a:off x="822960" y="2377440"/>
-            <a:ext cx="10543032" cy="0"/>
-          </a:xfrm>
-          <a:prstGeom prst="line">
-            <a:avLst/>
-          </a:prstGeom>
-          <a:noFill/>
+          <p:cNvPr id="5" name="Shape 3"/>
+          <p:cNvSpPr/>
+          <p:nvPr/>
+        </p:nvSpPr>
+        <p:spPr>
+          <a:xfrm>
+            <a:off x="822960" y="1051560"/>
+            <a:ext cx="6309360" cy="4480560"/>
+          </a:xfrm>
+          <a:prstGeom prst="rect">
+            <a:avLst/>
+          </a:prstGeom>
+          <a:solidFill>
+            <a:srgbClr val="FAF8F1"/>
+          </a:solidFill>
           <a:ln w="9525">
             <a:solidFill>
               <a:srgbClr val="D9D4C4"/>
@@ -5154,71 +5211,140 @@
           </a:ln>
         </p:spPr>
       </p:sp>
-      <p:sp>
-        <p:nvSpPr>
-          <p:cNvPr id="10" name="Text 8"/>
-          <p:cNvSpPr/>
-          <p:nvPr/>
-        </p:nvSpPr>
-        <p:spPr>
-          <a:xfrm>
-            <a:off x="822960" y="2377440"/>
-            <a:ext cx="4023360" cy="640080"/>
-          </a:xfrm>
-          <a:prstGeom prst="rect">
-            <a:avLst/>
-          </a:prstGeom>
-          <a:noFill/>
-          <a:ln/>
-        </p:spPr>
-        <p:txBody>
-          <a:bodyPr wrap="square" lIns="0" tIns="0" rIns="0" bIns="0" rtlCol="0" anchor="ctr"/>
+      <p:pic>
+        <p:nvPicPr>
+          <p:cNvPr id="6" name="Image 0" descr="/Users/dogan/Documents/Vaults/Courses/wiki/classes/media-studies/decks/_build/img/nationwide-title.jpg">    </p:cNvPr>
+          <p:cNvPicPr>
+            <a:picLocks noChangeAspect="1"/>
+          </p:cNvPicPr>
+          <p:nvPr/>
+        </p:nvPicPr>
+        <p:blipFill>
+          <a:blip r:embed="rId1"/>
+          <a:stretch>
+            <a:fillRect/>
+          </a:stretch>
+        </p:blipFill>
+        <p:spPr>
+          <a:xfrm>
+            <a:off x="950976" y="1182634"/>
+            <a:ext cx="6053328" cy="4218413"/>
+          </a:xfrm>
+          <a:prstGeom prst="rect">
+            <a:avLst/>
+          </a:prstGeom>
+        </p:spPr>
+      </p:pic>
+      <p:sp>
+        <p:nvSpPr>
+          <p:cNvPr id="7" name="Text 4"/>
+          <p:cNvSpPr/>
+          <p:nvPr/>
+        </p:nvSpPr>
+        <p:spPr>
+          <a:xfrm>
+            <a:off x="822960" y="5596128"/>
+            <a:ext cx="6309360" cy="274320"/>
+          </a:xfrm>
+          <a:prstGeom prst="rect">
+            <a:avLst/>
+          </a:prstGeom>
+          <a:noFill/>
+          <a:ln/>
+        </p:spPr>
+        <p:txBody>
+          <a:bodyPr wrap="square" lIns="0" tIns="0" rIns="0" bIns="0" rtlCol="0" anchor="ctr"/>
+          <a:lstStyle/>
+          <a:p>
+            <a:pPr algn="ctr" indent="0" marL="0">
+              <a:buNone/>
+            </a:pPr>
+            <a:r>
+              <a:rPr lang="en-US" sz="950" dirty="0">
+                <a:solidFill>
+                  <a:srgbClr val="7A7F72"/>
+                </a:solidFill>
+                <a:latin typeface="Arial" pitchFamily="34" charset="0"/>
+                <a:ea typeface="Arial" pitchFamily="34" charset="-122"/>
+                <a:cs typeface="Arial" pitchFamily="34" charset="-120"/>
+              </a:rPr>
+              <a:t>Nationwide title sequence, BBC One</a:t>
+            </a:r>
+            <a:endParaRPr lang="en-US" sz="950" dirty="0"/>
+          </a:p>
+        </p:txBody>
+      </p:sp>
+      <p:sp>
+        <p:nvSpPr>
+          <p:cNvPr id="8" name="Text 5"/>
+          <p:cNvSpPr/>
+          <p:nvPr/>
+        </p:nvSpPr>
+        <p:spPr>
+          <a:xfrm>
+            <a:off x="7452360" y="1280160"/>
+            <a:ext cx="3931920" cy="822960"/>
+          </a:xfrm>
+          <a:prstGeom prst="rect">
+            <a:avLst/>
+          </a:prstGeom>
+          <a:noFill/>
+          <a:ln/>
+        </p:spPr>
+        <p:txBody>
+          <a:bodyPr wrap="square" lIns="0" tIns="0" rIns="0" bIns="0" rtlCol="0" anchor="t"/>
           <a:lstStyle/>
           <a:p>
             <a:pPr indent="0" marL="0">
-              <a:buNone/>
-            </a:pPr>
-            <a:r>
-              <a:rPr lang="en-US" sz="1900" dirty="0">
-                <a:solidFill>
-                  <a:srgbClr val="4A6B5D"/>
+              <a:lnSpc>
+                <a:spcPts val="3400"/>
+              </a:lnSpc>
+              <a:buNone/>
+            </a:pPr>
+            <a:r>
+              <a:rPr lang="en-US" sz="3000" dirty="0">
+                <a:solidFill>
+                  <a:srgbClr val="24313F"/>
                 </a:solidFill>
                 <a:latin typeface="Georgia" pitchFamily="34" charset="0"/>
                 <a:ea typeface="Georgia" pitchFamily="34" charset="-122"/>
                 <a:cs typeface="Georgia" pitchFamily="34" charset="-120"/>
               </a:rPr>
-              <a:t>Licence fee or state</a:t>
-            </a:r>
-            <a:endParaRPr lang="en-US" sz="1900" dirty="0"/>
-          </a:p>
-        </p:txBody>
-      </p:sp>
-      <p:sp>
-        <p:nvSpPr>
-          <p:cNvPr id="11" name="Text 9"/>
-          <p:cNvSpPr/>
-          <p:nvPr/>
-        </p:nvSpPr>
-        <p:spPr>
-          <a:xfrm>
-            <a:off x="5029200" y="2377440"/>
-            <a:ext cx="6309360" cy="640080"/>
-          </a:xfrm>
-          <a:prstGeom prst="rect">
-            <a:avLst/>
-          </a:prstGeom>
-          <a:noFill/>
-          <a:ln/>
-        </p:spPr>
-        <p:txBody>
-          <a:bodyPr wrap="square" lIns="0" tIns="0" rIns="0" bIns="0" rtlCol="0" anchor="ctr"/>
+              <a:t>Deliberately ordinary</a:t>
+            </a:r>
+            <a:endParaRPr lang="en-US" sz="3000" dirty="0"/>
+          </a:p>
+        </p:txBody>
+      </p:sp>
+      <p:sp>
+        <p:nvSpPr>
+          <p:cNvPr id="9" name="Text 6"/>
+          <p:cNvSpPr/>
+          <p:nvPr/>
+        </p:nvSpPr>
+        <p:spPr>
+          <a:xfrm>
+            <a:off x="7452360" y="2240280"/>
+            <a:ext cx="3931920" cy="3566160"/>
+          </a:xfrm>
+          <a:prstGeom prst="rect">
+            <a:avLst/>
+          </a:prstGeom>
+          <a:noFill/>
+          <a:ln/>
+        </p:spPr>
+        <p:txBody>
+          <a:bodyPr wrap="square" lIns="0" tIns="0" rIns="0" bIns="0" rtlCol="0" anchor="t"/>
           <a:lstStyle/>
           <a:p>
             <a:pPr indent="0" marL="0">
-              <a:buNone/>
-            </a:pPr>
-            <a:r>
-              <a:rPr lang="en-US" sz="1650" dirty="0">
+              <a:lnSpc>
+                <a:spcPts val="2100"/>
+              </a:lnSpc>
+              <a:buNone/>
+            </a:pPr>
+            <a:r>
+              <a:rPr lang="en-US" sz="1500" dirty="0">
                 <a:solidFill>
                   <a:srgbClr val="24313F"/>
                 </a:solidFill>
@@ -5226,21 +5352,50 @@
                 <a:ea typeface="Georgia" pitchFamily="34" charset="-122"/>
                 <a:cs typeface="Georgia" pitchFamily="34" charset="-120"/>
               </a:rPr>
-              <a:t>A remit: a duty to inform, educate, reach everyone.</a:t>
-            </a:r>
-            <a:endParaRPr lang="en-US" sz="1650" dirty="0"/>
-          </a:p>
-        </p:txBody>
-      </p:sp>
-      <p:sp>
-        <p:nvSpPr>
-          <p:cNvPr id="12" name="Shape 10"/>
-          <p:cNvSpPr/>
-          <p:nvPr/>
-        </p:nvSpPr>
-        <p:spPr>
-          <a:xfrm>
-            <a:off x="822960" y="3017520"/>
+              <a:t>A teatime magazine programme: regional news, consumer items, the odd duck on a skateboard. Morley chose it because it was ordinary, addressed to everyone and pitched as common sense.</a:t>
+            </a:r>
+            <a:endParaRPr lang="en-US" sz="1500" dirty="0"/>
+          </a:p>
+          <a:p>
+            <a:pPr indent="0" marL="0">
+              <a:lnSpc>
+                <a:spcPts val="2100"/>
+              </a:lnSpc>
+              <a:buNone/>
+            </a:pPr>
+            <a:endParaRPr lang="en-US" sz="1500" dirty="0"/>
+          </a:p>
+          <a:p>
+            <a:pPr indent="0" marL="0">
+              <a:lnSpc>
+                <a:spcPts val="2100"/>
+              </a:lnSpc>
+              <a:buNone/>
+            </a:pPr>
+            <a:r>
+              <a:rPr lang="en-US" sz="1500" dirty="0">
+                <a:solidFill>
+                  <a:srgbClr val="24313F"/>
+                </a:solidFill>
+                <a:latin typeface="Georgia" pitchFamily="34" charset="0"/>
+                <a:ea typeface="Georgia" pitchFamily="34" charset="-122"/>
+                <a:cs typeface="Georgia" pitchFamily="34" charset="-120"/>
+              </a:rPr>
+              <a:t>That is what made the finding sharp: if even this produces systematically different readings, no text is neutral.</a:t>
+            </a:r>
+            <a:endParaRPr lang="en-US" sz="1500" dirty="0"/>
+          </a:p>
+        </p:txBody>
+      </p:sp>
+      <p:sp>
+        <p:nvSpPr>
+          <p:cNvPr id="10" name="Shape 7"/>
+          <p:cNvSpPr/>
+          <p:nvPr/>
+        </p:nvSpPr>
+        <p:spPr>
+          <a:xfrm>
+            <a:off x="822960" y="6382512"/>
             <a:ext cx="10543032" cy="0"/>
           </a:xfrm>
           <a:prstGeom prst="line">
@@ -5257,14 +5412,14 @@
       </p:sp>
       <p:sp>
         <p:nvSpPr>
-          <p:cNvPr id="13" name="Text 11"/>
-          <p:cNvSpPr/>
-          <p:nvPr/>
-        </p:nvSpPr>
-        <p:spPr>
-          <a:xfrm>
-            <a:off x="822960" y="3017520"/>
-            <a:ext cx="4023360" cy="640080"/>
+          <p:cNvPr id="11" name="Text 8"/>
+          <p:cNvSpPr/>
+          <p:nvPr/>
+        </p:nvSpPr>
+        <p:spPr>
+          <a:xfrm>
+            <a:off x="822960" y="6419088"/>
+            <a:ext cx="7315200" cy="274320"/>
           </a:xfrm>
           <a:prstGeom prst="rect">
             <a:avLst/>
@@ -5280,46 +5435,239 @@
               <a:buNone/>
             </a:pPr>
             <a:r>
-              <a:rPr lang="en-US" sz="1900" dirty="0">
-                <a:solidFill>
-                  <a:srgbClr val="4A6B5D"/>
+              <a:rPr lang="en-US" sz="900" spc="150" kern="0" dirty="0">
+                <a:solidFill>
+                  <a:srgbClr val="7A7F72"/>
+                </a:solidFill>
+                <a:latin typeface="Arial" pitchFamily="34" charset="0"/>
+                <a:ea typeface="Arial" pitchFamily="34" charset="-122"/>
+                <a:cs typeface="Arial" pitchFamily="34" charset="-120"/>
+              </a:rPr>
+              <a:t>MEDIA STUDIES 9607 · SEMESTER I</a:t>
+            </a:r>
+            <a:endParaRPr lang="en-US" sz="900" dirty="0"/>
+          </a:p>
+        </p:txBody>
+      </p:sp>
+      <p:sp>
+        <p:nvSpPr>
+          <p:cNvPr id="12" name="Text 9"/>
+          <p:cNvSpPr/>
+          <p:nvPr/>
+        </p:nvSpPr>
+        <p:spPr>
+          <a:xfrm>
+            <a:off x="10268712" y="6355080"/>
+            <a:ext cx="1097280" cy="365760"/>
+          </a:xfrm>
+          <a:prstGeom prst="rect">
+            <a:avLst/>
+          </a:prstGeom>
+          <a:noFill/>
+          <a:ln/>
+        </p:spPr>
+        <p:txBody>
+          <a:bodyPr wrap="square" lIns="0" tIns="0" rIns="0" bIns="0" rtlCol="0" anchor="ctr"/>
+          <a:lstStyle/>
+          <a:p>
+            <a:pPr algn="r" indent="0" marL="0">
+              <a:buNone/>
+            </a:pPr>
+            <a:r>
+              <a:rPr lang="en-US" sz="1600" dirty="0">
+                <a:solidFill>
+                  <a:srgbClr val="A3C1AD"/>
                 </a:solidFill>
                 <a:latin typeface="Georgia" pitchFamily="34" charset="0"/>
                 <a:ea typeface="Georgia" pitchFamily="34" charset="-122"/>
                 <a:cs typeface="Georgia" pitchFamily="34" charset="-120"/>
               </a:rPr>
-              <a:t>Advertisers</a:t>
-            </a:r>
-            <a:endParaRPr lang="en-US" sz="1900" dirty="0"/>
-          </a:p>
-        </p:txBody>
-      </p:sp>
-      <p:sp>
-        <p:nvSpPr>
-          <p:cNvPr id="14" name="Text 12"/>
-          <p:cNvSpPr/>
-          <p:nvPr/>
-        </p:nvSpPr>
-        <p:spPr>
-          <a:xfrm>
-            <a:off x="5029200" y="3017520"/>
-            <a:ext cx="6309360" cy="640080"/>
-          </a:xfrm>
-          <a:prstGeom prst="rect">
-            <a:avLst/>
-          </a:prstGeom>
-          <a:noFill/>
-          <a:ln/>
-        </p:spPr>
-        <p:txBody>
-          <a:bodyPr wrap="square" lIns="0" tIns="0" rIns="0" bIns="0" rtlCol="0" anchor="ctr"/>
+              <a:t>02</a:t>
+            </a:r>
+            <a:endParaRPr lang="en-US" sz="1600" dirty="0"/>
+          </a:p>
+        </p:txBody>
+      </p:sp>
+    </p:spTree>
+  </p:cSld>
+  <p:clrMapOvr>
+    <a:masterClrMapping/>
+  </p:clrMapOvr>
+</p:sld>
+</file>
+
+<file path=ppt/slides/slide5.xml><?xml version="1.0" encoding="utf-8"?>
+<p:sld xmlns:a="http://schemas.openxmlformats.org/drawingml/2006/main" xmlns:r="http://schemas.openxmlformats.org/officeDocument/2006/relationships" xmlns:p="http://schemas.openxmlformats.org/presentationml/2006/main">
+  <p:cSld name="Slide 5">
+    <p:spTree>
+      <p:nvGrpSpPr>
+        <p:cNvPr id="1" name=""/>
+        <p:cNvGrpSpPr/>
+        <p:nvPr/>
+      </p:nvGrpSpPr>
+      <p:grpSpPr>
+        <a:xfrm>
+          <a:off x="0" y="0"/>
+          <a:ext cx="0" cy="0"/>
+          <a:chOff x="0" y="0"/>
+          <a:chExt cx="0" cy="0"/>
+        </a:xfrm>
+      </p:grpSpPr>
+      <p:pic>
+        <p:nvPicPr>
+          <p:cNvPr id="2" name="Image 0" descr="/Users/dogan/Documents/Vaults/Courses/wiki/classes/media-studies/decks/_build/img/crops/legray-emperor-table_a1777.jpg">    </p:cNvPr>
+          <p:cNvPicPr>
+            <a:picLocks noChangeAspect="1"/>
+          </p:cNvPicPr>
+          <p:nvPr/>
+        </p:nvPicPr>
+        <p:blipFill>
+          <a:blip r:embed="rId1"/>
+          <a:stretch>
+            <a:fillRect/>
+          </a:stretch>
+        </p:blipFill>
+        <p:spPr>
+          <a:xfrm>
+            <a:off x="0" y="0"/>
+            <a:ext cx="12188952" cy="6858000"/>
+          </a:xfrm>
+          <a:prstGeom prst="rect">
+            <a:avLst/>
+          </a:prstGeom>
+        </p:spPr>
+      </p:pic>
+      <p:sp>
+        <p:nvSpPr>
+          <p:cNvPr id="3" name="Shape 0"/>
+          <p:cNvSpPr/>
+          <p:nvPr/>
+        </p:nvSpPr>
+        <p:spPr>
+          <a:xfrm>
+            <a:off x="502920" y="502920"/>
+            <a:ext cx="5120640" cy="502920"/>
+          </a:xfrm>
+          <a:prstGeom prst="rect">
+            <a:avLst/>
+          </a:prstGeom>
+          <a:solidFill>
+            <a:srgbClr val="FAF8F1"/>
+          </a:solidFill>
+          <a:ln/>
+        </p:spPr>
+      </p:sp>
+      <p:sp>
+        <p:nvSpPr>
+          <p:cNvPr id="4" name="Text 1"/>
+          <p:cNvSpPr/>
+          <p:nvPr/>
+        </p:nvSpPr>
+        <p:spPr>
+          <a:xfrm>
+            <a:off x="704088" y="521208"/>
+            <a:ext cx="4846320" cy="274320"/>
+          </a:xfrm>
+          <a:prstGeom prst="rect">
+            <a:avLst/>
+          </a:prstGeom>
+          <a:noFill/>
+          <a:ln/>
+        </p:spPr>
+        <p:txBody>
+          <a:bodyPr wrap="square" lIns="0" tIns="0" rIns="0" bIns="0" rtlCol="0" anchor="ctr"/>
+          <a:lstStyle/>
+          <a:p>
+            <a:pPr algn="l" indent="0" marL="0">
+              <a:buNone/>
+            </a:pPr>
+            <a:r>
+              <a:rPr lang="en-US" sz="1100" b="1" spc="250" kern="0" dirty="0">
+                <a:solidFill>
+                  <a:srgbClr val="4A6B5D"/>
+                </a:solidFill>
+                <a:latin typeface="Arial" pitchFamily="34" charset="0"/>
+                <a:ea typeface="Arial" pitchFamily="34" charset="-122"/>
+                <a:cs typeface="Arial" pitchFamily="34" charset="-120"/>
+              </a:rPr>
+              <a:t>THE FRAME BELONGED TO THE PAYER</a:t>
+            </a:r>
+            <a:endParaRPr lang="en-US" sz="1100" dirty="0"/>
+          </a:p>
+        </p:txBody>
+      </p:sp>
+      <p:sp>
+        <p:nvSpPr>
+          <p:cNvPr id="5" name="Shape 2"/>
+          <p:cNvSpPr/>
+          <p:nvPr/>
+        </p:nvSpPr>
+        <p:spPr>
+          <a:xfrm>
+            <a:off x="457200" y="5230368"/>
+            <a:ext cx="8778240" cy="1243584"/>
+          </a:xfrm>
+          <a:prstGeom prst="rect">
+            <a:avLst/>
+          </a:prstGeom>
+          <a:solidFill>
+            <a:srgbClr val="FAF8F1"/>
+          </a:solidFill>
+          <a:ln/>
+        </p:spPr>
+      </p:sp>
+      <p:sp>
+        <p:nvSpPr>
+          <p:cNvPr id="6" name="Shape 3"/>
+          <p:cNvSpPr/>
+          <p:nvPr/>
+        </p:nvSpPr>
+        <p:spPr>
+          <a:xfrm>
+            <a:off x="676656" y="5468112"/>
+            <a:ext cx="731520" cy="0"/>
+          </a:xfrm>
+          <a:prstGeom prst="line">
+            <a:avLst/>
+          </a:prstGeom>
+          <a:noFill/>
+          <a:ln w="28575">
+            <a:solidFill>
+              <a:srgbClr val="8C3A38"/>
+            </a:solidFill>
+            <a:prstDash val="solid"/>
+          </a:ln>
+        </p:spPr>
+      </p:sp>
+      <p:sp>
+        <p:nvSpPr>
+          <p:cNvPr id="7" name="Text 4"/>
+          <p:cNvSpPr/>
+          <p:nvPr/>
+        </p:nvSpPr>
+        <p:spPr>
+          <a:xfrm>
+            <a:off x="676656" y="5541264"/>
+            <a:ext cx="8339328" cy="585216"/>
+          </a:xfrm>
+          <a:prstGeom prst="rect">
+            <a:avLst/>
+          </a:prstGeom>
+          <a:noFill/>
+          <a:ln/>
+        </p:spPr>
+        <p:txBody>
+          <a:bodyPr wrap="square" lIns="0" tIns="0" rIns="0" bIns="0" rtlCol="0" anchor="t"/>
           <a:lstStyle/>
           <a:p>
             <a:pPr indent="0" marL="0">
-              <a:buNone/>
-            </a:pPr>
-            <a:r>
-              <a:rPr lang="en-US" sz="1650" dirty="0">
+              <a:lnSpc>
+                <a:spcPts val="2200"/>
+              </a:lnSpc>
+              <a:buNone/>
+            </a:pPr>
+            <a:r>
+              <a:rPr lang="en-US" sz="1800" dirty="0">
                 <a:solidFill>
                   <a:srgbClr val="24313F"/>
                 </a:solidFill>
@@ -5327,45 +5675,22 @@
                 <a:ea typeface="Georgia" pitchFamily="34" charset="-122"/>
                 <a:cs typeface="Georgia" pitchFamily="34" charset="-120"/>
               </a:rPr>
-              <a:t>Your attention, delivered in the right demographic.</a:t>
-            </a:r>
-            <a:endParaRPr lang="en-US" sz="1650" dirty="0"/>
-          </a:p>
-        </p:txBody>
-      </p:sp>
-      <p:sp>
-        <p:nvSpPr>
-          <p:cNvPr id="15" name="Shape 13"/>
-          <p:cNvSpPr/>
-          <p:nvPr/>
-        </p:nvSpPr>
-        <p:spPr>
-          <a:xfrm>
-            <a:off x="822960" y="3657600"/>
-            <a:ext cx="10543032" cy="0"/>
-          </a:xfrm>
-          <a:prstGeom prst="line">
-            <a:avLst/>
-          </a:prstGeom>
-          <a:noFill/>
-          <a:ln w="9525">
-            <a:solidFill>
-              <a:srgbClr val="D9D4C4"/>
-            </a:solidFill>
-            <a:prstDash val="solid"/>
-          </a:ln>
-        </p:spPr>
-      </p:sp>
-      <p:sp>
-        <p:nvSpPr>
-          <p:cNvPr id="16" name="Text 14"/>
-          <p:cNvSpPr/>
-          <p:nvPr/>
-        </p:nvSpPr>
-        <p:spPr>
-          <a:xfrm>
-            <a:off x="822960" y="3657600"/>
-            <a:ext cx="4023360" cy="640080"/>
+              <a:t>Le Gray photographed the Emperor's camp on commission: the frame belonged to who paid, in 1857 as now.</a:t>
+            </a:r>
+            <a:endParaRPr lang="en-US" sz="1800" dirty="0"/>
+          </a:p>
+        </p:txBody>
+      </p:sp>
+      <p:sp>
+        <p:nvSpPr>
+          <p:cNvPr id="8" name="Text 5"/>
+          <p:cNvSpPr/>
+          <p:nvPr/>
+        </p:nvSpPr>
+        <p:spPr>
+          <a:xfrm>
+            <a:off x="676656" y="6181344"/>
+            <a:ext cx="8339328" cy="256032"/>
           </a:xfrm>
           <a:prstGeom prst="rect">
             <a:avLst/>
@@ -5381,209 +5706,7 @@
               <a:buNone/>
             </a:pPr>
             <a:r>
-              <a:rPr lang="en-US" sz="1900" dirty="0">
-                <a:solidFill>
-                  <a:srgbClr val="4A6B5D"/>
-                </a:solidFill>
-                <a:latin typeface="Georgia" pitchFamily="34" charset="0"/>
-                <a:ea typeface="Georgia" pitchFamily="34" charset="-122"/>
-                <a:cs typeface="Georgia" pitchFamily="34" charset="-120"/>
-              </a:rPr>
-              <a:t>Subscribers</a:t>
-            </a:r>
-            <a:endParaRPr lang="en-US" sz="1900" dirty="0"/>
-          </a:p>
-        </p:txBody>
-      </p:sp>
-      <p:sp>
-        <p:nvSpPr>
-          <p:cNvPr id="17" name="Text 15"/>
-          <p:cNvSpPr/>
-          <p:nvPr/>
-        </p:nvSpPr>
-        <p:spPr>
-          <a:xfrm>
-            <a:off x="5029200" y="3657600"/>
-            <a:ext cx="6309360" cy="640080"/>
-          </a:xfrm>
-          <a:prstGeom prst="rect">
-            <a:avLst/>
-          </a:prstGeom>
-          <a:noFill/>
-          <a:ln/>
-        </p:spPr>
-        <p:txBody>
-          <a:bodyPr wrap="square" lIns="0" tIns="0" rIns="0" bIns="0" rtlCol="0" anchor="ctr"/>
-          <a:lstStyle/>
-          <a:p>
-            <a:pPr indent="0" marL="0">
-              <a:buNone/>
-            </a:pPr>
-            <a:r>
-              <a:rPr lang="en-US" sz="1650" dirty="0">
-                <a:solidFill>
-                  <a:srgbClr val="24313F"/>
-                </a:solidFill>
-                <a:latin typeface="Georgia" pitchFamily="34" charset="0"/>
-                <a:ea typeface="Georgia" pitchFamily="34" charset="-122"/>
-                <a:cs typeface="Georgia" pitchFamily="34" charset="-120"/>
-              </a:rPr>
-              <a:t>A product good enough that you keep paying for it.</a:t>
-            </a:r>
-            <a:endParaRPr lang="en-US" sz="1650" dirty="0"/>
-          </a:p>
-        </p:txBody>
-      </p:sp>
-      <p:sp>
-        <p:nvSpPr>
-          <p:cNvPr id="18" name="Shape 16"/>
-          <p:cNvSpPr/>
-          <p:nvPr/>
-        </p:nvSpPr>
-        <p:spPr>
-          <a:xfrm>
-            <a:off x="822960" y="4297680"/>
-            <a:ext cx="10543032" cy="0"/>
-          </a:xfrm>
-          <a:prstGeom prst="line">
-            <a:avLst/>
-          </a:prstGeom>
-          <a:noFill/>
-          <a:ln w="9525">
-            <a:solidFill>
-              <a:srgbClr val="D9D4C4"/>
-            </a:solidFill>
-            <a:prstDash val="solid"/>
-          </a:ln>
-        </p:spPr>
-      </p:sp>
-      <p:sp>
-        <p:nvSpPr>
-          <p:cNvPr id="19" name="Text 17"/>
-          <p:cNvSpPr/>
-          <p:nvPr/>
-        </p:nvSpPr>
-        <p:spPr>
-          <a:xfrm>
-            <a:off x="822960" y="4297680"/>
-            <a:ext cx="4023360" cy="640080"/>
-          </a:xfrm>
-          <a:prstGeom prst="rect">
-            <a:avLst/>
-          </a:prstGeom>
-          <a:noFill/>
-          <a:ln/>
-        </p:spPr>
-        <p:txBody>
-          <a:bodyPr wrap="square" lIns="0" tIns="0" rIns="0" bIns="0" rtlCol="0" anchor="ctr"/>
-          <a:lstStyle/>
-          <a:p>
-            <a:pPr indent="0" marL="0">
-              <a:buNone/>
-            </a:pPr>
-            <a:r>
-              <a:rPr lang="en-US" sz="1900" dirty="0">
-                <a:solidFill>
-                  <a:srgbClr val="4A6B5D"/>
-                </a:solidFill>
-                <a:latin typeface="Georgia" pitchFamily="34" charset="0"/>
-                <a:ea typeface="Georgia" pitchFamily="34" charset="-122"/>
-                <a:cs typeface="Georgia" pitchFamily="34" charset="-120"/>
-              </a:rPr>
-              <a:t>The state directly</a:t>
-            </a:r>
-            <a:endParaRPr lang="en-US" sz="1900" dirty="0"/>
-          </a:p>
-        </p:txBody>
-      </p:sp>
-      <p:sp>
-        <p:nvSpPr>
-          <p:cNvPr id="20" name="Text 18"/>
-          <p:cNvSpPr/>
-          <p:nvPr/>
-        </p:nvSpPr>
-        <p:spPr>
-          <a:xfrm>
-            <a:off x="5029200" y="4297680"/>
-            <a:ext cx="6309360" cy="640080"/>
-          </a:xfrm>
-          <a:prstGeom prst="rect">
-            <a:avLst/>
-          </a:prstGeom>
-          <a:noFill/>
-          <a:ln/>
-        </p:spPr>
-        <p:txBody>
-          <a:bodyPr wrap="square" lIns="0" tIns="0" rIns="0" bIns="0" rtlCol="0" anchor="ctr"/>
-          <a:lstStyle/>
-          <a:p>
-            <a:pPr indent="0" marL="0">
-              <a:buNone/>
-            </a:pPr>
-            <a:r>
-              <a:rPr lang="en-US" sz="1650" dirty="0">
-                <a:solidFill>
-                  <a:srgbClr val="24313F"/>
-                </a:solidFill>
-                <a:latin typeface="Georgia" pitchFamily="34" charset="0"/>
-                <a:ea typeface="Georgia" pitchFamily="34" charset="-122"/>
-                <a:cs typeface="Georgia" pitchFamily="34" charset="-120"/>
-              </a:rPr>
-              <a:t>Content that aligns with the payer's interests.</a:t>
-            </a:r>
-            <a:endParaRPr lang="en-US" sz="1650" dirty="0"/>
-          </a:p>
-        </p:txBody>
-      </p:sp>
-      <p:sp>
-        <p:nvSpPr>
-          <p:cNvPr id="21" name="Shape 19"/>
-          <p:cNvSpPr/>
-          <p:nvPr/>
-        </p:nvSpPr>
-        <p:spPr>
-          <a:xfrm>
-            <a:off x="822960" y="4937760"/>
-            <a:ext cx="10543032" cy="0"/>
-          </a:xfrm>
-          <a:prstGeom prst="line">
-            <a:avLst/>
-          </a:prstGeom>
-          <a:noFill/>
-          <a:ln w="9525">
-            <a:solidFill>
-              <a:srgbClr val="D9D4C4"/>
-            </a:solidFill>
-            <a:prstDash val="solid"/>
-          </a:ln>
-        </p:spPr>
-      </p:sp>
-      <p:sp>
-        <p:nvSpPr>
-          <p:cNvPr id="22" name="Text 20"/>
-          <p:cNvSpPr/>
-          <p:nvPr/>
-        </p:nvSpPr>
-        <p:spPr>
-          <a:xfrm>
-            <a:off x="822960" y="5074920"/>
-            <a:ext cx="10543032" cy="365760"/>
-          </a:xfrm>
-          <a:prstGeom prst="rect">
-            <a:avLst/>
-          </a:prstGeom>
-          <a:noFill/>
-          <a:ln/>
-        </p:spPr>
-        <p:txBody>
-          <a:bodyPr wrap="square" lIns="0" tIns="0" rIns="0" bIns="0" rtlCol="0" anchor="ctr"/>
-          <a:lstStyle/>
-          <a:p>
-            <a:pPr indent="0" marL="0">
-              <a:buNone/>
-            </a:pPr>
-            <a:r>
-              <a:rPr lang="en-US" sz="1200" i="1" dirty="0">
+              <a:rPr lang="en-US" sz="950" spc="50" kern="0" dirty="0">
                 <a:solidFill>
                   <a:srgbClr val="7A7F72"/>
                 </a:solidFill>
@@ -5591,110 +5714,9 @@
                 <a:ea typeface="Arial" pitchFamily="34" charset="-122"/>
                 <a:cs typeface="Arial" pitchFamily="34" charset="-120"/>
               </a:rPr>
-              <a:t>Curran and Seaton: ownership concentration narrows the range of stories that get told.</a:t>
-            </a:r>
-            <a:endParaRPr lang="en-US" sz="1200" dirty="0"/>
-          </a:p>
-        </p:txBody>
-      </p:sp>
-      <p:sp>
-        <p:nvSpPr>
-          <p:cNvPr id="23" name="Shape 21"/>
-          <p:cNvSpPr/>
-          <p:nvPr/>
-        </p:nvSpPr>
-        <p:spPr>
-          <a:xfrm>
-            <a:off x="822960" y="6382512"/>
-            <a:ext cx="10543032" cy="0"/>
-          </a:xfrm>
-          <a:prstGeom prst="line">
-            <a:avLst/>
-          </a:prstGeom>
-          <a:noFill/>
-          <a:ln w="9525">
-            <a:solidFill>
-              <a:srgbClr val="D9D4C4"/>
-            </a:solidFill>
-            <a:prstDash val="solid"/>
-          </a:ln>
-        </p:spPr>
-      </p:sp>
-      <p:sp>
-        <p:nvSpPr>
-          <p:cNvPr id="24" name="Text 22"/>
-          <p:cNvSpPr/>
-          <p:nvPr/>
-        </p:nvSpPr>
-        <p:spPr>
-          <a:xfrm>
-            <a:off x="822960" y="6419088"/>
-            <a:ext cx="7315200" cy="274320"/>
-          </a:xfrm>
-          <a:prstGeom prst="rect">
-            <a:avLst/>
-          </a:prstGeom>
-          <a:noFill/>
-          <a:ln/>
-        </p:spPr>
-        <p:txBody>
-          <a:bodyPr wrap="square" lIns="0" tIns="0" rIns="0" bIns="0" rtlCol="0" anchor="ctr"/>
-          <a:lstStyle/>
-          <a:p>
-            <a:pPr indent="0" marL="0">
-              <a:buNone/>
-            </a:pPr>
-            <a:r>
-              <a:rPr lang="en-US" sz="900" spc="150" kern="0" dirty="0">
-                <a:solidFill>
-                  <a:srgbClr val="7A7F72"/>
-                </a:solidFill>
-                <a:latin typeface="Arial" pitchFamily="34" charset="0"/>
-                <a:ea typeface="Arial" pitchFamily="34" charset="-122"/>
-                <a:cs typeface="Arial" pitchFamily="34" charset="-120"/>
-              </a:rPr>
-              <a:t>MEDIA STUDIES 9607 · SEMESTER I</a:t>
-            </a:r>
-            <a:endParaRPr lang="en-US" sz="900" dirty="0"/>
-          </a:p>
-        </p:txBody>
-      </p:sp>
-      <p:sp>
-        <p:nvSpPr>
-          <p:cNvPr id="25" name="Text 23"/>
-          <p:cNvSpPr/>
-          <p:nvPr/>
-        </p:nvSpPr>
-        <p:spPr>
-          <a:xfrm>
-            <a:off x="10268712" y="6355080"/>
-            <a:ext cx="1097280" cy="365760"/>
-          </a:xfrm>
-          <a:prstGeom prst="rect">
-            <a:avLst/>
-          </a:prstGeom>
-          <a:noFill/>
-          <a:ln/>
-        </p:spPr>
-        <p:txBody>
-          <a:bodyPr wrap="square" lIns="0" tIns="0" rIns="0" bIns="0" rtlCol="0" anchor="ctr"/>
-          <a:lstStyle/>
-          <a:p>
-            <a:pPr algn="r" indent="0" marL="0">
-              <a:buNone/>
-            </a:pPr>
-            <a:r>
-              <a:rPr lang="en-US" sz="1600" dirty="0">
-                <a:solidFill>
-                  <a:srgbClr val="A3C1AD"/>
-                </a:solidFill>
-                <a:latin typeface="Georgia" pitchFamily="34" charset="0"/>
-                <a:ea typeface="Georgia" pitchFamily="34" charset="-122"/>
-                <a:cs typeface="Georgia" pitchFamily="34" charset="-120"/>
-              </a:rPr>
-              <a:t>02</a:t>
-            </a:r>
-            <a:endParaRPr lang="en-US" sz="1600" dirty="0"/>
+              <a:t>Gustave Le Gray, Camp de Chalons, 1857</a:t>
+            </a:r>
+            <a:endParaRPr lang="en-US" sz="950" dirty="0"/>
           </a:p>
         </p:txBody>
       </p:sp>
@@ -5709,6 +5731,846 @@
 <file path=ppt/slides/slide6.xml><?xml version="1.0" encoding="utf-8"?>
 <p:sld xmlns:a="http://schemas.openxmlformats.org/drawingml/2006/main" xmlns:r="http://schemas.openxmlformats.org/officeDocument/2006/relationships" xmlns:p="http://schemas.openxmlformats.org/presentationml/2006/main">
   <p:cSld name="Slide 6">
+    <p:bg>
+      <p:bgPr>
+        <a:solidFill>
+          <a:srgbClr val="FAF8F1"/>
+        </a:solidFill>
+      </p:bgPr>
+    </p:bg>
+    <p:spTree>
+      <p:nvGrpSpPr>
+        <p:cNvPr id="1" name=""/>
+        <p:cNvGrpSpPr/>
+        <p:nvPr/>
+      </p:nvGrpSpPr>
+      <p:grpSpPr>
+        <a:xfrm>
+          <a:off x="0" y="0"/>
+          <a:ext cx="0" cy="0"/>
+          <a:chOff x="0" y="0"/>
+          <a:chExt cx="0" cy="0"/>
+        </a:xfrm>
+      </p:grpSpPr>
+      <p:sp>
+        <p:nvSpPr>
+          <p:cNvPr id="2" name="Text 0"/>
+          <p:cNvSpPr/>
+          <p:nvPr/>
+        </p:nvSpPr>
+        <p:spPr>
+          <a:xfrm>
+            <a:off x="822960" y="457200"/>
+            <a:ext cx="6400800" cy="274320"/>
+          </a:xfrm>
+          <a:prstGeom prst="rect">
+            <a:avLst/>
+          </a:prstGeom>
+          <a:noFill/>
+          <a:ln/>
+        </p:spPr>
+        <p:txBody>
+          <a:bodyPr wrap="square" lIns="0" tIns="0" rIns="0" bIns="0" rtlCol="0" anchor="ctr"/>
+          <a:lstStyle/>
+          <a:p>
+            <a:pPr algn="l" indent="0" marL="0">
+              <a:buNone/>
+            </a:pPr>
+            <a:r>
+              <a:rPr lang="en-US" sz="1100" b="1" spc="250" kern="0" dirty="0">
+                <a:solidFill>
+                  <a:srgbClr val="4A6B5D"/>
+                </a:solidFill>
+                <a:latin typeface="Arial" pitchFamily="34" charset="0"/>
+                <a:ea typeface="Arial" pitchFamily="34" charset="-122"/>
+                <a:cs typeface="Arial" pitchFamily="34" charset="-120"/>
+              </a:rPr>
+              <a:t>WHO PAYS, AND WHAT THEY BUY</a:t>
+            </a:r>
+            <a:endParaRPr lang="en-US" sz="1100" dirty="0"/>
+          </a:p>
+        </p:txBody>
+      </p:sp>
+      <p:sp>
+        <p:nvSpPr>
+          <p:cNvPr id="3" name="Text 1"/>
+          <p:cNvSpPr/>
+          <p:nvPr/>
+        </p:nvSpPr>
+        <p:spPr>
+          <a:xfrm>
+            <a:off x="6793992" y="457200"/>
+            <a:ext cx="4572000" cy="274320"/>
+          </a:xfrm>
+          <a:prstGeom prst="rect">
+            <a:avLst/>
+          </a:prstGeom>
+          <a:noFill/>
+          <a:ln/>
+        </p:spPr>
+        <p:txBody>
+          <a:bodyPr wrap="square" lIns="0" tIns="0" rIns="0" bIns="0" rtlCol="0" anchor="ctr"/>
+          <a:lstStyle/>
+          <a:p>
+            <a:pPr algn="r" indent="0" marL="0">
+              <a:buNone/>
+            </a:pPr>
+            <a:r>
+              <a:rPr lang="en-US" sz="1100" b="1" spc="250" kern="0" dirty="0">
+                <a:solidFill>
+                  <a:srgbClr val="7A7F72"/>
+                </a:solidFill>
+                <a:latin typeface="Arial" pitchFamily="34" charset="0"/>
+                <a:ea typeface="Arial" pitchFamily="34" charset="-122"/>
+                <a:cs typeface="Arial" pitchFamily="34" charset="-120"/>
+              </a:rPr>
+              <a:t>PSB VERSUS COMMERCIAL</a:t>
+            </a:r>
+            <a:endParaRPr lang="en-US" sz="1100" dirty="0"/>
+          </a:p>
+        </p:txBody>
+      </p:sp>
+      <p:sp>
+        <p:nvSpPr>
+          <p:cNvPr id="4" name="Shape 2"/>
+          <p:cNvSpPr/>
+          <p:nvPr/>
+        </p:nvSpPr>
+        <p:spPr>
+          <a:xfrm>
+            <a:off x="822960" y="786384"/>
+            <a:ext cx="10543032" cy="0"/>
+          </a:xfrm>
+          <a:prstGeom prst="line">
+            <a:avLst/>
+          </a:prstGeom>
+          <a:noFill/>
+          <a:ln w="9525">
+            <a:solidFill>
+              <a:srgbClr val="D9D4C4"/>
+            </a:solidFill>
+            <a:prstDash val="solid"/>
+          </a:ln>
+        </p:spPr>
+      </p:sp>
+      <p:sp>
+        <p:nvSpPr>
+          <p:cNvPr id="5" name="Text 3"/>
+          <p:cNvSpPr/>
+          <p:nvPr/>
+        </p:nvSpPr>
+        <p:spPr>
+          <a:xfrm>
+            <a:off x="822960" y="932688"/>
+            <a:ext cx="10543032" cy="640080"/>
+          </a:xfrm>
+          <a:prstGeom prst="rect">
+            <a:avLst/>
+          </a:prstGeom>
+          <a:noFill/>
+          <a:ln/>
+        </p:spPr>
+        <p:txBody>
+          <a:bodyPr wrap="square" lIns="0" tIns="0" rIns="0" bIns="0" rtlCol="0" anchor="ctr"/>
+          <a:lstStyle/>
+          <a:p>
+            <a:pPr indent="0" marL="0">
+              <a:buNone/>
+            </a:pPr>
+            <a:r>
+              <a:rPr lang="en-US" sz="3200" dirty="0">
+                <a:solidFill>
+                  <a:srgbClr val="24313F"/>
+                </a:solidFill>
+                <a:latin typeface="Georgia" pitchFamily="34" charset="0"/>
+                <a:ea typeface="Georgia" pitchFamily="34" charset="-122"/>
+                <a:cs typeface="Georgia" pitchFamily="34" charset="-120"/>
+              </a:rPr>
+              <a:t>Follow the money</a:t>
+            </a:r>
+            <a:endParaRPr lang="en-US" sz="3200" dirty="0"/>
+          </a:p>
+        </p:txBody>
+      </p:sp>
+      <p:sp>
+        <p:nvSpPr>
+          <p:cNvPr id="6" name="Shape 4"/>
+          <p:cNvSpPr/>
+          <p:nvPr/>
+        </p:nvSpPr>
+        <p:spPr>
+          <a:xfrm>
+            <a:off x="822960" y="1737360"/>
+            <a:ext cx="10543032" cy="0"/>
+          </a:xfrm>
+          <a:prstGeom prst="line">
+            <a:avLst/>
+          </a:prstGeom>
+          <a:noFill/>
+          <a:ln w="12700">
+            <a:solidFill>
+              <a:srgbClr val="24313F"/>
+            </a:solidFill>
+            <a:prstDash val="solid"/>
+          </a:ln>
+        </p:spPr>
+      </p:sp>
+      <p:sp>
+        <p:nvSpPr>
+          <p:cNvPr id="7" name="Text 5"/>
+          <p:cNvSpPr/>
+          <p:nvPr/>
+        </p:nvSpPr>
+        <p:spPr>
+          <a:xfrm>
+            <a:off x="822960" y="1737360"/>
+            <a:ext cx="4023360" cy="640080"/>
+          </a:xfrm>
+          <a:prstGeom prst="rect">
+            <a:avLst/>
+          </a:prstGeom>
+          <a:noFill/>
+          <a:ln/>
+        </p:spPr>
+        <p:txBody>
+          <a:bodyPr wrap="square" lIns="0" tIns="0" rIns="0" bIns="0" rtlCol="0" anchor="ctr"/>
+          <a:lstStyle/>
+          <a:p>
+            <a:pPr indent="0" marL="0">
+              <a:buNone/>
+            </a:pPr>
+            <a:r>
+              <a:rPr lang="en-US" sz="1100" b="1" spc="150" kern="0" dirty="0">
+                <a:solidFill>
+                  <a:srgbClr val="7A7F72"/>
+                </a:solidFill>
+                <a:latin typeface="Arial" pitchFamily="34" charset="0"/>
+                <a:ea typeface="Arial" pitchFamily="34" charset="-122"/>
+                <a:cs typeface="Arial" pitchFamily="34" charset="-120"/>
+              </a:rPr>
+              <a:t>THE PAYER</a:t>
+            </a:r>
+            <a:endParaRPr lang="en-US" sz="1100" dirty="0"/>
+          </a:p>
+        </p:txBody>
+      </p:sp>
+      <p:sp>
+        <p:nvSpPr>
+          <p:cNvPr id="8" name="Text 6"/>
+          <p:cNvSpPr/>
+          <p:nvPr/>
+        </p:nvSpPr>
+        <p:spPr>
+          <a:xfrm>
+            <a:off x="5029200" y="1737360"/>
+            <a:ext cx="6309360" cy="640080"/>
+          </a:xfrm>
+          <a:prstGeom prst="rect">
+            <a:avLst/>
+          </a:prstGeom>
+          <a:noFill/>
+          <a:ln/>
+        </p:spPr>
+        <p:txBody>
+          <a:bodyPr wrap="square" lIns="0" tIns="0" rIns="0" bIns="0" rtlCol="0" anchor="ctr"/>
+          <a:lstStyle/>
+          <a:p>
+            <a:pPr indent="0" marL="0">
+              <a:buNone/>
+            </a:pPr>
+            <a:r>
+              <a:rPr lang="en-US" sz="1100" b="1" spc="150" kern="0" dirty="0">
+                <a:solidFill>
+                  <a:srgbClr val="7A7F72"/>
+                </a:solidFill>
+                <a:latin typeface="Arial" pitchFamily="34" charset="0"/>
+                <a:ea typeface="Arial" pitchFamily="34" charset="-122"/>
+                <a:cs typeface="Arial" pitchFamily="34" charset="-120"/>
+              </a:rPr>
+              <a:t>WHAT THE MONEY BUYS</a:t>
+            </a:r>
+            <a:endParaRPr lang="en-US" sz="1100" dirty="0"/>
+          </a:p>
+        </p:txBody>
+      </p:sp>
+      <p:sp>
+        <p:nvSpPr>
+          <p:cNvPr id="9" name="Shape 7"/>
+          <p:cNvSpPr/>
+          <p:nvPr/>
+        </p:nvSpPr>
+        <p:spPr>
+          <a:xfrm>
+            <a:off x="822960" y="2377440"/>
+            <a:ext cx="10543032" cy="0"/>
+          </a:xfrm>
+          <a:prstGeom prst="line">
+            <a:avLst/>
+          </a:prstGeom>
+          <a:noFill/>
+          <a:ln w="9525">
+            <a:solidFill>
+              <a:srgbClr val="D9D4C4"/>
+            </a:solidFill>
+            <a:prstDash val="solid"/>
+          </a:ln>
+        </p:spPr>
+      </p:sp>
+      <p:sp>
+        <p:nvSpPr>
+          <p:cNvPr id="10" name="Text 8"/>
+          <p:cNvSpPr/>
+          <p:nvPr/>
+        </p:nvSpPr>
+        <p:spPr>
+          <a:xfrm>
+            <a:off x="822960" y="2377440"/>
+            <a:ext cx="4023360" cy="640080"/>
+          </a:xfrm>
+          <a:prstGeom prst="rect">
+            <a:avLst/>
+          </a:prstGeom>
+          <a:noFill/>
+          <a:ln/>
+        </p:spPr>
+        <p:txBody>
+          <a:bodyPr wrap="square" lIns="0" tIns="0" rIns="0" bIns="0" rtlCol="0" anchor="ctr"/>
+          <a:lstStyle/>
+          <a:p>
+            <a:pPr indent="0" marL="0">
+              <a:buNone/>
+            </a:pPr>
+            <a:r>
+              <a:rPr lang="en-US" sz="1900" dirty="0">
+                <a:solidFill>
+                  <a:srgbClr val="4A6B5D"/>
+                </a:solidFill>
+                <a:latin typeface="Georgia" pitchFamily="34" charset="0"/>
+                <a:ea typeface="Georgia" pitchFamily="34" charset="-122"/>
+                <a:cs typeface="Georgia" pitchFamily="34" charset="-120"/>
+              </a:rPr>
+              <a:t>Licence fee or state</a:t>
+            </a:r>
+            <a:endParaRPr lang="en-US" sz="1900" dirty="0"/>
+          </a:p>
+        </p:txBody>
+      </p:sp>
+      <p:sp>
+        <p:nvSpPr>
+          <p:cNvPr id="11" name="Text 9"/>
+          <p:cNvSpPr/>
+          <p:nvPr/>
+        </p:nvSpPr>
+        <p:spPr>
+          <a:xfrm>
+            <a:off x="5029200" y="2377440"/>
+            <a:ext cx="6309360" cy="640080"/>
+          </a:xfrm>
+          <a:prstGeom prst="rect">
+            <a:avLst/>
+          </a:prstGeom>
+          <a:noFill/>
+          <a:ln/>
+        </p:spPr>
+        <p:txBody>
+          <a:bodyPr wrap="square" lIns="0" tIns="0" rIns="0" bIns="0" rtlCol="0" anchor="ctr"/>
+          <a:lstStyle/>
+          <a:p>
+            <a:pPr indent="0" marL="0">
+              <a:buNone/>
+            </a:pPr>
+            <a:r>
+              <a:rPr lang="en-US" sz="1650" dirty="0">
+                <a:solidFill>
+                  <a:srgbClr val="24313F"/>
+                </a:solidFill>
+                <a:latin typeface="Georgia" pitchFamily="34" charset="0"/>
+                <a:ea typeface="Georgia" pitchFamily="34" charset="-122"/>
+                <a:cs typeface="Georgia" pitchFamily="34" charset="-120"/>
+              </a:rPr>
+              <a:t>A remit: a duty to inform, educate, reach everyone.</a:t>
+            </a:r>
+            <a:endParaRPr lang="en-US" sz="1650" dirty="0"/>
+          </a:p>
+        </p:txBody>
+      </p:sp>
+      <p:sp>
+        <p:nvSpPr>
+          <p:cNvPr id="12" name="Shape 10"/>
+          <p:cNvSpPr/>
+          <p:nvPr/>
+        </p:nvSpPr>
+        <p:spPr>
+          <a:xfrm>
+            <a:off x="822960" y="3017520"/>
+            <a:ext cx="10543032" cy="0"/>
+          </a:xfrm>
+          <a:prstGeom prst="line">
+            <a:avLst/>
+          </a:prstGeom>
+          <a:noFill/>
+          <a:ln w="9525">
+            <a:solidFill>
+              <a:srgbClr val="D9D4C4"/>
+            </a:solidFill>
+            <a:prstDash val="solid"/>
+          </a:ln>
+        </p:spPr>
+      </p:sp>
+      <p:sp>
+        <p:nvSpPr>
+          <p:cNvPr id="13" name="Text 11"/>
+          <p:cNvSpPr/>
+          <p:nvPr/>
+        </p:nvSpPr>
+        <p:spPr>
+          <a:xfrm>
+            <a:off x="822960" y="3017520"/>
+            <a:ext cx="4023360" cy="640080"/>
+          </a:xfrm>
+          <a:prstGeom prst="rect">
+            <a:avLst/>
+          </a:prstGeom>
+          <a:noFill/>
+          <a:ln/>
+        </p:spPr>
+        <p:txBody>
+          <a:bodyPr wrap="square" lIns="0" tIns="0" rIns="0" bIns="0" rtlCol="0" anchor="ctr"/>
+          <a:lstStyle/>
+          <a:p>
+            <a:pPr indent="0" marL="0">
+              <a:buNone/>
+            </a:pPr>
+            <a:r>
+              <a:rPr lang="en-US" sz="1900" dirty="0">
+                <a:solidFill>
+                  <a:srgbClr val="4A6B5D"/>
+                </a:solidFill>
+                <a:latin typeface="Georgia" pitchFamily="34" charset="0"/>
+                <a:ea typeface="Georgia" pitchFamily="34" charset="-122"/>
+                <a:cs typeface="Georgia" pitchFamily="34" charset="-120"/>
+              </a:rPr>
+              <a:t>Advertisers</a:t>
+            </a:r>
+            <a:endParaRPr lang="en-US" sz="1900" dirty="0"/>
+          </a:p>
+        </p:txBody>
+      </p:sp>
+      <p:sp>
+        <p:nvSpPr>
+          <p:cNvPr id="14" name="Text 12"/>
+          <p:cNvSpPr/>
+          <p:nvPr/>
+        </p:nvSpPr>
+        <p:spPr>
+          <a:xfrm>
+            <a:off x="5029200" y="3017520"/>
+            <a:ext cx="6309360" cy="640080"/>
+          </a:xfrm>
+          <a:prstGeom prst="rect">
+            <a:avLst/>
+          </a:prstGeom>
+          <a:noFill/>
+          <a:ln/>
+        </p:spPr>
+        <p:txBody>
+          <a:bodyPr wrap="square" lIns="0" tIns="0" rIns="0" bIns="0" rtlCol="0" anchor="ctr"/>
+          <a:lstStyle/>
+          <a:p>
+            <a:pPr indent="0" marL="0">
+              <a:buNone/>
+            </a:pPr>
+            <a:r>
+              <a:rPr lang="en-US" sz="1650" dirty="0">
+                <a:solidFill>
+                  <a:srgbClr val="24313F"/>
+                </a:solidFill>
+                <a:latin typeface="Georgia" pitchFamily="34" charset="0"/>
+                <a:ea typeface="Georgia" pitchFamily="34" charset="-122"/>
+                <a:cs typeface="Georgia" pitchFamily="34" charset="-120"/>
+              </a:rPr>
+              <a:t>Your attention, delivered in the right demographic.</a:t>
+            </a:r>
+            <a:endParaRPr lang="en-US" sz="1650" dirty="0"/>
+          </a:p>
+        </p:txBody>
+      </p:sp>
+      <p:sp>
+        <p:nvSpPr>
+          <p:cNvPr id="15" name="Shape 13"/>
+          <p:cNvSpPr/>
+          <p:nvPr/>
+        </p:nvSpPr>
+        <p:spPr>
+          <a:xfrm>
+            <a:off x="822960" y="3657600"/>
+            <a:ext cx="10543032" cy="0"/>
+          </a:xfrm>
+          <a:prstGeom prst="line">
+            <a:avLst/>
+          </a:prstGeom>
+          <a:noFill/>
+          <a:ln w="9525">
+            <a:solidFill>
+              <a:srgbClr val="D9D4C4"/>
+            </a:solidFill>
+            <a:prstDash val="solid"/>
+          </a:ln>
+        </p:spPr>
+      </p:sp>
+      <p:sp>
+        <p:nvSpPr>
+          <p:cNvPr id="16" name="Text 14"/>
+          <p:cNvSpPr/>
+          <p:nvPr/>
+        </p:nvSpPr>
+        <p:spPr>
+          <a:xfrm>
+            <a:off x="822960" y="3657600"/>
+            <a:ext cx="4023360" cy="640080"/>
+          </a:xfrm>
+          <a:prstGeom prst="rect">
+            <a:avLst/>
+          </a:prstGeom>
+          <a:noFill/>
+          <a:ln/>
+        </p:spPr>
+        <p:txBody>
+          <a:bodyPr wrap="square" lIns="0" tIns="0" rIns="0" bIns="0" rtlCol="0" anchor="ctr"/>
+          <a:lstStyle/>
+          <a:p>
+            <a:pPr indent="0" marL="0">
+              <a:buNone/>
+            </a:pPr>
+            <a:r>
+              <a:rPr lang="en-US" sz="1900" dirty="0">
+                <a:solidFill>
+                  <a:srgbClr val="4A6B5D"/>
+                </a:solidFill>
+                <a:latin typeface="Georgia" pitchFamily="34" charset="0"/>
+                <a:ea typeface="Georgia" pitchFamily="34" charset="-122"/>
+                <a:cs typeface="Georgia" pitchFamily="34" charset="-120"/>
+              </a:rPr>
+              <a:t>Subscribers</a:t>
+            </a:r>
+            <a:endParaRPr lang="en-US" sz="1900" dirty="0"/>
+          </a:p>
+        </p:txBody>
+      </p:sp>
+      <p:sp>
+        <p:nvSpPr>
+          <p:cNvPr id="17" name="Text 15"/>
+          <p:cNvSpPr/>
+          <p:nvPr/>
+        </p:nvSpPr>
+        <p:spPr>
+          <a:xfrm>
+            <a:off x="5029200" y="3657600"/>
+            <a:ext cx="6309360" cy="640080"/>
+          </a:xfrm>
+          <a:prstGeom prst="rect">
+            <a:avLst/>
+          </a:prstGeom>
+          <a:noFill/>
+          <a:ln/>
+        </p:spPr>
+        <p:txBody>
+          <a:bodyPr wrap="square" lIns="0" tIns="0" rIns="0" bIns="0" rtlCol="0" anchor="ctr"/>
+          <a:lstStyle/>
+          <a:p>
+            <a:pPr indent="0" marL="0">
+              <a:buNone/>
+            </a:pPr>
+            <a:r>
+              <a:rPr lang="en-US" sz="1650" dirty="0">
+                <a:solidFill>
+                  <a:srgbClr val="24313F"/>
+                </a:solidFill>
+                <a:latin typeface="Georgia" pitchFamily="34" charset="0"/>
+                <a:ea typeface="Georgia" pitchFamily="34" charset="-122"/>
+                <a:cs typeface="Georgia" pitchFamily="34" charset="-120"/>
+              </a:rPr>
+              <a:t>A product good enough that you keep paying for it.</a:t>
+            </a:r>
+            <a:endParaRPr lang="en-US" sz="1650" dirty="0"/>
+          </a:p>
+        </p:txBody>
+      </p:sp>
+      <p:sp>
+        <p:nvSpPr>
+          <p:cNvPr id="18" name="Shape 16"/>
+          <p:cNvSpPr/>
+          <p:nvPr/>
+        </p:nvSpPr>
+        <p:spPr>
+          <a:xfrm>
+            <a:off x="822960" y="4297680"/>
+            <a:ext cx="10543032" cy="0"/>
+          </a:xfrm>
+          <a:prstGeom prst="line">
+            <a:avLst/>
+          </a:prstGeom>
+          <a:noFill/>
+          <a:ln w="9525">
+            <a:solidFill>
+              <a:srgbClr val="D9D4C4"/>
+            </a:solidFill>
+            <a:prstDash val="solid"/>
+          </a:ln>
+        </p:spPr>
+      </p:sp>
+      <p:sp>
+        <p:nvSpPr>
+          <p:cNvPr id="19" name="Text 17"/>
+          <p:cNvSpPr/>
+          <p:nvPr/>
+        </p:nvSpPr>
+        <p:spPr>
+          <a:xfrm>
+            <a:off x="822960" y="4297680"/>
+            <a:ext cx="4023360" cy="640080"/>
+          </a:xfrm>
+          <a:prstGeom prst="rect">
+            <a:avLst/>
+          </a:prstGeom>
+          <a:noFill/>
+          <a:ln/>
+        </p:spPr>
+        <p:txBody>
+          <a:bodyPr wrap="square" lIns="0" tIns="0" rIns="0" bIns="0" rtlCol="0" anchor="ctr"/>
+          <a:lstStyle/>
+          <a:p>
+            <a:pPr indent="0" marL="0">
+              <a:buNone/>
+            </a:pPr>
+            <a:r>
+              <a:rPr lang="en-US" sz="1900" dirty="0">
+                <a:solidFill>
+                  <a:srgbClr val="4A6B5D"/>
+                </a:solidFill>
+                <a:latin typeface="Georgia" pitchFamily="34" charset="0"/>
+                <a:ea typeface="Georgia" pitchFamily="34" charset="-122"/>
+                <a:cs typeface="Georgia" pitchFamily="34" charset="-120"/>
+              </a:rPr>
+              <a:t>The state directly</a:t>
+            </a:r>
+            <a:endParaRPr lang="en-US" sz="1900" dirty="0"/>
+          </a:p>
+        </p:txBody>
+      </p:sp>
+      <p:sp>
+        <p:nvSpPr>
+          <p:cNvPr id="20" name="Text 18"/>
+          <p:cNvSpPr/>
+          <p:nvPr/>
+        </p:nvSpPr>
+        <p:spPr>
+          <a:xfrm>
+            <a:off x="5029200" y="4297680"/>
+            <a:ext cx="6309360" cy="640080"/>
+          </a:xfrm>
+          <a:prstGeom prst="rect">
+            <a:avLst/>
+          </a:prstGeom>
+          <a:noFill/>
+          <a:ln/>
+        </p:spPr>
+        <p:txBody>
+          <a:bodyPr wrap="square" lIns="0" tIns="0" rIns="0" bIns="0" rtlCol="0" anchor="ctr"/>
+          <a:lstStyle/>
+          <a:p>
+            <a:pPr indent="0" marL="0">
+              <a:buNone/>
+            </a:pPr>
+            <a:r>
+              <a:rPr lang="en-US" sz="1650" dirty="0">
+                <a:solidFill>
+                  <a:srgbClr val="24313F"/>
+                </a:solidFill>
+                <a:latin typeface="Georgia" pitchFamily="34" charset="0"/>
+                <a:ea typeface="Georgia" pitchFamily="34" charset="-122"/>
+                <a:cs typeface="Georgia" pitchFamily="34" charset="-120"/>
+              </a:rPr>
+              <a:t>Content that aligns with the payer's interests.</a:t>
+            </a:r>
+            <a:endParaRPr lang="en-US" sz="1650" dirty="0"/>
+          </a:p>
+        </p:txBody>
+      </p:sp>
+      <p:sp>
+        <p:nvSpPr>
+          <p:cNvPr id="21" name="Shape 19"/>
+          <p:cNvSpPr/>
+          <p:nvPr/>
+        </p:nvSpPr>
+        <p:spPr>
+          <a:xfrm>
+            <a:off x="822960" y="4937760"/>
+            <a:ext cx="10543032" cy="0"/>
+          </a:xfrm>
+          <a:prstGeom prst="line">
+            <a:avLst/>
+          </a:prstGeom>
+          <a:noFill/>
+          <a:ln w="9525">
+            <a:solidFill>
+              <a:srgbClr val="D9D4C4"/>
+            </a:solidFill>
+            <a:prstDash val="solid"/>
+          </a:ln>
+        </p:spPr>
+      </p:sp>
+      <p:sp>
+        <p:nvSpPr>
+          <p:cNvPr id="22" name="Text 20"/>
+          <p:cNvSpPr/>
+          <p:nvPr/>
+        </p:nvSpPr>
+        <p:spPr>
+          <a:xfrm>
+            <a:off x="822960" y="5074920"/>
+            <a:ext cx="10543032" cy="365760"/>
+          </a:xfrm>
+          <a:prstGeom prst="rect">
+            <a:avLst/>
+          </a:prstGeom>
+          <a:noFill/>
+          <a:ln/>
+        </p:spPr>
+        <p:txBody>
+          <a:bodyPr wrap="square" lIns="0" tIns="0" rIns="0" bIns="0" rtlCol="0" anchor="ctr"/>
+          <a:lstStyle/>
+          <a:p>
+            <a:pPr indent="0" marL="0">
+              <a:buNone/>
+            </a:pPr>
+            <a:r>
+              <a:rPr lang="en-US" sz="1200" i="1" dirty="0">
+                <a:solidFill>
+                  <a:srgbClr val="7A7F72"/>
+                </a:solidFill>
+                <a:latin typeface="Arial" pitchFamily="34" charset="0"/>
+                <a:ea typeface="Arial" pitchFamily="34" charset="-122"/>
+                <a:cs typeface="Arial" pitchFamily="34" charset="-120"/>
+              </a:rPr>
+              <a:t>Curran and Seaton: ownership concentration narrows the range of stories that get told.</a:t>
+            </a:r>
+            <a:endParaRPr lang="en-US" sz="1200" dirty="0"/>
+          </a:p>
+        </p:txBody>
+      </p:sp>
+      <p:sp>
+        <p:nvSpPr>
+          <p:cNvPr id="23" name="Shape 21"/>
+          <p:cNvSpPr/>
+          <p:nvPr/>
+        </p:nvSpPr>
+        <p:spPr>
+          <a:xfrm>
+            <a:off x="822960" y="6382512"/>
+            <a:ext cx="10543032" cy="0"/>
+          </a:xfrm>
+          <a:prstGeom prst="line">
+            <a:avLst/>
+          </a:prstGeom>
+          <a:noFill/>
+          <a:ln w="9525">
+            <a:solidFill>
+              <a:srgbClr val="D9D4C4"/>
+            </a:solidFill>
+            <a:prstDash val="solid"/>
+          </a:ln>
+        </p:spPr>
+      </p:sp>
+      <p:sp>
+        <p:nvSpPr>
+          <p:cNvPr id="24" name="Text 22"/>
+          <p:cNvSpPr/>
+          <p:nvPr/>
+        </p:nvSpPr>
+        <p:spPr>
+          <a:xfrm>
+            <a:off x="822960" y="6419088"/>
+            <a:ext cx="7315200" cy="274320"/>
+          </a:xfrm>
+          <a:prstGeom prst="rect">
+            <a:avLst/>
+          </a:prstGeom>
+          <a:noFill/>
+          <a:ln/>
+        </p:spPr>
+        <p:txBody>
+          <a:bodyPr wrap="square" lIns="0" tIns="0" rIns="0" bIns="0" rtlCol="0" anchor="ctr"/>
+          <a:lstStyle/>
+          <a:p>
+            <a:pPr indent="0" marL="0">
+              <a:buNone/>
+            </a:pPr>
+            <a:r>
+              <a:rPr lang="en-US" sz="900" spc="150" kern="0" dirty="0">
+                <a:solidFill>
+                  <a:srgbClr val="7A7F72"/>
+                </a:solidFill>
+                <a:latin typeface="Arial" pitchFamily="34" charset="0"/>
+                <a:ea typeface="Arial" pitchFamily="34" charset="-122"/>
+                <a:cs typeface="Arial" pitchFamily="34" charset="-120"/>
+              </a:rPr>
+              <a:t>MEDIA STUDIES 9607 · SEMESTER I</a:t>
+            </a:r>
+            <a:endParaRPr lang="en-US" sz="900" dirty="0"/>
+          </a:p>
+        </p:txBody>
+      </p:sp>
+      <p:sp>
+        <p:nvSpPr>
+          <p:cNvPr id="25" name="Text 23"/>
+          <p:cNvSpPr/>
+          <p:nvPr/>
+        </p:nvSpPr>
+        <p:spPr>
+          <a:xfrm>
+            <a:off x="10268712" y="6355080"/>
+            <a:ext cx="1097280" cy="365760"/>
+          </a:xfrm>
+          <a:prstGeom prst="rect">
+            <a:avLst/>
+          </a:prstGeom>
+          <a:noFill/>
+          <a:ln/>
+        </p:spPr>
+        <p:txBody>
+          <a:bodyPr wrap="square" lIns="0" tIns="0" rIns="0" bIns="0" rtlCol="0" anchor="ctr"/>
+          <a:lstStyle/>
+          <a:p>
+            <a:pPr algn="r" indent="0" marL="0">
+              <a:buNone/>
+            </a:pPr>
+            <a:r>
+              <a:rPr lang="en-US" sz="1600" dirty="0">
+                <a:solidFill>
+                  <a:srgbClr val="A3C1AD"/>
+                </a:solidFill>
+                <a:latin typeface="Georgia" pitchFamily="34" charset="0"/>
+                <a:ea typeface="Georgia" pitchFamily="34" charset="-122"/>
+                <a:cs typeface="Georgia" pitchFamily="34" charset="-120"/>
+              </a:rPr>
+              <a:t>03</a:t>
+            </a:r>
+            <a:endParaRPr lang="en-US" sz="1600" dirty="0"/>
+          </a:p>
+        </p:txBody>
+      </p:sp>
+    </p:spTree>
+  </p:cSld>
+  <p:clrMapOvr>
+    <a:masterClrMapping/>
+  </p:clrMapOvr>
+</p:sld>
+</file>
+
+<file path=ppt/slides/slide7.xml><?xml version="1.0" encoding="utf-8"?>
+<p:sld xmlns:a="http://schemas.openxmlformats.org/drawingml/2006/main" xmlns:r="http://schemas.openxmlformats.org/officeDocument/2006/relationships" xmlns:p="http://schemas.openxmlformats.org/presentationml/2006/main">
+  <p:cSld name="Slide 7">
     <p:bg>
       <p:bgPr>
         <a:solidFill>
@@ -5870,786 +6732,6 @@
               <a:t>A. J. Liebling, The New Yorker, 1960</a:t>
             </a:r>
             <a:endParaRPr lang="en-US" sz="1400" dirty="0"/>
-          </a:p>
-        </p:txBody>
-      </p:sp>
-    </p:spTree>
-  </p:cSld>
-  <p:clrMapOvr>
-    <a:masterClrMapping/>
-  </p:clrMapOvr>
-</p:sld>
-</file>
-
-<file path=ppt/slides/slide7.xml><?xml version="1.0" encoding="utf-8"?>
-<p:sld xmlns:a="http://schemas.openxmlformats.org/drawingml/2006/main" xmlns:r="http://schemas.openxmlformats.org/officeDocument/2006/relationships" xmlns:p="http://schemas.openxmlformats.org/presentationml/2006/main">
-  <p:cSld name="Slide 7">
-    <p:bg>
-      <p:bgPr>
-        <a:solidFill>
-          <a:srgbClr val="FAF8F1"/>
-        </a:solidFill>
-      </p:bgPr>
-    </p:bg>
-    <p:spTree>
-      <p:nvGrpSpPr>
-        <p:cNvPr id="1" name=""/>
-        <p:cNvGrpSpPr/>
-        <p:nvPr/>
-      </p:nvGrpSpPr>
-      <p:grpSpPr>
-        <a:xfrm>
-          <a:off x="0" y="0"/>
-          <a:ext cx="0" cy="0"/>
-          <a:chOff x="0" y="0"/>
-          <a:chExt cx="0" cy="0"/>
-        </a:xfrm>
-      </p:grpSpPr>
-      <p:sp>
-        <p:nvSpPr>
-          <p:cNvPr id="2" name="Text 0"/>
-          <p:cNvSpPr/>
-          <p:nvPr/>
-        </p:nvSpPr>
-        <p:spPr>
-          <a:xfrm>
-            <a:off x="822960" y="457200"/>
-            <a:ext cx="6400800" cy="274320"/>
-          </a:xfrm>
-          <a:prstGeom prst="rect">
-            <a:avLst/>
-          </a:prstGeom>
-          <a:noFill/>
-          <a:ln/>
-        </p:spPr>
-        <p:txBody>
-          <a:bodyPr wrap="square" lIns="0" tIns="0" rIns="0" bIns="0" rtlCol="0" anchor="ctr"/>
-          <a:lstStyle/>
-          <a:p>
-            <a:pPr algn="l" indent="0" marL="0">
-              <a:buNone/>
-            </a:pPr>
-            <a:r>
-              <a:rPr lang="en-US" sz="1100" b="1" spc="250" kern="0" dirty="0">
-                <a:solidFill>
-                  <a:srgbClr val="4A6B5D"/>
-                </a:solidFill>
-                <a:latin typeface="Arial" pitchFamily="34" charset="0"/>
-                <a:ea typeface="Arial" pitchFamily="34" charset="-122"/>
-                <a:cs typeface="Arial" pitchFamily="34" charset="-120"/>
-              </a:rPr>
-              <a:t>TRACE ONE VISIBLE DECISION</a:t>
-            </a:r>
-            <a:endParaRPr lang="en-US" sz="1100" dirty="0"/>
-          </a:p>
-        </p:txBody>
-      </p:sp>
-      <p:sp>
-        <p:nvSpPr>
-          <p:cNvPr id="3" name="Text 1"/>
-          <p:cNvSpPr/>
-          <p:nvPr/>
-        </p:nvSpPr>
-        <p:spPr>
-          <a:xfrm>
-            <a:off x="6793992" y="457200"/>
-            <a:ext cx="4572000" cy="274320"/>
-          </a:xfrm>
-          <a:prstGeom prst="rect">
-            <a:avLst/>
-          </a:prstGeom>
-          <a:noFill/>
-          <a:ln/>
-        </p:spPr>
-        <p:txBody>
-          <a:bodyPr wrap="square" lIns="0" tIns="0" rIns="0" bIns="0" rtlCol="0" anchor="ctr"/>
-          <a:lstStyle/>
-          <a:p>
-            <a:pPr algn="r" indent="0" marL="0">
-              <a:buNone/>
-            </a:pPr>
-            <a:r>
-              <a:rPr lang="en-US" sz="1100" b="1" spc="250" kern="0" dirty="0">
-                <a:solidFill>
-                  <a:srgbClr val="7A7F72"/>
-                </a:solidFill>
-                <a:latin typeface="Arial" pitchFamily="34" charset="0"/>
-                <a:ea typeface="Arial" pitchFamily="34" charset="-122"/>
-                <a:cs typeface="Arial" pitchFamily="34" charset="-120"/>
-              </a:rPr>
-              <a:t>BACK TO WHO PAYS FOR IT</a:t>
-            </a:r>
-            <a:endParaRPr lang="en-US" sz="1100" dirty="0"/>
-          </a:p>
-        </p:txBody>
-      </p:sp>
-      <p:sp>
-        <p:nvSpPr>
-          <p:cNvPr id="4" name="Shape 2"/>
-          <p:cNvSpPr/>
-          <p:nvPr/>
-        </p:nvSpPr>
-        <p:spPr>
-          <a:xfrm>
-            <a:off x="822960" y="786384"/>
-            <a:ext cx="10543032" cy="0"/>
-          </a:xfrm>
-          <a:prstGeom prst="line">
-            <a:avLst/>
-          </a:prstGeom>
-          <a:noFill/>
-          <a:ln w="9525">
-            <a:solidFill>
-              <a:srgbClr val="D9D4C4"/>
-            </a:solidFill>
-            <a:prstDash val="solid"/>
-          </a:ln>
-        </p:spPr>
-      </p:sp>
-      <p:sp>
-        <p:nvSpPr>
-          <p:cNvPr id="5" name="Text 3"/>
-          <p:cNvSpPr/>
-          <p:nvPr/>
-        </p:nvSpPr>
-        <p:spPr>
-          <a:xfrm>
-            <a:off x="822960" y="932688"/>
-            <a:ext cx="10543032" cy="640080"/>
-          </a:xfrm>
-          <a:prstGeom prst="rect">
-            <a:avLst/>
-          </a:prstGeom>
-          <a:noFill/>
-          <a:ln/>
-        </p:spPr>
-        <p:txBody>
-          <a:bodyPr wrap="square" lIns="0" tIns="0" rIns="0" bIns="0" rtlCol="0" anchor="ctr"/>
-          <a:lstStyle/>
-          <a:p>
-            <a:pPr indent="0" marL="0">
-              <a:buNone/>
-            </a:pPr>
-            <a:r>
-              <a:rPr lang="en-US" sz="3200" dirty="0">
-                <a:solidFill>
-                  <a:srgbClr val="24313F"/>
-                </a:solidFill>
-                <a:latin typeface="Georgia" pitchFamily="34" charset="0"/>
-                <a:ea typeface="Georgia" pitchFamily="34" charset="-122"/>
-                <a:cs typeface="Georgia" pitchFamily="34" charset="-120"/>
-              </a:rPr>
-              <a:t>The chain</a:t>
-            </a:r>
-            <a:endParaRPr lang="en-US" sz="3200" dirty="0"/>
-          </a:p>
-        </p:txBody>
-      </p:sp>
-      <p:sp>
-        <p:nvSpPr>
-          <p:cNvPr id="6" name="Shape 4"/>
-          <p:cNvSpPr/>
-          <p:nvPr/>
-        </p:nvSpPr>
-        <p:spPr>
-          <a:xfrm>
-            <a:off x="822960" y="2194560"/>
-            <a:ext cx="3200400" cy="2103120"/>
-          </a:xfrm>
-          <a:prstGeom prst="rect">
-            <a:avLst/>
-          </a:prstGeom>
-          <a:solidFill>
-            <a:srgbClr val="FAF8F1"/>
-          </a:solidFill>
-          <a:ln w="12700">
-            <a:solidFill>
-              <a:srgbClr val="8AA394"/>
-            </a:solidFill>
-            <a:prstDash val="solid"/>
-          </a:ln>
-        </p:spPr>
-      </p:sp>
-      <p:sp>
-        <p:nvSpPr>
-          <p:cNvPr id="7" name="Text 5"/>
-          <p:cNvSpPr/>
-          <p:nvPr/>
-        </p:nvSpPr>
-        <p:spPr>
-          <a:xfrm>
-            <a:off x="1051560" y="2423160"/>
-            <a:ext cx="2743200" cy="457200"/>
-          </a:xfrm>
-          <a:prstGeom prst="rect">
-            <a:avLst/>
-          </a:prstGeom>
-          <a:noFill/>
-          <a:ln/>
-        </p:spPr>
-        <p:txBody>
-          <a:bodyPr wrap="square" lIns="0" tIns="0" rIns="0" bIns="0" rtlCol="0" anchor="ctr"/>
-          <a:lstStyle/>
-          <a:p>
-            <a:pPr indent="0" marL="0">
-              <a:buNone/>
-            </a:pPr>
-            <a:r>
-              <a:rPr lang="en-US" sz="2100" dirty="0">
-                <a:solidFill>
-                  <a:srgbClr val="4A6B5D"/>
-                </a:solidFill>
-                <a:latin typeface="Georgia" pitchFamily="34" charset="0"/>
-                <a:ea typeface="Georgia" pitchFamily="34" charset="-122"/>
-                <a:cs typeface="Georgia" pitchFamily="34" charset="-120"/>
-              </a:rPr>
-              <a:t>The decision</a:t>
-            </a:r>
-            <a:endParaRPr lang="en-US" sz="2100" dirty="0"/>
-          </a:p>
-        </p:txBody>
-      </p:sp>
-      <p:sp>
-        <p:nvSpPr>
-          <p:cNvPr id="8" name="Shape 6"/>
-          <p:cNvSpPr/>
-          <p:nvPr/>
-        </p:nvSpPr>
-        <p:spPr>
-          <a:xfrm>
-            <a:off x="1051560" y="2971800"/>
-            <a:ext cx="822960" cy="0"/>
-          </a:xfrm>
-          <a:prstGeom prst="line">
-            <a:avLst/>
-          </a:prstGeom>
-          <a:noFill/>
-          <a:ln w="25400">
-            <a:solidFill>
-              <a:srgbClr val="8C3A38"/>
-            </a:solidFill>
-            <a:prstDash val="solid"/>
-          </a:ln>
-        </p:spPr>
-      </p:sp>
-      <p:sp>
-        <p:nvSpPr>
-          <p:cNvPr id="9" name="Text 7"/>
-          <p:cNvSpPr/>
-          <p:nvPr/>
-        </p:nvSpPr>
-        <p:spPr>
-          <a:xfrm>
-            <a:off x="1051560" y="3108960"/>
-            <a:ext cx="2743200" cy="1097280"/>
-          </a:xfrm>
-          <a:prstGeom prst="rect">
-            <a:avLst/>
-          </a:prstGeom>
-          <a:noFill/>
-          <a:ln/>
-        </p:spPr>
-        <p:txBody>
-          <a:bodyPr wrap="square" lIns="0" tIns="0" rIns="0" bIns="0" rtlCol="0" anchor="t"/>
-          <a:lstStyle/>
-          <a:p>
-            <a:pPr indent="0" marL="0">
-              <a:lnSpc>
-                <a:spcPts val="1900"/>
-              </a:lnSpc>
-              <a:buNone/>
-            </a:pPr>
-            <a:r>
-              <a:rPr lang="en-US" sz="1400" dirty="0">
-                <a:solidFill>
-                  <a:srgbClr val="24313F"/>
-                </a:solidFill>
-                <a:latin typeface="Georgia" pitchFamily="34" charset="0"/>
-                <a:ea typeface="Georgia" pitchFamily="34" charset="-122"/>
-                <a:cs typeface="Georgia" pitchFamily="34" charset="-120"/>
-              </a:rPr>
-              <a:t>the ad break, the family-friendly cut, the product in shot, the story not covered</a:t>
-            </a:r>
-            <a:endParaRPr lang="en-US" sz="1400" dirty="0"/>
-          </a:p>
-        </p:txBody>
-      </p:sp>
-      <p:sp>
-        <p:nvSpPr>
-          <p:cNvPr id="10" name="Shape 8"/>
-          <p:cNvSpPr/>
-          <p:nvPr/>
-        </p:nvSpPr>
-        <p:spPr>
-          <a:xfrm>
-            <a:off x="4494276" y="2194560"/>
-            <a:ext cx="3200400" cy="2103120"/>
-          </a:xfrm>
-          <a:prstGeom prst="rect">
-            <a:avLst/>
-          </a:prstGeom>
-          <a:solidFill>
-            <a:srgbClr val="FAF8F1"/>
-          </a:solidFill>
-          <a:ln w="12700">
-            <a:solidFill>
-              <a:srgbClr val="8AA394"/>
-            </a:solidFill>
-            <a:prstDash val="solid"/>
-          </a:ln>
-        </p:spPr>
-      </p:sp>
-      <p:sp>
-        <p:nvSpPr>
-          <p:cNvPr id="11" name="Text 9"/>
-          <p:cNvSpPr/>
-          <p:nvPr/>
-        </p:nvSpPr>
-        <p:spPr>
-          <a:xfrm>
-            <a:off x="4722876" y="2423160"/>
-            <a:ext cx="2743200" cy="457200"/>
-          </a:xfrm>
-          <a:prstGeom prst="rect">
-            <a:avLst/>
-          </a:prstGeom>
-          <a:noFill/>
-          <a:ln/>
-        </p:spPr>
-        <p:txBody>
-          <a:bodyPr wrap="square" lIns="0" tIns="0" rIns="0" bIns="0" rtlCol="0" anchor="ctr"/>
-          <a:lstStyle/>
-          <a:p>
-            <a:pPr indent="0" marL="0">
-              <a:buNone/>
-            </a:pPr>
-            <a:r>
-              <a:rPr lang="en-US" sz="2100" dirty="0">
-                <a:solidFill>
-                  <a:srgbClr val="4A6B5D"/>
-                </a:solidFill>
-                <a:latin typeface="Georgia" pitchFamily="34" charset="0"/>
-                <a:ea typeface="Georgia" pitchFamily="34" charset="-122"/>
-                <a:cs typeface="Georgia" pitchFamily="34" charset="-120"/>
-              </a:rPr>
-              <a:t>The incentive</a:t>
-            </a:r>
-            <a:endParaRPr lang="en-US" sz="2100" dirty="0"/>
-          </a:p>
-        </p:txBody>
-      </p:sp>
-      <p:sp>
-        <p:nvSpPr>
-          <p:cNvPr id="12" name="Shape 10"/>
-          <p:cNvSpPr/>
-          <p:nvPr/>
-        </p:nvSpPr>
-        <p:spPr>
-          <a:xfrm>
-            <a:off x="4722876" y="2971800"/>
-            <a:ext cx="822960" cy="0"/>
-          </a:xfrm>
-          <a:prstGeom prst="line">
-            <a:avLst/>
-          </a:prstGeom>
-          <a:noFill/>
-          <a:ln w="25400">
-            <a:solidFill>
-              <a:srgbClr val="8C3A38"/>
-            </a:solidFill>
-            <a:prstDash val="solid"/>
-          </a:ln>
-        </p:spPr>
-      </p:sp>
-      <p:sp>
-        <p:nvSpPr>
-          <p:cNvPr id="13" name="Text 11"/>
-          <p:cNvSpPr/>
-          <p:nvPr/>
-        </p:nvSpPr>
-        <p:spPr>
-          <a:xfrm>
-            <a:off x="4722876" y="3108960"/>
-            <a:ext cx="2743200" cy="1097280"/>
-          </a:xfrm>
-          <a:prstGeom prst="rect">
-            <a:avLst/>
-          </a:prstGeom>
-          <a:noFill/>
-          <a:ln/>
-        </p:spPr>
-        <p:txBody>
-          <a:bodyPr wrap="square" lIns="0" tIns="0" rIns="0" bIns="0" rtlCol="0" anchor="t"/>
-          <a:lstStyle/>
-          <a:p>
-            <a:pPr indent="0" marL="0">
-              <a:lnSpc>
-                <a:spcPts val="1900"/>
-              </a:lnSpc>
-              <a:buNone/>
-            </a:pPr>
-            <a:r>
-              <a:rPr lang="en-US" sz="1400" dirty="0">
-                <a:solidFill>
-                  <a:srgbClr val="24313F"/>
-                </a:solidFill>
-                <a:latin typeface="Georgia" pitchFamily="34" charset="0"/>
-                <a:ea typeface="Georgia" pitchFamily="34" charset="-122"/>
-                <a:cs typeface="Georgia" pitchFamily="34" charset="-120"/>
-              </a:rPr>
-              <a:t>what that choice protects or earns for the maker</a:t>
-            </a:r>
-            <a:endParaRPr lang="en-US" sz="1400" dirty="0"/>
-          </a:p>
-        </p:txBody>
-      </p:sp>
-      <p:sp>
-        <p:nvSpPr>
-          <p:cNvPr id="14" name="Text 12"/>
-          <p:cNvSpPr/>
-          <p:nvPr/>
-        </p:nvSpPr>
-        <p:spPr>
-          <a:xfrm>
-            <a:off x="4023360" y="2926080"/>
-            <a:ext cx="470916" cy="640080"/>
-          </a:xfrm>
-          <a:prstGeom prst="rect">
-            <a:avLst/>
-          </a:prstGeom>
-          <a:noFill/>
-          <a:ln/>
-        </p:spPr>
-        <p:txBody>
-          <a:bodyPr wrap="square" lIns="0" tIns="0" rIns="0" bIns="0" rtlCol="0" anchor="ctr"/>
-          <a:lstStyle/>
-          <a:p>
-            <a:pPr algn="ctr" indent="0" marL="0">
-              <a:buNone/>
-            </a:pPr>
-            <a:r>
-              <a:rPr lang="en-US" sz="3400" dirty="0">
-                <a:solidFill>
-                  <a:srgbClr val="A3C1AD"/>
-                </a:solidFill>
-                <a:latin typeface="Georgia" pitchFamily="34" charset="0"/>
-                <a:ea typeface="Georgia" pitchFamily="34" charset="-122"/>
-                <a:cs typeface="Georgia" pitchFamily="34" charset="-120"/>
-              </a:rPr>
-              <a:t>←</a:t>
-            </a:r>
-            <a:endParaRPr lang="en-US" sz="3400" dirty="0"/>
-          </a:p>
-        </p:txBody>
-      </p:sp>
-      <p:sp>
-        <p:nvSpPr>
-          <p:cNvPr id="15" name="Shape 13"/>
-          <p:cNvSpPr/>
-          <p:nvPr/>
-        </p:nvSpPr>
-        <p:spPr>
-          <a:xfrm>
-            <a:off x="8165592" y="2194560"/>
-            <a:ext cx="3200400" cy="2103120"/>
-          </a:xfrm>
-          <a:prstGeom prst="rect">
-            <a:avLst/>
-          </a:prstGeom>
-          <a:solidFill>
-            <a:srgbClr val="E8EFE7"/>
-          </a:solidFill>
-          <a:ln w="12700">
-            <a:solidFill>
-              <a:srgbClr val="8AA394"/>
-            </a:solidFill>
-            <a:prstDash val="solid"/>
-          </a:ln>
-        </p:spPr>
-      </p:sp>
-      <p:sp>
-        <p:nvSpPr>
-          <p:cNvPr id="16" name="Text 14"/>
-          <p:cNvSpPr/>
-          <p:nvPr/>
-        </p:nvSpPr>
-        <p:spPr>
-          <a:xfrm>
-            <a:off x="8394192" y="2423160"/>
-            <a:ext cx="2743200" cy="457200"/>
-          </a:xfrm>
-          <a:prstGeom prst="rect">
-            <a:avLst/>
-          </a:prstGeom>
-          <a:noFill/>
-          <a:ln/>
-        </p:spPr>
-        <p:txBody>
-          <a:bodyPr wrap="square" lIns="0" tIns="0" rIns="0" bIns="0" rtlCol="0" anchor="ctr"/>
-          <a:lstStyle/>
-          <a:p>
-            <a:pPr indent="0" marL="0">
-              <a:buNone/>
-            </a:pPr>
-            <a:r>
-              <a:rPr lang="en-US" sz="2100" dirty="0">
-                <a:solidFill>
-                  <a:srgbClr val="4A6B5D"/>
-                </a:solidFill>
-                <a:latin typeface="Georgia" pitchFamily="34" charset="0"/>
-                <a:ea typeface="Georgia" pitchFamily="34" charset="-122"/>
-                <a:cs typeface="Georgia" pitchFamily="34" charset="-120"/>
-              </a:rPr>
-              <a:t>Who pays</a:t>
-            </a:r>
-            <a:endParaRPr lang="en-US" sz="2100" dirty="0"/>
-          </a:p>
-        </p:txBody>
-      </p:sp>
-      <p:sp>
-        <p:nvSpPr>
-          <p:cNvPr id="17" name="Shape 15"/>
-          <p:cNvSpPr/>
-          <p:nvPr/>
-        </p:nvSpPr>
-        <p:spPr>
-          <a:xfrm>
-            <a:off x="8394192" y="2971800"/>
-            <a:ext cx="822960" cy="0"/>
-          </a:xfrm>
-          <a:prstGeom prst="line">
-            <a:avLst/>
-          </a:prstGeom>
-          <a:noFill/>
-          <a:ln w="25400">
-            <a:solidFill>
-              <a:srgbClr val="8C3A38"/>
-            </a:solidFill>
-            <a:prstDash val="solid"/>
-          </a:ln>
-        </p:spPr>
-      </p:sp>
-      <p:sp>
-        <p:nvSpPr>
-          <p:cNvPr id="18" name="Text 16"/>
-          <p:cNvSpPr/>
-          <p:nvPr/>
-        </p:nvSpPr>
-        <p:spPr>
-          <a:xfrm>
-            <a:off x="8394192" y="3108960"/>
-            <a:ext cx="2743200" cy="1097280"/>
-          </a:xfrm>
-          <a:prstGeom prst="rect">
-            <a:avLst/>
-          </a:prstGeom>
-          <a:noFill/>
-          <a:ln/>
-        </p:spPr>
-        <p:txBody>
-          <a:bodyPr wrap="square" lIns="0" tIns="0" rIns="0" bIns="0" rtlCol="0" anchor="t"/>
-          <a:lstStyle/>
-          <a:p>
-            <a:pPr indent="0" marL="0">
-              <a:lnSpc>
-                <a:spcPts val="1900"/>
-              </a:lnSpc>
-              <a:buNone/>
-            </a:pPr>
-            <a:r>
-              <a:rPr lang="en-US" sz="1400" dirty="0">
-                <a:solidFill>
-                  <a:srgbClr val="24313F"/>
-                </a:solidFill>
-                <a:latin typeface="Georgia" pitchFamily="34" charset="0"/>
-                <a:ea typeface="Georgia" pitchFamily="34" charset="-122"/>
-                <a:cs typeface="Georgia" pitchFamily="34" charset="-120"/>
-              </a:rPr>
-              <a:t>the advertiser, the subscriber, the state, the platform</a:t>
-            </a:r>
-            <a:endParaRPr lang="en-US" sz="1400" dirty="0"/>
-          </a:p>
-        </p:txBody>
-      </p:sp>
-      <p:sp>
-        <p:nvSpPr>
-          <p:cNvPr id="19" name="Text 17"/>
-          <p:cNvSpPr/>
-          <p:nvPr/>
-        </p:nvSpPr>
-        <p:spPr>
-          <a:xfrm>
-            <a:off x="7694676" y="2926080"/>
-            <a:ext cx="470916" cy="640080"/>
-          </a:xfrm>
-          <a:prstGeom prst="rect">
-            <a:avLst/>
-          </a:prstGeom>
-          <a:noFill/>
-          <a:ln/>
-        </p:spPr>
-        <p:txBody>
-          <a:bodyPr wrap="square" lIns="0" tIns="0" rIns="0" bIns="0" rtlCol="0" anchor="ctr"/>
-          <a:lstStyle/>
-          <a:p>
-            <a:pPr algn="ctr" indent="0" marL="0">
-              <a:buNone/>
-            </a:pPr>
-            <a:r>
-              <a:rPr lang="en-US" sz="3400" dirty="0">
-                <a:solidFill>
-                  <a:srgbClr val="A3C1AD"/>
-                </a:solidFill>
-                <a:latin typeface="Georgia" pitchFamily="34" charset="0"/>
-                <a:ea typeface="Georgia" pitchFamily="34" charset="-122"/>
-                <a:cs typeface="Georgia" pitchFamily="34" charset="-120"/>
-              </a:rPr>
-              <a:t>←</a:t>
-            </a:r>
-            <a:endParaRPr lang="en-US" sz="3400" dirty="0"/>
-          </a:p>
-        </p:txBody>
-      </p:sp>
-      <p:sp>
-        <p:nvSpPr>
-          <p:cNvPr id="20" name="Text 18"/>
-          <p:cNvSpPr/>
-          <p:nvPr/>
-        </p:nvSpPr>
-        <p:spPr>
-          <a:xfrm>
-            <a:off x="822960" y="4846320"/>
-            <a:ext cx="10543032" cy="685800"/>
-          </a:xfrm>
-          <a:prstGeom prst="rect">
-            <a:avLst/>
-          </a:prstGeom>
-          <a:noFill/>
-          <a:ln/>
-        </p:spPr>
-        <p:txBody>
-          <a:bodyPr wrap="square" lIns="0" tIns="0" rIns="0" bIns="0" rtlCol="0" anchor="t"/>
-          <a:lstStyle/>
-          <a:p>
-            <a:pPr indent="0" marL="0">
-              <a:lnSpc>
-                <a:spcPts val="1700"/>
-              </a:lnSpc>
-              <a:buNone/>
-            </a:pPr>
-            <a:r>
-              <a:rPr lang="en-US" sz="1250" i="1" dirty="0">
-                <a:solidFill>
-                  <a:srgbClr val="7A7F72"/>
-                </a:solidFill>
-                <a:latin typeface="Arial" pitchFamily="34" charset="0"/>
-                <a:ea typeface="Arial" pitchFamily="34" charset="-122"/>
-                <a:cs typeface="Arial" pitchFamily="34" charset="-120"/>
-              </a:rPr>
-              <a:t>Read it right to left: every decision on screen traces back to who pays. Traced against the clock, a point per link that survives challenge. Rehearse the chain on your case-study institution; that is the exam answer.</a:t>
-            </a:r>
-            <a:endParaRPr lang="en-US" sz="1250" dirty="0"/>
-          </a:p>
-        </p:txBody>
-      </p:sp>
-      <p:sp>
-        <p:nvSpPr>
-          <p:cNvPr id="21" name="Shape 19"/>
-          <p:cNvSpPr/>
-          <p:nvPr/>
-        </p:nvSpPr>
-        <p:spPr>
-          <a:xfrm>
-            <a:off x="822960" y="6382512"/>
-            <a:ext cx="10543032" cy="0"/>
-          </a:xfrm>
-          <a:prstGeom prst="line">
-            <a:avLst/>
-          </a:prstGeom>
-          <a:noFill/>
-          <a:ln w="9525">
-            <a:solidFill>
-              <a:srgbClr val="D9D4C4"/>
-            </a:solidFill>
-            <a:prstDash val="solid"/>
-          </a:ln>
-        </p:spPr>
-      </p:sp>
-      <p:sp>
-        <p:nvSpPr>
-          <p:cNvPr id="22" name="Text 20"/>
-          <p:cNvSpPr/>
-          <p:nvPr/>
-        </p:nvSpPr>
-        <p:spPr>
-          <a:xfrm>
-            <a:off x="822960" y="6419088"/>
-            <a:ext cx="7315200" cy="274320"/>
-          </a:xfrm>
-          <a:prstGeom prst="rect">
-            <a:avLst/>
-          </a:prstGeom>
-          <a:noFill/>
-          <a:ln/>
-        </p:spPr>
-        <p:txBody>
-          <a:bodyPr wrap="square" lIns="0" tIns="0" rIns="0" bIns="0" rtlCol="0" anchor="ctr"/>
-          <a:lstStyle/>
-          <a:p>
-            <a:pPr indent="0" marL="0">
-              <a:buNone/>
-            </a:pPr>
-            <a:r>
-              <a:rPr lang="en-US" sz="900" spc="150" kern="0" dirty="0">
-                <a:solidFill>
-                  <a:srgbClr val="7A7F72"/>
-                </a:solidFill>
-                <a:latin typeface="Arial" pitchFamily="34" charset="0"/>
-                <a:ea typeface="Arial" pitchFamily="34" charset="-122"/>
-                <a:cs typeface="Arial" pitchFamily="34" charset="-120"/>
-              </a:rPr>
-              <a:t>MEDIA STUDIES 9607 · SEMESTER I</a:t>
-            </a:r>
-            <a:endParaRPr lang="en-US" sz="900" dirty="0"/>
-          </a:p>
-        </p:txBody>
-      </p:sp>
-      <p:sp>
-        <p:nvSpPr>
-          <p:cNvPr id="23" name="Text 21"/>
-          <p:cNvSpPr/>
-          <p:nvPr/>
-        </p:nvSpPr>
-        <p:spPr>
-          <a:xfrm>
-            <a:off x="10268712" y="6355080"/>
-            <a:ext cx="1097280" cy="365760"/>
-          </a:xfrm>
-          <a:prstGeom prst="rect">
-            <a:avLst/>
-          </a:prstGeom>
-          <a:noFill/>
-          <a:ln/>
-        </p:spPr>
-        <p:txBody>
-          <a:bodyPr wrap="square" lIns="0" tIns="0" rIns="0" bIns="0" rtlCol="0" anchor="ctr"/>
-          <a:lstStyle/>
-          <a:p>
-            <a:pPr algn="r" indent="0" marL="0">
-              <a:buNone/>
-            </a:pPr>
-            <a:r>
-              <a:rPr lang="en-US" sz="1600" dirty="0">
-                <a:solidFill>
-                  <a:srgbClr val="A3C1AD"/>
-                </a:solidFill>
-                <a:latin typeface="Georgia" pitchFamily="34" charset="0"/>
-                <a:ea typeface="Georgia" pitchFamily="34" charset="-122"/>
-                <a:cs typeface="Georgia" pitchFamily="34" charset="-120"/>
-              </a:rPr>
-              <a:t>03</a:t>
-            </a:r>
-            <a:endParaRPr lang="en-US" sz="1600" dirty="0"/>
           </a:p>
         </p:txBody>
       </p:sp>
@@ -6685,105 +6767,79 @@
           <a:chExt cx="0" cy="0"/>
         </a:xfrm>
       </p:grpSpPr>
-      <p:pic>
-        <p:nvPicPr>
-          <p:cNvPr id="2" name="Image 0" descr="/Users/dogan/Documents/Vaults/Courses/wiki/classes/media-studies/decks/_build/img/crops/underwood-fifth-ave_a664.jpg">    </p:cNvPr>
-          <p:cNvPicPr>
-            <a:picLocks noChangeAspect="1"/>
-          </p:cNvPicPr>
-          <p:nvPr/>
-        </p:nvPicPr>
-        <p:blipFill>
-          <a:blip r:embed="rId1"/>
-          <a:stretch>
-            <a:fillRect/>
-          </a:stretch>
-        </p:blipFill>
-        <p:spPr>
-          <a:xfrm>
-            <a:off x="7635240" y="0"/>
-            <a:ext cx="4553712" cy="6858000"/>
-          </a:xfrm>
-          <a:prstGeom prst="rect">
-            <a:avLst/>
-          </a:prstGeom>
-        </p:spPr>
-      </p:pic>
-      <p:sp>
-        <p:nvSpPr>
-          <p:cNvPr id="3" name="Text 0"/>
-          <p:cNvSpPr/>
-          <p:nvPr/>
-        </p:nvSpPr>
-        <p:spPr>
-          <a:xfrm>
-            <a:off x="7818120" y="6126480"/>
-            <a:ext cx="4187952" cy="365760"/>
-          </a:xfrm>
-          <a:prstGeom prst="rect">
-            <a:avLst/>
-          </a:prstGeom>
-          <a:solidFill>
-            <a:srgbClr val="FAF8F1"/>
-          </a:solidFill>
-          <a:ln/>
-        </p:spPr>
-        <p:txBody>
-          <a:bodyPr wrap="square" lIns="0" tIns="0" rIns="0" bIns="0" rtlCol="0" anchor="ctr"/>
-          <a:lstStyle/>
-          <a:p>
-            <a:pPr indent="0" marL="0">
-              <a:buNone/>
-            </a:pPr>
-            <a:r>
-              <a:rPr lang="en-US" sz="950" spc="50" kern="0" dirty="0">
-                <a:solidFill>
-                  <a:srgbClr val="7A7F72"/>
+      <p:sp>
+        <p:nvSpPr>
+          <p:cNvPr id="2" name="Text 0"/>
+          <p:cNvSpPr/>
+          <p:nvPr/>
+        </p:nvSpPr>
+        <p:spPr>
+          <a:xfrm>
+            <a:off x="822960" y="457200"/>
+            <a:ext cx="6400800" cy="274320"/>
+          </a:xfrm>
+          <a:prstGeom prst="rect">
+            <a:avLst/>
+          </a:prstGeom>
+          <a:noFill/>
+          <a:ln/>
+        </p:spPr>
+        <p:txBody>
+          <a:bodyPr wrap="square" lIns="0" tIns="0" rIns="0" bIns="0" rtlCol="0" anchor="ctr"/>
+          <a:lstStyle/>
+          <a:p>
+            <a:pPr algn="l" indent="0" marL="0">
+              <a:buNone/>
+            </a:pPr>
+            <a:r>
+              <a:rPr lang="en-US" sz="1100" b="1" spc="250" kern="0" dirty="0">
+                <a:solidFill>
+                  <a:srgbClr val="4A6B5D"/>
                 </a:solidFill>
                 <a:latin typeface="Arial" pitchFamily="34" charset="0"/>
                 <a:ea typeface="Arial" pitchFamily="34" charset="-122"/>
                 <a:cs typeface="Arial" pitchFamily="34" charset="-120"/>
               </a:rPr>
-              <a:t>Underwood &amp; Underwood, Above Fifth Avenue, Looking North</a:t>
-            </a:r>
-            <a:endParaRPr lang="en-US" sz="950" dirty="0"/>
-          </a:p>
-        </p:txBody>
-      </p:sp>
-      <p:sp>
-        <p:nvSpPr>
-          <p:cNvPr id="4" name="Text 1"/>
-          <p:cNvSpPr/>
-          <p:nvPr/>
-        </p:nvSpPr>
-        <p:spPr>
-          <a:xfrm>
-            <a:off x="822960" y="685800"/>
-            <a:ext cx="5486400" cy="274320"/>
-          </a:xfrm>
-          <a:prstGeom prst="rect">
-            <a:avLst/>
-          </a:prstGeom>
-          <a:noFill/>
-          <a:ln/>
-        </p:spPr>
-        <p:txBody>
-          <a:bodyPr wrap="square" lIns="0" tIns="0" rIns="0" bIns="0" rtlCol="0" anchor="ctr"/>
-          <a:lstStyle/>
-          <a:p>
-            <a:pPr algn="l" indent="0" marL="0">
+              <a:t>TRACE ONE VISIBLE DECISION</a:t>
+            </a:r>
+            <a:endParaRPr lang="en-US" sz="1100" dirty="0"/>
+          </a:p>
+        </p:txBody>
+      </p:sp>
+      <p:sp>
+        <p:nvSpPr>
+          <p:cNvPr id="3" name="Text 1"/>
+          <p:cNvSpPr/>
+          <p:nvPr/>
+        </p:nvSpPr>
+        <p:spPr>
+          <a:xfrm>
+            <a:off x="6793992" y="457200"/>
+            <a:ext cx="4572000" cy="274320"/>
+          </a:xfrm>
+          <a:prstGeom prst="rect">
+            <a:avLst/>
+          </a:prstGeom>
+          <a:noFill/>
+          <a:ln/>
+        </p:spPr>
+        <p:txBody>
+          <a:bodyPr wrap="square" lIns="0" tIns="0" rIns="0" bIns="0" rtlCol="0" anchor="ctr"/>
+          <a:lstStyle/>
+          <a:p>
+            <a:pPr algn="r" indent="0" marL="0">
               <a:buNone/>
             </a:pPr>
             <a:r>
               <a:rPr lang="en-US" sz="1100" b="1" spc="250" kern="0" dirty="0">
                 <a:solidFill>
-                  <a:srgbClr val="4A6B5D"/>
+                  <a:srgbClr val="7A7F72"/>
                 </a:solidFill>
                 <a:latin typeface="Arial" pitchFamily="34" charset="0"/>
                 <a:ea typeface="Arial" pitchFamily="34" charset="-122"/>
                 <a:cs typeface="Arial" pitchFamily="34" charset="-120"/>
               </a:rPr>
-              <a:t>THE VIEW FROM ABOVE</a:t>
+              <a:t>BACK TO WHO PAYS FOR IT</a:t>
             </a:r>
             <a:endParaRPr lang="en-US" sz="1100" dirty="0"/>
           </a:p>
@@ -6791,14 +6847,14 @@
       </p:sp>
       <p:sp>
         <p:nvSpPr>
-          <p:cNvPr id="5" name="Shape 2"/>
-          <p:cNvSpPr/>
-          <p:nvPr/>
-        </p:nvSpPr>
-        <p:spPr>
-          <a:xfrm>
-            <a:off x="822960" y="1051560"/>
-            <a:ext cx="6492240" cy="0"/>
+          <p:cNvPr id="4" name="Shape 2"/>
+          <p:cNvSpPr/>
+          <p:nvPr/>
+        </p:nvSpPr>
+        <p:spPr>
+          <a:xfrm>
+            <a:off x="822960" y="786384"/>
+            <a:ext cx="10543032" cy="0"/>
           </a:xfrm>
           <a:prstGeom prst="line">
             <a:avLst/>
@@ -6814,33 +6870,30 @@
       </p:sp>
       <p:sp>
         <p:nvSpPr>
-          <p:cNvPr id="6" name="Text 3"/>
-          <p:cNvSpPr/>
-          <p:nvPr/>
-        </p:nvSpPr>
-        <p:spPr>
-          <a:xfrm>
-            <a:off x="822960" y="1234440"/>
-            <a:ext cx="6492240" cy="1371600"/>
-          </a:xfrm>
-          <a:prstGeom prst="rect">
-            <a:avLst/>
-          </a:prstGeom>
-          <a:noFill/>
-          <a:ln/>
-        </p:spPr>
-        <p:txBody>
-          <a:bodyPr wrap="square" lIns="0" tIns="0" rIns="0" bIns="0" rtlCol="0" anchor="t"/>
+          <p:cNvPr id="5" name="Text 3"/>
+          <p:cNvSpPr/>
+          <p:nvPr/>
+        </p:nvSpPr>
+        <p:spPr>
+          <a:xfrm>
+            <a:off x="822960" y="932688"/>
+            <a:ext cx="10543032" cy="640080"/>
+          </a:xfrm>
+          <a:prstGeom prst="rect">
+            <a:avLst/>
+          </a:prstGeom>
+          <a:noFill/>
+          <a:ln/>
+        </p:spPr>
+        <p:txBody>
+          <a:bodyPr wrap="square" lIns="0" tIns="0" rIns="0" bIns="0" rtlCol="0" anchor="ctr"/>
           <a:lstStyle/>
           <a:p>
             <a:pPr indent="0" marL="0">
-              <a:lnSpc>
-                <a:spcPts val="4200"/>
-              </a:lnSpc>
-              <a:buNone/>
-            </a:pPr>
-            <a:r>
-              <a:rPr lang="en-US" sz="4000" dirty="0">
+              <a:buNone/>
+            </a:pPr>
+            <a:r>
+              <a:rPr lang="en-US" sz="3200" dirty="0">
                 <a:solidFill>
                   <a:srgbClr val="24313F"/>
                 </a:solidFill>
@@ -6848,42 +6901,109 @@
                 <a:ea typeface="Georgia" pitchFamily="34" charset="-122"/>
                 <a:cs typeface="Georgia" pitchFamily="34" charset="-120"/>
               </a:rPr>
-              <a:t>Who owns the</a:t>
-            </a:r>
-            <a:endParaRPr lang="en-US" sz="4000" dirty="0"/>
-          </a:p>
+              <a:t>The chain</a:t>
+            </a:r>
+            <a:endParaRPr lang="en-US" sz="3200" dirty="0"/>
+          </a:p>
+        </p:txBody>
+      </p:sp>
+      <p:sp>
+        <p:nvSpPr>
+          <p:cNvPr id="6" name="Shape 4"/>
+          <p:cNvSpPr/>
+          <p:nvPr/>
+        </p:nvSpPr>
+        <p:spPr>
+          <a:xfrm>
+            <a:off x="822960" y="2194560"/>
+            <a:ext cx="3200400" cy="2103120"/>
+          </a:xfrm>
+          <a:prstGeom prst="rect">
+            <a:avLst/>
+          </a:prstGeom>
+          <a:solidFill>
+            <a:srgbClr val="FAF8F1"/>
+          </a:solidFill>
+          <a:ln w="12700">
+            <a:solidFill>
+              <a:srgbClr val="8AA394"/>
+            </a:solidFill>
+            <a:prstDash val="solid"/>
+          </a:ln>
+        </p:spPr>
+      </p:sp>
+      <p:sp>
+        <p:nvSpPr>
+          <p:cNvPr id="7" name="Text 5"/>
+          <p:cNvSpPr/>
+          <p:nvPr/>
+        </p:nvSpPr>
+        <p:spPr>
+          <a:xfrm>
+            <a:off x="1051560" y="2423160"/>
+            <a:ext cx="2743200" cy="457200"/>
+          </a:xfrm>
+          <a:prstGeom prst="rect">
+            <a:avLst/>
+          </a:prstGeom>
+          <a:noFill/>
+          <a:ln/>
+        </p:spPr>
+        <p:txBody>
+          <a:bodyPr wrap="square" lIns="0" tIns="0" rIns="0" bIns="0" rtlCol="0" anchor="ctr"/>
+          <a:lstStyle/>
           <a:p>
             <a:pPr indent="0" marL="0">
-              <a:lnSpc>
-                <a:spcPts val="4200"/>
-              </a:lnSpc>
-              <a:buNone/>
-            </a:pPr>
-            <a:r>
-              <a:rPr lang="en-US" sz="4000" dirty="0">
-                <a:solidFill>
-                  <a:srgbClr val="24313F"/>
+              <a:buNone/>
+            </a:pPr>
+            <a:r>
+              <a:rPr lang="en-US" sz="2100" dirty="0">
+                <a:solidFill>
+                  <a:srgbClr val="4A6B5D"/>
                 </a:solidFill>
                 <a:latin typeface="Georgia" pitchFamily="34" charset="0"/>
                 <a:ea typeface="Georgia" pitchFamily="34" charset="-122"/>
                 <a:cs typeface="Georgia" pitchFamily="34" charset="-120"/>
               </a:rPr>
-              <a:t>vantage point</a:t>
-            </a:r>
-            <a:endParaRPr lang="en-US" sz="4000" dirty="0"/>
-          </a:p>
-        </p:txBody>
-      </p:sp>
-      <p:sp>
-        <p:nvSpPr>
-          <p:cNvPr id="7" name="Text 4"/>
-          <p:cNvSpPr/>
-          <p:nvPr/>
-        </p:nvSpPr>
-        <p:spPr>
-          <a:xfrm>
-            <a:off x="822960" y="2743200"/>
-            <a:ext cx="6583680" cy="2743200"/>
+              <a:t>The decision</a:t>
+            </a:r>
+            <a:endParaRPr lang="en-US" sz="2100" dirty="0"/>
+          </a:p>
+        </p:txBody>
+      </p:sp>
+      <p:sp>
+        <p:nvSpPr>
+          <p:cNvPr id="8" name="Shape 6"/>
+          <p:cNvSpPr/>
+          <p:nvPr/>
+        </p:nvSpPr>
+        <p:spPr>
+          <a:xfrm>
+            <a:off x="1051560" y="2971800"/>
+            <a:ext cx="822960" cy="0"/>
+          </a:xfrm>
+          <a:prstGeom prst="line">
+            <a:avLst/>
+          </a:prstGeom>
+          <a:noFill/>
+          <a:ln w="25400">
+            <a:solidFill>
+              <a:srgbClr val="8C3A38"/>
+            </a:solidFill>
+            <a:prstDash val="solid"/>
+          </a:ln>
+        </p:spPr>
+      </p:sp>
+      <p:sp>
+        <p:nvSpPr>
+          <p:cNvPr id="9" name="Text 7"/>
+          <p:cNvSpPr/>
+          <p:nvPr/>
+        </p:nvSpPr>
+        <p:spPr>
+          <a:xfrm>
+            <a:off x="1051560" y="3108960"/>
+            <a:ext cx="2743200" cy="1097280"/>
           </a:xfrm>
           <a:prstGeom prst="rect">
             <a:avLst/>
@@ -6897,12 +7017,12 @@
           <a:p>
             <a:pPr indent="0" marL="0">
               <a:lnSpc>
-                <a:spcPts val="2500"/>
+                <a:spcPts val="1900"/>
               </a:lnSpc>
               <a:buNone/>
             </a:pPr>
             <a:r>
-              <a:rPr lang="en-US" sz="1750" dirty="0">
+              <a:rPr lang="en-US" sz="1400" dirty="0">
                 <a:solidFill>
                   <a:srgbClr val="24313F"/>
                 </a:solidFill>
@@ -6910,9 +7030,488 @@
                 <a:ea typeface="Georgia" pitchFamily="34" charset="-122"/>
                 <a:cs typeface="Georgia" pitchFamily="34" charset="-120"/>
               </a:rPr>
-              <a:t>The camera operator on the parapet chooses the frame the city is seen through. Institutions own the vantage point: the platform, the schedule, the budget, the greenlight. What reaches you was chosen by someone standing where you cannot.</a:t>
-            </a:r>
-            <a:endParaRPr lang="en-US" sz="1750" dirty="0"/>
+              <a:t>the ad break, the family-friendly cut, the product in shot, the story not covered</a:t>
+            </a:r>
+            <a:endParaRPr lang="en-US" sz="1400" dirty="0"/>
+          </a:p>
+        </p:txBody>
+      </p:sp>
+      <p:sp>
+        <p:nvSpPr>
+          <p:cNvPr id="10" name="Shape 8"/>
+          <p:cNvSpPr/>
+          <p:nvPr/>
+        </p:nvSpPr>
+        <p:spPr>
+          <a:xfrm>
+            <a:off x="4494276" y="2194560"/>
+            <a:ext cx="3200400" cy="2103120"/>
+          </a:xfrm>
+          <a:prstGeom prst="rect">
+            <a:avLst/>
+          </a:prstGeom>
+          <a:solidFill>
+            <a:srgbClr val="FAF8F1"/>
+          </a:solidFill>
+          <a:ln w="12700">
+            <a:solidFill>
+              <a:srgbClr val="8AA394"/>
+            </a:solidFill>
+            <a:prstDash val="solid"/>
+          </a:ln>
+        </p:spPr>
+      </p:sp>
+      <p:sp>
+        <p:nvSpPr>
+          <p:cNvPr id="11" name="Text 9"/>
+          <p:cNvSpPr/>
+          <p:nvPr/>
+        </p:nvSpPr>
+        <p:spPr>
+          <a:xfrm>
+            <a:off x="4722876" y="2423160"/>
+            <a:ext cx="2743200" cy="457200"/>
+          </a:xfrm>
+          <a:prstGeom prst="rect">
+            <a:avLst/>
+          </a:prstGeom>
+          <a:noFill/>
+          <a:ln/>
+        </p:spPr>
+        <p:txBody>
+          <a:bodyPr wrap="square" lIns="0" tIns="0" rIns="0" bIns="0" rtlCol="0" anchor="ctr"/>
+          <a:lstStyle/>
+          <a:p>
+            <a:pPr indent="0" marL="0">
+              <a:buNone/>
+            </a:pPr>
+            <a:r>
+              <a:rPr lang="en-US" sz="2100" dirty="0">
+                <a:solidFill>
+                  <a:srgbClr val="4A6B5D"/>
+                </a:solidFill>
+                <a:latin typeface="Georgia" pitchFamily="34" charset="0"/>
+                <a:ea typeface="Georgia" pitchFamily="34" charset="-122"/>
+                <a:cs typeface="Georgia" pitchFamily="34" charset="-120"/>
+              </a:rPr>
+              <a:t>The incentive</a:t>
+            </a:r>
+            <a:endParaRPr lang="en-US" sz="2100" dirty="0"/>
+          </a:p>
+        </p:txBody>
+      </p:sp>
+      <p:sp>
+        <p:nvSpPr>
+          <p:cNvPr id="12" name="Shape 10"/>
+          <p:cNvSpPr/>
+          <p:nvPr/>
+        </p:nvSpPr>
+        <p:spPr>
+          <a:xfrm>
+            <a:off x="4722876" y="2971800"/>
+            <a:ext cx="822960" cy="0"/>
+          </a:xfrm>
+          <a:prstGeom prst="line">
+            <a:avLst/>
+          </a:prstGeom>
+          <a:noFill/>
+          <a:ln w="25400">
+            <a:solidFill>
+              <a:srgbClr val="8C3A38"/>
+            </a:solidFill>
+            <a:prstDash val="solid"/>
+          </a:ln>
+        </p:spPr>
+      </p:sp>
+      <p:sp>
+        <p:nvSpPr>
+          <p:cNvPr id="13" name="Text 11"/>
+          <p:cNvSpPr/>
+          <p:nvPr/>
+        </p:nvSpPr>
+        <p:spPr>
+          <a:xfrm>
+            <a:off x="4722876" y="3108960"/>
+            <a:ext cx="2743200" cy="1097280"/>
+          </a:xfrm>
+          <a:prstGeom prst="rect">
+            <a:avLst/>
+          </a:prstGeom>
+          <a:noFill/>
+          <a:ln/>
+        </p:spPr>
+        <p:txBody>
+          <a:bodyPr wrap="square" lIns="0" tIns="0" rIns="0" bIns="0" rtlCol="0" anchor="t"/>
+          <a:lstStyle/>
+          <a:p>
+            <a:pPr indent="0" marL="0">
+              <a:lnSpc>
+                <a:spcPts val="1900"/>
+              </a:lnSpc>
+              <a:buNone/>
+            </a:pPr>
+            <a:r>
+              <a:rPr lang="en-US" sz="1400" dirty="0">
+                <a:solidFill>
+                  <a:srgbClr val="24313F"/>
+                </a:solidFill>
+                <a:latin typeface="Georgia" pitchFamily="34" charset="0"/>
+                <a:ea typeface="Georgia" pitchFamily="34" charset="-122"/>
+                <a:cs typeface="Georgia" pitchFamily="34" charset="-120"/>
+              </a:rPr>
+              <a:t>what that choice protects or earns for the maker</a:t>
+            </a:r>
+            <a:endParaRPr lang="en-US" sz="1400" dirty="0"/>
+          </a:p>
+        </p:txBody>
+      </p:sp>
+      <p:sp>
+        <p:nvSpPr>
+          <p:cNvPr id="14" name="Text 12"/>
+          <p:cNvSpPr/>
+          <p:nvPr/>
+        </p:nvSpPr>
+        <p:spPr>
+          <a:xfrm>
+            <a:off x="4023360" y="2926080"/>
+            <a:ext cx="470916" cy="640080"/>
+          </a:xfrm>
+          <a:prstGeom prst="rect">
+            <a:avLst/>
+          </a:prstGeom>
+          <a:noFill/>
+          <a:ln/>
+        </p:spPr>
+        <p:txBody>
+          <a:bodyPr wrap="square" lIns="0" tIns="0" rIns="0" bIns="0" rtlCol="0" anchor="ctr"/>
+          <a:lstStyle/>
+          <a:p>
+            <a:pPr algn="ctr" indent="0" marL="0">
+              <a:buNone/>
+            </a:pPr>
+            <a:r>
+              <a:rPr lang="en-US" sz="3400" dirty="0">
+                <a:solidFill>
+                  <a:srgbClr val="A3C1AD"/>
+                </a:solidFill>
+                <a:latin typeface="Georgia" pitchFamily="34" charset="0"/>
+                <a:ea typeface="Georgia" pitchFamily="34" charset="-122"/>
+                <a:cs typeface="Georgia" pitchFamily="34" charset="-120"/>
+              </a:rPr>
+              <a:t>←</a:t>
+            </a:r>
+            <a:endParaRPr lang="en-US" sz="3400" dirty="0"/>
+          </a:p>
+        </p:txBody>
+      </p:sp>
+      <p:sp>
+        <p:nvSpPr>
+          <p:cNvPr id="15" name="Shape 13"/>
+          <p:cNvSpPr/>
+          <p:nvPr/>
+        </p:nvSpPr>
+        <p:spPr>
+          <a:xfrm>
+            <a:off x="8165592" y="2194560"/>
+            <a:ext cx="3200400" cy="2103120"/>
+          </a:xfrm>
+          <a:prstGeom prst="rect">
+            <a:avLst/>
+          </a:prstGeom>
+          <a:solidFill>
+            <a:srgbClr val="E8EFE7"/>
+          </a:solidFill>
+          <a:ln w="12700">
+            <a:solidFill>
+              <a:srgbClr val="8AA394"/>
+            </a:solidFill>
+            <a:prstDash val="solid"/>
+          </a:ln>
+        </p:spPr>
+      </p:sp>
+      <p:sp>
+        <p:nvSpPr>
+          <p:cNvPr id="16" name="Text 14"/>
+          <p:cNvSpPr/>
+          <p:nvPr/>
+        </p:nvSpPr>
+        <p:spPr>
+          <a:xfrm>
+            <a:off x="8394192" y="2423160"/>
+            <a:ext cx="2743200" cy="457200"/>
+          </a:xfrm>
+          <a:prstGeom prst="rect">
+            <a:avLst/>
+          </a:prstGeom>
+          <a:noFill/>
+          <a:ln/>
+        </p:spPr>
+        <p:txBody>
+          <a:bodyPr wrap="square" lIns="0" tIns="0" rIns="0" bIns="0" rtlCol="0" anchor="ctr"/>
+          <a:lstStyle/>
+          <a:p>
+            <a:pPr indent="0" marL="0">
+              <a:buNone/>
+            </a:pPr>
+            <a:r>
+              <a:rPr lang="en-US" sz="2100" dirty="0">
+                <a:solidFill>
+                  <a:srgbClr val="4A6B5D"/>
+                </a:solidFill>
+                <a:latin typeface="Georgia" pitchFamily="34" charset="0"/>
+                <a:ea typeface="Georgia" pitchFamily="34" charset="-122"/>
+                <a:cs typeface="Georgia" pitchFamily="34" charset="-120"/>
+              </a:rPr>
+              <a:t>Who pays</a:t>
+            </a:r>
+            <a:endParaRPr lang="en-US" sz="2100" dirty="0"/>
+          </a:p>
+        </p:txBody>
+      </p:sp>
+      <p:sp>
+        <p:nvSpPr>
+          <p:cNvPr id="17" name="Shape 15"/>
+          <p:cNvSpPr/>
+          <p:nvPr/>
+        </p:nvSpPr>
+        <p:spPr>
+          <a:xfrm>
+            <a:off x="8394192" y="2971800"/>
+            <a:ext cx="822960" cy="0"/>
+          </a:xfrm>
+          <a:prstGeom prst="line">
+            <a:avLst/>
+          </a:prstGeom>
+          <a:noFill/>
+          <a:ln w="25400">
+            <a:solidFill>
+              <a:srgbClr val="8C3A38"/>
+            </a:solidFill>
+            <a:prstDash val="solid"/>
+          </a:ln>
+        </p:spPr>
+      </p:sp>
+      <p:sp>
+        <p:nvSpPr>
+          <p:cNvPr id="18" name="Text 16"/>
+          <p:cNvSpPr/>
+          <p:nvPr/>
+        </p:nvSpPr>
+        <p:spPr>
+          <a:xfrm>
+            <a:off x="8394192" y="3108960"/>
+            <a:ext cx="2743200" cy="1097280"/>
+          </a:xfrm>
+          <a:prstGeom prst="rect">
+            <a:avLst/>
+          </a:prstGeom>
+          <a:noFill/>
+          <a:ln/>
+        </p:spPr>
+        <p:txBody>
+          <a:bodyPr wrap="square" lIns="0" tIns="0" rIns="0" bIns="0" rtlCol="0" anchor="t"/>
+          <a:lstStyle/>
+          <a:p>
+            <a:pPr indent="0" marL="0">
+              <a:lnSpc>
+                <a:spcPts val="1900"/>
+              </a:lnSpc>
+              <a:buNone/>
+            </a:pPr>
+            <a:r>
+              <a:rPr lang="en-US" sz="1400" dirty="0">
+                <a:solidFill>
+                  <a:srgbClr val="24313F"/>
+                </a:solidFill>
+                <a:latin typeface="Georgia" pitchFamily="34" charset="0"/>
+                <a:ea typeface="Georgia" pitchFamily="34" charset="-122"/>
+                <a:cs typeface="Georgia" pitchFamily="34" charset="-120"/>
+              </a:rPr>
+              <a:t>the advertiser, the subscriber, the state, the platform</a:t>
+            </a:r>
+            <a:endParaRPr lang="en-US" sz="1400" dirty="0"/>
+          </a:p>
+        </p:txBody>
+      </p:sp>
+      <p:sp>
+        <p:nvSpPr>
+          <p:cNvPr id="19" name="Text 17"/>
+          <p:cNvSpPr/>
+          <p:nvPr/>
+        </p:nvSpPr>
+        <p:spPr>
+          <a:xfrm>
+            <a:off x="7694676" y="2926080"/>
+            <a:ext cx="470916" cy="640080"/>
+          </a:xfrm>
+          <a:prstGeom prst="rect">
+            <a:avLst/>
+          </a:prstGeom>
+          <a:noFill/>
+          <a:ln/>
+        </p:spPr>
+        <p:txBody>
+          <a:bodyPr wrap="square" lIns="0" tIns="0" rIns="0" bIns="0" rtlCol="0" anchor="ctr"/>
+          <a:lstStyle/>
+          <a:p>
+            <a:pPr algn="ctr" indent="0" marL="0">
+              <a:buNone/>
+            </a:pPr>
+            <a:r>
+              <a:rPr lang="en-US" sz="3400" dirty="0">
+                <a:solidFill>
+                  <a:srgbClr val="A3C1AD"/>
+                </a:solidFill>
+                <a:latin typeface="Georgia" pitchFamily="34" charset="0"/>
+                <a:ea typeface="Georgia" pitchFamily="34" charset="-122"/>
+                <a:cs typeface="Georgia" pitchFamily="34" charset="-120"/>
+              </a:rPr>
+              <a:t>←</a:t>
+            </a:r>
+            <a:endParaRPr lang="en-US" sz="3400" dirty="0"/>
+          </a:p>
+        </p:txBody>
+      </p:sp>
+      <p:sp>
+        <p:nvSpPr>
+          <p:cNvPr id="20" name="Text 18"/>
+          <p:cNvSpPr/>
+          <p:nvPr/>
+        </p:nvSpPr>
+        <p:spPr>
+          <a:xfrm>
+            <a:off x="822960" y="4846320"/>
+            <a:ext cx="10543032" cy="685800"/>
+          </a:xfrm>
+          <a:prstGeom prst="rect">
+            <a:avLst/>
+          </a:prstGeom>
+          <a:noFill/>
+          <a:ln/>
+        </p:spPr>
+        <p:txBody>
+          <a:bodyPr wrap="square" lIns="0" tIns="0" rIns="0" bIns="0" rtlCol="0" anchor="t"/>
+          <a:lstStyle/>
+          <a:p>
+            <a:pPr indent="0" marL="0">
+              <a:lnSpc>
+                <a:spcPts val="1700"/>
+              </a:lnSpc>
+              <a:buNone/>
+            </a:pPr>
+            <a:r>
+              <a:rPr lang="en-US" sz="1250" i="1" dirty="0">
+                <a:solidFill>
+                  <a:srgbClr val="7A7F72"/>
+                </a:solidFill>
+                <a:latin typeface="Arial" pitchFamily="34" charset="0"/>
+                <a:ea typeface="Arial" pitchFamily="34" charset="-122"/>
+                <a:cs typeface="Arial" pitchFamily="34" charset="-120"/>
+              </a:rPr>
+              <a:t>Read it right to left: every decision on screen traces back to who pays. Traced against the clock, a point per link that survives challenge. Rehearse the chain on your case-study institution; that is the exam answer.</a:t>
+            </a:r>
+            <a:endParaRPr lang="en-US" sz="1250" dirty="0"/>
+          </a:p>
+        </p:txBody>
+      </p:sp>
+      <p:sp>
+        <p:nvSpPr>
+          <p:cNvPr id="21" name="Shape 19"/>
+          <p:cNvSpPr/>
+          <p:nvPr/>
+        </p:nvSpPr>
+        <p:spPr>
+          <a:xfrm>
+            <a:off x="822960" y="6382512"/>
+            <a:ext cx="10543032" cy="0"/>
+          </a:xfrm>
+          <a:prstGeom prst="line">
+            <a:avLst/>
+          </a:prstGeom>
+          <a:noFill/>
+          <a:ln w="9525">
+            <a:solidFill>
+              <a:srgbClr val="D9D4C4"/>
+            </a:solidFill>
+            <a:prstDash val="solid"/>
+          </a:ln>
+        </p:spPr>
+      </p:sp>
+      <p:sp>
+        <p:nvSpPr>
+          <p:cNvPr id="22" name="Text 20"/>
+          <p:cNvSpPr/>
+          <p:nvPr/>
+        </p:nvSpPr>
+        <p:spPr>
+          <a:xfrm>
+            <a:off x="822960" y="6419088"/>
+            <a:ext cx="7315200" cy="274320"/>
+          </a:xfrm>
+          <a:prstGeom prst="rect">
+            <a:avLst/>
+          </a:prstGeom>
+          <a:noFill/>
+          <a:ln/>
+        </p:spPr>
+        <p:txBody>
+          <a:bodyPr wrap="square" lIns="0" tIns="0" rIns="0" bIns="0" rtlCol="0" anchor="ctr"/>
+          <a:lstStyle/>
+          <a:p>
+            <a:pPr indent="0" marL="0">
+              <a:buNone/>
+            </a:pPr>
+            <a:r>
+              <a:rPr lang="en-US" sz="900" spc="150" kern="0" dirty="0">
+                <a:solidFill>
+                  <a:srgbClr val="7A7F72"/>
+                </a:solidFill>
+                <a:latin typeface="Arial" pitchFamily="34" charset="0"/>
+                <a:ea typeface="Arial" pitchFamily="34" charset="-122"/>
+                <a:cs typeface="Arial" pitchFamily="34" charset="-120"/>
+              </a:rPr>
+              <a:t>MEDIA STUDIES 9607 · SEMESTER I</a:t>
+            </a:r>
+            <a:endParaRPr lang="en-US" sz="900" dirty="0"/>
+          </a:p>
+        </p:txBody>
+      </p:sp>
+      <p:sp>
+        <p:nvSpPr>
+          <p:cNvPr id="23" name="Text 21"/>
+          <p:cNvSpPr/>
+          <p:nvPr/>
+        </p:nvSpPr>
+        <p:spPr>
+          <a:xfrm>
+            <a:off x="10268712" y="6355080"/>
+            <a:ext cx="1097280" cy="365760"/>
+          </a:xfrm>
+          <a:prstGeom prst="rect">
+            <a:avLst/>
+          </a:prstGeom>
+          <a:noFill/>
+          <a:ln/>
+        </p:spPr>
+        <p:txBody>
+          <a:bodyPr wrap="square" lIns="0" tIns="0" rIns="0" bIns="0" rtlCol="0" anchor="ctr"/>
+          <a:lstStyle/>
+          <a:p>
+            <a:pPr algn="r" indent="0" marL="0">
+              <a:buNone/>
+            </a:pPr>
+            <a:r>
+              <a:rPr lang="en-US" sz="1600" dirty="0">
+                <a:solidFill>
+                  <a:srgbClr val="A3C1AD"/>
+                </a:solidFill>
+                <a:latin typeface="Georgia" pitchFamily="34" charset="0"/>
+                <a:ea typeface="Georgia" pitchFamily="34" charset="-122"/>
+                <a:cs typeface="Georgia" pitchFamily="34" charset="-120"/>
+              </a:rPr>
+              <a:t>04</a:t>
+            </a:r>
+            <a:endParaRPr lang="en-US" sz="1600" dirty="0"/>
           </a:p>
         </p:txBody>
       </p:sp>
@@ -6948,79 +7547,105 @@
           <a:chExt cx="0" cy="0"/>
         </a:xfrm>
       </p:grpSpPr>
-      <p:sp>
-        <p:nvSpPr>
-          <p:cNvPr id="2" name="Text 0"/>
-          <p:cNvSpPr/>
-          <p:nvPr/>
-        </p:nvSpPr>
-        <p:spPr>
-          <a:xfrm>
-            <a:off x="822960" y="457200"/>
-            <a:ext cx="6400800" cy="274320"/>
-          </a:xfrm>
-          <a:prstGeom prst="rect">
-            <a:avLst/>
-          </a:prstGeom>
-          <a:noFill/>
-          <a:ln/>
-        </p:spPr>
-        <p:txBody>
-          <a:bodyPr wrap="square" lIns="0" tIns="0" rIns="0" bIns="0" rtlCol="0" anchor="ctr"/>
-          <a:lstStyle/>
-          <a:p>
-            <a:pPr algn="l" indent="0" marL="0">
-              <a:buNone/>
-            </a:pPr>
-            <a:r>
-              <a:rPr lang="en-US" sz="1100" b="1" spc="250" kern="0" dirty="0">
-                <a:solidFill>
-                  <a:srgbClr val="4A6B5D"/>
+      <p:pic>
+        <p:nvPicPr>
+          <p:cNvPr id="2" name="Image 0" descr="/Users/dogan/Documents/Vaults/Courses/wiki/classes/media-studies/decks/_build/img/crops/underwood-fifth-ave_a664.jpg">    </p:cNvPr>
+          <p:cNvPicPr>
+            <a:picLocks noChangeAspect="1"/>
+          </p:cNvPicPr>
+          <p:nvPr/>
+        </p:nvPicPr>
+        <p:blipFill>
+          <a:blip r:embed="rId1"/>
+          <a:stretch>
+            <a:fillRect/>
+          </a:stretch>
+        </p:blipFill>
+        <p:spPr>
+          <a:xfrm>
+            <a:off x="7635240" y="0"/>
+            <a:ext cx="4553712" cy="6858000"/>
+          </a:xfrm>
+          <a:prstGeom prst="rect">
+            <a:avLst/>
+          </a:prstGeom>
+        </p:spPr>
+      </p:pic>
+      <p:sp>
+        <p:nvSpPr>
+          <p:cNvPr id="3" name="Text 0"/>
+          <p:cNvSpPr/>
+          <p:nvPr/>
+        </p:nvSpPr>
+        <p:spPr>
+          <a:xfrm>
+            <a:off x="7818120" y="6126480"/>
+            <a:ext cx="4187952" cy="365760"/>
+          </a:xfrm>
+          <a:prstGeom prst="rect">
+            <a:avLst/>
+          </a:prstGeom>
+          <a:solidFill>
+            <a:srgbClr val="FAF8F1"/>
+          </a:solidFill>
+          <a:ln/>
+        </p:spPr>
+        <p:txBody>
+          <a:bodyPr wrap="square" lIns="0" tIns="0" rIns="0" bIns="0" rtlCol="0" anchor="ctr"/>
+          <a:lstStyle/>
+          <a:p>
+            <a:pPr indent="0" marL="0">
+              <a:buNone/>
+            </a:pPr>
+            <a:r>
+              <a:rPr lang="en-US" sz="950" spc="50" kern="0" dirty="0">
+                <a:solidFill>
+                  <a:srgbClr val="7A7F72"/>
                 </a:solidFill>
                 <a:latin typeface="Arial" pitchFamily="34" charset="0"/>
                 <a:ea typeface="Arial" pitchFamily="34" charset="-122"/>
                 <a:cs typeface="Arial" pitchFamily="34" charset="-120"/>
               </a:rPr>
-              <a:t>CS12 · SECTION A, DEMYSTIFIED</a:t>
-            </a:r>
-            <a:endParaRPr lang="en-US" sz="1100" dirty="0"/>
-          </a:p>
-        </p:txBody>
-      </p:sp>
-      <p:sp>
-        <p:nvSpPr>
-          <p:cNvPr id="3" name="Text 1"/>
-          <p:cNvSpPr/>
-          <p:nvPr/>
-        </p:nvSpPr>
-        <p:spPr>
-          <a:xfrm>
-            <a:off x="6793992" y="457200"/>
-            <a:ext cx="4572000" cy="274320"/>
-          </a:xfrm>
-          <a:prstGeom prst="rect">
-            <a:avLst/>
-          </a:prstGeom>
-          <a:noFill/>
-          <a:ln/>
-        </p:spPr>
-        <p:txBody>
-          <a:bodyPr wrap="square" lIns="0" tIns="0" rIns="0" bIns="0" rtlCol="0" anchor="ctr"/>
-          <a:lstStyle/>
-          <a:p>
-            <a:pPr algn="r" indent="0" marL="0">
+              <a:t>Underwood &amp; Underwood, Above Fifth Avenue, Looking North</a:t>
+            </a:r>
+            <a:endParaRPr lang="en-US" sz="950" dirty="0"/>
+          </a:p>
+        </p:txBody>
+      </p:sp>
+      <p:sp>
+        <p:nvSpPr>
+          <p:cNvPr id="4" name="Text 1"/>
+          <p:cNvSpPr/>
+          <p:nvPr/>
+        </p:nvSpPr>
+        <p:spPr>
+          <a:xfrm>
+            <a:off x="822960" y="685800"/>
+            <a:ext cx="5486400" cy="274320"/>
+          </a:xfrm>
+          <a:prstGeom prst="rect">
+            <a:avLst/>
+          </a:prstGeom>
+          <a:noFill/>
+          <a:ln/>
+        </p:spPr>
+        <p:txBody>
+          <a:bodyPr wrap="square" lIns="0" tIns="0" rIns="0" bIns="0" rtlCol="0" anchor="ctr"/>
+          <a:lstStyle/>
+          <a:p>
+            <a:pPr algn="l" indent="0" marL="0">
               <a:buNone/>
             </a:pPr>
             <a:r>
               <a:rPr lang="en-US" sz="1100" b="1" spc="250" kern="0" dirty="0">
                 <a:solidFill>
-                  <a:srgbClr val="7A7F72"/>
+                  <a:srgbClr val="4A6B5D"/>
                 </a:solidFill>
                 <a:latin typeface="Arial" pitchFamily="34" charset="0"/>
                 <a:ea typeface="Arial" pitchFamily="34" charset="-122"/>
                 <a:cs typeface="Arial" pitchFamily="34" charset="-120"/>
               </a:rPr>
-              <a:t>THE MARK SCHEME AS FURNITURE</a:t>
+              <a:t>THE VIEW FROM ABOVE</a:t>
             </a:r>
             <a:endParaRPr lang="en-US" sz="1100" dirty="0"/>
           </a:p>
@@ -7028,14 +7653,14 @@
       </p:sp>
       <p:sp>
         <p:nvSpPr>
-          <p:cNvPr id="4" name="Shape 2"/>
-          <p:cNvSpPr/>
-          <p:nvPr/>
-        </p:nvSpPr>
-        <p:spPr>
-          <a:xfrm>
-            <a:off x="822960" y="786384"/>
-            <a:ext cx="10543032" cy="0"/>
+          <p:cNvPr id="5" name="Shape 2"/>
+          <p:cNvSpPr/>
+          <p:nvPr/>
+        </p:nvSpPr>
+        <p:spPr>
+          <a:xfrm>
+            <a:off x="822960" y="1051560"/>
+            <a:ext cx="6492240" cy="0"/>
           </a:xfrm>
           <a:prstGeom prst="line">
             <a:avLst/>
@@ -7051,30 +7676,33 @@
       </p:sp>
       <p:sp>
         <p:nvSpPr>
-          <p:cNvPr id="5" name="Text 3"/>
-          <p:cNvSpPr/>
-          <p:nvPr/>
-        </p:nvSpPr>
-        <p:spPr>
-          <a:xfrm>
-            <a:off x="822960" y="1280160"/>
-            <a:ext cx="10543032" cy="914400"/>
-          </a:xfrm>
-          <a:prstGeom prst="rect">
-            <a:avLst/>
-          </a:prstGeom>
-          <a:noFill/>
-          <a:ln/>
-        </p:spPr>
-        <p:txBody>
-          <a:bodyPr wrap="square" lIns="0" tIns="0" rIns="0" bIns="0" rtlCol="0" anchor="ctr"/>
+          <p:cNvPr id="6" name="Text 3"/>
+          <p:cNvSpPr/>
+          <p:nvPr/>
+        </p:nvSpPr>
+        <p:spPr>
+          <a:xfrm>
+            <a:off x="822960" y="1234440"/>
+            <a:ext cx="6492240" cy="1371600"/>
+          </a:xfrm>
+          <a:prstGeom prst="rect">
+            <a:avLst/>
+          </a:prstGeom>
+          <a:noFill/>
+          <a:ln/>
+        </p:spPr>
+        <p:txBody>
+          <a:bodyPr wrap="square" lIns="0" tIns="0" rIns="0" bIns="0" rtlCol="0" anchor="t"/>
           <a:lstStyle/>
           <a:p>
             <a:pPr indent="0" marL="0">
-              <a:buNone/>
-            </a:pPr>
-            <a:r>
-              <a:rPr lang="en-US" sz="3600" dirty="0">
+              <a:lnSpc>
+                <a:spcPts val="4200"/>
+              </a:lnSpc>
+              <a:buNone/>
+            </a:pPr>
+            <a:r>
+              <a:rPr lang="en-US" sz="4000" dirty="0">
                 <a:solidFill>
                   <a:srgbClr val="24313F"/>
                 </a:solidFill>
@@ -7082,64 +7710,19 @@
                 <a:ea typeface="Georgia" pitchFamily="34" charset="-122"/>
                 <a:cs typeface="Georgia" pitchFamily="34" charset="-120"/>
               </a:rPr>
-              <a:t>Write it with the answers open</a:t>
-            </a:r>
-            <a:endParaRPr lang="en-US" sz="3600" dirty="0"/>
-          </a:p>
-        </p:txBody>
-      </p:sp>
-      <p:sp>
-        <p:nvSpPr>
-          <p:cNvPr id="6" name="Shape 4"/>
-          <p:cNvSpPr/>
-          <p:nvPr/>
-        </p:nvSpPr>
-        <p:spPr>
-          <a:xfrm>
-            <a:off x="822960" y="2514600"/>
-            <a:ext cx="914400" cy="0"/>
-          </a:xfrm>
-          <a:prstGeom prst="line">
-            <a:avLst/>
-          </a:prstGeom>
-          <a:noFill/>
-          <a:ln w="31750">
-            <a:solidFill>
-              <a:srgbClr val="8C3A38"/>
-            </a:solidFill>
-            <a:prstDash val="solid"/>
-          </a:ln>
-        </p:spPr>
-      </p:sp>
-      <p:sp>
-        <p:nvSpPr>
-          <p:cNvPr id="7" name="Text 5"/>
-          <p:cNvSpPr/>
-          <p:nvPr/>
-        </p:nvSpPr>
-        <p:spPr>
-          <a:xfrm>
-            <a:off x="822960" y="2743200"/>
-            <a:ext cx="9875520" cy="2194560"/>
-          </a:xfrm>
-          <a:prstGeom prst="rect">
-            <a:avLst/>
-          </a:prstGeom>
-          <a:noFill/>
-          <a:ln/>
-        </p:spPr>
-        <p:txBody>
-          <a:bodyPr wrap="square" lIns="0" tIns="0" rIns="0" bIns="0" rtlCol="0" anchor="t"/>
-          <a:lstStyle/>
+              <a:t>Who owns the</a:t>
+            </a:r>
+            <a:endParaRPr lang="en-US" sz="4000" dirty="0"/>
+          </a:p>
           <a:p>
             <a:pPr indent="0" marL="0">
               <a:lnSpc>
-                <a:spcPts val="2700"/>
+                <a:spcPts val="4200"/>
               </a:lnSpc>
               <a:buNone/>
             </a:pPr>
             <a:r>
-              <a:rPr lang="en-US" sz="1900" dirty="0">
+              <a:rPr lang="en-US" sz="4000" dirty="0">
                 <a:solidFill>
                   <a:srgbClr val="24313F"/>
                 </a:solidFill>
@@ -7147,110 +7730,51 @@
                 <a:ea typeface="Georgia" pitchFamily="34" charset="-122"/>
                 <a:cs typeface="Georgia" pitchFamily="34" charset="-120"/>
               </a:rPr>
-              <a:t>The official five-criteria rubric sits on every desk, consultable. Paragraphs are drafted solo, but any student may stop, check the band language, and annotate their own margin: this sentence is my terminology evidence. The mark scheme stops being an enemy the moment it becomes furniture. In review, each student labels which criterion each paragraph earned, and finds the one they never fed.</a:t>
-            </a:r>
-            <a:endParaRPr lang="en-US" sz="1900" dirty="0"/>
-          </a:p>
-        </p:txBody>
-      </p:sp>
-      <p:sp>
-        <p:nvSpPr>
-          <p:cNvPr id="8" name="Shape 6"/>
-          <p:cNvSpPr/>
-          <p:nvPr/>
-        </p:nvSpPr>
-        <p:spPr>
-          <a:xfrm>
-            <a:off x="822960" y="6382512"/>
-            <a:ext cx="10543032" cy="0"/>
-          </a:xfrm>
-          <a:prstGeom prst="line">
-            <a:avLst/>
-          </a:prstGeom>
-          <a:noFill/>
-          <a:ln w="9525">
-            <a:solidFill>
-              <a:srgbClr val="D9D4C4"/>
-            </a:solidFill>
-            <a:prstDash val="solid"/>
-          </a:ln>
-        </p:spPr>
-      </p:sp>
-      <p:sp>
-        <p:nvSpPr>
-          <p:cNvPr id="9" name="Text 7"/>
-          <p:cNvSpPr/>
-          <p:nvPr/>
-        </p:nvSpPr>
-        <p:spPr>
-          <a:xfrm>
-            <a:off x="822960" y="6419088"/>
-            <a:ext cx="7315200" cy="274320"/>
-          </a:xfrm>
-          <a:prstGeom prst="rect">
-            <a:avLst/>
-          </a:prstGeom>
-          <a:noFill/>
-          <a:ln/>
-        </p:spPr>
-        <p:txBody>
-          <a:bodyPr wrap="square" lIns="0" tIns="0" rIns="0" bIns="0" rtlCol="0" anchor="ctr"/>
+              <a:t>vantage point</a:t>
+            </a:r>
+            <a:endParaRPr lang="en-US" sz="4000" dirty="0"/>
+          </a:p>
+        </p:txBody>
+      </p:sp>
+      <p:sp>
+        <p:nvSpPr>
+          <p:cNvPr id="7" name="Text 4"/>
+          <p:cNvSpPr/>
+          <p:nvPr/>
+        </p:nvSpPr>
+        <p:spPr>
+          <a:xfrm>
+            <a:off x="822960" y="2743200"/>
+            <a:ext cx="6583680" cy="2743200"/>
+          </a:xfrm>
+          <a:prstGeom prst="rect">
+            <a:avLst/>
+          </a:prstGeom>
+          <a:noFill/>
+          <a:ln/>
+        </p:spPr>
+        <p:txBody>
+          <a:bodyPr wrap="square" lIns="0" tIns="0" rIns="0" bIns="0" rtlCol="0" anchor="t"/>
           <a:lstStyle/>
           <a:p>
             <a:pPr indent="0" marL="0">
-              <a:buNone/>
-            </a:pPr>
-            <a:r>
-              <a:rPr lang="en-US" sz="900" spc="150" kern="0" dirty="0">
-                <a:solidFill>
-                  <a:srgbClr val="7A7F72"/>
-                </a:solidFill>
-                <a:latin typeface="Arial" pitchFamily="34" charset="0"/>
-                <a:ea typeface="Arial" pitchFamily="34" charset="-122"/>
-                <a:cs typeface="Arial" pitchFamily="34" charset="-120"/>
-              </a:rPr>
-              <a:t>MEDIA STUDIES 9607 · SEMESTER I</a:t>
-            </a:r>
-            <a:endParaRPr lang="en-US" sz="900" dirty="0"/>
-          </a:p>
-        </p:txBody>
-      </p:sp>
-      <p:sp>
-        <p:nvSpPr>
-          <p:cNvPr id="10" name="Text 8"/>
-          <p:cNvSpPr/>
-          <p:nvPr/>
-        </p:nvSpPr>
-        <p:spPr>
-          <a:xfrm>
-            <a:off x="10268712" y="6355080"/>
-            <a:ext cx="1097280" cy="365760"/>
-          </a:xfrm>
-          <a:prstGeom prst="rect">
-            <a:avLst/>
-          </a:prstGeom>
-          <a:noFill/>
-          <a:ln/>
-        </p:spPr>
-        <p:txBody>
-          <a:bodyPr wrap="square" lIns="0" tIns="0" rIns="0" bIns="0" rtlCol="0" anchor="ctr"/>
-          <a:lstStyle/>
-          <a:p>
-            <a:pPr algn="r" indent="0" marL="0">
-              <a:buNone/>
-            </a:pPr>
-            <a:r>
-              <a:rPr lang="en-US" sz="1600" dirty="0">
-                <a:solidFill>
-                  <a:srgbClr val="A3C1AD"/>
+              <a:lnSpc>
+                <a:spcPts val="2500"/>
+              </a:lnSpc>
+              <a:buNone/>
+            </a:pPr>
+            <a:r>
+              <a:rPr lang="en-US" sz="1750" dirty="0">
+                <a:solidFill>
+                  <a:srgbClr val="24313F"/>
                 </a:solidFill>
                 <a:latin typeface="Georgia" pitchFamily="34" charset="0"/>
                 <a:ea typeface="Georgia" pitchFamily="34" charset="-122"/>
                 <a:cs typeface="Georgia" pitchFamily="34" charset="-120"/>
               </a:rPr>
-              <a:t>04</a:t>
-            </a:r>
-            <a:endParaRPr lang="en-US" sz="1600" dirty="0"/>
+              <a:t>The camera operator on the parapet chooses the frame the city is seen through. Institutions own the vantage point: the platform, the schedule, the budget, the greenlight. What reaches you was chosen by someone standing where you cannot.</a:t>
+            </a:r>
+            <a:endParaRPr lang="en-US" sz="1750" dirty="0"/>
           </a:p>
         </p:txBody>
       </p:sp>

--- a/content/decks/media-studies/media-studies-s1-lesson-15-institutions-and-section-a-craft.pptx
+++ b/content/decks/media-studies/media-studies-s1-lesson-15-institutions-and-section-a-craft.pptx
@@ -602,7 +602,7 @@
           <a:p>
             <a:r>
               <a:rPr lang="en-US" dirty="0"/>
-              <a:t/>
+              <a:t>CS12 is part collaborative by design. The find-your-unfed-criterion move sets each student's personal A4 target. Warm-up: Deck U5.2's context-terms quiz.</a:t>
             </a:r>
             <a:endParaRPr lang="en-US" dirty="0"/>
           </a:p>
@@ -690,7 +690,7 @@
           <a:p>
             <a:r>
               <a:rPr lang="en-US" dirty="0"/>
-              <a:t/>
+              <a:t>The document is the highest-leverage artifact this side of the blog: it feeds A4, the End of Term Exam, and Paper 2 in May. WS 5.3 is handed out as the model.</a:t>
             </a:r>
             <a:endParaRPr lang="en-US" dirty="0"/>
           </a:p>
@@ -778,7 +778,7 @@
           <a:p>
             <a:r>
               <a:rPr lang="en-US" dirty="0"/>
-              <a:t/>
+              <a:t>Only the June 2024/21 paper is rendered anywhere in the deck set: 22 and 23 name the End-of-Term text and stay sealed, as do all June 2025 variants.</a:t>
             </a:r>
             <a:endParaRPr lang="en-US" dirty="0"/>
           </a:p>
@@ -1042,7 +1042,7 @@
           <a:p>
             <a:r>
               <a:rPr lang="en-US" dirty="0"/>
-              <a:t/>
+              <a:t>D1 replicates the study in miniature: one short text screened, readings gathered anonymously on cards, compared against situation. The disagreement is the finding.</a:t>
             </a:r>
             <a:endParaRPr lang="en-US" dirty="0"/>
           </a:p>
@@ -1218,7 +1218,7 @@
           <a:p>
             <a:r>
               <a:rPr lang="en-US" dirty="0"/>
-              <a:t>Le Gray's imperial commission: a photograph made to a paymaster's brief. Funding follows content, a century and a half before the streaming wars.</a:t>
+              <a:t>Re-derived from the library original and shown whole: the plate's composition is the argument, so it is never cropped. The historical proof in one image, before any modern example.</a:t>
             </a:r>
             <a:endParaRPr lang="en-US" dirty="0"/>
           </a:p>
@@ -1306,7 +1306,7 @@
           <a:p>
             <a:r>
               <a:rPr lang="en-US" dirty="0"/>
-              <a:t/>
+              <a:t>License-fee figure verified 2026-08-24: 180 pounds a year from 1 April 2026. The CCTV, Tencent and bilibili parallels stay spoken asides per the exam-example rule.</a:t>
             </a:r>
             <a:endParaRPr lang="en-US" dirty="0"/>
           </a:p>
@@ -1482,7 +1482,7 @@
           <a:p>
             <a:r>
               <a:rPr lang="en-US" dirty="0"/>
-              <a:t/>
+              <a:t>Trace game rules: teams pick a visible decision from real current output, trace it link by link, a point per link that survives the room's challenge; the fastest verified chain presents first.</a:t>
             </a:r>
             <a:endParaRPr lang="en-US" dirty="0"/>
           </a:p>
@@ -1570,7 +1570,7 @@
           <a:p>
             <a:r>
               <a:rPr lang="en-US" dirty="0"/>
-              <a:t>Underwood's camera operator high above Fifth Avenue: the institution's chosen vantage point, from which the frame is set.</a:t>
+              <a:t>Replaced Underwood's parapet metaphor 2026-08-24: institutions own the platform, the schedule, the budget, the greenlight, shown as one real conglomerate. Disney is the Scheme of Work's own conglomeration example. The chart is drawn, not sourced, so it can be redrawn for any case-study institution.</a:t>
             </a:r>
             <a:endParaRPr lang="en-US" dirty="0"/>
           </a:p>
@@ -2325,8 +2325,8 @@
         </p:nvSpPr>
         <p:spPr>
           <a:xfrm>
-            <a:off x="822960" y="1280160"/>
-            <a:ext cx="10543032" cy="914400"/>
+            <a:off x="822960" y="1005840"/>
+            <a:ext cx="5852160" cy="822960"/>
           </a:xfrm>
           <a:prstGeom prst="rect">
             <a:avLst/>
@@ -2342,7 +2342,7 @@
               <a:buNone/>
             </a:pPr>
             <a:r>
-              <a:rPr lang="en-US" sz="3600" dirty="0">
+              <a:rPr lang="en-US" sz="2900" dirty="0">
                 <a:solidFill>
                   <a:srgbClr val="24313F"/>
                 </a:solidFill>
@@ -2352,7 +2352,7 @@
               </a:rPr>
               <a:t>Write it with the answers open</a:t>
             </a:r>
-            <a:endParaRPr lang="en-US" sz="3600" dirty="0"/>
+            <a:endParaRPr lang="en-US" sz="2900" dirty="0"/>
           </a:p>
         </p:txBody>
       </p:sp>
@@ -2364,7 +2364,7 @@
         </p:nvSpPr>
         <p:spPr>
           <a:xfrm>
-            <a:off x="822960" y="2514600"/>
+            <a:off x="822960" y="1965960"/>
             <a:ext cx="914400" cy="0"/>
           </a:xfrm>
           <a:prstGeom prst="line">
@@ -2387,8 +2387,8 @@
         </p:nvSpPr>
         <p:spPr>
           <a:xfrm>
-            <a:off x="822960" y="2743200"/>
-            <a:ext cx="9875520" cy="2194560"/>
+            <a:off x="822960" y="2194560"/>
+            <a:ext cx="5760720" cy="3566160"/>
           </a:xfrm>
           <a:prstGeom prst="rect">
             <a:avLst/>
@@ -2402,12 +2402,12 @@
           <a:p>
             <a:pPr indent="0" marL="0">
               <a:lnSpc>
-                <a:spcPts val="2700"/>
+                <a:spcPts val="2200"/>
               </a:lnSpc>
               <a:buNone/>
             </a:pPr>
             <a:r>
-              <a:rPr lang="en-US" sz="1900" dirty="0">
+              <a:rPr lang="en-US" sz="1550" dirty="0">
                 <a:solidFill>
                   <a:srgbClr val="24313F"/>
                 </a:solidFill>
@@ -2415,9 +2415,9 @@
                 <a:ea typeface="Georgia" pitchFamily="34" charset="-122"/>
                 <a:cs typeface="Georgia" pitchFamily="34" charset="-120"/>
               </a:rPr>
-              <a:t>The official five-criteria rubric sits on every desk, consultable. Paragraphs are drafted solo, but any student may stop, check the band language, and annotate their own margin: this sentence is my terminology evidence. The mark scheme stops being an enemy the moment it becomes furniture. In review, each student labels which criterion each paragraph earned, and finds the one they never fed.</a:t>
-            </a:r>
-            <a:endParaRPr lang="en-US" sz="1900" dirty="0"/>
+              <a:t>The official five-criteria rubric sits on every desk, consultable: media concepts, contexts and critical debates, use of terminology, analysis of how meaning is created, use of examples, five marks each. Paragraphs are drafted solo, but any student may stop, check the band language, and annotate their own margin: this sentence is my terminology evidence. In review, each student labels which criterion each paragraph earned, and finds the one they never fed. The same format family as A4, with the scaffold removed next week.</a:t>
+            </a:r>
+            <a:endParaRPr lang="en-US" sz="1550" dirty="0"/>
           </a:p>
         </p:txBody>
       </p:sp>
@@ -2429,13 +2429,15 @@
         </p:nvSpPr>
         <p:spPr>
           <a:xfrm>
-            <a:off x="822960" y="6382512"/>
-            <a:ext cx="10543032" cy="0"/>
-          </a:xfrm>
-          <a:prstGeom prst="line">
-            <a:avLst/>
-          </a:prstGeom>
-          <a:noFill/>
+            <a:off x="6675120" y="1143000"/>
+            <a:ext cx="4709160" cy="4434840"/>
+          </a:xfrm>
+          <a:prstGeom prst="rect">
+            <a:avLst/>
+          </a:prstGeom>
+          <a:solidFill>
+            <a:srgbClr val="FAF8F1"/>
+          </a:solidFill>
           <a:ln w="9525">
             <a:solidFill>
               <a:srgbClr val="D9D4C4"/>
@@ -2444,32 +2446,56 @@
           </a:ln>
         </p:spPr>
       </p:sp>
-      <p:sp>
-        <p:nvSpPr>
-          <p:cNvPr id="9" name="Text 7"/>
-          <p:cNvSpPr/>
-          <p:nvPr/>
-        </p:nvSpPr>
-        <p:spPr>
-          <a:xfrm>
-            <a:off x="822960" y="6419088"/>
-            <a:ext cx="7315200" cy="274320"/>
-          </a:xfrm>
-          <a:prstGeom prst="rect">
-            <a:avLst/>
-          </a:prstGeom>
-          <a:noFill/>
-          <a:ln/>
-        </p:spPr>
-        <p:txBody>
-          <a:bodyPr wrap="square" lIns="0" tIns="0" rIns="0" bIns="0" rtlCol="0" anchor="ctr"/>
-          <a:lstStyle/>
-          <a:p>
-            <a:pPr indent="0" marL="0">
-              <a:buNone/>
-            </a:pPr>
-            <a:r>
-              <a:rPr lang="en-US" sz="900" spc="150" kern="0" dirty="0">
+      <p:pic>
+        <p:nvPicPr>
+          <p:cNvPr id="9" name="Image 0" descr="/Users/dogan/Documents/Vaults/Courses/wiki/classes/media-studies/decks/_build/img/ms21-p10.jpg">    </p:cNvPr>
+          <p:cNvPicPr>
+            <a:picLocks noChangeAspect="1"/>
+          </p:cNvPicPr>
+          <p:nvPr/>
+        </p:nvPicPr>
+        <p:blipFill>
+          <a:blip r:embed="rId1"/>
+          <a:stretch>
+            <a:fillRect/>
+          </a:stretch>
+        </p:blipFill>
+        <p:spPr>
+          <a:xfrm>
+            <a:off x="6803136" y="1785928"/>
+            <a:ext cx="4453128" cy="3148984"/>
+          </a:xfrm>
+          <a:prstGeom prst="rect">
+            <a:avLst/>
+          </a:prstGeom>
+        </p:spPr>
+      </p:pic>
+      <p:sp>
+        <p:nvSpPr>
+          <p:cNvPr id="10" name="Text 7"/>
+          <p:cNvSpPr/>
+          <p:nvPr/>
+        </p:nvSpPr>
+        <p:spPr>
+          <a:xfrm>
+            <a:off x="6675120" y="5623560"/>
+            <a:ext cx="4709160" cy="274320"/>
+          </a:xfrm>
+          <a:prstGeom prst="rect">
+            <a:avLst/>
+          </a:prstGeom>
+          <a:noFill/>
+          <a:ln/>
+        </p:spPr>
+        <p:txBody>
+          <a:bodyPr wrap="square" lIns="0" tIns="0" rIns="0" bIns="0" rtlCol="0" anchor="ctr"/>
+          <a:lstStyle/>
+          <a:p>
+            <a:pPr algn="ctr" indent="0" marL="0">
+              <a:buNone/>
+            </a:pPr>
+            <a:r>
+              <a:rPr lang="en-US" sz="1000" dirty="0">
                 <a:solidFill>
                   <a:srgbClr val="7A7F72"/>
                 </a:solidFill>
@@ -2477,6 +2503,68 @@
                 <a:ea typeface="Arial" pitchFamily="34" charset="-122"/>
                 <a:cs typeface="Arial" pitchFamily="34" charset="-120"/>
               </a:rPr>
+              <a:t>The furniture itself: June 2024 mark scheme, Section A criteria</a:t>
+            </a:r>
+            <a:endParaRPr lang="en-US" sz="1000" dirty="0"/>
+          </a:p>
+        </p:txBody>
+      </p:sp>
+      <p:sp>
+        <p:nvSpPr>
+          <p:cNvPr id="11" name="Shape 8"/>
+          <p:cNvSpPr/>
+          <p:nvPr/>
+        </p:nvSpPr>
+        <p:spPr>
+          <a:xfrm>
+            <a:off x="822960" y="6382512"/>
+            <a:ext cx="10543032" cy="0"/>
+          </a:xfrm>
+          <a:prstGeom prst="line">
+            <a:avLst/>
+          </a:prstGeom>
+          <a:noFill/>
+          <a:ln w="9525">
+            <a:solidFill>
+              <a:srgbClr val="D9D4C4"/>
+            </a:solidFill>
+            <a:prstDash val="solid"/>
+          </a:ln>
+        </p:spPr>
+      </p:sp>
+      <p:sp>
+        <p:nvSpPr>
+          <p:cNvPr id="12" name="Text 9"/>
+          <p:cNvSpPr/>
+          <p:nvPr/>
+        </p:nvSpPr>
+        <p:spPr>
+          <a:xfrm>
+            <a:off x="822960" y="6419088"/>
+            <a:ext cx="7315200" cy="274320"/>
+          </a:xfrm>
+          <a:prstGeom prst="rect">
+            <a:avLst/>
+          </a:prstGeom>
+          <a:noFill/>
+          <a:ln/>
+        </p:spPr>
+        <p:txBody>
+          <a:bodyPr wrap="square" lIns="0" tIns="0" rIns="0" bIns="0" rtlCol="0" anchor="ctr"/>
+          <a:lstStyle/>
+          <a:p>
+            <a:pPr indent="0" marL="0">
+              <a:buNone/>
+            </a:pPr>
+            <a:r>
+              <a:rPr lang="en-US" sz="900" spc="150" kern="0" dirty="0">
+                <a:solidFill>
+                  <a:srgbClr val="7A7F72"/>
+                </a:solidFill>
+                <a:latin typeface="Arial" pitchFamily="34" charset="0"/>
+                <a:ea typeface="Arial" pitchFamily="34" charset="-122"/>
+                <a:cs typeface="Arial" pitchFamily="34" charset="-120"/>
+              </a:rPr>
               <a:t>MEDIA STUDIES 9607 · SEMESTER I</a:t>
             </a:r>
             <a:endParaRPr lang="en-US" sz="900" dirty="0"/>
@@ -2485,7 +2573,7 @@
       </p:sp>
       <p:sp>
         <p:nvSpPr>
-          <p:cNvPr id="10" name="Text 8"/>
+          <p:cNvPr id="13" name="Text 10"/>
           <p:cNvSpPr/>
           <p:nvPr/>
         </p:nvSpPr>
@@ -2516,7 +2604,7 @@
                 <a:ea typeface="Georgia" pitchFamily="34" charset="-122"/>
                 <a:cs typeface="Georgia" pitchFamily="34" charset="-120"/>
               </a:rPr>
-              <a:t>05</a:t>
+              <a:t>07</a:t>
             </a:r>
             <a:endParaRPr lang="en-US" sz="1600" dirty="0"/>
           </a:p>
@@ -2664,7 +2752,7 @@
         <p:spPr>
           <a:xfrm>
             <a:off x="822960" y="932688"/>
-            <a:ext cx="10543032" cy="640080"/>
+            <a:ext cx="6949440" cy="640080"/>
           </a:xfrm>
           <a:prstGeom prst="rect">
             <a:avLst/>
@@ -2680,7 +2768,7 @@
               <a:buNone/>
             </a:pPr>
             <a:r>
-              <a:rPr lang="en-US" sz="3000" dirty="0">
+              <a:rPr lang="en-US" sz="2800" dirty="0">
                 <a:solidFill>
                   <a:srgbClr val="24313F"/>
                 </a:solidFill>
@@ -2690,7 +2778,7 @@
               </a:rPr>
               <a:t>One institution, tracked to Paper 2</a:t>
             </a:r>
-            <a:endParaRPr lang="en-US" sz="3000" dirty="0"/>
+            <a:endParaRPr lang="en-US" sz="2800" dirty="0"/>
           </a:p>
         </p:txBody>
       </p:sp>
@@ -2702,8 +2790,8 @@
         </p:nvSpPr>
         <p:spPr>
           <a:xfrm>
-            <a:off x="822960" y="1783080"/>
-            <a:ext cx="640080" cy="457200"/>
+            <a:off x="822960" y="1737360"/>
+            <a:ext cx="594360" cy="457200"/>
           </a:xfrm>
           <a:prstGeom prst="rect">
             <a:avLst/>
@@ -2719,7 +2807,7 @@
               <a:buNone/>
             </a:pPr>
             <a:r>
-              <a:rPr lang="en-US" sz="1700" dirty="0">
+              <a:rPr lang="en-US" sz="1600" dirty="0">
                 <a:solidFill>
                   <a:srgbClr val="A3C1AD"/>
                 </a:solidFill>
@@ -2729,7 +2817,7 @@
               </a:rPr>
               <a:t>01</a:t>
             </a:r>
-            <a:endParaRPr lang="en-US" sz="1700" dirty="0"/>
+            <a:endParaRPr lang="en-US" sz="1600" dirty="0"/>
           </a:p>
         </p:txBody>
       </p:sp>
@@ -2741,8 +2829,8 @@
         </p:nvSpPr>
         <p:spPr>
           <a:xfrm>
-            <a:off x="1463040" y="1783080"/>
-            <a:ext cx="4480560" cy="457200"/>
+            <a:off x="1417320" y="1737360"/>
+            <a:ext cx="6309360" cy="457200"/>
           </a:xfrm>
           <a:prstGeom prst="rect">
             <a:avLst/>
@@ -2758,7 +2846,7 @@
               <a:buNone/>
             </a:pPr>
             <a:r>
-              <a:rPr lang="en-US" sz="1650" dirty="0">
+              <a:rPr lang="en-US" sz="1550" dirty="0">
                 <a:solidFill>
                   <a:srgbClr val="24313F"/>
                 </a:solidFill>
@@ -2768,7 +2856,7 @@
               </a:rPr>
               <a:t>Identity and ownership</a:t>
             </a:r>
-            <a:endParaRPr lang="en-US" sz="1650" dirty="0"/>
+            <a:endParaRPr lang="en-US" sz="1550" dirty="0"/>
           </a:p>
         </p:txBody>
       </p:sp>
@@ -2780,8 +2868,8 @@
         </p:nvSpPr>
         <p:spPr>
           <a:xfrm>
-            <a:off x="822960" y="2313432"/>
-            <a:ext cx="5029200" cy="0"/>
+            <a:off x="822960" y="2212848"/>
+            <a:ext cx="6766560" cy="0"/>
           </a:xfrm>
           <a:prstGeom prst="line">
             <a:avLst/>
@@ -2803,8 +2891,8 @@
         </p:nvSpPr>
         <p:spPr>
           <a:xfrm>
-            <a:off x="822960" y="2441448"/>
-            <a:ext cx="640080" cy="457200"/>
+            <a:off x="822960" y="2249424"/>
+            <a:ext cx="594360" cy="457200"/>
           </a:xfrm>
           <a:prstGeom prst="rect">
             <a:avLst/>
@@ -2820,7 +2908,7 @@
               <a:buNone/>
             </a:pPr>
             <a:r>
-              <a:rPr lang="en-US" sz="1700" dirty="0">
+              <a:rPr lang="en-US" sz="1600" dirty="0">
                 <a:solidFill>
                   <a:srgbClr val="A3C1AD"/>
                 </a:solidFill>
@@ -2830,7 +2918,7 @@
               </a:rPr>
               <a:t>02</a:t>
             </a:r>
-            <a:endParaRPr lang="en-US" sz="1700" dirty="0"/>
+            <a:endParaRPr lang="en-US" sz="1600" dirty="0"/>
           </a:p>
         </p:txBody>
       </p:sp>
@@ -2842,8 +2930,8 @@
         </p:nvSpPr>
         <p:spPr>
           <a:xfrm>
-            <a:off x="1463040" y="2441448"/>
-            <a:ext cx="4480560" cy="457200"/>
+            <a:off x="1417320" y="2249424"/>
+            <a:ext cx="6309360" cy="457200"/>
           </a:xfrm>
           <a:prstGeom prst="rect">
             <a:avLst/>
@@ -2859,7 +2947,7 @@
               <a:buNone/>
             </a:pPr>
             <a:r>
-              <a:rPr lang="en-US" sz="1650" dirty="0">
+              <a:rPr lang="en-US" sz="1550" dirty="0">
                 <a:solidFill>
                   <a:srgbClr val="24313F"/>
                 </a:solidFill>
@@ -2869,7 +2957,7 @@
               </a:rPr>
               <a:t>Production patterns</a:t>
             </a:r>
-            <a:endParaRPr lang="en-US" sz="1650" dirty="0"/>
+            <a:endParaRPr lang="en-US" sz="1550" dirty="0"/>
           </a:p>
         </p:txBody>
       </p:sp>
@@ -2881,8 +2969,8 @@
         </p:nvSpPr>
         <p:spPr>
           <a:xfrm>
-            <a:off x="822960" y="2971800"/>
-            <a:ext cx="5029200" cy="0"/>
+            <a:off x="822960" y="2724912"/>
+            <a:ext cx="6766560" cy="0"/>
           </a:xfrm>
           <a:prstGeom prst="line">
             <a:avLst/>
@@ -2904,8 +2992,8 @@
         </p:nvSpPr>
         <p:spPr>
           <a:xfrm>
-            <a:off x="822960" y="3099816"/>
-            <a:ext cx="640080" cy="457200"/>
+            <a:off x="822960" y="2761488"/>
+            <a:ext cx="594360" cy="457200"/>
           </a:xfrm>
           <a:prstGeom prst="rect">
             <a:avLst/>
@@ -2921,7 +3009,7 @@
               <a:buNone/>
             </a:pPr>
             <a:r>
-              <a:rPr lang="en-US" sz="1700" dirty="0">
+              <a:rPr lang="en-US" sz="1600" dirty="0">
                 <a:solidFill>
                   <a:srgbClr val="A3C1AD"/>
                 </a:solidFill>
@@ -2931,7 +3019,7 @@
               </a:rPr>
               <a:t>03</a:t>
             </a:r>
-            <a:endParaRPr lang="en-US" sz="1700" dirty="0"/>
+            <a:endParaRPr lang="en-US" sz="1600" dirty="0"/>
           </a:p>
         </p:txBody>
       </p:sp>
@@ -2943,8 +3031,8 @@
         </p:nvSpPr>
         <p:spPr>
           <a:xfrm>
-            <a:off x="1463040" y="3099816"/>
-            <a:ext cx="4480560" cy="457200"/>
+            <a:off x="1417320" y="2761488"/>
+            <a:ext cx="6309360" cy="457200"/>
           </a:xfrm>
           <a:prstGeom prst="rect">
             <a:avLst/>
@@ -2960,7 +3048,7 @@
               <a:buNone/>
             </a:pPr>
             <a:r>
-              <a:rPr lang="en-US" sz="1650" dirty="0">
+              <a:rPr lang="en-US" sz="1550" dirty="0">
                 <a:solidFill>
                   <a:srgbClr val="24313F"/>
                 </a:solidFill>
@@ -2970,7 +3058,7 @@
               </a:rPr>
               <a:t>Distribution and marketing</a:t>
             </a:r>
-            <a:endParaRPr lang="en-US" sz="1650" dirty="0"/>
+            <a:endParaRPr lang="en-US" sz="1550" dirty="0"/>
           </a:p>
         </p:txBody>
       </p:sp>
@@ -2982,8 +3070,8 @@
         </p:nvSpPr>
         <p:spPr>
           <a:xfrm>
-            <a:off x="822960" y="3630168"/>
-            <a:ext cx="5029200" cy="0"/>
+            <a:off x="822960" y="3236976"/>
+            <a:ext cx="6766560" cy="0"/>
           </a:xfrm>
           <a:prstGeom prst="line">
             <a:avLst/>
@@ -3005,8 +3093,8 @@
         </p:nvSpPr>
         <p:spPr>
           <a:xfrm>
-            <a:off x="822960" y="3758184"/>
-            <a:ext cx="640080" cy="457200"/>
+            <a:off x="822960" y="3273552"/>
+            <a:ext cx="594360" cy="457200"/>
           </a:xfrm>
           <a:prstGeom prst="rect">
             <a:avLst/>
@@ -3022,7 +3110,7 @@
               <a:buNone/>
             </a:pPr>
             <a:r>
-              <a:rPr lang="en-US" sz="1700" dirty="0">
+              <a:rPr lang="en-US" sz="1600" dirty="0">
                 <a:solidFill>
                   <a:srgbClr val="A3C1AD"/>
                 </a:solidFill>
@@ -3032,7 +3120,7 @@
               </a:rPr>
               <a:t>04</a:t>
             </a:r>
-            <a:endParaRPr lang="en-US" sz="1700" dirty="0"/>
+            <a:endParaRPr lang="en-US" sz="1600" dirty="0"/>
           </a:p>
         </p:txBody>
       </p:sp>
@@ -3044,8 +3132,8 @@
         </p:nvSpPr>
         <p:spPr>
           <a:xfrm>
-            <a:off x="1463040" y="3758184"/>
-            <a:ext cx="4480560" cy="457200"/>
+            <a:off x="1417320" y="3273552"/>
+            <a:ext cx="6309360" cy="457200"/>
           </a:xfrm>
           <a:prstGeom prst="rect">
             <a:avLst/>
@@ -3061,7 +3149,7 @@
               <a:buNone/>
             </a:pPr>
             <a:r>
-              <a:rPr lang="en-US" sz="1650" dirty="0">
+              <a:rPr lang="en-US" sz="1550" dirty="0">
                 <a:solidFill>
                   <a:srgbClr val="24313F"/>
                 </a:solidFill>
@@ -3071,7 +3159,7 @@
               </a:rPr>
               <a:t>Audience and consumption</a:t>
             </a:r>
-            <a:endParaRPr lang="en-US" sz="1650" dirty="0"/>
+            <a:endParaRPr lang="en-US" sz="1550" dirty="0"/>
           </a:p>
         </p:txBody>
       </p:sp>
@@ -3083,8 +3171,8 @@
         </p:nvSpPr>
         <p:spPr>
           <a:xfrm>
-            <a:off x="822960" y="4288536"/>
-            <a:ext cx="5029200" cy="0"/>
+            <a:off x="822960" y="3749040"/>
+            <a:ext cx="6766560" cy="0"/>
           </a:xfrm>
           <a:prstGeom prst="line">
             <a:avLst/>
@@ -3106,8 +3194,8 @@
         </p:nvSpPr>
         <p:spPr>
           <a:xfrm>
-            <a:off x="6217920" y="1783080"/>
-            <a:ext cx="640080" cy="457200"/>
+            <a:off x="822960" y="3785616"/>
+            <a:ext cx="594360" cy="457200"/>
           </a:xfrm>
           <a:prstGeom prst="rect">
             <a:avLst/>
@@ -3123,7 +3211,7 @@
               <a:buNone/>
             </a:pPr>
             <a:r>
-              <a:rPr lang="en-US" sz="1700" dirty="0">
+              <a:rPr lang="en-US" sz="1600" dirty="0">
                 <a:solidFill>
                   <a:srgbClr val="A3C1AD"/>
                 </a:solidFill>
@@ -3133,7 +3221,7 @@
               </a:rPr>
               <a:t>05</a:t>
             </a:r>
-            <a:endParaRPr lang="en-US" sz="1700" dirty="0"/>
+            <a:endParaRPr lang="en-US" sz="1600" dirty="0"/>
           </a:p>
         </p:txBody>
       </p:sp>
@@ -3145,8 +3233,8 @@
         </p:nvSpPr>
         <p:spPr>
           <a:xfrm>
-            <a:off x="6858000" y="1783080"/>
-            <a:ext cx="4480560" cy="457200"/>
+            <a:off x="1417320" y="3785616"/>
+            <a:ext cx="6309360" cy="457200"/>
           </a:xfrm>
           <a:prstGeom prst="rect">
             <a:avLst/>
@@ -3162,7 +3250,7 @@
               <a:buNone/>
             </a:pPr>
             <a:r>
-              <a:rPr lang="en-US" sz="1650" dirty="0">
+              <a:rPr lang="en-US" sz="1550" dirty="0">
                 <a:solidFill>
                   <a:srgbClr val="24313F"/>
                 </a:solidFill>
@@ -3172,7 +3260,7 @@
               </a:rPr>
               <a:t>Regulation</a:t>
             </a:r>
-            <a:endParaRPr lang="en-US" sz="1650" dirty="0"/>
+            <a:endParaRPr lang="en-US" sz="1550" dirty="0"/>
           </a:p>
         </p:txBody>
       </p:sp>
@@ -3184,8 +3272,8 @@
         </p:nvSpPr>
         <p:spPr>
           <a:xfrm>
-            <a:off x="6217920" y="2313432"/>
-            <a:ext cx="5029200" cy="0"/>
+            <a:off x="822960" y="4261104"/>
+            <a:ext cx="6766560" cy="0"/>
           </a:xfrm>
           <a:prstGeom prst="line">
             <a:avLst/>
@@ -3207,8 +3295,8 @@
         </p:nvSpPr>
         <p:spPr>
           <a:xfrm>
-            <a:off x="6217920" y="2441448"/>
-            <a:ext cx="640080" cy="457200"/>
+            <a:off x="822960" y="4297680"/>
+            <a:ext cx="594360" cy="457200"/>
           </a:xfrm>
           <a:prstGeom prst="rect">
             <a:avLst/>
@@ -3224,7 +3312,7 @@
               <a:buNone/>
             </a:pPr>
             <a:r>
-              <a:rPr lang="en-US" sz="1700" dirty="0">
+              <a:rPr lang="en-US" sz="1600" dirty="0">
                 <a:solidFill>
                   <a:srgbClr val="A3C1AD"/>
                 </a:solidFill>
@@ -3234,7 +3322,7 @@
               </a:rPr>
               <a:t>06</a:t>
             </a:r>
-            <a:endParaRPr lang="en-US" sz="1700" dirty="0"/>
+            <a:endParaRPr lang="en-US" sz="1600" dirty="0"/>
           </a:p>
         </p:txBody>
       </p:sp>
@@ -3246,8 +3334,8 @@
         </p:nvSpPr>
         <p:spPr>
           <a:xfrm>
-            <a:off x="6858000" y="2441448"/>
-            <a:ext cx="4480560" cy="457200"/>
+            <a:off x="1417320" y="4297680"/>
+            <a:ext cx="6309360" cy="457200"/>
           </a:xfrm>
           <a:prstGeom prst="rect">
             <a:avLst/>
@@ -3263,7 +3351,7 @@
               <a:buNone/>
             </a:pPr>
             <a:r>
-              <a:rPr lang="en-US" sz="1650" dirty="0">
+              <a:rPr lang="en-US" sz="1550" dirty="0">
                 <a:solidFill>
                   <a:srgbClr val="24313F"/>
                 </a:solidFill>
@@ -3273,7 +3361,7 @@
               </a:rPr>
               <a:t>Technology</a:t>
             </a:r>
-            <a:endParaRPr lang="en-US" sz="1650" dirty="0"/>
+            <a:endParaRPr lang="en-US" sz="1550" dirty="0"/>
           </a:p>
         </p:txBody>
       </p:sp>
@@ -3285,8 +3373,8 @@
         </p:nvSpPr>
         <p:spPr>
           <a:xfrm>
-            <a:off x="6217920" y="2971800"/>
-            <a:ext cx="5029200" cy="0"/>
+            <a:off x="822960" y="4773168"/>
+            <a:ext cx="6766560" cy="0"/>
           </a:xfrm>
           <a:prstGeom prst="line">
             <a:avLst/>
@@ -3308,8 +3396,8 @@
         </p:nvSpPr>
         <p:spPr>
           <a:xfrm>
-            <a:off x="6217920" y="3099816"/>
-            <a:ext cx="640080" cy="457200"/>
+            <a:off x="822960" y="4809744"/>
+            <a:ext cx="594360" cy="457200"/>
           </a:xfrm>
           <a:prstGeom prst="rect">
             <a:avLst/>
@@ -3325,7 +3413,7 @@
               <a:buNone/>
             </a:pPr>
             <a:r>
-              <a:rPr lang="en-US" sz="1700" dirty="0">
+              <a:rPr lang="en-US" sz="1600" dirty="0">
                 <a:solidFill>
                   <a:srgbClr val="A3C1AD"/>
                 </a:solidFill>
@@ -3335,7 +3423,7 @@
               </a:rPr>
               <a:t>07</a:t>
             </a:r>
-            <a:endParaRPr lang="en-US" sz="1700" dirty="0"/>
+            <a:endParaRPr lang="en-US" sz="1600" dirty="0"/>
           </a:p>
         </p:txBody>
       </p:sp>
@@ -3347,8 +3435,8 @@
         </p:nvSpPr>
         <p:spPr>
           <a:xfrm>
-            <a:off x="6858000" y="3099816"/>
-            <a:ext cx="4480560" cy="457200"/>
+            <a:off x="1417320" y="4809744"/>
+            <a:ext cx="6309360" cy="457200"/>
           </a:xfrm>
           <a:prstGeom prst="rect">
             <a:avLst/>
@@ -3364,7 +3452,7 @@
               <a:buNone/>
             </a:pPr>
             <a:r>
-              <a:rPr lang="en-US" sz="1650" dirty="0">
+              <a:rPr lang="en-US" sz="1550" dirty="0">
                 <a:solidFill>
                   <a:srgbClr val="24313F"/>
                 </a:solidFill>
@@ -3374,7 +3462,7 @@
               </a:rPr>
               <a:t>Dated key facts</a:t>
             </a:r>
-            <a:endParaRPr lang="en-US" sz="1650" dirty="0"/>
+            <a:endParaRPr lang="en-US" sz="1550" dirty="0"/>
           </a:p>
         </p:txBody>
       </p:sp>
@@ -3386,8 +3474,8 @@
         </p:nvSpPr>
         <p:spPr>
           <a:xfrm>
-            <a:off x="6217920" y="3630168"/>
-            <a:ext cx="5029200" cy="0"/>
+            <a:off x="822960" y="5285232"/>
+            <a:ext cx="6766560" cy="0"/>
           </a:xfrm>
           <a:prstGeom prst="line">
             <a:avLst/>
@@ -3409,8 +3497,8 @@
         </p:nvSpPr>
         <p:spPr>
           <a:xfrm>
-            <a:off x="6217920" y="3758184"/>
-            <a:ext cx="640080" cy="457200"/>
+            <a:off x="822960" y="5321808"/>
+            <a:ext cx="594360" cy="457200"/>
           </a:xfrm>
           <a:prstGeom prst="rect">
             <a:avLst/>
@@ -3426,7 +3514,7 @@
               <a:buNone/>
             </a:pPr>
             <a:r>
-              <a:rPr lang="en-US" sz="1700" dirty="0">
+              <a:rPr lang="en-US" sz="1600" dirty="0">
                 <a:solidFill>
                   <a:srgbClr val="A3C1AD"/>
                 </a:solidFill>
@@ -3436,7 +3524,7 @@
               </a:rPr>
               <a:t>08</a:t>
             </a:r>
-            <a:endParaRPr lang="en-US" sz="1700" dirty="0"/>
+            <a:endParaRPr lang="en-US" sz="1600" dirty="0"/>
           </a:p>
         </p:txBody>
       </p:sp>
@@ -3448,8 +3536,8 @@
         </p:nvSpPr>
         <p:spPr>
           <a:xfrm>
-            <a:off x="6858000" y="3758184"/>
-            <a:ext cx="4480560" cy="457200"/>
+            <a:off x="1417320" y="5321808"/>
+            <a:ext cx="6309360" cy="457200"/>
           </a:xfrm>
           <a:prstGeom prst="rect">
             <a:avLst/>
@@ -3465,7 +3553,7 @@
               <a:buNone/>
             </a:pPr>
             <a:r>
-              <a:rPr lang="en-US" sz="1650" dirty="0">
+              <a:rPr lang="en-US" sz="1550" dirty="0">
                 <a:solidFill>
                   <a:srgbClr val="24313F"/>
                 </a:solidFill>
@@ -3475,7 +3563,7 @@
               </a:rPr>
               <a:t>Coverage against the four Key Concepts</a:t>
             </a:r>
-            <a:endParaRPr lang="en-US" sz="1650" dirty="0"/>
+            <a:endParaRPr lang="en-US" sz="1550" dirty="0"/>
           </a:p>
         </p:txBody>
       </p:sp>
@@ -3487,8 +3575,8 @@
         </p:nvSpPr>
         <p:spPr>
           <a:xfrm>
-            <a:off x="6217920" y="4288536"/>
-            <a:ext cx="5029200" cy="0"/>
+            <a:off x="822960" y="5797296"/>
+            <a:ext cx="6766560" cy="0"/>
           </a:xfrm>
           <a:prstGeom prst="line">
             <a:avLst/>
@@ -3504,58 +3592,21 @@
       </p:sp>
       <p:sp>
         <p:nvSpPr>
-          <p:cNvPr id="30" name="Text 28"/>
-          <p:cNvSpPr/>
-          <p:nvPr/>
-        </p:nvSpPr>
-        <p:spPr>
-          <a:xfrm>
-            <a:off x="822960" y="4754880"/>
-            <a:ext cx="10543032" cy="457200"/>
-          </a:xfrm>
-          <a:prstGeom prst="rect">
-            <a:avLst/>
-          </a:prstGeom>
-          <a:noFill/>
-          <a:ln/>
-        </p:spPr>
-        <p:txBody>
-          <a:bodyPr wrap="square" lIns="0" tIns="0" rIns="0" bIns="0" rtlCol="0" anchor="ctr"/>
-          <a:lstStyle/>
-          <a:p>
-            <a:pPr indent="0" marL="0">
-              <a:buNone/>
-            </a:pPr>
-            <a:r>
-              <a:rPr lang="en-US" sz="1200" i="1" dirty="0">
-                <a:solidFill>
-                  <a:srgbClr val="7A7F72"/>
-                </a:solidFill>
-                <a:latin typeface="Arial" pitchFamily="34" charset="0"/>
-                <a:ea typeface="Arial" pitchFamily="34" charset="-122"/>
-                <a:cs typeface="Arial" pitchFamily="34" charset="-120"/>
-              </a:rPr>
-              <a:t>Entries dated from today: the 5-year contemporaneity rule starts mattering now, and it is what makes the document Paper 2-legal in May.</a:t>
-            </a:r>
-            <a:endParaRPr lang="en-US" sz="1200" dirty="0"/>
-          </a:p>
-        </p:txBody>
-      </p:sp>
-      <p:sp>
-        <p:nvSpPr>
-          <p:cNvPr id="31" name="Shape 29"/>
-          <p:cNvSpPr/>
-          <p:nvPr/>
-        </p:nvSpPr>
-        <p:spPr>
-          <a:xfrm>
-            <a:off x="822960" y="6382512"/>
-            <a:ext cx="10543032" cy="0"/>
-          </a:xfrm>
-          <a:prstGeom prst="line">
-            <a:avLst/>
-          </a:prstGeom>
-          <a:noFill/>
+          <p:cNvPr id="30" name="Shape 28"/>
+          <p:cNvSpPr/>
+          <p:nvPr/>
+        </p:nvSpPr>
+        <p:spPr>
+          <a:xfrm>
+            <a:off x="7452360" y="1097280"/>
+            <a:ext cx="3931920" cy="4663440"/>
+          </a:xfrm>
+          <a:prstGeom prst="rect">
+            <a:avLst/>
+          </a:prstGeom>
+          <a:solidFill>
+            <a:srgbClr val="FAF8F1"/>
+          </a:solidFill>
           <a:ln w="9525">
             <a:solidFill>
               <a:srgbClr val="D9D4C4"/>
@@ -3564,32 +3615,56 @@
           </a:ln>
         </p:spPr>
       </p:sp>
-      <p:sp>
-        <p:nvSpPr>
-          <p:cNvPr id="32" name="Text 30"/>
-          <p:cNvSpPr/>
-          <p:nvPr/>
-        </p:nvSpPr>
-        <p:spPr>
-          <a:xfrm>
-            <a:off x="822960" y="6419088"/>
-            <a:ext cx="7315200" cy="274320"/>
-          </a:xfrm>
-          <a:prstGeom prst="rect">
-            <a:avLst/>
-          </a:prstGeom>
-          <a:noFill/>
-          <a:ln/>
-        </p:spPr>
-        <p:txBody>
-          <a:bodyPr wrap="square" lIns="0" tIns="0" rIns="0" bIns="0" rtlCol="0" anchor="ctr"/>
-          <a:lstStyle/>
-          <a:p>
-            <a:pPr indent="0" marL="0">
-              <a:buNone/>
-            </a:pPr>
-            <a:r>
-              <a:rPr lang="en-US" sz="900" spc="150" kern="0" dirty="0">
+      <p:pic>
+        <p:nvPicPr>
+          <p:cNvPr id="31" name="Image 0" descr="/Users/dogan/Documents/Vaults/Courses/wiki/classes/media-studies/decks/_build/img/ws53.jpg">    </p:cNvPr>
+          <p:cNvPicPr>
+            <a:picLocks noChangeAspect="1"/>
+          </p:cNvPicPr>
+          <p:nvPr/>
+        </p:nvPicPr>
+        <p:blipFill>
+          <a:blip r:embed="rId1"/>
+          <a:stretch>
+            <a:fillRect/>
+          </a:stretch>
+        </p:blipFill>
+        <p:spPr>
+          <a:xfrm>
+            <a:off x="7580376" y="2130102"/>
+            <a:ext cx="3675888" cy="2597795"/>
+          </a:xfrm>
+          <a:prstGeom prst="rect">
+            <a:avLst/>
+          </a:prstGeom>
+        </p:spPr>
+      </p:pic>
+      <p:sp>
+        <p:nvSpPr>
+          <p:cNvPr id="32" name="Text 29"/>
+          <p:cNvSpPr/>
+          <p:nvPr/>
+        </p:nvSpPr>
+        <p:spPr>
+          <a:xfrm>
+            <a:off x="7452360" y="5779008"/>
+            <a:ext cx="3931920" cy="320040"/>
+          </a:xfrm>
+          <a:prstGeom prst="rect">
+            <a:avLst/>
+          </a:prstGeom>
+          <a:noFill/>
+          <a:ln/>
+        </p:spPr>
+        <p:txBody>
+          <a:bodyPr wrap="square" lIns="0" tIns="0" rIns="0" bIns="0" rtlCol="0" anchor="ctr"/>
+          <a:lstStyle/>
+          <a:p>
+            <a:pPr algn="ctr" indent="0" marL="0">
+              <a:buNone/>
+            </a:pPr>
+            <a:r>
+              <a:rPr lang="en-US" sz="1000" dirty="0">
                 <a:solidFill>
                   <a:srgbClr val="7A7F72"/>
                 </a:solidFill>
@@ -3597,6 +3672,107 @@
                 <a:ea typeface="Arial" pitchFamily="34" charset="-122"/>
                 <a:cs typeface="Arial" pitchFamily="34" charset="-120"/>
               </a:rPr>
+              <a:t>WS 5.3, the National Geographic sheet: the model of what good entries become</a:t>
+            </a:r>
+            <a:endParaRPr lang="en-US" sz="1000" dirty="0"/>
+          </a:p>
+        </p:txBody>
+      </p:sp>
+      <p:sp>
+        <p:nvSpPr>
+          <p:cNvPr id="33" name="Text 30"/>
+          <p:cNvSpPr/>
+          <p:nvPr/>
+        </p:nvSpPr>
+        <p:spPr>
+          <a:xfrm>
+            <a:off x="822960" y="5897880"/>
+            <a:ext cx="6766560" cy="365760"/>
+          </a:xfrm>
+          <a:prstGeom prst="rect">
+            <a:avLst/>
+          </a:prstGeom>
+          <a:noFill/>
+          <a:ln/>
+        </p:spPr>
+        <p:txBody>
+          <a:bodyPr wrap="square" lIns="0" tIns="0" rIns="0" bIns="0" rtlCol="0" anchor="ctr"/>
+          <a:lstStyle/>
+          <a:p>
+            <a:pPr indent="0" marL="0">
+              <a:buNone/>
+            </a:pPr>
+            <a:r>
+              <a:rPr lang="en-US" sz="1150" i="1" dirty="0">
+                <a:solidFill>
+                  <a:srgbClr val="7A7F72"/>
+                </a:solidFill>
+                <a:latin typeface="Arial" pitchFamily="34" charset="0"/>
+                <a:ea typeface="Arial" pitchFamily="34" charset="-122"/>
+                <a:cs typeface="Arial" pitchFamily="34" charset="-120"/>
+              </a:rPr>
+              <a:t>Entries dated from today: the 5-year contemporaneity rule starts mattering now.</a:t>
+            </a:r>
+            <a:endParaRPr lang="en-US" sz="1150" dirty="0"/>
+          </a:p>
+        </p:txBody>
+      </p:sp>
+      <p:sp>
+        <p:nvSpPr>
+          <p:cNvPr id="34" name="Shape 31"/>
+          <p:cNvSpPr/>
+          <p:nvPr/>
+        </p:nvSpPr>
+        <p:spPr>
+          <a:xfrm>
+            <a:off x="822960" y="6382512"/>
+            <a:ext cx="10543032" cy="0"/>
+          </a:xfrm>
+          <a:prstGeom prst="line">
+            <a:avLst/>
+          </a:prstGeom>
+          <a:noFill/>
+          <a:ln w="9525">
+            <a:solidFill>
+              <a:srgbClr val="D9D4C4"/>
+            </a:solidFill>
+            <a:prstDash val="solid"/>
+          </a:ln>
+        </p:spPr>
+      </p:sp>
+      <p:sp>
+        <p:nvSpPr>
+          <p:cNvPr id="35" name="Text 32"/>
+          <p:cNvSpPr/>
+          <p:nvPr/>
+        </p:nvSpPr>
+        <p:spPr>
+          <a:xfrm>
+            <a:off x="822960" y="6419088"/>
+            <a:ext cx="7315200" cy="274320"/>
+          </a:xfrm>
+          <a:prstGeom prst="rect">
+            <a:avLst/>
+          </a:prstGeom>
+          <a:noFill/>
+          <a:ln/>
+        </p:spPr>
+        <p:txBody>
+          <a:bodyPr wrap="square" lIns="0" tIns="0" rIns="0" bIns="0" rtlCol="0" anchor="ctr"/>
+          <a:lstStyle/>
+          <a:p>
+            <a:pPr indent="0" marL="0">
+              <a:buNone/>
+            </a:pPr>
+            <a:r>
+              <a:rPr lang="en-US" sz="900" spc="150" kern="0" dirty="0">
+                <a:solidFill>
+                  <a:srgbClr val="7A7F72"/>
+                </a:solidFill>
+                <a:latin typeface="Arial" pitchFamily="34" charset="0"/>
+                <a:ea typeface="Arial" pitchFamily="34" charset="-122"/>
+                <a:cs typeface="Arial" pitchFamily="34" charset="-120"/>
+              </a:rPr>
               <a:t>MEDIA STUDIES 9607 · SEMESTER I</a:t>
             </a:r>
             <a:endParaRPr lang="en-US" sz="900" dirty="0"/>
@@ -3605,7 +3781,7 @@
       </p:sp>
       <p:sp>
         <p:nvSpPr>
-          <p:cNvPr id="33" name="Text 31"/>
+          <p:cNvPr id="36" name="Text 33"/>
           <p:cNvSpPr/>
           <p:nvPr/>
         </p:nvSpPr>
@@ -3636,7 +3812,7 @@
                 <a:ea typeface="Georgia" pitchFamily="34" charset="-122"/>
                 <a:cs typeface="Georgia" pitchFamily="34" charset="-120"/>
               </a:rPr>
-              <a:t>06</a:t>
+              <a:t>08</a:t>
             </a:r>
             <a:endParaRPr lang="en-US" sz="1600" dirty="0"/>
           </a:p>
@@ -3707,7 +3883,7 @@
                 <a:ea typeface="Arial" pitchFamily="34" charset="-122"/>
                 <a:cs typeface="Arial" pitchFamily="34" charset="-120"/>
               </a:rPr>
-              <a:t>DELIVERABLE · CS12</a:t>
+              <a:t>THE PAPER ITSELF</a:t>
             </a:r>
             <a:endParaRPr lang="en-US" sz="1100" dirty="0"/>
           </a:p>
@@ -3746,7 +3922,7 @@
                 <a:ea typeface="Arial" pitchFamily="34" charset="-122"/>
                 <a:cs typeface="Arial" pitchFamily="34" charset="-120"/>
               </a:rPr>
-              <a:t>SCAFFOLD REMOVED NEXT WEEK</a:t>
+              <a:t>THIS LESSON'S TWO TOPICS, AS EXAM QUESTIONS</a:t>
             </a:r>
             <a:endParaRPr lang="en-US" sz="1100" dirty="0"/>
           </a:p>
@@ -3777,162 +3953,21 @@
       </p:sp>
       <p:sp>
         <p:nvSpPr>
-          <p:cNvPr id="5" name="Text 3"/>
-          <p:cNvSpPr/>
-          <p:nvPr/>
-        </p:nvSpPr>
-        <p:spPr>
-          <a:xfrm>
-            <a:off x="822960" y="1280160"/>
-            <a:ext cx="10543032" cy="914400"/>
-          </a:xfrm>
-          <a:prstGeom prst="rect">
-            <a:avLst/>
-          </a:prstGeom>
-          <a:noFill/>
-          <a:ln/>
-        </p:spPr>
-        <p:txBody>
-          <a:bodyPr wrap="square" lIns="0" tIns="0" rIns="0" bIns="0" rtlCol="0" anchor="ctr"/>
-          <a:lstStyle/>
-          <a:p>
-            <a:pPr indent="0" marL="0">
-              <a:buNone/>
-            </a:pPr>
-            <a:r>
-              <a:rPr lang="en-US" sz="3200" dirty="0">
-                <a:solidFill>
-                  <a:srgbClr val="24313F"/>
-                </a:solidFill>
-                <a:latin typeface="Georgia" pitchFamily="34" charset="0"/>
-                <a:ea typeface="Georgia" pitchFamily="34" charset="-122"/>
-                <a:cs typeface="Georgia" pitchFamily="34" charset="-120"/>
-              </a:rPr>
-              <a:t>Guided Section A, mark scheme open</a:t>
-            </a:r>
-            <a:endParaRPr lang="en-US" sz="3200" dirty="0"/>
-          </a:p>
-        </p:txBody>
-      </p:sp>
-      <p:sp>
-        <p:nvSpPr>
-          <p:cNvPr id="6" name="Shape 4"/>
-          <p:cNvSpPr/>
-          <p:nvPr/>
-        </p:nvSpPr>
-        <p:spPr>
-          <a:xfrm>
-            <a:off x="822960" y="2468880"/>
-            <a:ext cx="914400" cy="0"/>
-          </a:xfrm>
-          <a:prstGeom prst="line">
-            <a:avLst/>
-          </a:prstGeom>
-          <a:noFill/>
-          <a:ln w="31750">
-            <a:solidFill>
-              <a:srgbClr val="8C3A38"/>
-            </a:solidFill>
-            <a:prstDash val="solid"/>
-          </a:ln>
-        </p:spPr>
-      </p:sp>
-      <p:sp>
-        <p:nvSpPr>
-          <p:cNvPr id="7" name="Text 5"/>
-          <p:cNvSpPr/>
-          <p:nvPr/>
-        </p:nvSpPr>
-        <p:spPr>
-          <a:xfrm>
-            <a:off x="822960" y="2697480"/>
-            <a:ext cx="9875520" cy="1828800"/>
-          </a:xfrm>
-          <a:prstGeom prst="rect">
-            <a:avLst/>
-          </a:prstGeom>
-          <a:noFill/>
-          <a:ln/>
-        </p:spPr>
-        <p:txBody>
-          <a:bodyPr wrap="square" lIns="0" tIns="0" rIns="0" bIns="0" rtlCol="0" anchor="t"/>
-          <a:lstStyle/>
-          <a:p>
-            <a:pPr indent="0" marL="0">
-              <a:lnSpc>
-                <a:spcPts val="2800"/>
-              </a:lnSpc>
-              <a:buNone/>
-            </a:pPr>
-            <a:r>
-              <a:rPr lang="en-US" sz="2000" dirty="0">
-                <a:solidFill>
-                  <a:srgbClr val="24313F"/>
-                </a:solidFill>
-                <a:latin typeface="Georgia" pitchFamily="34" charset="0"/>
-                <a:ea typeface="Georgia" pitchFamily="34" charset="-122"/>
-                <a:cs typeface="Georgia" pitchFamily="34" charset="-120"/>
-              </a:rPr>
-              <a:t>A Section A response written with the mark scheme visible and consultable, part collaborative by design: the same format family as A4, with the scaffold removed next week. The find-your-unfed-criterion move sets each student's personal A4 target.</a:t>
-            </a:r>
-            <a:endParaRPr lang="en-US" sz="2000" dirty="0"/>
-          </a:p>
-        </p:txBody>
-      </p:sp>
-      <p:sp>
-        <p:nvSpPr>
-          <p:cNvPr id="8" name="Text 6"/>
-          <p:cNvSpPr/>
-          <p:nvPr/>
-        </p:nvSpPr>
-        <p:spPr>
-          <a:xfrm>
-            <a:off x="822960" y="4846320"/>
-            <a:ext cx="9875520" cy="457200"/>
-          </a:xfrm>
-          <a:prstGeom prst="rect">
-            <a:avLst/>
-          </a:prstGeom>
-          <a:noFill/>
-          <a:ln/>
-        </p:spPr>
-        <p:txBody>
-          <a:bodyPr wrap="square" lIns="0" tIns="0" rIns="0" bIns="0" rtlCol="0" anchor="ctr"/>
-          <a:lstStyle/>
-          <a:p>
-            <a:pPr indent="0" marL="0">
-              <a:buNone/>
-            </a:pPr>
-            <a:r>
-              <a:rPr lang="en-US" sz="1300" i="1" dirty="0">
-                <a:solidFill>
-                  <a:srgbClr val="7A7F72"/>
-                </a:solidFill>
-                <a:latin typeface="Arial" pitchFamily="34" charset="0"/>
-                <a:ea typeface="Arial" pitchFamily="34" charset="-122"/>
-                <a:cs typeface="Arial" pitchFamily="34" charset="-120"/>
-              </a:rPr>
-              <a:t>The case-study document feeds A4, the End of Term Exam, and Paper 2: the highest-leverage artifact this side of the blog.</a:t>
-            </a:r>
-            <a:endParaRPr lang="en-US" sz="1300" dirty="0"/>
-          </a:p>
-        </p:txBody>
-      </p:sp>
-      <p:sp>
-        <p:nvSpPr>
-          <p:cNvPr id="9" name="Shape 7"/>
-          <p:cNvSpPr/>
-          <p:nvPr/>
-        </p:nvSpPr>
-        <p:spPr>
-          <a:xfrm>
-            <a:off x="822960" y="6382512"/>
-            <a:ext cx="10543032" cy="0"/>
-          </a:xfrm>
-          <a:prstGeom prst="line">
-            <a:avLst/>
-          </a:prstGeom>
-          <a:noFill/>
+          <p:cNvPr id="5" name="Shape 3"/>
+          <p:cNvSpPr/>
+          <p:nvPr/>
+        </p:nvSpPr>
+        <p:spPr>
+          <a:xfrm>
+            <a:off x="822960" y="1051560"/>
+            <a:ext cx="4160520" cy="4937760"/>
+          </a:xfrm>
+          <a:prstGeom prst="rect">
+            <a:avLst/>
+          </a:prstGeom>
+          <a:solidFill>
+            <a:srgbClr val="FAF8F1"/>
+          </a:solidFill>
           <a:ln w="9525">
             <a:solidFill>
               <a:srgbClr val="D9D4C4"/>
@@ -3941,32 +3976,56 @@
           </a:ln>
         </p:spPr>
       </p:sp>
-      <p:sp>
-        <p:nvSpPr>
-          <p:cNvPr id="10" name="Text 8"/>
-          <p:cNvSpPr/>
-          <p:nvPr/>
-        </p:nvSpPr>
-        <p:spPr>
-          <a:xfrm>
-            <a:off x="822960" y="6419088"/>
-            <a:ext cx="7315200" cy="274320"/>
-          </a:xfrm>
-          <a:prstGeom prst="rect">
-            <a:avLst/>
-          </a:prstGeom>
-          <a:noFill/>
-          <a:ln/>
-        </p:spPr>
-        <p:txBody>
-          <a:bodyPr wrap="square" lIns="0" tIns="0" rIns="0" bIns="0" rtlCol="0" anchor="ctr"/>
-          <a:lstStyle/>
-          <a:p>
-            <a:pPr indent="0" marL="0">
-              <a:buNone/>
-            </a:pPr>
-            <a:r>
-              <a:rPr lang="en-US" sz="900" spc="150" kern="0" dirty="0">
+      <p:pic>
+        <p:nvPicPr>
+          <p:cNvPr id="6" name="Image 0" descr="/Users/dogan/Documents/Vaults/Courses/wiki/classes/media-studies/decks/_build/img/qp21-p2.jpg">    </p:cNvPr>
+          <p:cNvPicPr>
+            <a:picLocks noChangeAspect="1"/>
+          </p:cNvPicPr>
+          <p:nvPr/>
+        </p:nvPicPr>
+        <p:blipFill>
+          <a:blip r:embed="rId1"/>
+          <a:stretch>
+            <a:fillRect/>
+          </a:stretch>
+        </p:blipFill>
+        <p:spPr>
+          <a:xfrm>
+            <a:off x="1247902" y="1179576"/>
+            <a:ext cx="3310636" cy="4681728"/>
+          </a:xfrm>
+          <a:prstGeom prst="rect">
+            <a:avLst/>
+          </a:prstGeom>
+        </p:spPr>
+      </p:pic>
+      <p:sp>
+        <p:nvSpPr>
+          <p:cNvPr id="7" name="Text 4"/>
+          <p:cNvSpPr/>
+          <p:nvPr/>
+        </p:nvSpPr>
+        <p:spPr>
+          <a:xfrm>
+            <a:off x="822960" y="5989320"/>
+            <a:ext cx="4160520" cy="274320"/>
+          </a:xfrm>
+          <a:prstGeom prst="rect">
+            <a:avLst/>
+          </a:prstGeom>
+          <a:noFill/>
+          <a:ln/>
+        </p:spPr>
+        <p:txBody>
+          <a:bodyPr wrap="square" lIns="0" tIns="0" rIns="0" bIns="0" rtlCol="0" anchor="ctr"/>
+          <a:lstStyle/>
+          <a:p>
+            <a:pPr algn="ctr" indent="0" marL="0">
+              <a:buNone/>
+            </a:pPr>
+            <a:r>
+              <a:rPr lang="en-US" sz="1000" dirty="0">
                 <a:solidFill>
                   <a:srgbClr val="7A7F72"/>
                 </a:solidFill>
@@ -3974,46 +4033,215 @@
                 <a:ea typeface="Arial" pitchFamily="34" charset="-122"/>
                 <a:cs typeface="Arial" pitchFamily="34" charset="-120"/>
               </a:rPr>
-              <a:t>MEDIA STUDIES 9607 · SEMESTER I</a:t>
-            </a:r>
-            <a:endParaRPr lang="en-US" sz="900" dirty="0"/>
-          </a:p>
-        </p:txBody>
-      </p:sp>
-      <p:sp>
-        <p:nvSpPr>
-          <p:cNvPr id="11" name="Text 9"/>
-          <p:cNvSpPr/>
-          <p:nvPr/>
-        </p:nvSpPr>
-        <p:spPr>
-          <a:xfrm>
-            <a:off x="10268712" y="6355080"/>
-            <a:ext cx="1097280" cy="365760"/>
-          </a:xfrm>
-          <a:prstGeom prst="rect">
-            <a:avLst/>
-          </a:prstGeom>
-          <a:noFill/>
-          <a:ln/>
-        </p:spPr>
-        <p:txBody>
-          <a:bodyPr wrap="square" lIns="0" tIns="0" rIns="0" bIns="0" rtlCol="0" anchor="ctr"/>
-          <a:lstStyle/>
-          <a:p>
-            <a:pPr algn="r" indent="0" marL="0">
-              <a:buNone/>
-            </a:pPr>
-            <a:r>
-              <a:rPr lang="en-US" sz="1600" dirty="0">
-                <a:solidFill>
-                  <a:srgbClr val="A3C1AD"/>
+              <a:t>June 2024 Paper 2/21, page 2</a:t>
+            </a:r>
+            <a:endParaRPr lang="en-US" sz="1000" dirty="0"/>
+          </a:p>
+        </p:txBody>
+      </p:sp>
+      <p:sp>
+        <p:nvSpPr>
+          <p:cNvPr id="8" name="Text 5"/>
+          <p:cNvSpPr/>
+          <p:nvPr/>
+        </p:nvSpPr>
+        <p:spPr>
+          <a:xfrm>
+            <a:off x="5440680" y="1280160"/>
+            <a:ext cx="5943600" cy="822960"/>
+          </a:xfrm>
+          <a:prstGeom prst="rect">
+            <a:avLst/>
+          </a:prstGeom>
+          <a:noFill/>
+          <a:ln/>
+        </p:spPr>
+        <p:txBody>
+          <a:bodyPr wrap="square" lIns="0" tIns="0" rIns="0" bIns="0" rtlCol="0" anchor="ctr"/>
+          <a:lstStyle/>
+          <a:p>
+            <a:pPr indent="0" marL="0">
+              <a:lnSpc>
+                <a:spcPts val="3200"/>
+              </a:lnSpc>
+              <a:buNone/>
+            </a:pPr>
+            <a:r>
+              <a:rPr lang="en-US" sz="2800" dirty="0">
+                <a:solidFill>
+                  <a:srgbClr val="24313F"/>
                 </a:solidFill>
                 <a:latin typeface="Georgia" pitchFamily="34" charset="0"/>
                 <a:ea typeface="Georgia" pitchFamily="34" charset="-122"/>
                 <a:cs typeface="Georgia" pitchFamily="34" charset="-120"/>
               </a:rPr>
-              <a:t>07</a:t>
+              <a:t>Section B already knows this week</a:t>
+            </a:r>
+            <a:endParaRPr lang="en-US" sz="2800" dirty="0"/>
+          </a:p>
+        </p:txBody>
+      </p:sp>
+      <p:sp>
+        <p:nvSpPr>
+          <p:cNvPr id="9" name="Shape 6"/>
+          <p:cNvSpPr/>
+          <p:nvPr/>
+        </p:nvSpPr>
+        <p:spPr>
+          <a:xfrm>
+            <a:off x="5440680" y="2240280"/>
+            <a:ext cx="5897880" cy="0"/>
+          </a:xfrm>
+          <a:prstGeom prst="line">
+            <a:avLst/>
+          </a:prstGeom>
+          <a:noFill/>
+          <a:ln w="9525">
+            <a:solidFill>
+              <a:srgbClr val="D9D4C4"/>
+            </a:solidFill>
+            <a:prstDash val="solid"/>
+          </a:ln>
+        </p:spPr>
+      </p:sp>
+      <p:sp>
+        <p:nvSpPr>
+          <p:cNvPr id="10" name="Text 7"/>
+          <p:cNvSpPr/>
+          <p:nvPr/>
+        </p:nvSpPr>
+        <p:spPr>
+          <a:xfrm>
+            <a:off x="5440680" y="2423160"/>
+            <a:ext cx="5943600" cy="3017520"/>
+          </a:xfrm>
+          <a:prstGeom prst="rect">
+            <a:avLst/>
+          </a:prstGeom>
+          <a:noFill/>
+          <a:ln/>
+        </p:spPr>
+        <p:txBody>
+          <a:bodyPr wrap="square" lIns="0" tIns="0" rIns="0" bIns="0" rtlCol="0" anchor="t"/>
+          <a:lstStyle/>
+          <a:p>
+            <a:pPr indent="0" marL="0">
+              <a:lnSpc>
+                <a:spcPts val="2400"/>
+              </a:lnSpc>
+              <a:buNone/>
+            </a:pPr>
+            <a:r>
+              <a:rPr lang="en-US" sz="1650" dirty="0">
+                <a:solidFill>
+                  <a:srgbClr val="24313F"/>
+                </a:solidFill>
+                <a:latin typeface="Georgia" pitchFamily="34" charset="0"/>
+                <a:ea typeface="Georgia" pitchFamily="34" charset="-122"/>
+                <a:cs typeface="Georgia" pitchFamily="34" charset="-120"/>
+              </a:rPr>
+              <a:t>The two questions on the real June 2024 menu are exactly this lesson's two topics: analyse the relationship between media ownership and media content, or evaluate the ways audiences are active participants. Morley on Monday, ownership on Tuesday, and both were always Section B answers in waiting. The case-study document you opened today is the ammunition for either question.</a:t>
+            </a:r>
+            <a:endParaRPr lang="en-US" sz="1650" dirty="0"/>
+          </a:p>
+        </p:txBody>
+      </p:sp>
+      <p:sp>
+        <p:nvSpPr>
+          <p:cNvPr id="11" name="Shape 8"/>
+          <p:cNvSpPr/>
+          <p:nvPr/>
+        </p:nvSpPr>
+        <p:spPr>
+          <a:xfrm>
+            <a:off x="822960" y="6382512"/>
+            <a:ext cx="10543032" cy="0"/>
+          </a:xfrm>
+          <a:prstGeom prst="line">
+            <a:avLst/>
+          </a:prstGeom>
+          <a:noFill/>
+          <a:ln w="9525">
+            <a:solidFill>
+              <a:srgbClr val="D9D4C4"/>
+            </a:solidFill>
+            <a:prstDash val="solid"/>
+          </a:ln>
+        </p:spPr>
+      </p:sp>
+      <p:sp>
+        <p:nvSpPr>
+          <p:cNvPr id="12" name="Text 9"/>
+          <p:cNvSpPr/>
+          <p:nvPr/>
+        </p:nvSpPr>
+        <p:spPr>
+          <a:xfrm>
+            <a:off x="822960" y="6419088"/>
+            <a:ext cx="7315200" cy="274320"/>
+          </a:xfrm>
+          <a:prstGeom prst="rect">
+            <a:avLst/>
+          </a:prstGeom>
+          <a:noFill/>
+          <a:ln/>
+        </p:spPr>
+        <p:txBody>
+          <a:bodyPr wrap="square" lIns="0" tIns="0" rIns="0" bIns="0" rtlCol="0" anchor="ctr"/>
+          <a:lstStyle/>
+          <a:p>
+            <a:pPr indent="0" marL="0">
+              <a:buNone/>
+            </a:pPr>
+            <a:r>
+              <a:rPr lang="en-US" sz="900" spc="150" kern="0" dirty="0">
+                <a:solidFill>
+                  <a:srgbClr val="7A7F72"/>
+                </a:solidFill>
+                <a:latin typeface="Arial" pitchFamily="34" charset="0"/>
+                <a:ea typeface="Arial" pitchFamily="34" charset="-122"/>
+                <a:cs typeface="Arial" pitchFamily="34" charset="-120"/>
+              </a:rPr>
+              <a:t>MEDIA STUDIES 9607 · SEMESTER I</a:t>
+            </a:r>
+            <a:endParaRPr lang="en-US" sz="900" dirty="0"/>
+          </a:p>
+        </p:txBody>
+      </p:sp>
+      <p:sp>
+        <p:nvSpPr>
+          <p:cNvPr id="13" name="Text 10"/>
+          <p:cNvSpPr/>
+          <p:nvPr/>
+        </p:nvSpPr>
+        <p:spPr>
+          <a:xfrm>
+            <a:off x="10268712" y="6355080"/>
+            <a:ext cx="1097280" cy="365760"/>
+          </a:xfrm>
+          <a:prstGeom prst="rect">
+            <a:avLst/>
+          </a:prstGeom>
+          <a:noFill/>
+          <a:ln/>
+        </p:spPr>
+        <p:txBody>
+          <a:bodyPr wrap="square" lIns="0" tIns="0" rIns="0" bIns="0" rtlCol="0" anchor="ctr"/>
+          <a:lstStyle/>
+          <a:p>
+            <a:pPr algn="r" indent="0" marL="0">
+              <a:buNone/>
+            </a:pPr>
+            <a:r>
+              <a:rPr lang="en-US" sz="1600" dirty="0">
+                <a:solidFill>
+                  <a:srgbClr val="A3C1AD"/>
+                </a:solidFill>
+                <a:latin typeface="Georgia" pitchFamily="34" charset="0"/>
+                <a:ea typeface="Georgia" pitchFamily="34" charset="-122"/>
+                <a:cs typeface="Georgia" pitchFamily="34" charset="-120"/>
+              </a:rPr>
+              <a:t>09</a:t>
             </a:r>
             <a:endParaRPr lang="en-US" sz="1600" dirty="0"/>
           </a:p>
@@ -4309,7 +4537,7 @@
                 <a:ea typeface="Georgia" pitchFamily="34" charset="-122"/>
                 <a:cs typeface="Georgia" pitchFamily="34" charset="-120"/>
               </a:rPr>
-              <a:t>08</a:t>
+              <a:t>10</a:t>
             </a:r>
             <a:endParaRPr lang="en-US" sz="1600" dirty="0"/>
           </a:p>
@@ -5499,6 +5727,13 @@
 <file path=ppt/slides/slide5.xml><?xml version="1.0" encoding="utf-8"?>
 <p:sld xmlns:a="http://schemas.openxmlformats.org/drawingml/2006/main" xmlns:r="http://schemas.openxmlformats.org/officeDocument/2006/relationships" xmlns:p="http://schemas.openxmlformats.org/presentationml/2006/main">
   <p:cSld name="Slide 5">
+    <p:bg>
+      <p:bgPr>
+        <a:solidFill>
+          <a:srgbClr val="FAF8F1"/>
+        </a:solidFill>
+      </p:bgPr>
+    </p:bg>
     <p:spTree>
       <p:nvGrpSpPr>
         <p:cNvPr id="1" name=""/>
@@ -5513,9 +5748,135 @@
           <a:chExt cx="0" cy="0"/>
         </a:xfrm>
       </p:grpSpPr>
+      <p:sp>
+        <p:nvSpPr>
+          <p:cNvPr id="2" name="Text 0"/>
+          <p:cNvSpPr/>
+          <p:nvPr/>
+        </p:nvSpPr>
+        <p:spPr>
+          <a:xfrm>
+            <a:off x="822960" y="457200"/>
+            <a:ext cx="6400800" cy="274320"/>
+          </a:xfrm>
+          <a:prstGeom prst="rect">
+            <a:avLst/>
+          </a:prstGeom>
+          <a:noFill/>
+          <a:ln/>
+        </p:spPr>
+        <p:txBody>
+          <a:bodyPr wrap="square" lIns="0" tIns="0" rIns="0" bIns="0" rtlCol="0" anchor="ctr"/>
+          <a:lstStyle/>
+          <a:p>
+            <a:pPr algn="l" indent="0" marL="0">
+              <a:buNone/>
+            </a:pPr>
+            <a:r>
+              <a:rPr lang="en-US" sz="1100" b="1" spc="250" kern="0" dirty="0">
+                <a:solidFill>
+                  <a:srgbClr val="4A6B5D"/>
+                </a:solidFill>
+                <a:latin typeface="Arial" pitchFamily="34" charset="0"/>
+                <a:ea typeface="Arial" pitchFamily="34" charset="-122"/>
+                <a:cs typeface="Arial" pitchFamily="34" charset="-120"/>
+              </a:rPr>
+              <a:t>THE FRAME BELONGED TO THE PAYER</a:t>
+            </a:r>
+            <a:endParaRPr lang="en-US" sz="1100" dirty="0"/>
+          </a:p>
+        </p:txBody>
+      </p:sp>
+      <p:sp>
+        <p:nvSpPr>
+          <p:cNvPr id="3" name="Text 1"/>
+          <p:cNvSpPr/>
+          <p:nvPr/>
+        </p:nvSpPr>
+        <p:spPr>
+          <a:xfrm>
+            <a:off x="6793992" y="457200"/>
+            <a:ext cx="4572000" cy="274320"/>
+          </a:xfrm>
+          <a:prstGeom prst="rect">
+            <a:avLst/>
+          </a:prstGeom>
+          <a:noFill/>
+          <a:ln/>
+        </p:spPr>
+        <p:txBody>
+          <a:bodyPr wrap="square" lIns="0" tIns="0" rIns="0" bIns="0" rtlCol="0" anchor="ctr"/>
+          <a:lstStyle/>
+          <a:p>
+            <a:pPr algn="r" indent="0" marL="0">
+              <a:buNone/>
+            </a:pPr>
+            <a:r>
+              <a:rPr lang="en-US" sz="1100" b="1" spc="250" kern="0" dirty="0">
+                <a:solidFill>
+                  <a:srgbClr val="7A7F72"/>
+                </a:solidFill>
+                <a:latin typeface="Arial" pitchFamily="34" charset="0"/>
+                <a:ea typeface="Arial" pitchFamily="34" charset="-122"/>
+                <a:cs typeface="Arial" pitchFamily="34" charset="-120"/>
+              </a:rPr>
+              <a:t>1857 AS NOW</a:t>
+            </a:r>
+            <a:endParaRPr lang="en-US" sz="1100" dirty="0"/>
+          </a:p>
+        </p:txBody>
+      </p:sp>
+      <p:sp>
+        <p:nvSpPr>
+          <p:cNvPr id="4" name="Shape 2"/>
+          <p:cNvSpPr/>
+          <p:nvPr/>
+        </p:nvSpPr>
+        <p:spPr>
+          <a:xfrm>
+            <a:off x="822960" y="786384"/>
+            <a:ext cx="10543032" cy="0"/>
+          </a:xfrm>
+          <a:prstGeom prst="line">
+            <a:avLst/>
+          </a:prstGeom>
+          <a:noFill/>
+          <a:ln w="9525">
+            <a:solidFill>
+              <a:srgbClr val="D9D4C4"/>
+            </a:solidFill>
+            <a:prstDash val="solid"/>
+          </a:ln>
+        </p:spPr>
+      </p:sp>
+      <p:sp>
+        <p:nvSpPr>
+          <p:cNvPr id="5" name="Shape 3"/>
+          <p:cNvSpPr/>
+          <p:nvPr/>
+        </p:nvSpPr>
+        <p:spPr>
+          <a:xfrm>
+            <a:off x="822960" y="1051560"/>
+            <a:ext cx="6675120" cy="4663440"/>
+          </a:xfrm>
+          <a:prstGeom prst="rect">
+            <a:avLst/>
+          </a:prstGeom>
+          <a:solidFill>
+            <a:srgbClr val="FAF8F1"/>
+          </a:solidFill>
+          <a:ln w="9525">
+            <a:solidFill>
+              <a:srgbClr val="D9D4C4"/>
+            </a:solidFill>
+            <a:prstDash val="solid"/>
+          </a:ln>
+        </p:spPr>
+      </p:sp>
       <p:pic>
         <p:nvPicPr>
-          <p:cNvPr id="2" name="Image 0" descr="/Users/dogan/Documents/Vaults/Courses/wiki/classes/media-studies/decks/_build/img/crops/legray-emperor-table_a1777.jpg">    </p:cNvPr>
+          <p:cNvPr id="6" name="Image 0" descr="/Users/dogan/Documents/Vaults/Courses/wiki/classes/media-studies/decks/_build/img/legray-emperor-whole.jpg">    </p:cNvPr>
           <p:cNvPicPr>
             <a:picLocks noChangeAspect="1"/>
           </p:cNvPicPr>
@@ -5529,8 +5890,8 @@
         </p:blipFill>
         <p:spPr>
           <a:xfrm>
-            <a:off x="0" y="0"/>
-            <a:ext cx="12188952" cy="6858000"/>
+            <a:off x="1321610" y="1179576"/>
+            <a:ext cx="5677820" cy="4407408"/>
           </a:xfrm>
           <a:prstGeom prst="rect">
             <a:avLst/>
@@ -5539,101 +5900,174 @@
       </p:pic>
       <p:sp>
         <p:nvSpPr>
-          <p:cNvPr id="3" name="Shape 0"/>
-          <p:cNvSpPr/>
-          <p:nvPr/>
-        </p:nvSpPr>
-        <p:spPr>
-          <a:xfrm>
-            <a:off x="502920" y="502920"/>
-            <a:ext cx="5120640" cy="502920"/>
-          </a:xfrm>
-          <a:prstGeom prst="rect">
-            <a:avLst/>
-          </a:prstGeom>
-          <a:solidFill>
-            <a:srgbClr val="FAF8F1"/>
-          </a:solidFill>
-          <a:ln/>
-        </p:spPr>
-      </p:sp>
-      <p:sp>
-        <p:nvSpPr>
-          <p:cNvPr id="4" name="Text 1"/>
-          <p:cNvSpPr/>
-          <p:nvPr/>
-        </p:nvSpPr>
-        <p:spPr>
-          <a:xfrm>
-            <a:off x="704088" y="521208"/>
-            <a:ext cx="4846320" cy="274320"/>
-          </a:xfrm>
-          <a:prstGeom prst="rect">
-            <a:avLst/>
-          </a:prstGeom>
-          <a:noFill/>
-          <a:ln/>
-        </p:spPr>
-        <p:txBody>
-          <a:bodyPr wrap="square" lIns="0" tIns="0" rIns="0" bIns="0" rtlCol="0" anchor="ctr"/>
-          <a:lstStyle/>
-          <a:p>
-            <a:pPr algn="l" indent="0" marL="0">
-              <a:buNone/>
-            </a:pPr>
-            <a:r>
-              <a:rPr lang="en-US" sz="1100" b="1" spc="250" kern="0" dirty="0">
-                <a:solidFill>
-                  <a:srgbClr val="4A6B5D"/>
+          <p:cNvPr id="7" name="Text 4"/>
+          <p:cNvSpPr/>
+          <p:nvPr/>
+        </p:nvSpPr>
+        <p:spPr>
+          <a:xfrm>
+            <a:off x="822960" y="5760720"/>
+            <a:ext cx="6675120" cy="274320"/>
+          </a:xfrm>
+          <a:prstGeom prst="rect">
+            <a:avLst/>
+          </a:prstGeom>
+          <a:noFill/>
+          <a:ln/>
+        </p:spPr>
+        <p:txBody>
+          <a:bodyPr wrap="square" lIns="0" tIns="0" rIns="0" bIns="0" rtlCol="0" anchor="ctr"/>
+          <a:lstStyle/>
+          <a:p>
+            <a:pPr algn="ctr" indent="0" marL="0">
+              <a:buNone/>
+            </a:pPr>
+            <a:r>
+              <a:rPr lang="en-US" sz="950" dirty="0">
+                <a:solidFill>
+                  <a:srgbClr val="7A7F72"/>
                 </a:solidFill>
                 <a:latin typeface="Arial" pitchFamily="34" charset="0"/>
                 <a:ea typeface="Arial" pitchFamily="34" charset="-122"/>
                 <a:cs typeface="Arial" pitchFamily="34" charset="-120"/>
               </a:rPr>
-              <a:t>THE FRAME BELONGED TO THE PAYER</a:t>
-            </a:r>
-            <a:endParaRPr lang="en-US" sz="1100" dirty="0"/>
-          </a:p>
-        </p:txBody>
-      </p:sp>
-      <p:sp>
-        <p:nvSpPr>
-          <p:cNvPr id="5" name="Shape 2"/>
-          <p:cNvSpPr/>
-          <p:nvPr/>
-        </p:nvSpPr>
-        <p:spPr>
-          <a:xfrm>
-            <a:off x="457200" y="5230368"/>
-            <a:ext cx="8778240" cy="1243584"/>
-          </a:xfrm>
-          <a:prstGeom prst="rect">
-            <a:avLst/>
-          </a:prstGeom>
-          <a:solidFill>
-            <a:srgbClr val="FAF8F1"/>
-          </a:solidFill>
-          <a:ln/>
-        </p:spPr>
-      </p:sp>
-      <p:sp>
-        <p:nvSpPr>
-          <p:cNvPr id="6" name="Shape 3"/>
-          <p:cNvSpPr/>
-          <p:nvPr/>
-        </p:nvSpPr>
-        <p:spPr>
-          <a:xfrm>
-            <a:off x="676656" y="5468112"/>
-            <a:ext cx="731520" cy="0"/>
+              <a:t>Gustave Le Gray, Preparation of the Emperor's Table, Camp de Chalons, 1857</a:t>
+            </a:r>
+            <a:endParaRPr lang="en-US" sz="950" dirty="0"/>
+          </a:p>
+        </p:txBody>
+      </p:sp>
+      <p:sp>
+        <p:nvSpPr>
+          <p:cNvPr id="8" name="Text 5"/>
+          <p:cNvSpPr/>
+          <p:nvPr/>
+        </p:nvSpPr>
+        <p:spPr>
+          <a:xfrm>
+            <a:off x="7818120" y="1280160"/>
+            <a:ext cx="3566160" cy="822960"/>
+          </a:xfrm>
+          <a:prstGeom prst="rect">
+            <a:avLst/>
+          </a:prstGeom>
+          <a:noFill/>
+          <a:ln/>
+        </p:spPr>
+        <p:txBody>
+          <a:bodyPr wrap="square" lIns="0" tIns="0" rIns="0" bIns="0" rtlCol="0" anchor="t"/>
+          <a:lstStyle/>
+          <a:p>
+            <a:pPr indent="0" marL="0">
+              <a:lnSpc>
+                <a:spcPts val="3200"/>
+              </a:lnSpc>
+              <a:buNone/>
+            </a:pPr>
+            <a:r>
+              <a:rPr lang="en-US" sz="2800" dirty="0">
+                <a:solidFill>
+                  <a:srgbClr val="24313F"/>
+                </a:solidFill>
+                <a:latin typeface="Georgia" pitchFamily="34" charset="0"/>
+                <a:ea typeface="Georgia" pitchFamily="34" charset="-122"/>
+                <a:cs typeface="Georgia" pitchFamily="34" charset="-120"/>
+              </a:rPr>
+              <a:t>A commissioned view</a:t>
+            </a:r>
+            <a:endParaRPr lang="en-US" sz="2800" dirty="0"/>
+          </a:p>
+        </p:txBody>
+      </p:sp>
+      <p:sp>
+        <p:nvSpPr>
+          <p:cNvPr id="9" name="Text 6"/>
+          <p:cNvSpPr/>
+          <p:nvPr/>
+        </p:nvSpPr>
+        <p:spPr>
+          <a:xfrm>
+            <a:off x="7818120" y="2240280"/>
+            <a:ext cx="3566160" cy="3566160"/>
+          </a:xfrm>
+          <a:prstGeom prst="rect">
+            <a:avLst/>
+          </a:prstGeom>
+          <a:noFill/>
+          <a:ln/>
+        </p:spPr>
+        <p:txBody>
+          <a:bodyPr wrap="square" lIns="0" tIns="0" rIns="0" bIns="0" rtlCol="0" anchor="t"/>
+          <a:lstStyle/>
+          <a:p>
+            <a:pPr indent="0" marL="0">
+              <a:lnSpc>
+                <a:spcPts val="2000"/>
+              </a:lnSpc>
+              <a:buNone/>
+            </a:pPr>
+            <a:r>
+              <a:rPr lang="en-US" sz="1450" dirty="0">
+                <a:solidFill>
+                  <a:srgbClr val="24313F"/>
+                </a:solidFill>
+                <a:latin typeface="Georgia" pitchFamily="34" charset="0"/>
+                <a:ea typeface="Georgia" pitchFamily="34" charset="-122"/>
+                <a:cs typeface="Georgia" pitchFamily="34" charset="-120"/>
+              </a:rPr>
+              <a:t>Le Gray photographed the Emperor's camp on commission. The laid table, the attendants, the orderly tents: every choice serves the payer's story of effortless command.</a:t>
+            </a:r>
+            <a:endParaRPr lang="en-US" sz="1450" dirty="0"/>
+          </a:p>
+          <a:p>
+            <a:pPr indent="0" marL="0">
+              <a:lnSpc>
+                <a:spcPts val="2000"/>
+              </a:lnSpc>
+              <a:buNone/>
+            </a:pPr>
+            <a:endParaRPr lang="en-US" sz="1450" dirty="0"/>
+          </a:p>
+          <a:p>
+            <a:pPr indent="0" marL="0">
+              <a:lnSpc>
+                <a:spcPts val="2000"/>
+              </a:lnSpc>
+              <a:buNone/>
+            </a:pPr>
+            <a:r>
+              <a:rPr lang="en-US" sz="1450" dirty="0">
+                <a:solidFill>
+                  <a:srgbClr val="24313F"/>
+                </a:solidFill>
+                <a:latin typeface="Georgia" pitchFamily="34" charset="0"/>
+                <a:ea typeface="Georgia" pitchFamily="34" charset="-122"/>
+                <a:cs typeface="Georgia" pitchFamily="34" charset="-120"/>
+              </a:rPr>
+              <a:t>Who pays shapes what gets said. Hold that sentence; the rest of the week traces it through modern money.</a:t>
+            </a:r>
+            <a:endParaRPr lang="en-US" sz="1450" dirty="0"/>
+          </a:p>
+        </p:txBody>
+      </p:sp>
+      <p:sp>
+        <p:nvSpPr>
+          <p:cNvPr id="10" name="Shape 7"/>
+          <p:cNvSpPr/>
+          <p:nvPr/>
+        </p:nvSpPr>
+        <p:spPr>
+          <a:xfrm>
+            <a:off x="822960" y="6382512"/>
+            <a:ext cx="10543032" cy="0"/>
           </a:xfrm>
           <a:prstGeom prst="line">
             <a:avLst/>
           </a:prstGeom>
           <a:noFill/>
-          <a:ln w="28575">
+          <a:ln w="9525">
             <a:solidFill>
-              <a:srgbClr val="8C3A38"/>
+              <a:srgbClr val="D9D4C4"/>
             </a:solidFill>
             <a:prstDash val="solid"/>
           </a:ln>
@@ -5641,82 +6075,79 @@
       </p:sp>
       <p:sp>
         <p:nvSpPr>
-          <p:cNvPr id="7" name="Text 4"/>
-          <p:cNvSpPr/>
-          <p:nvPr/>
-        </p:nvSpPr>
-        <p:spPr>
-          <a:xfrm>
-            <a:off x="676656" y="5541264"/>
-            <a:ext cx="8339328" cy="585216"/>
-          </a:xfrm>
-          <a:prstGeom prst="rect">
-            <a:avLst/>
-          </a:prstGeom>
-          <a:noFill/>
-          <a:ln/>
-        </p:spPr>
-        <p:txBody>
-          <a:bodyPr wrap="square" lIns="0" tIns="0" rIns="0" bIns="0" rtlCol="0" anchor="t"/>
+          <p:cNvPr id="11" name="Text 8"/>
+          <p:cNvSpPr/>
+          <p:nvPr/>
+        </p:nvSpPr>
+        <p:spPr>
+          <a:xfrm>
+            <a:off x="822960" y="6419088"/>
+            <a:ext cx="7315200" cy="274320"/>
+          </a:xfrm>
+          <a:prstGeom prst="rect">
+            <a:avLst/>
+          </a:prstGeom>
+          <a:noFill/>
+          <a:ln/>
+        </p:spPr>
+        <p:txBody>
+          <a:bodyPr wrap="square" lIns="0" tIns="0" rIns="0" bIns="0" rtlCol="0" anchor="ctr"/>
           <a:lstStyle/>
           <a:p>
             <a:pPr indent="0" marL="0">
-              <a:lnSpc>
-                <a:spcPts val="2200"/>
-              </a:lnSpc>
-              <a:buNone/>
-            </a:pPr>
-            <a:r>
-              <a:rPr lang="en-US" sz="1800" dirty="0">
-                <a:solidFill>
-                  <a:srgbClr val="24313F"/>
+              <a:buNone/>
+            </a:pPr>
+            <a:r>
+              <a:rPr lang="en-US" sz="900" spc="150" kern="0" dirty="0">
+                <a:solidFill>
+                  <a:srgbClr val="7A7F72"/>
+                </a:solidFill>
+                <a:latin typeface="Arial" pitchFamily="34" charset="0"/>
+                <a:ea typeface="Arial" pitchFamily="34" charset="-122"/>
+                <a:cs typeface="Arial" pitchFamily="34" charset="-120"/>
+              </a:rPr>
+              <a:t>MEDIA STUDIES 9607 · SEMESTER I</a:t>
+            </a:r>
+            <a:endParaRPr lang="en-US" sz="900" dirty="0"/>
+          </a:p>
+        </p:txBody>
+      </p:sp>
+      <p:sp>
+        <p:nvSpPr>
+          <p:cNvPr id="12" name="Text 9"/>
+          <p:cNvSpPr/>
+          <p:nvPr/>
+        </p:nvSpPr>
+        <p:spPr>
+          <a:xfrm>
+            <a:off x="10268712" y="6355080"/>
+            <a:ext cx="1097280" cy="365760"/>
+          </a:xfrm>
+          <a:prstGeom prst="rect">
+            <a:avLst/>
+          </a:prstGeom>
+          <a:noFill/>
+          <a:ln/>
+        </p:spPr>
+        <p:txBody>
+          <a:bodyPr wrap="square" lIns="0" tIns="0" rIns="0" bIns="0" rtlCol="0" anchor="ctr"/>
+          <a:lstStyle/>
+          <a:p>
+            <a:pPr algn="r" indent="0" marL="0">
+              <a:buNone/>
+            </a:pPr>
+            <a:r>
+              <a:rPr lang="en-US" sz="1600" dirty="0">
+                <a:solidFill>
+                  <a:srgbClr val="A3C1AD"/>
                 </a:solidFill>
                 <a:latin typeface="Georgia" pitchFamily="34" charset="0"/>
                 <a:ea typeface="Georgia" pitchFamily="34" charset="-122"/>
                 <a:cs typeface="Georgia" pitchFamily="34" charset="-120"/>
               </a:rPr>
-              <a:t>Le Gray photographed the Emperor's camp on commission: the frame belonged to who paid, in 1857 as now.</a:t>
-            </a:r>
-            <a:endParaRPr lang="en-US" sz="1800" dirty="0"/>
-          </a:p>
-        </p:txBody>
-      </p:sp>
-      <p:sp>
-        <p:nvSpPr>
-          <p:cNvPr id="8" name="Text 5"/>
-          <p:cNvSpPr/>
-          <p:nvPr/>
-        </p:nvSpPr>
-        <p:spPr>
-          <a:xfrm>
-            <a:off x="676656" y="6181344"/>
-            <a:ext cx="8339328" cy="256032"/>
-          </a:xfrm>
-          <a:prstGeom prst="rect">
-            <a:avLst/>
-          </a:prstGeom>
-          <a:noFill/>
-          <a:ln/>
-        </p:spPr>
-        <p:txBody>
-          <a:bodyPr wrap="square" lIns="0" tIns="0" rIns="0" bIns="0" rtlCol="0" anchor="ctr"/>
-          <a:lstStyle/>
-          <a:p>
-            <a:pPr indent="0" marL="0">
-              <a:buNone/>
-            </a:pPr>
-            <a:r>
-              <a:rPr lang="en-US" sz="950" spc="50" kern="0" dirty="0">
-                <a:solidFill>
-                  <a:srgbClr val="7A7F72"/>
-                </a:solidFill>
-                <a:latin typeface="Arial" pitchFamily="34" charset="0"/>
-                <a:ea typeface="Arial" pitchFamily="34" charset="-122"/>
-                <a:cs typeface="Arial" pitchFamily="34" charset="-120"/>
-              </a:rPr>
-              <a:t>Gustave Le Gray, Camp de Chalons, 1857</a:t>
-            </a:r>
-            <a:endParaRPr lang="en-US" sz="950" dirty="0"/>
+              <a:t>03</a:t>
+            </a:r>
+            <a:endParaRPr lang="en-US" sz="1600" dirty="0"/>
           </a:p>
         </p:txBody>
       </p:sp>
@@ -6049,7 +6480,7 @@
                 <a:ea typeface="Georgia" pitchFamily="34" charset="-122"/>
                 <a:cs typeface="Georgia" pitchFamily="34" charset="-120"/>
               </a:rPr>
-              <a:t>Licence fee or state</a:t>
+              <a:t>License fee or state</a:t>
             </a:r>
             <a:endParaRPr lang="en-US" sz="1900" dirty="0"/>
           </a:p>
@@ -6080,7 +6511,7 @@
               <a:buNone/>
             </a:pPr>
             <a:r>
-              <a:rPr lang="en-US" sz="1650" dirty="0">
+              <a:rPr lang="en-US" sz="1550" dirty="0">
                 <a:solidFill>
                   <a:srgbClr val="24313F"/>
                 </a:solidFill>
@@ -6088,9 +6519,9 @@
                 <a:ea typeface="Georgia" pitchFamily="34" charset="-122"/>
                 <a:cs typeface="Georgia" pitchFamily="34" charset="-120"/>
               </a:rPr>
-              <a:t>A remit: a duty to inform, educate, reach everyone.</a:t>
-            </a:r>
-            <a:endParaRPr lang="en-US" sz="1650" dirty="0"/>
+              <a:t>A remit: a duty to inform, educate, reach everyone. The UK license fee: 180 pounds a year from April 2026.</a:t>
+            </a:r>
+            <a:endParaRPr lang="en-US" sz="1550" dirty="0"/>
           </a:p>
         </p:txBody>
       </p:sp>
@@ -6181,7 +6612,7 @@
               <a:buNone/>
             </a:pPr>
             <a:r>
-              <a:rPr lang="en-US" sz="1650" dirty="0">
+              <a:rPr lang="en-US" sz="1550" dirty="0">
                 <a:solidFill>
                   <a:srgbClr val="24313F"/>
                 </a:solidFill>
@@ -6191,7 +6622,7 @@
               </a:rPr>
               <a:t>Your attention, delivered in the right demographic.</a:t>
             </a:r>
-            <a:endParaRPr lang="en-US" sz="1650" dirty="0"/>
+            <a:endParaRPr lang="en-US" sz="1550" dirty="0"/>
           </a:p>
         </p:txBody>
       </p:sp>
@@ -6282,7 +6713,7 @@
               <a:buNone/>
             </a:pPr>
             <a:r>
-              <a:rPr lang="en-US" sz="1650" dirty="0">
+              <a:rPr lang="en-US" sz="1550" dirty="0">
                 <a:solidFill>
                   <a:srgbClr val="24313F"/>
                 </a:solidFill>
@@ -6292,7 +6723,7 @@
               </a:rPr>
               <a:t>A product good enough that you keep paying for it.</a:t>
             </a:r>
-            <a:endParaRPr lang="en-US" sz="1650" dirty="0"/>
+            <a:endParaRPr lang="en-US" sz="1550" dirty="0"/>
           </a:p>
         </p:txBody>
       </p:sp>
@@ -6383,7 +6814,7 @@
               <a:buNone/>
             </a:pPr>
             <a:r>
-              <a:rPr lang="en-US" sz="1650" dirty="0">
+              <a:rPr lang="en-US" sz="1550" dirty="0">
                 <a:solidFill>
                   <a:srgbClr val="24313F"/>
                 </a:solidFill>
@@ -6393,7 +6824,7 @@
               </a:rPr>
               <a:t>Content that aligns with the payer's interests.</a:t>
             </a:r>
-            <a:endParaRPr lang="en-US" sz="1650" dirty="0"/>
+            <a:endParaRPr lang="en-US" sz="1550" dirty="0"/>
           </a:p>
         </p:txBody>
       </p:sp>
@@ -6554,7 +6985,7 @@
                 <a:ea typeface="Georgia" pitchFamily="34" charset="-122"/>
                 <a:cs typeface="Georgia" pitchFamily="34" charset="-120"/>
               </a:rPr>
-              <a:t>03</a:t>
+              <a:t>04</a:t>
             </a:r>
             <a:endParaRPr lang="en-US" sz="1600" dirty="0"/>
           </a:p>
@@ -7509,7 +7940,7 @@
                 <a:ea typeface="Georgia" pitchFamily="34" charset="-122"/>
                 <a:cs typeface="Georgia" pitchFamily="34" charset="-120"/>
               </a:rPr>
-              <a:t>04</a:t>
+              <a:t>05</a:t>
             </a:r>
             <a:endParaRPr lang="en-US" sz="1600" dirty="0"/>
           </a:p>
@@ -7547,105 +7978,79 @@
           <a:chExt cx="0" cy="0"/>
         </a:xfrm>
       </p:grpSpPr>
-      <p:pic>
-        <p:nvPicPr>
-          <p:cNvPr id="2" name="Image 0" descr="/Users/dogan/Documents/Vaults/Courses/wiki/classes/media-studies/decks/_build/img/crops/underwood-fifth-ave_a664.jpg">    </p:cNvPr>
-          <p:cNvPicPr>
-            <a:picLocks noChangeAspect="1"/>
-          </p:cNvPicPr>
-          <p:nvPr/>
-        </p:nvPicPr>
-        <p:blipFill>
-          <a:blip r:embed="rId1"/>
-          <a:stretch>
-            <a:fillRect/>
-          </a:stretch>
-        </p:blipFill>
-        <p:spPr>
-          <a:xfrm>
-            <a:off x="7635240" y="0"/>
-            <a:ext cx="4553712" cy="6858000"/>
-          </a:xfrm>
-          <a:prstGeom prst="rect">
-            <a:avLst/>
-          </a:prstGeom>
-        </p:spPr>
-      </p:pic>
-      <p:sp>
-        <p:nvSpPr>
-          <p:cNvPr id="3" name="Text 0"/>
-          <p:cNvSpPr/>
-          <p:nvPr/>
-        </p:nvSpPr>
-        <p:spPr>
-          <a:xfrm>
-            <a:off x="7818120" y="6126480"/>
-            <a:ext cx="4187952" cy="365760"/>
-          </a:xfrm>
-          <a:prstGeom prst="rect">
-            <a:avLst/>
-          </a:prstGeom>
-          <a:solidFill>
-            <a:srgbClr val="FAF8F1"/>
-          </a:solidFill>
-          <a:ln/>
-        </p:spPr>
-        <p:txBody>
-          <a:bodyPr wrap="square" lIns="0" tIns="0" rIns="0" bIns="0" rtlCol="0" anchor="ctr"/>
-          <a:lstStyle/>
-          <a:p>
-            <a:pPr indent="0" marL="0">
-              <a:buNone/>
-            </a:pPr>
-            <a:r>
-              <a:rPr lang="en-US" sz="950" spc="50" kern="0" dirty="0">
-                <a:solidFill>
-                  <a:srgbClr val="7A7F72"/>
+      <p:sp>
+        <p:nvSpPr>
+          <p:cNvPr id="2" name="Text 0"/>
+          <p:cNvSpPr/>
+          <p:nvPr/>
+        </p:nvSpPr>
+        <p:spPr>
+          <a:xfrm>
+            <a:off x="822960" y="457200"/>
+            <a:ext cx="6400800" cy="274320"/>
+          </a:xfrm>
+          <a:prstGeom prst="rect">
+            <a:avLst/>
+          </a:prstGeom>
+          <a:noFill/>
+          <a:ln/>
+        </p:spPr>
+        <p:txBody>
+          <a:bodyPr wrap="square" lIns="0" tIns="0" rIns="0" bIns="0" rtlCol="0" anchor="ctr"/>
+          <a:lstStyle/>
+          <a:p>
+            <a:pPr algn="l" indent="0" marL="0">
+              <a:buNone/>
+            </a:pPr>
+            <a:r>
+              <a:rPr lang="en-US" sz="1100" b="1" spc="250" kern="0" dirty="0">
+                <a:solidFill>
+                  <a:srgbClr val="4A6B5D"/>
                 </a:solidFill>
                 <a:latin typeface="Arial" pitchFamily="34" charset="0"/>
                 <a:ea typeface="Arial" pitchFamily="34" charset="-122"/>
                 <a:cs typeface="Arial" pitchFamily="34" charset="-120"/>
               </a:rPr>
-              <a:t>Underwood &amp; Underwood, Above Fifth Avenue, Looking North</a:t>
-            </a:r>
-            <a:endParaRPr lang="en-US" sz="950" dirty="0"/>
-          </a:p>
-        </p:txBody>
-      </p:sp>
-      <p:sp>
-        <p:nvSpPr>
-          <p:cNvPr id="4" name="Text 1"/>
-          <p:cNvSpPr/>
-          <p:nvPr/>
-        </p:nvSpPr>
-        <p:spPr>
-          <a:xfrm>
-            <a:off x="822960" y="685800"/>
-            <a:ext cx="5486400" cy="274320"/>
-          </a:xfrm>
-          <a:prstGeom prst="rect">
-            <a:avLst/>
-          </a:prstGeom>
-          <a:noFill/>
-          <a:ln/>
-        </p:spPr>
-        <p:txBody>
-          <a:bodyPr wrap="square" lIns="0" tIns="0" rIns="0" bIns="0" rtlCol="0" anchor="ctr"/>
-          <a:lstStyle/>
-          <a:p>
-            <a:pPr algn="l" indent="0" marL="0">
+              <a:t>ONE OWNER, MANY SPOUTS</a:t>
+            </a:r>
+            <a:endParaRPr lang="en-US" sz="1100" dirty="0"/>
+          </a:p>
+        </p:txBody>
+      </p:sp>
+      <p:sp>
+        <p:nvSpPr>
+          <p:cNvPr id="3" name="Text 1"/>
+          <p:cNvSpPr/>
+          <p:nvPr/>
+        </p:nvSpPr>
+        <p:spPr>
+          <a:xfrm>
+            <a:off x="6793992" y="457200"/>
+            <a:ext cx="4572000" cy="274320"/>
+          </a:xfrm>
+          <a:prstGeom prst="rect">
+            <a:avLst/>
+          </a:prstGeom>
+          <a:noFill/>
+          <a:ln/>
+        </p:spPr>
+        <p:txBody>
+          <a:bodyPr wrap="square" lIns="0" tIns="0" rIns="0" bIns="0" rtlCol="0" anchor="ctr"/>
+          <a:lstStyle/>
+          <a:p>
+            <a:pPr algn="r" indent="0" marL="0">
               <a:buNone/>
             </a:pPr>
             <a:r>
               <a:rPr lang="en-US" sz="1100" b="1" spc="250" kern="0" dirty="0">
                 <a:solidFill>
-                  <a:srgbClr val="4A6B5D"/>
+                  <a:srgbClr val="7A7F72"/>
                 </a:solidFill>
                 <a:latin typeface="Arial" pitchFamily="34" charset="0"/>
                 <a:ea typeface="Arial" pitchFamily="34" charset="-122"/>
                 <a:cs typeface="Arial" pitchFamily="34" charset="-120"/>
               </a:rPr>
-              <a:t>THE VIEW FROM ABOVE</a:t>
+              <a:t>CONCENTRATION, DRAWN TO SCALE OF ONE COMPANY</a:t>
             </a:r>
             <a:endParaRPr lang="en-US" sz="1100" dirty="0"/>
           </a:p>
@@ -7653,14 +8058,14 @@
       </p:sp>
       <p:sp>
         <p:nvSpPr>
-          <p:cNvPr id="5" name="Shape 2"/>
-          <p:cNvSpPr/>
-          <p:nvPr/>
-        </p:nvSpPr>
-        <p:spPr>
-          <a:xfrm>
-            <a:off x="822960" y="1051560"/>
-            <a:ext cx="6492240" cy="0"/>
+          <p:cNvPr id="4" name="Shape 2"/>
+          <p:cNvSpPr/>
+          <p:nvPr/>
+        </p:nvSpPr>
+        <p:spPr>
+          <a:xfrm>
+            <a:off x="822960" y="786384"/>
+            <a:ext cx="10543032" cy="0"/>
           </a:xfrm>
           <a:prstGeom prst="line">
             <a:avLst/>
@@ -7676,33 +8081,239 @@
       </p:sp>
       <p:sp>
         <p:nvSpPr>
-          <p:cNvPr id="6" name="Text 3"/>
-          <p:cNvSpPr/>
-          <p:nvPr/>
-        </p:nvSpPr>
-        <p:spPr>
-          <a:xfrm>
-            <a:off x="822960" y="1234440"/>
-            <a:ext cx="6492240" cy="1371600"/>
-          </a:xfrm>
-          <a:prstGeom prst="rect">
-            <a:avLst/>
-          </a:prstGeom>
-          <a:noFill/>
-          <a:ln/>
-        </p:spPr>
-        <p:txBody>
-          <a:bodyPr wrap="square" lIns="0" tIns="0" rIns="0" bIns="0" rtlCol="0" anchor="t"/>
-          <a:lstStyle/>
-          <a:p>
-            <a:pPr indent="0" marL="0">
-              <a:lnSpc>
-                <a:spcPts val="4200"/>
-              </a:lnSpc>
-              <a:buNone/>
-            </a:pPr>
-            <a:r>
-              <a:rPr lang="en-US" sz="4000" dirty="0">
+          <p:cNvPr id="5" name="Shape 3"/>
+          <p:cNvSpPr/>
+          <p:nvPr/>
+        </p:nvSpPr>
+        <p:spPr>
+          <a:xfrm flipH="1" flipV="1">
+            <a:off x="2377440" y="1691640"/>
+            <a:ext cx="3703320" cy="1783080"/>
+          </a:xfrm>
+          <a:prstGeom prst="line">
+            <a:avLst/>
+          </a:prstGeom>
+          <a:noFill/>
+          <a:ln w="12700">
+            <a:solidFill>
+              <a:srgbClr val="8AA394"/>
+            </a:solidFill>
+            <a:prstDash val="solid"/>
+          </a:ln>
+        </p:spPr>
+      </p:sp>
+      <p:sp>
+        <p:nvSpPr>
+          <p:cNvPr id="6" name="Shape 4"/>
+          <p:cNvSpPr/>
+          <p:nvPr/>
+        </p:nvSpPr>
+        <p:spPr>
+          <a:xfrm flipH="1" flipV="1">
+            <a:off x="4892040" y="1463040"/>
+            <a:ext cx="1188720" cy="2011680"/>
+          </a:xfrm>
+          <a:prstGeom prst="line">
+            <a:avLst/>
+          </a:prstGeom>
+          <a:noFill/>
+          <a:ln w="12700">
+            <a:solidFill>
+              <a:srgbClr val="8AA394"/>
+            </a:solidFill>
+            <a:prstDash val="solid"/>
+          </a:ln>
+        </p:spPr>
+      </p:sp>
+      <p:sp>
+        <p:nvSpPr>
+          <p:cNvPr id="7" name="Shape 5"/>
+          <p:cNvSpPr/>
+          <p:nvPr/>
+        </p:nvSpPr>
+        <p:spPr>
+          <a:xfrm flipV="1">
+            <a:off x="6080760" y="1463040"/>
+            <a:ext cx="1783080" cy="2011680"/>
+          </a:xfrm>
+          <a:prstGeom prst="line">
+            <a:avLst/>
+          </a:prstGeom>
+          <a:noFill/>
+          <a:ln w="12700">
+            <a:solidFill>
+              <a:srgbClr val="8AA394"/>
+            </a:solidFill>
+            <a:prstDash val="solid"/>
+          </a:ln>
+        </p:spPr>
+      </p:sp>
+      <p:sp>
+        <p:nvSpPr>
+          <p:cNvPr id="8" name="Shape 6"/>
+          <p:cNvSpPr/>
+          <p:nvPr/>
+        </p:nvSpPr>
+        <p:spPr>
+          <a:xfrm flipV="1">
+            <a:off x="6080760" y="1691640"/>
+            <a:ext cx="4114800" cy="1783080"/>
+          </a:xfrm>
+          <a:prstGeom prst="line">
+            <a:avLst/>
+          </a:prstGeom>
+          <a:noFill/>
+          <a:ln w="12700">
+            <a:solidFill>
+              <a:srgbClr val="8AA394"/>
+            </a:solidFill>
+            <a:prstDash val="solid"/>
+          </a:ln>
+        </p:spPr>
+      </p:sp>
+      <p:sp>
+        <p:nvSpPr>
+          <p:cNvPr id="9" name="Shape 7"/>
+          <p:cNvSpPr/>
+          <p:nvPr/>
+        </p:nvSpPr>
+        <p:spPr>
+          <a:xfrm flipH="1">
+            <a:off x="2148840" y="3474720"/>
+            <a:ext cx="3931920" cy="1005840"/>
+          </a:xfrm>
+          <a:prstGeom prst="line">
+            <a:avLst/>
+          </a:prstGeom>
+          <a:noFill/>
+          <a:ln w="12700">
+            <a:solidFill>
+              <a:srgbClr val="8AA394"/>
+            </a:solidFill>
+            <a:prstDash val="solid"/>
+          </a:ln>
+        </p:spPr>
+      </p:sp>
+      <p:sp>
+        <p:nvSpPr>
+          <p:cNvPr id="10" name="Shape 8"/>
+          <p:cNvSpPr/>
+          <p:nvPr/>
+        </p:nvSpPr>
+        <p:spPr>
+          <a:xfrm flipH="1">
+            <a:off x="4663440" y="3474720"/>
+            <a:ext cx="1417320" cy="1508760"/>
+          </a:xfrm>
+          <a:prstGeom prst="line">
+            <a:avLst/>
+          </a:prstGeom>
+          <a:noFill/>
+          <a:ln w="12700">
+            <a:solidFill>
+              <a:srgbClr val="8AA394"/>
+            </a:solidFill>
+            <a:prstDash val="solid"/>
+          </a:ln>
+        </p:spPr>
+      </p:sp>
+      <p:sp>
+        <p:nvSpPr>
+          <p:cNvPr id="11" name="Shape 9"/>
+          <p:cNvSpPr/>
+          <p:nvPr/>
+        </p:nvSpPr>
+        <p:spPr>
+          <a:xfrm>
+            <a:off x="6080760" y="3474720"/>
+            <a:ext cx="1783080" cy="1508760"/>
+          </a:xfrm>
+          <a:prstGeom prst="line">
+            <a:avLst/>
+          </a:prstGeom>
+          <a:noFill/>
+          <a:ln w="12700">
+            <a:solidFill>
+              <a:srgbClr val="8AA394"/>
+            </a:solidFill>
+            <a:prstDash val="solid"/>
+          </a:ln>
+        </p:spPr>
+      </p:sp>
+      <p:sp>
+        <p:nvSpPr>
+          <p:cNvPr id="12" name="Shape 10"/>
+          <p:cNvSpPr/>
+          <p:nvPr/>
+        </p:nvSpPr>
+        <p:spPr>
+          <a:xfrm>
+            <a:off x="6080760" y="3474720"/>
+            <a:ext cx="3977640" cy="1005840"/>
+          </a:xfrm>
+          <a:prstGeom prst="line">
+            <a:avLst/>
+          </a:prstGeom>
+          <a:noFill/>
+          <a:ln w="12700">
+            <a:solidFill>
+              <a:srgbClr val="8AA394"/>
+            </a:solidFill>
+            <a:prstDash val="solid"/>
+          </a:ln>
+        </p:spPr>
+      </p:sp>
+      <p:sp>
+        <p:nvSpPr>
+          <p:cNvPr id="13" name="Shape 11"/>
+          <p:cNvSpPr/>
+          <p:nvPr/>
+        </p:nvSpPr>
+        <p:spPr>
+          <a:xfrm>
+            <a:off x="1463040" y="1417320"/>
+            <a:ext cx="1828800" cy="548640"/>
+          </a:xfrm>
+          <a:prstGeom prst="rect">
+            <a:avLst/>
+          </a:prstGeom>
+          <a:solidFill>
+            <a:srgbClr val="E8EFE7"/>
+          </a:solidFill>
+          <a:ln w="9525">
+            <a:solidFill>
+              <a:srgbClr val="8AA394"/>
+            </a:solidFill>
+            <a:prstDash val="solid"/>
+          </a:ln>
+        </p:spPr>
+      </p:sp>
+      <p:sp>
+        <p:nvSpPr>
+          <p:cNvPr id="14" name="Text 12"/>
+          <p:cNvSpPr/>
+          <p:nvPr/>
+        </p:nvSpPr>
+        <p:spPr>
+          <a:xfrm>
+            <a:off x="1463040" y="1417320"/>
+            <a:ext cx="1828800" cy="548640"/>
+          </a:xfrm>
+          <a:prstGeom prst="rect">
+            <a:avLst/>
+          </a:prstGeom>
+          <a:noFill/>
+          <a:ln/>
+        </p:spPr>
+        <p:txBody>
+          <a:bodyPr wrap="square" lIns="0" tIns="0" rIns="0" bIns="0" rtlCol="0" anchor="ctr"/>
+          <a:lstStyle/>
+          <a:p>
+            <a:pPr algn="ctr" indent="0" marL="0">
+              <a:buNone/>
+            </a:pPr>
+            <a:r>
+              <a:rPr lang="en-US" sz="1400" dirty="0">
                 <a:solidFill>
                   <a:srgbClr val="24313F"/>
                 </a:solidFill>
@@ -7710,19 +8321,63 @@
                 <a:ea typeface="Georgia" pitchFamily="34" charset="-122"/>
                 <a:cs typeface="Georgia" pitchFamily="34" charset="-120"/>
               </a:rPr>
-              <a:t>Who owns the</a:t>
-            </a:r>
-            <a:endParaRPr lang="en-US" sz="4000" dirty="0"/>
-          </a:p>
-          <a:p>
-            <a:pPr indent="0" marL="0">
-              <a:lnSpc>
-                <a:spcPts val="4200"/>
-              </a:lnSpc>
-              <a:buNone/>
-            </a:pPr>
-            <a:r>
-              <a:rPr lang="en-US" sz="4000" dirty="0">
+              <a:t>Pixar</a:t>
+            </a:r>
+            <a:endParaRPr lang="en-US" sz="1400" dirty="0"/>
+          </a:p>
+        </p:txBody>
+      </p:sp>
+      <p:sp>
+        <p:nvSpPr>
+          <p:cNvPr id="15" name="Shape 13"/>
+          <p:cNvSpPr/>
+          <p:nvPr/>
+        </p:nvSpPr>
+        <p:spPr>
+          <a:xfrm>
+            <a:off x="3977640" y="1188720"/>
+            <a:ext cx="1828800" cy="548640"/>
+          </a:xfrm>
+          <a:prstGeom prst="rect">
+            <a:avLst/>
+          </a:prstGeom>
+          <a:solidFill>
+            <a:srgbClr val="E8EFE7"/>
+          </a:solidFill>
+          <a:ln w="9525">
+            <a:solidFill>
+              <a:srgbClr val="8AA394"/>
+            </a:solidFill>
+            <a:prstDash val="solid"/>
+          </a:ln>
+        </p:spPr>
+      </p:sp>
+      <p:sp>
+        <p:nvSpPr>
+          <p:cNvPr id="16" name="Text 14"/>
+          <p:cNvSpPr/>
+          <p:nvPr/>
+        </p:nvSpPr>
+        <p:spPr>
+          <a:xfrm>
+            <a:off x="3977640" y="1188720"/>
+            <a:ext cx="1828800" cy="548640"/>
+          </a:xfrm>
+          <a:prstGeom prst="rect">
+            <a:avLst/>
+          </a:prstGeom>
+          <a:noFill/>
+          <a:ln/>
+        </p:spPr>
+        <p:txBody>
+          <a:bodyPr wrap="square" lIns="0" tIns="0" rIns="0" bIns="0" rtlCol="0" anchor="ctr"/>
+          <a:lstStyle/>
+          <a:p>
+            <a:pPr algn="ctr" indent="0" marL="0">
+              <a:buNone/>
+            </a:pPr>
+            <a:r>
+              <a:rPr lang="en-US" sz="1400" dirty="0">
                 <a:solidFill>
                   <a:srgbClr val="24313F"/>
                 </a:solidFill>
@@ -7730,41 +8385,63 @@
                 <a:ea typeface="Georgia" pitchFamily="34" charset="-122"/>
                 <a:cs typeface="Georgia" pitchFamily="34" charset="-120"/>
               </a:rPr>
-              <a:t>vantage point</a:t>
-            </a:r>
-            <a:endParaRPr lang="en-US" sz="4000" dirty="0"/>
-          </a:p>
-        </p:txBody>
-      </p:sp>
-      <p:sp>
-        <p:nvSpPr>
-          <p:cNvPr id="7" name="Text 4"/>
-          <p:cNvSpPr/>
-          <p:nvPr/>
-        </p:nvSpPr>
-        <p:spPr>
-          <a:xfrm>
-            <a:off x="822960" y="2743200"/>
-            <a:ext cx="6583680" cy="2743200"/>
-          </a:xfrm>
-          <a:prstGeom prst="rect">
-            <a:avLst/>
-          </a:prstGeom>
-          <a:noFill/>
-          <a:ln/>
-        </p:spPr>
-        <p:txBody>
-          <a:bodyPr wrap="square" lIns="0" tIns="0" rIns="0" bIns="0" rtlCol="0" anchor="t"/>
-          <a:lstStyle/>
-          <a:p>
-            <a:pPr indent="0" marL="0">
-              <a:lnSpc>
-                <a:spcPts val="2500"/>
-              </a:lnSpc>
-              <a:buNone/>
-            </a:pPr>
-            <a:r>
-              <a:rPr lang="en-US" sz="1750" dirty="0">
+              <a:t>Marvel</a:t>
+            </a:r>
+            <a:endParaRPr lang="en-US" sz="1400" dirty="0"/>
+          </a:p>
+        </p:txBody>
+      </p:sp>
+      <p:sp>
+        <p:nvSpPr>
+          <p:cNvPr id="17" name="Shape 15"/>
+          <p:cNvSpPr/>
+          <p:nvPr/>
+        </p:nvSpPr>
+        <p:spPr>
+          <a:xfrm>
+            <a:off x="6949440" y="1188720"/>
+            <a:ext cx="1828800" cy="548640"/>
+          </a:xfrm>
+          <a:prstGeom prst="rect">
+            <a:avLst/>
+          </a:prstGeom>
+          <a:solidFill>
+            <a:srgbClr val="E8EFE7"/>
+          </a:solidFill>
+          <a:ln w="9525">
+            <a:solidFill>
+              <a:srgbClr val="8AA394"/>
+            </a:solidFill>
+            <a:prstDash val="solid"/>
+          </a:ln>
+        </p:spPr>
+      </p:sp>
+      <p:sp>
+        <p:nvSpPr>
+          <p:cNvPr id="18" name="Text 16"/>
+          <p:cNvSpPr/>
+          <p:nvPr/>
+        </p:nvSpPr>
+        <p:spPr>
+          <a:xfrm>
+            <a:off x="6949440" y="1188720"/>
+            <a:ext cx="1828800" cy="548640"/>
+          </a:xfrm>
+          <a:prstGeom prst="rect">
+            <a:avLst/>
+          </a:prstGeom>
+          <a:noFill/>
+          <a:ln/>
+        </p:spPr>
+        <p:txBody>
+          <a:bodyPr wrap="square" lIns="0" tIns="0" rIns="0" bIns="0" rtlCol="0" anchor="ctr"/>
+          <a:lstStyle/>
+          <a:p>
+            <a:pPr algn="ctr" indent="0" marL="0">
+              <a:buNone/>
+            </a:pPr>
+            <a:r>
+              <a:rPr lang="en-US" sz="1400" dirty="0">
                 <a:solidFill>
                   <a:srgbClr val="24313F"/>
                 </a:solidFill>
@@ -7772,9 +8449,577 @@
                 <a:ea typeface="Georgia" pitchFamily="34" charset="-122"/>
                 <a:cs typeface="Georgia" pitchFamily="34" charset="-120"/>
               </a:rPr>
-              <a:t>The camera operator on the parapet chooses the frame the city is seen through. Institutions own the vantage point: the platform, the schedule, the budget, the greenlight. What reaches you was chosen by someone standing where you cannot.</a:t>
-            </a:r>
-            <a:endParaRPr lang="en-US" sz="1750" dirty="0"/>
+              <a:t>Lucasfilm</a:t>
+            </a:r>
+            <a:endParaRPr lang="en-US" sz="1400" dirty="0"/>
+          </a:p>
+        </p:txBody>
+      </p:sp>
+      <p:sp>
+        <p:nvSpPr>
+          <p:cNvPr id="19" name="Shape 17"/>
+          <p:cNvSpPr/>
+          <p:nvPr/>
+        </p:nvSpPr>
+        <p:spPr>
+          <a:xfrm>
+            <a:off x="9281160" y="1417320"/>
+            <a:ext cx="1828800" cy="548640"/>
+          </a:xfrm>
+          <a:prstGeom prst="rect">
+            <a:avLst/>
+          </a:prstGeom>
+          <a:solidFill>
+            <a:srgbClr val="E8EFE7"/>
+          </a:solidFill>
+          <a:ln w="9525">
+            <a:solidFill>
+              <a:srgbClr val="8AA394"/>
+            </a:solidFill>
+            <a:prstDash val="solid"/>
+          </a:ln>
+        </p:spPr>
+      </p:sp>
+      <p:sp>
+        <p:nvSpPr>
+          <p:cNvPr id="20" name="Text 18"/>
+          <p:cNvSpPr/>
+          <p:nvPr/>
+        </p:nvSpPr>
+        <p:spPr>
+          <a:xfrm>
+            <a:off x="9281160" y="1417320"/>
+            <a:ext cx="1828800" cy="548640"/>
+          </a:xfrm>
+          <a:prstGeom prst="rect">
+            <a:avLst/>
+          </a:prstGeom>
+          <a:noFill/>
+          <a:ln/>
+        </p:spPr>
+        <p:txBody>
+          <a:bodyPr wrap="square" lIns="0" tIns="0" rIns="0" bIns="0" rtlCol="0" anchor="ctr"/>
+          <a:lstStyle/>
+          <a:p>
+            <a:pPr algn="ctr" indent="0" marL="0">
+              <a:buNone/>
+            </a:pPr>
+            <a:r>
+              <a:rPr lang="en-US" sz="1400" dirty="0">
+                <a:solidFill>
+                  <a:srgbClr val="24313F"/>
+                </a:solidFill>
+                <a:latin typeface="Georgia" pitchFamily="34" charset="0"/>
+                <a:ea typeface="Georgia" pitchFamily="34" charset="-122"/>
+                <a:cs typeface="Georgia" pitchFamily="34" charset="-120"/>
+              </a:rPr>
+              <a:t>20th Century</a:t>
+            </a:r>
+            <a:endParaRPr lang="en-US" sz="1400" dirty="0"/>
+          </a:p>
+        </p:txBody>
+      </p:sp>
+      <p:sp>
+        <p:nvSpPr>
+          <p:cNvPr id="21" name="Shape 19"/>
+          <p:cNvSpPr/>
+          <p:nvPr/>
+        </p:nvSpPr>
+        <p:spPr>
+          <a:xfrm>
+            <a:off x="1234440" y="4206240"/>
+            <a:ext cx="1828800" cy="548640"/>
+          </a:xfrm>
+          <a:prstGeom prst="rect">
+            <a:avLst/>
+          </a:prstGeom>
+          <a:solidFill>
+            <a:srgbClr val="E8EFE7"/>
+          </a:solidFill>
+          <a:ln w="9525">
+            <a:solidFill>
+              <a:srgbClr val="8AA394"/>
+            </a:solidFill>
+            <a:prstDash val="solid"/>
+          </a:ln>
+        </p:spPr>
+      </p:sp>
+      <p:sp>
+        <p:nvSpPr>
+          <p:cNvPr id="22" name="Text 20"/>
+          <p:cNvSpPr/>
+          <p:nvPr/>
+        </p:nvSpPr>
+        <p:spPr>
+          <a:xfrm>
+            <a:off x="1234440" y="4206240"/>
+            <a:ext cx="1828800" cy="548640"/>
+          </a:xfrm>
+          <a:prstGeom prst="rect">
+            <a:avLst/>
+          </a:prstGeom>
+          <a:noFill/>
+          <a:ln/>
+        </p:spPr>
+        <p:txBody>
+          <a:bodyPr wrap="square" lIns="0" tIns="0" rIns="0" bIns="0" rtlCol="0" anchor="ctr"/>
+          <a:lstStyle/>
+          <a:p>
+            <a:pPr algn="ctr" indent="0" marL="0">
+              <a:buNone/>
+            </a:pPr>
+            <a:r>
+              <a:rPr lang="en-US" sz="1400" dirty="0">
+                <a:solidFill>
+                  <a:srgbClr val="24313F"/>
+                </a:solidFill>
+                <a:latin typeface="Georgia" pitchFamily="34" charset="0"/>
+                <a:ea typeface="Georgia" pitchFamily="34" charset="-122"/>
+                <a:cs typeface="Georgia" pitchFamily="34" charset="-120"/>
+              </a:rPr>
+              <a:t>ABC</a:t>
+            </a:r>
+            <a:endParaRPr lang="en-US" sz="1400" dirty="0"/>
+          </a:p>
+        </p:txBody>
+      </p:sp>
+      <p:sp>
+        <p:nvSpPr>
+          <p:cNvPr id="23" name="Shape 21"/>
+          <p:cNvSpPr/>
+          <p:nvPr/>
+        </p:nvSpPr>
+        <p:spPr>
+          <a:xfrm>
+            <a:off x="3749040" y="4709160"/>
+            <a:ext cx="1828800" cy="548640"/>
+          </a:xfrm>
+          <a:prstGeom prst="rect">
+            <a:avLst/>
+          </a:prstGeom>
+          <a:solidFill>
+            <a:srgbClr val="E8EFE7"/>
+          </a:solidFill>
+          <a:ln w="9525">
+            <a:solidFill>
+              <a:srgbClr val="8AA394"/>
+            </a:solidFill>
+            <a:prstDash val="solid"/>
+          </a:ln>
+        </p:spPr>
+      </p:sp>
+      <p:sp>
+        <p:nvSpPr>
+          <p:cNvPr id="24" name="Text 22"/>
+          <p:cNvSpPr/>
+          <p:nvPr/>
+        </p:nvSpPr>
+        <p:spPr>
+          <a:xfrm>
+            <a:off x="3749040" y="4709160"/>
+            <a:ext cx="1828800" cy="548640"/>
+          </a:xfrm>
+          <a:prstGeom prst="rect">
+            <a:avLst/>
+          </a:prstGeom>
+          <a:noFill/>
+          <a:ln/>
+        </p:spPr>
+        <p:txBody>
+          <a:bodyPr wrap="square" lIns="0" tIns="0" rIns="0" bIns="0" rtlCol="0" anchor="ctr"/>
+          <a:lstStyle/>
+          <a:p>
+            <a:pPr algn="ctr" indent="0" marL="0">
+              <a:buNone/>
+            </a:pPr>
+            <a:r>
+              <a:rPr lang="en-US" sz="1400" dirty="0">
+                <a:solidFill>
+                  <a:srgbClr val="24313F"/>
+                </a:solidFill>
+                <a:latin typeface="Georgia" pitchFamily="34" charset="0"/>
+                <a:ea typeface="Georgia" pitchFamily="34" charset="-122"/>
+                <a:cs typeface="Georgia" pitchFamily="34" charset="-120"/>
+              </a:rPr>
+              <a:t>ESPN</a:t>
+            </a:r>
+            <a:endParaRPr lang="en-US" sz="1400" dirty="0"/>
+          </a:p>
+        </p:txBody>
+      </p:sp>
+      <p:sp>
+        <p:nvSpPr>
+          <p:cNvPr id="25" name="Shape 23"/>
+          <p:cNvSpPr/>
+          <p:nvPr/>
+        </p:nvSpPr>
+        <p:spPr>
+          <a:xfrm>
+            <a:off x="6949440" y="4709160"/>
+            <a:ext cx="1828800" cy="548640"/>
+          </a:xfrm>
+          <a:prstGeom prst="rect">
+            <a:avLst/>
+          </a:prstGeom>
+          <a:solidFill>
+            <a:srgbClr val="E8EFE7"/>
+          </a:solidFill>
+          <a:ln w="9525">
+            <a:solidFill>
+              <a:srgbClr val="8AA394"/>
+            </a:solidFill>
+            <a:prstDash val="solid"/>
+          </a:ln>
+        </p:spPr>
+      </p:sp>
+      <p:sp>
+        <p:nvSpPr>
+          <p:cNvPr id="26" name="Text 24"/>
+          <p:cNvSpPr/>
+          <p:nvPr/>
+        </p:nvSpPr>
+        <p:spPr>
+          <a:xfrm>
+            <a:off x="6949440" y="4709160"/>
+            <a:ext cx="1828800" cy="548640"/>
+          </a:xfrm>
+          <a:prstGeom prst="rect">
+            <a:avLst/>
+          </a:prstGeom>
+          <a:noFill/>
+          <a:ln/>
+        </p:spPr>
+        <p:txBody>
+          <a:bodyPr wrap="square" lIns="0" tIns="0" rIns="0" bIns="0" rtlCol="0" anchor="ctr"/>
+          <a:lstStyle/>
+          <a:p>
+            <a:pPr algn="ctr" indent="0" marL="0">
+              <a:buNone/>
+            </a:pPr>
+            <a:r>
+              <a:rPr lang="en-US" sz="1400" dirty="0">
+                <a:solidFill>
+                  <a:srgbClr val="24313F"/>
+                </a:solidFill>
+                <a:latin typeface="Georgia" pitchFamily="34" charset="0"/>
+                <a:ea typeface="Georgia" pitchFamily="34" charset="-122"/>
+                <a:cs typeface="Georgia" pitchFamily="34" charset="-120"/>
+              </a:rPr>
+              <a:t>Disney+</a:t>
+            </a:r>
+            <a:endParaRPr lang="en-US" sz="1400" dirty="0"/>
+          </a:p>
+        </p:txBody>
+      </p:sp>
+      <p:sp>
+        <p:nvSpPr>
+          <p:cNvPr id="27" name="Shape 25"/>
+          <p:cNvSpPr/>
+          <p:nvPr/>
+        </p:nvSpPr>
+        <p:spPr>
+          <a:xfrm>
+            <a:off x="9144000" y="4206240"/>
+            <a:ext cx="1828800" cy="548640"/>
+          </a:xfrm>
+          <a:prstGeom prst="rect">
+            <a:avLst/>
+          </a:prstGeom>
+          <a:solidFill>
+            <a:srgbClr val="E8EFE7"/>
+          </a:solidFill>
+          <a:ln w="9525">
+            <a:solidFill>
+              <a:srgbClr val="8AA394"/>
+            </a:solidFill>
+            <a:prstDash val="solid"/>
+          </a:ln>
+        </p:spPr>
+      </p:sp>
+      <p:sp>
+        <p:nvSpPr>
+          <p:cNvPr id="28" name="Text 26"/>
+          <p:cNvSpPr/>
+          <p:nvPr/>
+        </p:nvSpPr>
+        <p:spPr>
+          <a:xfrm>
+            <a:off x="9144000" y="4206240"/>
+            <a:ext cx="1828800" cy="548640"/>
+          </a:xfrm>
+          <a:prstGeom prst="rect">
+            <a:avLst/>
+          </a:prstGeom>
+          <a:noFill/>
+          <a:ln/>
+        </p:spPr>
+        <p:txBody>
+          <a:bodyPr wrap="square" lIns="0" tIns="0" rIns="0" bIns="0" rtlCol="0" anchor="ctr"/>
+          <a:lstStyle/>
+          <a:p>
+            <a:pPr algn="ctr" indent="0" marL="0">
+              <a:buNone/>
+            </a:pPr>
+            <a:r>
+              <a:rPr lang="en-US" sz="1400" dirty="0">
+                <a:solidFill>
+                  <a:srgbClr val="24313F"/>
+                </a:solidFill>
+                <a:latin typeface="Georgia" pitchFamily="34" charset="0"/>
+                <a:ea typeface="Georgia" pitchFamily="34" charset="-122"/>
+                <a:cs typeface="Georgia" pitchFamily="34" charset="-120"/>
+              </a:rPr>
+              <a:t>Parks and merch</a:t>
+            </a:r>
+            <a:endParaRPr lang="en-US" sz="1400" dirty="0"/>
+          </a:p>
+        </p:txBody>
+      </p:sp>
+      <p:sp>
+        <p:nvSpPr>
+          <p:cNvPr id="29" name="Shape 27"/>
+          <p:cNvSpPr/>
+          <p:nvPr/>
+        </p:nvSpPr>
+        <p:spPr>
+          <a:xfrm>
+            <a:off x="4937760" y="3017520"/>
+            <a:ext cx="2286000" cy="914400"/>
+          </a:xfrm>
+          <a:prstGeom prst="rect">
+            <a:avLst/>
+          </a:prstGeom>
+          <a:solidFill>
+            <a:srgbClr val="4A6B5D"/>
+          </a:solidFill>
+          <a:ln/>
+        </p:spPr>
+      </p:sp>
+      <p:sp>
+        <p:nvSpPr>
+          <p:cNvPr id="30" name="Text 28"/>
+          <p:cNvSpPr/>
+          <p:nvPr/>
+        </p:nvSpPr>
+        <p:spPr>
+          <a:xfrm>
+            <a:off x="4937760" y="3017520"/>
+            <a:ext cx="2286000" cy="914400"/>
+          </a:xfrm>
+          <a:prstGeom prst="rect">
+            <a:avLst/>
+          </a:prstGeom>
+          <a:noFill/>
+          <a:ln/>
+        </p:spPr>
+        <p:txBody>
+          <a:bodyPr wrap="square" lIns="0" tIns="0" rIns="0" bIns="0" rtlCol="0" anchor="ctr"/>
+          <a:lstStyle/>
+          <a:p>
+            <a:pPr algn="ctr" indent="0" marL="0">
+              <a:lnSpc>
+                <a:spcPts val="1800"/>
+              </a:lnSpc>
+              <a:buNone/>
+            </a:pPr>
+            <a:r>
+              <a:rPr lang="en-US" sz="1500" dirty="0">
+                <a:solidFill>
+                  <a:srgbClr val="FAF8F1"/>
+                </a:solidFill>
+                <a:latin typeface="Georgia" pitchFamily="34" charset="0"/>
+                <a:ea typeface="Georgia" pitchFamily="34" charset="-122"/>
+                <a:cs typeface="Georgia" pitchFamily="34" charset="-120"/>
+              </a:rPr>
+              <a:t>The Walt Disney</a:t>
+            </a:r>
+            <a:endParaRPr lang="en-US" sz="1500" dirty="0"/>
+          </a:p>
+          <a:p>
+            <a:pPr algn="ctr" indent="0" marL="0">
+              <a:lnSpc>
+                <a:spcPts val="1800"/>
+              </a:lnSpc>
+              <a:buNone/>
+            </a:pPr>
+            <a:r>
+              <a:rPr lang="en-US" sz="1500" dirty="0">
+                <a:solidFill>
+                  <a:srgbClr val="FAF8F1"/>
+                </a:solidFill>
+                <a:latin typeface="Georgia" pitchFamily="34" charset="0"/>
+                <a:ea typeface="Georgia" pitchFamily="34" charset="-122"/>
+                <a:cs typeface="Georgia" pitchFamily="34" charset="-120"/>
+              </a:rPr>
+              <a:t>Company</a:t>
+            </a:r>
+            <a:endParaRPr lang="en-US" sz="1500" dirty="0"/>
+          </a:p>
+        </p:txBody>
+      </p:sp>
+      <p:sp>
+        <p:nvSpPr>
+          <p:cNvPr id="31" name="Shape 29"/>
+          <p:cNvSpPr/>
+          <p:nvPr/>
+        </p:nvSpPr>
+        <p:spPr>
+          <a:xfrm>
+            <a:off x="822960" y="5577840"/>
+            <a:ext cx="914400" cy="0"/>
+          </a:xfrm>
+          <a:prstGeom prst="line">
+            <a:avLst/>
+          </a:prstGeom>
+          <a:noFill/>
+          <a:ln w="31750">
+            <a:solidFill>
+              <a:srgbClr val="8C3A38"/>
+            </a:solidFill>
+            <a:prstDash val="solid"/>
+          </a:ln>
+        </p:spPr>
+      </p:sp>
+      <p:sp>
+        <p:nvSpPr>
+          <p:cNvPr id="32" name="Text 30"/>
+          <p:cNvSpPr/>
+          <p:nvPr/>
+        </p:nvSpPr>
+        <p:spPr>
+          <a:xfrm>
+            <a:off x="822960" y="5742432"/>
+            <a:ext cx="10543032" cy="502920"/>
+          </a:xfrm>
+          <a:prstGeom prst="rect">
+            <a:avLst/>
+          </a:prstGeom>
+          <a:noFill/>
+          <a:ln/>
+        </p:spPr>
+        <p:txBody>
+          <a:bodyPr wrap="square" lIns="0" tIns="0" rIns="0" bIns="0" rtlCol="0" anchor="t"/>
+          <a:lstStyle/>
+          <a:p>
+            <a:pPr indent="0" marL="0">
+              <a:lnSpc>
+                <a:spcPts val="1800"/>
+              </a:lnSpc>
+              <a:buNone/>
+            </a:pPr>
+            <a:r>
+              <a:rPr lang="en-US" sz="1350" i="1" dirty="0">
+                <a:solidFill>
+                  <a:srgbClr val="4A6B5D"/>
+                </a:solidFill>
+                <a:latin typeface="Georgia" pitchFamily="34" charset="0"/>
+                <a:ea typeface="Georgia" pitchFamily="34" charset="-122"/>
+                <a:cs typeface="Georgia" pitchFamily="34" charset="-120"/>
+              </a:rPr>
+              <a:t>Eight familiar names, one greenlight desk. Concentration means the range of stories narrows while the number of spouts grows: the diversity is downstream, the decision is not.</a:t>
+            </a:r>
+            <a:endParaRPr lang="en-US" sz="1350" dirty="0"/>
+          </a:p>
+        </p:txBody>
+      </p:sp>
+      <p:sp>
+        <p:nvSpPr>
+          <p:cNvPr id="33" name="Shape 31"/>
+          <p:cNvSpPr/>
+          <p:nvPr/>
+        </p:nvSpPr>
+        <p:spPr>
+          <a:xfrm>
+            <a:off x="822960" y="6382512"/>
+            <a:ext cx="10543032" cy="0"/>
+          </a:xfrm>
+          <a:prstGeom prst="line">
+            <a:avLst/>
+          </a:prstGeom>
+          <a:noFill/>
+          <a:ln w="9525">
+            <a:solidFill>
+              <a:srgbClr val="D9D4C4"/>
+            </a:solidFill>
+            <a:prstDash val="solid"/>
+          </a:ln>
+        </p:spPr>
+      </p:sp>
+      <p:sp>
+        <p:nvSpPr>
+          <p:cNvPr id="34" name="Text 32"/>
+          <p:cNvSpPr/>
+          <p:nvPr/>
+        </p:nvSpPr>
+        <p:spPr>
+          <a:xfrm>
+            <a:off x="822960" y="6419088"/>
+            <a:ext cx="7315200" cy="274320"/>
+          </a:xfrm>
+          <a:prstGeom prst="rect">
+            <a:avLst/>
+          </a:prstGeom>
+          <a:noFill/>
+          <a:ln/>
+        </p:spPr>
+        <p:txBody>
+          <a:bodyPr wrap="square" lIns="0" tIns="0" rIns="0" bIns="0" rtlCol="0" anchor="ctr"/>
+          <a:lstStyle/>
+          <a:p>
+            <a:pPr indent="0" marL="0">
+              <a:buNone/>
+            </a:pPr>
+            <a:r>
+              <a:rPr lang="en-US" sz="900" spc="150" kern="0" dirty="0">
+                <a:solidFill>
+                  <a:srgbClr val="7A7F72"/>
+                </a:solidFill>
+                <a:latin typeface="Arial" pitchFamily="34" charset="0"/>
+                <a:ea typeface="Arial" pitchFamily="34" charset="-122"/>
+                <a:cs typeface="Arial" pitchFamily="34" charset="-120"/>
+              </a:rPr>
+              <a:t>MEDIA STUDIES 9607 · SEMESTER I</a:t>
+            </a:r>
+            <a:endParaRPr lang="en-US" sz="900" dirty="0"/>
+          </a:p>
+        </p:txBody>
+      </p:sp>
+      <p:sp>
+        <p:nvSpPr>
+          <p:cNvPr id="35" name="Text 33"/>
+          <p:cNvSpPr/>
+          <p:nvPr/>
+        </p:nvSpPr>
+        <p:spPr>
+          <a:xfrm>
+            <a:off x="10268712" y="6355080"/>
+            <a:ext cx="1097280" cy="365760"/>
+          </a:xfrm>
+          <a:prstGeom prst="rect">
+            <a:avLst/>
+          </a:prstGeom>
+          <a:noFill/>
+          <a:ln/>
+        </p:spPr>
+        <p:txBody>
+          <a:bodyPr wrap="square" lIns="0" tIns="0" rIns="0" bIns="0" rtlCol="0" anchor="ctr"/>
+          <a:lstStyle/>
+          <a:p>
+            <a:pPr algn="r" indent="0" marL="0">
+              <a:buNone/>
+            </a:pPr>
+            <a:r>
+              <a:rPr lang="en-US" sz="1600" dirty="0">
+                <a:solidFill>
+                  <a:srgbClr val="A3C1AD"/>
+                </a:solidFill>
+                <a:latin typeface="Georgia" pitchFamily="34" charset="0"/>
+                <a:ea typeface="Georgia" pitchFamily="34" charset="-122"/>
+                <a:cs typeface="Georgia" pitchFamily="34" charset="-120"/>
+              </a:rPr>
+              <a:t>06</a:t>
+            </a:r>
+            <a:endParaRPr lang="en-US" sz="1600" dirty="0"/>
           </a:p>
         </p:txBody>
       </p:sp>

--- a/content/decks/media-studies/media-studies-s1-lesson-15-institutions-and-section-a-craft.pptx
+++ b/content/decks/media-studies/media-studies-s1-lesson-15-institutions-and-section-a-craft.pptx
@@ -2402,12 +2402,29 @@
           <a:p>
             <a:pPr indent="0" marL="0">
               <a:lnSpc>
-                <a:spcPts val="2200"/>
+                <a:spcPts val="2000"/>
               </a:lnSpc>
               <a:buNone/>
             </a:pPr>
             <a:r>
-              <a:rPr lang="en-US" sz="1550" dirty="0">
+              <a:rPr lang="en-US" sz="1250" b="1" spc="100" kern="0" dirty="0">
+                <a:solidFill>
+                  <a:srgbClr val="4A6B5D"/>
+                </a:solidFill>
+                <a:latin typeface="Arial" pitchFamily="34" charset="0"/>
+                <a:ea typeface="Arial" pitchFamily="34" charset="-122"/>
+                <a:cs typeface="Arial" pitchFamily="34" charset="-120"/>
+              </a:rPr>
+              <a:t>THE SET-UP   </a:t>
+            </a:r>
+            <a:pPr indent="0" marL="0">
+              <a:lnSpc>
+                <a:spcPts val="2000"/>
+              </a:lnSpc>
+              <a:buNone/>
+            </a:pPr>
+            <a:r>
+              <a:rPr lang="en-US" sz="1450" dirty="0">
                 <a:solidFill>
                   <a:srgbClr val="24313F"/>
                 </a:solidFill>
@@ -2415,9 +2432,103 @@
                 <a:ea typeface="Georgia" pitchFamily="34" charset="-122"/>
                 <a:cs typeface="Georgia" pitchFamily="34" charset="-120"/>
               </a:rPr>
-              <a:t>The official five-criteria rubric sits on every desk, consultable: media concepts, contexts and critical debates, use of terminology, analysis of how meaning is created, use of examples, five marks each. Paragraphs are drafted solo, but any student may stop, check the band language, and annotate their own margin: this sentence is my terminology evidence. In review, each student labels which criterion each paragraph earned, and finds the one they never fed. The same format family as A4, with the scaffold removed next week.</a:t>
-            </a:r>
-            <a:endParaRPr lang="en-US" sz="1550" dirty="0"/>
+              <a:t>The official five-criteria rubric sits open on every desk: concepts, contexts, terminology, analysis, examples. Five marks each.</a:t>
+            </a:r>
+            <a:endParaRPr lang="en-US" sz="1250" dirty="0"/>
+          </a:p>
+          <a:p>
+            <a:pPr indent="0" marL="0">
+              <a:lnSpc>
+                <a:spcPts val="2000"/>
+              </a:lnSpc>
+              <a:buNone/>
+            </a:pPr>
+            <a:r>
+              <a:rPr lang="en-US" sz="1250" b="1" spc="100" kern="0" dirty="0">
+                <a:solidFill>
+                  <a:srgbClr val="4A6B5D"/>
+                </a:solidFill>
+                <a:latin typeface="Arial" pitchFamily="34" charset="0"/>
+                <a:ea typeface="Arial" pitchFamily="34" charset="-122"/>
+                <a:cs typeface="Arial" pitchFamily="34" charset="-120"/>
+              </a:rPr>
+              <a:t>TASK   </a:t>
+            </a:r>
+            <a:pPr indent="0" marL="0">
+              <a:lnSpc>
+                <a:spcPts val="2000"/>
+              </a:lnSpc>
+              <a:buNone/>
+            </a:pPr>
+            <a:r>
+              <a:rPr lang="en-US" sz="1450" dirty="0">
+                <a:solidFill>
+                  <a:srgbClr val="24313F"/>
+                </a:solidFill>
+                <a:latin typeface="Georgia" pitchFamily="34" charset="0"/>
+                <a:ea typeface="Georgia" pitchFamily="34" charset="-122"/>
+                <a:cs typeface="Georgia" pitchFamily="34" charset="-120"/>
+              </a:rPr>
+              <a:t>Draft your paragraphs solo. Stop any time to check the band language, and label your own margin: “this is my terminology evidence.”</a:t>
+            </a:r>
+            <a:endParaRPr lang="en-US" sz="1250" dirty="0"/>
+          </a:p>
+          <a:p>
+            <a:pPr indent="0" marL="0">
+              <a:lnSpc>
+                <a:spcPts val="2000"/>
+              </a:lnSpc>
+              <a:buNone/>
+            </a:pPr>
+            <a:r>
+              <a:rPr lang="en-US" sz="1250" b="1" spc="100" kern="0" dirty="0">
+                <a:solidFill>
+                  <a:srgbClr val="4A6B5D"/>
+                </a:solidFill>
+                <a:latin typeface="Arial" pitchFamily="34" charset="0"/>
+                <a:ea typeface="Arial" pitchFamily="34" charset="-122"/>
+                <a:cs typeface="Arial" pitchFamily="34" charset="-120"/>
+              </a:rPr>
+              <a:t>REVIEW   </a:t>
+            </a:r>
+            <a:pPr indent="0" marL="0">
+              <a:lnSpc>
+                <a:spcPts val="2000"/>
+              </a:lnSpc>
+              <a:buNone/>
+            </a:pPr>
+            <a:r>
+              <a:rPr lang="en-US" sz="1450" dirty="0">
+                <a:solidFill>
+                  <a:srgbClr val="24313F"/>
+                </a:solidFill>
+                <a:latin typeface="Georgia" pitchFamily="34" charset="0"/>
+                <a:ea typeface="Georgia" pitchFamily="34" charset="-122"/>
+                <a:cs typeface="Georgia" pitchFamily="34" charset="-120"/>
+              </a:rPr>
+              <a:t>Label which criterion each paragraph fed. The one you never fed is your A4 target.</a:t>
+            </a:r>
+            <a:endParaRPr lang="en-US" sz="1250" dirty="0"/>
+          </a:p>
+          <a:p>
+            <a:pPr indent="0" marL="0">
+              <a:lnSpc>
+                <a:spcPts val="2000"/>
+              </a:lnSpc>
+              <a:buNone/>
+            </a:pPr>
+            <a:r>
+              <a:rPr lang="en-US" sz="1450" dirty="0">
+                <a:solidFill>
+                  <a:srgbClr val="24313F"/>
+                </a:solidFill>
+                <a:latin typeface="Georgia" pitchFamily="34" charset="0"/>
+                <a:ea typeface="Georgia" pitchFamily="34" charset="-122"/>
+                <a:cs typeface="Georgia" pitchFamily="34" charset="-120"/>
+              </a:rPr>
+              <a:t>Next week: the same format, with the scaffold removed.</a:t>
+            </a:r>
+            <a:endParaRPr lang="en-US" sz="1250" dirty="0"/>
           </a:p>
         </p:txBody>
       </p:sp>
@@ -3711,7 +3822,7 @@
                 <a:ea typeface="Arial" pitchFamily="34" charset="-122"/>
                 <a:cs typeface="Arial" pitchFamily="34" charset="-120"/>
               </a:rPr>
-              <a:t>Entries dated from today: the 5-year contemporaneity rule starts mattering now.</a:t>
+              <a:t>Date every entry. The exam wants examples from the last five years, so dates matter from today.</a:t>
             </a:r>
             <a:endParaRPr lang="en-US" sz="1150" dirty="0"/>
           </a:p>
@@ -4127,12 +4238,29 @@
           <a:p>
             <a:pPr indent="0" marL="0">
               <a:lnSpc>
-                <a:spcPts val="2400"/>
+                <a:spcPts val="2300"/>
               </a:lnSpc>
               <a:buNone/>
             </a:pPr>
             <a:r>
-              <a:rPr lang="en-US" sz="1650" dirty="0">
+              <a:rPr lang="en-US" sz="1400" b="1" spc="100" kern="0" dirty="0">
+                <a:solidFill>
+                  <a:srgbClr val="4A6B5D"/>
+                </a:solidFill>
+                <a:latin typeface="Arial" pitchFamily="34" charset="0"/>
+                <a:ea typeface="Arial" pitchFamily="34" charset="-122"/>
+                <a:cs typeface="Arial" pitchFamily="34" charset="-120"/>
+              </a:rPr>
+              <a:t>THE MENU   </a:t>
+            </a:r>
+            <a:pPr indent="0" marL="0">
+              <a:lnSpc>
+                <a:spcPts val="2300"/>
+              </a:lnSpc>
+              <a:buNone/>
+            </a:pPr>
+            <a:r>
+              <a:rPr lang="en-US" sz="1600" dirty="0">
                 <a:solidFill>
                   <a:srgbClr val="24313F"/>
                 </a:solidFill>
@@ -4140,9 +4268,83 @@
                 <a:ea typeface="Georgia" pitchFamily="34" charset="-122"/>
                 <a:cs typeface="Georgia" pitchFamily="34" charset="-120"/>
               </a:rPr>
-              <a:t>The two questions on the real June 2024 menu are exactly this lesson's two topics: analyse the relationship between media ownership and media content, or evaluate the ways audiences are active participants. Morley on Monday, ownership on Tuesday, and both were always Section B answers in waiting. The case-study document you opened today is the ammunition for either question.</a:t>
-            </a:r>
-            <a:endParaRPr lang="en-US" sz="1650" dirty="0"/>
+              <a:t>June 2024, Section B: analyze the relationship between ownership and content, or evaluate audiences as active participants.</a:t>
+            </a:r>
+            <a:endParaRPr lang="en-US" sz="1400" dirty="0"/>
+          </a:p>
+          <a:p>
+            <a:pPr indent="0" marL="0">
+              <a:lnSpc>
+                <a:spcPts val="2300"/>
+              </a:lnSpc>
+              <a:buNone/>
+            </a:pPr>
+            <a:r>
+              <a:rPr lang="en-US" sz="1400" b="1" spc="100" kern="0" dirty="0">
+                <a:solidFill>
+                  <a:srgbClr val="4A6B5D"/>
+                </a:solidFill>
+                <a:latin typeface="Arial" pitchFamily="34" charset="0"/>
+                <a:ea typeface="Arial" pitchFamily="34" charset="-122"/>
+                <a:cs typeface="Arial" pitchFamily="34" charset="-120"/>
+              </a:rPr>
+              <a:t>KEY POINT   </a:t>
+            </a:r>
+            <a:pPr indent="0" marL="0">
+              <a:lnSpc>
+                <a:spcPts val="2300"/>
+              </a:lnSpc>
+              <a:buNone/>
+            </a:pPr>
+            <a:r>
+              <a:rPr lang="en-US" sz="1600" dirty="0">
+                <a:solidFill>
+                  <a:srgbClr val="24313F"/>
+                </a:solidFill>
+                <a:latin typeface="Georgia" pitchFamily="34" charset="0"/>
+                <a:ea typeface="Georgia" pitchFamily="34" charset="-122"/>
+                <a:cs typeface="Georgia" pitchFamily="34" charset="-120"/>
+              </a:rPr>
+              <a:t>This lesson's two topics are the real exam's two questions.</a:t>
+            </a:r>
+            <a:endParaRPr lang="en-US" sz="1400" dirty="0"/>
+          </a:p>
+          <a:p>
+            <a:pPr indent="0" marL="0">
+              <a:lnSpc>
+                <a:spcPts val="2300"/>
+              </a:lnSpc>
+              <a:buNone/>
+            </a:pPr>
+            <a:r>
+              <a:rPr lang="en-US" sz="1400" b="1" spc="100" kern="0" dirty="0">
+                <a:solidFill>
+                  <a:srgbClr val="4A6B5D"/>
+                </a:solidFill>
+                <a:latin typeface="Arial" pitchFamily="34" charset="0"/>
+                <a:ea typeface="Arial" pitchFamily="34" charset="-122"/>
+                <a:cs typeface="Arial" pitchFamily="34" charset="-120"/>
+              </a:rPr>
+              <a:t>YOUR NOTES   </a:t>
+            </a:r>
+            <a:pPr indent="0" marL="0">
+              <a:lnSpc>
+                <a:spcPts val="2300"/>
+              </a:lnSpc>
+              <a:buNone/>
+            </a:pPr>
+            <a:r>
+              <a:rPr lang="en-US" sz="1600" dirty="0">
+                <a:solidFill>
+                  <a:srgbClr val="24313F"/>
+                </a:solidFill>
+                <a:latin typeface="Georgia" pitchFamily="34" charset="0"/>
+                <a:ea typeface="Georgia" pitchFamily="34" charset="-122"/>
+                <a:cs typeface="Georgia" pitchFamily="34" charset="-120"/>
+              </a:rPr>
+              <a:t>The case-study document you opened today answers either question.</a:t>
+            </a:r>
+            <a:endParaRPr lang="en-US" sz="1400" dirty="0"/>
           </a:p>
         </p:txBody>
       </p:sp>
@@ -4685,7 +4887,7 @@
         <p:spPr>
           <a:xfrm>
             <a:off x="822960" y="2788920"/>
-            <a:ext cx="6766560" cy="2194560"/>
+            <a:ext cx="6949440" cy="2194560"/>
           </a:xfrm>
           <a:prstGeom prst="rect">
             <a:avLst/>
@@ -4699,12 +4901,12 @@
           <a:p>
             <a:pPr indent="0" marL="0">
               <a:lnSpc>
-                <a:spcPts val="5600"/>
+                <a:spcPts val="5400"/>
               </a:lnSpc>
               <a:buNone/>
             </a:pPr>
             <a:r>
-              <a:rPr lang="en-US" sz="5600" dirty="0">
+              <a:rPr lang="en-US" sz="5000" dirty="0">
                 <a:solidFill>
                   <a:srgbClr val="FAF8F1"/>
                 </a:solidFill>
@@ -4712,19 +4914,19 @@
                 <a:ea typeface="Georgia" pitchFamily="34" charset="-122"/>
                 <a:cs typeface="Georgia" pitchFamily="34" charset="-120"/>
               </a:rPr>
-              <a:t>Funding follows</a:t>
-            </a:r>
-            <a:endParaRPr lang="en-US" sz="5600" dirty="0"/>
+              <a:t>Who pays</a:t>
+            </a:r>
+            <a:endParaRPr lang="en-US" sz="5000" dirty="0"/>
           </a:p>
           <a:p>
             <a:pPr indent="0" marL="0">
               <a:lnSpc>
-                <a:spcPts val="5600"/>
+                <a:spcPts val="5400"/>
               </a:lnSpc>
               <a:buNone/>
             </a:pPr>
             <a:r>
-              <a:rPr lang="en-US" sz="5600" dirty="0">
+              <a:rPr lang="en-US" sz="5000" dirty="0">
                 <a:solidFill>
                   <a:srgbClr val="FAF8F1"/>
                 </a:solidFill>
@@ -4732,9 +4934,9 @@
                 <a:ea typeface="Georgia" pitchFamily="34" charset="-122"/>
                 <a:cs typeface="Georgia" pitchFamily="34" charset="-120"/>
               </a:rPr>
-              <a:t>content.</a:t>
-            </a:r>
-            <a:endParaRPr lang="en-US" sz="5600" dirty="0"/>
+              <a:t>shapes what is said.</a:t>
+            </a:r>
+            <a:endParaRPr lang="en-US" sz="5000" dirty="0"/>
           </a:p>
         </p:txBody>
       </p:sp>
@@ -5150,23 +5352,26 @@
         <p:spPr>
           <a:xfrm>
             <a:off x="822960" y="5394960"/>
-            <a:ext cx="10058400" cy="457200"/>
-          </a:xfrm>
-          <a:prstGeom prst="rect">
-            <a:avLst/>
-          </a:prstGeom>
-          <a:noFill/>
-          <a:ln/>
-        </p:spPr>
-        <p:txBody>
-          <a:bodyPr wrap="square" lIns="0" tIns="0" rIns="0" bIns="0" rtlCol="0" anchor="ctr"/>
-          <a:lstStyle/>
-          <a:p>
-            <a:pPr indent="0" marL="0">
-              <a:buNone/>
-            </a:pPr>
-            <a:r>
-              <a:rPr lang="en-US" sz="1250" i="1" dirty="0">
+            <a:ext cx="10058400" cy="320040"/>
+          </a:xfrm>
+          <a:prstGeom prst="rect">
+            <a:avLst/>
+          </a:prstGeom>
+          <a:noFill/>
+          <a:ln/>
+        </p:spPr>
+        <p:txBody>
+          <a:bodyPr wrap="square" lIns="0" tIns="0" rIns="0" bIns="0" rtlCol="0" anchor="t"/>
+          <a:lstStyle/>
+          <a:p>
+            <a:pPr indent="0" marL="0">
+              <a:lnSpc>
+                <a:spcPts val="1700"/>
+              </a:lnSpc>
+              <a:buNone/>
+            </a:pPr>
+            <a:r>
+              <a:rPr lang="en-US" sz="1050" b="1" spc="100" kern="0" dirty="0">
                 <a:solidFill>
                   <a:srgbClr val="7A7F72"/>
                 </a:solidFill>
@@ -5174,9 +5379,26 @@
                 <a:ea typeface="Arial" pitchFamily="34" charset="-122"/>
                 <a:cs typeface="Arial" pitchFamily="34" charset="-120"/>
               </a:rPr>
-              <a:t>If readings differ by situation, then who makes the text matters even more. Tomorrow: ownership.</a:t>
-            </a:r>
-            <a:endParaRPr lang="en-US" sz="1250" dirty="0"/>
+              <a:t>KEY POINT   </a:t>
+            </a:r>
+            <a:pPr indent="0" marL="0">
+              <a:lnSpc>
+                <a:spcPts val="1700"/>
+              </a:lnSpc>
+              <a:buNone/>
+            </a:pPr>
+            <a:r>
+              <a:rPr lang="en-US" sz="1250" dirty="0">
+                <a:solidFill>
+                  <a:srgbClr val="7A7F72"/>
+                </a:solidFill>
+                <a:latin typeface="Georgia" pitchFamily="34" charset="0"/>
+                <a:ea typeface="Georgia" pitchFamily="34" charset="-122"/>
+                <a:cs typeface="Georgia" pitchFamily="34" charset="-120"/>
+              </a:rPr>
+              <a:t>Readings differ by social situation. So who makes the text matters even more. Tomorrow: ownership.</a:t>
+            </a:r>
+            <a:endParaRPr lang="en-US" sz="1050" dirty="0"/>
           </a:p>
         </p:txBody>
       </p:sp>
@@ -5580,7 +5802,7 @@
                 <a:ea typeface="Georgia" pitchFamily="34" charset="-122"/>
                 <a:cs typeface="Georgia" pitchFamily="34" charset="-120"/>
               </a:rPr>
-              <a:t>A teatime magazine programme: regional news, consumer items, the odd duck on a skateboard. Morley chose it because it was ordinary, addressed to everyone and pitched as common sense.</a:t>
+              <a:t>An early-evening magazine show: local news, consumer stories, light fun. Morley chose it because it was ordinary and addressed to everyone.</a:t>
             </a:r>
             <a:endParaRPr lang="en-US" sz="1500" dirty="0"/>
           </a:p>
@@ -5591,9 +5813,17 @@
               </a:lnSpc>
               <a:buNone/>
             </a:pPr>
-            <a:endParaRPr lang="en-US" sz="1500" dirty="0"/>
-          </a:p>
-          <a:p>
+            <a:r>
+              <a:rPr lang="en-US" sz="1300" b="1" spc="100" kern="0" dirty="0">
+                <a:solidFill>
+                  <a:srgbClr val="4A6B5D"/>
+                </a:solidFill>
+                <a:latin typeface="Arial" pitchFamily="34" charset="0"/>
+                <a:ea typeface="Arial" pitchFamily="34" charset="-122"/>
+                <a:cs typeface="Arial" pitchFamily="34" charset="-120"/>
+              </a:rPr>
+              <a:t>KEY POINT   </a:t>
+            </a:r>
             <a:pPr indent="0" marL="0">
               <a:lnSpc>
                 <a:spcPts val="2100"/>
@@ -5609,7 +5839,7 @@
                 <a:ea typeface="Georgia" pitchFamily="34" charset="-122"/>
                 <a:cs typeface="Georgia" pitchFamily="34" charset="-120"/>
               </a:rPr>
-              <a:t>That is what made the finding sharp: if even this produces systematically different readings, no text is neutral.</a:t>
+              <a:t>If even this ordinary show produces different readings, then no text is neutral.</a:t>
             </a:r>
             <a:endParaRPr lang="en-US" sz="1500" dirty="0"/>
           </a:p>
@@ -6002,12 +6232,12 @@
           <a:p>
             <a:pPr indent="0" marL="0">
               <a:lnSpc>
-                <a:spcPts val="2000"/>
+                <a:spcPts val="1950"/>
               </a:lnSpc>
               <a:buNone/>
             </a:pPr>
             <a:r>
-              <a:rPr lang="en-US" sz="1450" dirty="0">
+              <a:rPr lang="en-US" sz="1400" dirty="0">
                 <a:solidFill>
                   <a:srgbClr val="24313F"/>
                 </a:solidFill>
@@ -6015,28 +6245,36 @@
                 <a:ea typeface="Georgia" pitchFamily="34" charset="-122"/>
                 <a:cs typeface="Georgia" pitchFamily="34" charset="-120"/>
               </a:rPr>
-              <a:t>Le Gray photographed the Emperor's camp on commission. The laid table, the attendants, the orderly tents: every choice serves the payer's story of effortless command.</a:t>
-            </a:r>
-            <a:endParaRPr lang="en-US" sz="1450" dirty="0"/>
+              <a:t>Le Gray was paid by the Emperor's court to photograph the camp. The set table, the servants, the tidy tents: every choice serves the payer's story of easy power.</a:t>
+            </a:r>
+            <a:endParaRPr lang="en-US" sz="1400" dirty="0"/>
           </a:p>
           <a:p>
             <a:pPr indent="0" marL="0">
               <a:lnSpc>
-                <a:spcPts val="2000"/>
+                <a:spcPts val="1950"/>
               </a:lnSpc>
               <a:buNone/>
             </a:pPr>
-            <a:endParaRPr lang="en-US" sz="1450" dirty="0"/>
-          </a:p>
-          <a:p>
+            <a:r>
+              <a:rPr lang="en-US" sz="1200" b="1" spc="100" kern="0" dirty="0">
+                <a:solidFill>
+                  <a:srgbClr val="4A6B5D"/>
+                </a:solidFill>
+                <a:latin typeface="Arial" pitchFamily="34" charset="0"/>
+                <a:ea typeface="Arial" pitchFamily="34" charset="-122"/>
+                <a:cs typeface="Arial" pitchFamily="34" charset="-120"/>
+              </a:rPr>
+              <a:t>KEY POINT   </a:t>
+            </a:r>
             <a:pPr indent="0" marL="0">
               <a:lnSpc>
-                <a:spcPts val="2000"/>
+                <a:spcPts val="1950"/>
               </a:lnSpc>
               <a:buNone/>
             </a:pPr>
             <a:r>
-              <a:rPr lang="en-US" sz="1450" dirty="0">
+              <a:rPr lang="en-US" sz="1400" dirty="0">
                 <a:solidFill>
                   <a:srgbClr val="24313F"/>
                 </a:solidFill>
@@ -6044,9 +6282,9 @@
                 <a:ea typeface="Georgia" pitchFamily="34" charset="-122"/>
                 <a:cs typeface="Georgia" pitchFamily="34" charset="-120"/>
               </a:rPr>
-              <a:t>Who pays shapes what gets said. Hold that sentence; the rest of the week traces it through modern money.</a:t>
-            </a:r>
-            <a:endParaRPr lang="en-US" sz="1450" dirty="0"/>
+              <a:t>Who pays shapes what gets said. This week traces that sentence through modern money.</a:t>
+            </a:r>
+            <a:endParaRPr lang="en-US" sz="1400" dirty="0"/>
           </a:p>
         </p:txBody>
       </p:sp>
@@ -6860,23 +7098,26 @@
         <p:spPr>
           <a:xfrm>
             <a:off x="822960" y="5074920"/>
-            <a:ext cx="10543032" cy="365760"/>
-          </a:xfrm>
-          <a:prstGeom prst="rect">
-            <a:avLst/>
-          </a:prstGeom>
-          <a:noFill/>
-          <a:ln/>
-        </p:spPr>
-        <p:txBody>
-          <a:bodyPr wrap="square" lIns="0" tIns="0" rIns="0" bIns="0" rtlCol="0" anchor="ctr"/>
-          <a:lstStyle/>
-          <a:p>
-            <a:pPr indent="0" marL="0">
-              <a:buNone/>
-            </a:pPr>
-            <a:r>
-              <a:rPr lang="en-US" sz="1200" i="1" dirty="0">
+            <a:ext cx="10543032" cy="320040"/>
+          </a:xfrm>
+          <a:prstGeom prst="rect">
+            <a:avLst/>
+          </a:prstGeom>
+          <a:noFill/>
+          <a:ln/>
+        </p:spPr>
+        <p:txBody>
+          <a:bodyPr wrap="square" lIns="0" tIns="0" rIns="0" bIns="0" rtlCol="0" anchor="t"/>
+          <a:lstStyle/>
+          <a:p>
+            <a:pPr indent="0" marL="0">
+              <a:lnSpc>
+                <a:spcPts val="1600"/>
+              </a:lnSpc>
+              <a:buNone/>
+            </a:pPr>
+            <a:r>
+              <a:rPr lang="en-US" sz="1000" b="1" spc="100" kern="0" dirty="0">
                 <a:solidFill>
                   <a:srgbClr val="7A7F72"/>
                 </a:solidFill>
@@ -6884,9 +7125,26 @@
                 <a:ea typeface="Arial" pitchFamily="34" charset="-122"/>
                 <a:cs typeface="Arial" pitchFamily="34" charset="-120"/>
               </a:rPr>
-              <a:t>Curran and Seaton: ownership concentration narrows the range of stories that get told.</a:t>
-            </a:r>
-            <a:endParaRPr lang="en-US" sz="1200" dirty="0"/>
+              <a:t>THEORY   </a:t>
+            </a:r>
+            <a:pPr indent="0" marL="0">
+              <a:lnSpc>
+                <a:spcPts val="1600"/>
+              </a:lnSpc>
+              <a:buNone/>
+            </a:pPr>
+            <a:r>
+              <a:rPr lang="en-US" sz="1200" dirty="0">
+                <a:solidFill>
+                  <a:srgbClr val="7A7F72"/>
+                </a:solidFill>
+                <a:latin typeface="Georgia" pitchFamily="34" charset="0"/>
+                <a:ea typeface="Georgia" pitchFamily="34" charset="-122"/>
+                <a:cs typeface="Georgia" pitchFamily="34" charset="-120"/>
+              </a:rPr>
+              <a:t>Curran and Seaton: when fewer owners control more media, the range of stories narrows.</a:t>
+            </a:r>
+            <a:endParaRPr lang="en-US" sz="1000" dirty="0"/>
           </a:p>
         </p:txBody>
       </p:sp>
@@ -7166,6 +7424,65 @@
           </a:p>
         </p:txBody>
       </p:sp>
+      <p:sp>
+        <p:nvSpPr>
+          <p:cNvPr id="6" name="Text 4"/>
+          <p:cNvSpPr/>
+          <p:nvPr/>
+        </p:nvSpPr>
+        <p:spPr>
+          <a:xfrm>
+            <a:off x="822960" y="5806440"/>
+            <a:ext cx="10424160" cy="640080"/>
+          </a:xfrm>
+          <a:prstGeom prst="rect">
+            <a:avLst/>
+          </a:prstGeom>
+          <a:noFill/>
+          <a:ln/>
+        </p:spPr>
+        <p:txBody>
+          <a:bodyPr wrap="square" lIns="0" tIns="0" rIns="0" bIns="0" rtlCol="0" anchor="t"/>
+          <a:lstStyle/>
+          <a:p>
+            <a:pPr indent="0" marL="0">
+              <a:lnSpc>
+                <a:spcPts val="1900"/>
+              </a:lnSpc>
+              <a:buNone/>
+            </a:pPr>
+            <a:r>
+              <a:rPr lang="en-US" sz="1200" b="1" spc="100" kern="0" dirty="0">
+                <a:solidFill>
+                  <a:srgbClr val="7A7F72"/>
+                </a:solidFill>
+                <a:latin typeface="Arial" pitchFamily="34" charset="0"/>
+                <a:ea typeface="Arial" pitchFamily="34" charset="-122"/>
+                <a:cs typeface="Arial" pitchFamily="34" charset="-120"/>
+              </a:rPr>
+              <a:t>IN PLAIN WORDS   </a:t>
+            </a:r>
+            <a:pPr indent="0" marL="0">
+              <a:lnSpc>
+                <a:spcPts val="1900"/>
+              </a:lnSpc>
+              <a:buNone/>
+            </a:pPr>
+            <a:r>
+              <a:rPr lang="en-US" sz="1400" i="1" dirty="0">
+                <a:solidFill>
+                  <a:srgbClr val="4A6B5D"/>
+                </a:solidFill>
+                <a:latin typeface="Georgia" pitchFamily="34" charset="0"/>
+                <a:ea typeface="Georgia" pitchFamily="34" charset="-122"/>
+                <a:cs typeface="Georgia" pitchFamily="34" charset="-120"/>
+              </a:rPr>
+              <a:t>Press freedom belongs, in practice, to the people who own the press.</a:t>
+            </a:r>
+            <a:endParaRPr lang="en-US" sz="1200" dirty="0"/>
+          </a:p>
+        </p:txBody>
+      </p:sp>
     </p:spTree>
   </p:cSld>
   <p:clrMapOvr>
@@ -7826,12 +8143,12 @@
           <a:p>
             <a:pPr indent="0" marL="0">
               <a:lnSpc>
-                <a:spcPts val="1700"/>
+                <a:spcPts val="1600"/>
               </a:lnSpc>
               <a:buNone/>
             </a:pPr>
             <a:r>
-              <a:rPr lang="en-US" sz="1250" i="1" dirty="0">
+              <a:rPr lang="en-US" sz="1050" b="1" spc="100" kern="0" dirty="0">
                 <a:solidFill>
                   <a:srgbClr val="7A7F72"/>
                 </a:solidFill>
@@ -7839,9 +8156,100 @@
                 <a:ea typeface="Arial" pitchFamily="34" charset="-122"/>
                 <a:cs typeface="Arial" pitchFamily="34" charset="-120"/>
               </a:rPr>
-              <a:t>Read it right to left: every decision on screen traces back to who pays. Traced against the clock, a point per link that survives challenge. Rehearse the chain on your case-study institution; that is the exam answer.</a:t>
-            </a:r>
-            <a:endParaRPr lang="en-US" sz="1250" dirty="0"/>
+              <a:t>READ IT   </a:t>
+            </a:r>
+            <a:pPr indent="0" marL="0">
+              <a:lnSpc>
+                <a:spcPts val="1600"/>
+              </a:lnSpc>
+              <a:buNone/>
+            </a:pPr>
+            <a:r>
+              <a:rPr lang="en-US" sz="1250" dirty="0">
+                <a:solidFill>
+                  <a:srgbClr val="7A7F72"/>
+                </a:solidFill>
+                <a:latin typeface="Georgia" pitchFamily="34" charset="0"/>
+                <a:ea typeface="Georgia" pitchFamily="34" charset="-122"/>
+                <a:cs typeface="Georgia" pitchFamily="34" charset="-120"/>
+              </a:rPr>
+              <a:t>Right to left: every on-screen decision traces back to who pays.</a:t>
+            </a:r>
+            <a:endParaRPr lang="en-US" sz="1050" dirty="0"/>
+          </a:p>
+          <a:p>
+            <a:pPr indent="0" marL="0">
+              <a:lnSpc>
+                <a:spcPts val="1600"/>
+              </a:lnSpc>
+              <a:buNone/>
+            </a:pPr>
+            <a:r>
+              <a:rPr lang="en-US" sz="1050" b="1" spc="100" kern="0" dirty="0">
+                <a:solidFill>
+                  <a:srgbClr val="7A7F72"/>
+                </a:solidFill>
+                <a:latin typeface="Arial" pitchFamily="34" charset="0"/>
+                <a:ea typeface="Arial" pitchFamily="34" charset="-122"/>
+                <a:cs typeface="Arial" pitchFamily="34" charset="-120"/>
+              </a:rPr>
+              <a:t>GAME   </a:t>
+            </a:r>
+            <a:pPr indent="0" marL="0">
+              <a:lnSpc>
+                <a:spcPts val="1600"/>
+              </a:lnSpc>
+              <a:buNone/>
+            </a:pPr>
+            <a:r>
+              <a:rPr lang="en-US" sz="1250" dirty="0">
+                <a:solidFill>
+                  <a:srgbClr val="7A7F72"/>
+                </a:solidFill>
+                <a:latin typeface="Georgia" pitchFamily="34" charset="0"/>
+                <a:ea typeface="Georgia" pitchFamily="34" charset="-122"/>
+                <a:cs typeface="Georgia" pitchFamily="34" charset="-120"/>
+              </a:rPr>
+              <a:t>Trace a chain against the clock. One point per link that survives challenge.</a:t>
+            </a:r>
+            <a:endParaRPr lang="en-US" sz="1050" dirty="0"/>
+          </a:p>
+          <a:p>
+            <a:pPr indent="0" marL="0">
+              <a:lnSpc>
+                <a:spcPts val="1600"/>
+              </a:lnSpc>
+              <a:buNone/>
+            </a:pPr>
+            <a:r>
+              <a:rPr lang="en-US" sz="1050" b="1" spc="100" kern="0" dirty="0">
+                <a:solidFill>
+                  <a:srgbClr val="7A7F72"/>
+                </a:solidFill>
+                <a:latin typeface="Arial" pitchFamily="34" charset="0"/>
+                <a:ea typeface="Arial" pitchFamily="34" charset="-122"/>
+                <a:cs typeface="Arial" pitchFamily="34" charset="-120"/>
+              </a:rPr>
+              <a:t>EXAM LINK   </a:t>
+            </a:r>
+            <a:pPr indent="0" marL="0">
+              <a:lnSpc>
+                <a:spcPts val="1600"/>
+              </a:lnSpc>
+              <a:buNone/>
+            </a:pPr>
+            <a:r>
+              <a:rPr lang="en-US" sz="1250" dirty="0">
+                <a:solidFill>
+                  <a:srgbClr val="7A7F72"/>
+                </a:solidFill>
+                <a:latin typeface="Georgia" pitchFamily="34" charset="0"/>
+                <a:ea typeface="Georgia" pitchFamily="34" charset="-122"/>
+                <a:cs typeface="Georgia" pitchFamily="34" charset="-120"/>
+              </a:rPr>
+              <a:t>Rehearse the chain on your case-study institution. That is the Section B answer.</a:t>
+            </a:r>
+            <a:endParaRPr lang="en-US" sz="1050" dirty="0"/>
           </a:p>
         </p:txBody>
       </p:sp>
@@ -8888,7 +9296,7 @@
         </p:nvSpPr>
         <p:spPr>
           <a:xfrm>
-            <a:off x="822960" y="5742432"/>
+            <a:off x="822960" y="5724144"/>
             <a:ext cx="10543032" cy="502920"/>
           </a:xfrm>
           <a:prstGeom prst="rect">
@@ -8903,12 +9311,29 @@
           <a:p>
             <a:pPr indent="0" marL="0">
               <a:lnSpc>
-                <a:spcPts val="1800"/>
+                <a:spcPts val="1650"/>
               </a:lnSpc>
               <a:buNone/>
             </a:pPr>
             <a:r>
-              <a:rPr lang="en-US" sz="1350" i="1" dirty="0">
+              <a:rPr lang="en-US" sz="1050" b="1" spc="100" kern="0" dirty="0">
+                <a:solidFill>
+                  <a:srgbClr val="4A6B5D"/>
+                </a:solidFill>
+                <a:latin typeface="Arial" pitchFamily="34" charset="0"/>
+                <a:ea typeface="Arial" pitchFamily="34" charset="-122"/>
+                <a:cs typeface="Arial" pitchFamily="34" charset="-120"/>
+              </a:rPr>
+              <a:t>KEY POINT   </a:t>
+            </a:r>
+            <a:pPr indent="0" marL="0">
+              <a:lnSpc>
+                <a:spcPts val="1650"/>
+              </a:lnSpc>
+              <a:buNone/>
+            </a:pPr>
+            <a:r>
+              <a:rPr lang="en-US" sz="1250" dirty="0">
                 <a:solidFill>
                   <a:srgbClr val="4A6B5D"/>
                 </a:solidFill>
@@ -8916,9 +9341,46 @@
                 <a:ea typeface="Georgia" pitchFamily="34" charset="-122"/>
                 <a:cs typeface="Georgia" pitchFamily="34" charset="-120"/>
               </a:rPr>
-              <a:t>Eight familiar names, one greenlight desk. Concentration means the range of stories narrows while the number of spouts grows: the diversity is downstream, the decision is not.</a:t>
-            </a:r>
-            <a:endParaRPr lang="en-US" sz="1350" dirty="0"/>
+              <a:t>Eight familiar names, one approval desk. Many outlets, one owner: the choice of stories narrows.</a:t>
+            </a:r>
+            <a:endParaRPr lang="en-US" sz="1050" dirty="0"/>
+          </a:p>
+          <a:p>
+            <a:pPr indent="0" marL="0">
+              <a:lnSpc>
+                <a:spcPts val="1650"/>
+              </a:lnSpc>
+              <a:buNone/>
+            </a:pPr>
+            <a:r>
+              <a:rPr lang="en-US" sz="1050" b="1" spc="100" kern="0" dirty="0">
+                <a:solidFill>
+                  <a:srgbClr val="4A6B5D"/>
+                </a:solidFill>
+                <a:latin typeface="Arial" pitchFamily="34" charset="0"/>
+                <a:ea typeface="Arial" pitchFamily="34" charset="-122"/>
+                <a:cs typeface="Arial" pitchFamily="34" charset="-120"/>
+              </a:rPr>
+              <a:t>TERM   </a:t>
+            </a:r>
+            <a:pPr indent="0" marL="0">
+              <a:lnSpc>
+                <a:spcPts val="1650"/>
+              </a:lnSpc>
+              <a:buNone/>
+            </a:pPr>
+            <a:r>
+              <a:rPr lang="en-US" sz="1250" dirty="0">
+                <a:solidFill>
+                  <a:srgbClr val="4A6B5D"/>
+                </a:solidFill>
+                <a:latin typeface="Georgia" pitchFamily="34" charset="0"/>
+                <a:ea typeface="Georgia" pitchFamily="34" charset="-122"/>
+                <a:cs typeface="Georgia" pitchFamily="34" charset="-120"/>
+              </a:rPr>
+              <a:t>This is ownership concentration (conglomeration).</a:t>
+            </a:r>
+            <a:endParaRPr lang="en-US" sz="1050" dirty="0"/>
           </a:p>
         </p:txBody>
       </p:sp>
